--- a/KMIP_PKCS11_REST_KMS_Plan_Deck.pptx
+++ b/KMIP_PKCS11_REST_KMS_Plan_Deck.pptx
@@ -4485,7 +4485,7 @@
                 <a:ea typeface="Cambria" pitchFamily="34" charset="-122"/>
                 <a:cs typeface="Cambria" pitchFamily="34" charset="-120"/>
               </a:rPr>
-              <a:t>42</a:t>
+              <a:t>50</a:t>
             </a:r>
             <a:endParaRPr lang="en-US" sz="3200" dirty="0"/>
           </a:p>
@@ -4563,7 +4563,7 @@
                 <a:ea typeface="Cambria" pitchFamily="34" charset="-122"/>
                 <a:cs typeface="Cambria" pitchFamily="34" charset="-120"/>
               </a:rPr>
-              <a:t>28</a:t>
+              <a:t>32</a:t>
             </a:r>
             <a:endParaRPr lang="en-US" sz="3200" dirty="0"/>
           </a:p>
@@ -4641,7 +4641,7 @@
                 <a:ea typeface="Cambria" pitchFamily="34" charset="-122"/>
                 <a:cs typeface="Cambria" pitchFamily="34" charset="-120"/>
               </a:rPr>
-              <a:t>14</a:t>
+              <a:t>18</a:t>
             </a:r>
             <a:endParaRPr lang="en-US" sz="3200" dirty="0"/>
           </a:p>
@@ -4719,7 +4719,7 @@
                 <a:ea typeface="Calibri" pitchFamily="34" charset="-122"/>
                 <a:cs typeface="Calibri" pitchFamily="34" charset="-120"/>
               </a:rPr>
-              <a:t>Baseline e44a2ef · 816 tests green · 10 September 2026</a:t>
+              <a:t>Baseline e44a2ef · 816 tests green · 11 September 2026</a:t>
             </a:r>
             <a:endParaRPr lang="en-US" sz="1050" dirty="0"/>
           </a:p>
@@ -5036,7 +5036,7 @@
           <a:p>
             <a:pPr marL="342900" indent="-342900">
               <a:lnSpc>
-                <a:spcPts val="1600"/>
+                <a:spcPts val="1625"/>
               </a:lnSpc>
               <a:spcAft>
                 <a:spcPts val="700"/>
@@ -5060,7 +5060,7 @@
           <a:p>
             <a:pPr marL="342900" indent="-342900">
               <a:lnSpc>
-                <a:spcPts val="1600"/>
+                <a:spcPts val="1625"/>
               </a:lnSpc>
               <a:spcAft>
                 <a:spcPts val="700"/>
@@ -5084,7 +5084,7 @@
           <a:p>
             <a:pPr marL="342900" indent="-342900">
               <a:lnSpc>
-                <a:spcPts val="1600"/>
+                <a:spcPts val="1625"/>
               </a:lnSpc>
               <a:spcAft>
                 <a:spcPts val="700"/>
@@ -5203,7 +5203,7 @@
           <a:p>
             <a:pPr marL="342900" indent="-342900">
               <a:lnSpc>
-                <a:spcPts val="1600"/>
+                <a:spcPts val="1560"/>
               </a:lnSpc>
               <a:spcAft>
                 <a:spcPts val="700"/>
@@ -5227,7 +5227,7 @@
           <a:p>
             <a:pPr marL="342900" indent="-342900">
               <a:lnSpc>
-                <a:spcPts val="1600"/>
+                <a:spcPts val="1560"/>
               </a:lnSpc>
               <a:spcAft>
                 <a:spcPts val="700"/>
@@ -5251,7 +5251,7 @@
           <a:p>
             <a:pPr marL="342900" indent="-342900">
               <a:lnSpc>
-                <a:spcPts val="1600"/>
+                <a:spcPts val="1560"/>
               </a:lnSpc>
               <a:spcAft>
                 <a:spcPts val="700"/>
@@ -5624,7 +5624,7 @@
           <a:p>
             <a:pPr marL="342900" indent="-342900">
               <a:lnSpc>
-                <a:spcPts val="1600"/>
+                <a:spcPts val="1625"/>
               </a:lnSpc>
               <a:spcAft>
                 <a:spcPts val="700"/>
@@ -5648,7 +5648,7 @@
           <a:p>
             <a:pPr marL="342900" indent="-342900">
               <a:lnSpc>
-                <a:spcPts val="1600"/>
+                <a:spcPts val="1625"/>
               </a:lnSpc>
               <a:spcAft>
                 <a:spcPts val="700"/>
@@ -5672,7 +5672,7 @@
           <a:p>
             <a:pPr marL="342900" indent="-342900">
               <a:lnSpc>
-                <a:spcPts val="1600"/>
+                <a:spcPts val="1625"/>
               </a:lnSpc>
               <a:spcAft>
                 <a:spcPts val="700"/>
@@ -5696,7 +5696,7 @@
           <a:p>
             <a:pPr marL="342900" indent="-342900">
               <a:lnSpc>
-                <a:spcPts val="1600"/>
+                <a:spcPts val="1625"/>
               </a:lnSpc>
               <a:spcAft>
                 <a:spcPts val="700"/>
@@ -5720,7 +5720,7 @@
           <a:p>
             <a:pPr marL="342900" indent="-342900">
               <a:lnSpc>
-                <a:spcPts val="1600"/>
+                <a:spcPts val="1625"/>
               </a:lnSpc>
               <a:spcAft>
                 <a:spcPts val="700"/>
@@ -6079,11 +6079,11 @@
         <p:spPr>
           <a:xfrm>
             <a:off x="566928" y="2103120"/>
-            <a:ext cx="5486400" cy="2259584"/>
+            <a:ext cx="5486400" cy="2457704"/>
           </a:xfrm>
           <a:prstGeom prst="roundRect">
             <a:avLst>
-              <a:gd name="adj" fmla="val 2428"/>
+              <a:gd name="adj" fmla="val 2232"/>
             </a:avLst>
           </a:prstGeom>
           <a:solidFill>
@@ -6152,7 +6152,7 @@
         <p:spPr>
           <a:xfrm>
             <a:off x="822960" y="2615184"/>
-            <a:ext cx="4974336" cy="1564640"/>
+            <a:ext cx="4974336" cy="1762760"/>
           </a:xfrm>
           <a:prstGeom prst="rect">
             <a:avLst/>
@@ -6166,7 +6166,7 @@
           <a:p>
             <a:pPr marL="342900" indent="-342900">
               <a:lnSpc>
-                <a:spcPts val="1600"/>
+                <a:spcPts val="1625"/>
               </a:lnSpc>
               <a:spcAft>
                 <a:spcPts val="700"/>
@@ -6190,7 +6190,7 @@
           <a:p>
             <a:pPr marL="342900" indent="-342900">
               <a:lnSpc>
-                <a:spcPts val="1600"/>
+                <a:spcPts val="1625"/>
               </a:lnSpc>
               <a:spcAft>
                 <a:spcPts val="700"/>
@@ -6222,11 +6222,11 @@
         <p:spPr>
           <a:xfrm>
             <a:off x="6327648" y="2103120"/>
-            <a:ext cx="5266944" cy="2259584"/>
+            <a:ext cx="5266944" cy="2457704"/>
           </a:xfrm>
           <a:prstGeom prst="roundRect">
             <a:avLst>
-              <a:gd name="adj" fmla="val 2428"/>
+              <a:gd name="adj" fmla="val 2232"/>
             </a:avLst>
           </a:prstGeom>
           <a:solidFill>
@@ -6295,7 +6295,7 @@
         <p:spPr>
           <a:xfrm>
             <a:off x="6583680" y="2615184"/>
-            <a:ext cx="4754880" cy="1564640"/>
+            <a:ext cx="4754880" cy="1762760"/>
           </a:xfrm>
           <a:prstGeom prst="rect">
             <a:avLst/>
@@ -6309,7 +6309,7 @@
           <a:p>
             <a:pPr marL="342900" indent="-342900">
               <a:lnSpc>
-                <a:spcPts val="1600"/>
+                <a:spcPts val="1560"/>
               </a:lnSpc>
               <a:spcAft>
                 <a:spcPts val="700"/>
@@ -6333,7 +6333,7 @@
           <a:p>
             <a:pPr marL="342900" indent="-342900">
               <a:lnSpc>
-                <a:spcPts val="1600"/>
+                <a:spcPts val="1560"/>
               </a:lnSpc>
               <a:spcAft>
                 <a:spcPts val="700"/>
@@ -6667,7 +6667,7 @@
           <a:p>
             <a:pPr marL="342900" indent="-342900">
               <a:lnSpc>
-                <a:spcPts val="1600"/>
+                <a:spcPts val="1625"/>
               </a:lnSpc>
               <a:spcAft>
                 <a:spcPts val="700"/>
@@ -7019,11 +7019,11 @@
         <p:spPr>
           <a:xfrm>
             <a:off x="566928" y="2103120"/>
-            <a:ext cx="11027664" cy="2377694"/>
+            <a:ext cx="11027664" cy="2584069"/>
           </a:xfrm>
           <a:prstGeom prst="roundRect">
             <a:avLst>
-              <a:gd name="adj" fmla="val 2307"/>
+              <a:gd name="adj" fmla="val 2123"/>
             </a:avLst>
           </a:prstGeom>
           <a:solidFill>
@@ -7092,7 +7092,7 @@
         <p:spPr>
           <a:xfrm>
             <a:off x="822960" y="2615184"/>
-            <a:ext cx="10515600" cy="1682750"/>
+            <a:ext cx="10515600" cy="1889125"/>
           </a:xfrm>
           <a:prstGeom prst="rect">
             <a:avLst/>
@@ -7106,7 +7106,7 @@
           <a:p>
             <a:pPr marL="342900" indent="-342900">
               <a:lnSpc>
-                <a:spcPts val="1600"/>
+                <a:spcPts val="1625"/>
               </a:lnSpc>
               <a:spcAft>
                 <a:spcPts val="700"/>
@@ -7130,7 +7130,7 @@
           <a:p>
             <a:pPr marL="342900" indent="-342900">
               <a:lnSpc>
-                <a:spcPts val="1600"/>
+                <a:spcPts val="1625"/>
               </a:lnSpc>
               <a:spcAft>
                 <a:spcPts val="700"/>
@@ -7154,7 +7154,7 @@
           <a:p>
             <a:pPr marL="342900" indent="-342900">
               <a:lnSpc>
-                <a:spcPts val="1600"/>
+                <a:spcPts val="1625"/>
               </a:lnSpc>
               <a:spcAft>
                 <a:spcPts val="700"/>
@@ -7178,7 +7178,7 @@
           <a:p>
             <a:pPr marL="342900" indent="-342900">
               <a:lnSpc>
-                <a:spcPts val="1600"/>
+                <a:spcPts val="1625"/>
               </a:lnSpc>
               <a:spcAft>
                 <a:spcPts val="700"/>
@@ -7202,7 +7202,7 @@
           <a:p>
             <a:pPr marL="342900" indent="-342900">
               <a:lnSpc>
-                <a:spcPts val="1600"/>
+                <a:spcPts val="1625"/>
               </a:lnSpc>
               <a:spcAft>
                 <a:spcPts val="700"/>
@@ -7233,7 +7233,7 @@
         </p:nvSpPr>
         <p:spPr>
           <a:xfrm>
-            <a:off x="566928" y="4755134"/>
+            <a:off x="566928" y="4961509"/>
             <a:ext cx="11027664" cy="914400"/>
           </a:xfrm>
           <a:prstGeom prst="roundRect">
@@ -7267,7 +7267,7 @@
         </p:nvSpPr>
         <p:spPr>
           <a:xfrm>
-            <a:off x="822960" y="4901438"/>
+            <a:off x="822960" y="5107813"/>
             <a:ext cx="914400" cy="219456"/>
           </a:xfrm>
           <a:prstGeom prst="rect">
@@ -7306,7 +7306,7 @@
         </p:nvSpPr>
         <p:spPr>
           <a:xfrm>
-            <a:off x="1773936" y="4864862"/>
+            <a:off x="1773936" y="5071237"/>
             <a:ext cx="9564624" cy="694944"/>
           </a:xfrm>
           <a:prstGeom prst="rect">
@@ -7561,11 +7561,11 @@
         <p:spPr>
           <a:xfrm>
             <a:off x="566928" y="2103120"/>
-            <a:ext cx="5486400" cy="3537204"/>
+            <a:ext cx="5486400" cy="3692144"/>
           </a:xfrm>
           <a:prstGeom prst="roundRect">
             <a:avLst>
-              <a:gd name="adj" fmla="val 1551"/>
+              <a:gd name="adj" fmla="val 1486"/>
             </a:avLst>
           </a:prstGeom>
           <a:solidFill>
@@ -7634,7 +7634,7 @@
         <p:spPr>
           <a:xfrm>
             <a:off x="822960" y="2615184"/>
-            <a:ext cx="4974336" cy="2842260"/>
+            <a:ext cx="4974336" cy="2997200"/>
           </a:xfrm>
           <a:prstGeom prst="rect">
             <a:avLst/>
@@ -7648,7 +7648,7 @@
           <a:p>
             <a:pPr marL="342900" indent="-342900">
               <a:lnSpc>
-                <a:spcPts val="1600"/>
+                <a:spcPts val="1625"/>
               </a:lnSpc>
               <a:spcAft>
                 <a:spcPts val="700"/>
@@ -7672,7 +7672,7 @@
           <a:p>
             <a:pPr marL="342900" indent="-342900">
               <a:lnSpc>
-                <a:spcPts val="1600"/>
+                <a:spcPts val="1625"/>
               </a:lnSpc>
               <a:spcAft>
                 <a:spcPts val="700"/>
@@ -7693,6 +7693,30 @@
             </a:r>
             <a:endParaRPr lang="en-US" sz="1250" dirty="0"/>
           </a:p>
+          <a:p>
+            <a:pPr marL="342900" indent="-342900">
+              <a:lnSpc>
+                <a:spcPts val="1625"/>
+              </a:lnSpc>
+              <a:spcAft>
+                <a:spcPts val="700"/>
+              </a:spcAft>
+              <a:buSzPct val="100000"/>
+              <a:buChar char="•"/>
+            </a:pPr>
+            <a:r>
+              <a:rPr lang="en-US" sz="1250" dirty="0">
+                <a:solidFill>
+                  <a:srgbClr val="4D5A68"/>
+                </a:solidFill>
+                <a:latin typeface="Calibri" pitchFamily="34" charset="0"/>
+                <a:ea typeface="Calibri" pitchFamily="34" charset="-122"/>
+                <a:cs typeface="Calibri" pitchFamily="34" charset="-120"/>
+              </a:rPr>
+              <a:t>The server acquires a data plane. Until now every caller fetched a key reference and asked the token to act on it; now applications send data and never see a key at all.</a:t>
+            </a:r>
+            <a:endParaRPr lang="en-US" sz="1250" dirty="0"/>
+          </a:p>
         </p:txBody>
       </p:sp>
       <p:sp>
@@ -7704,11 +7728,11 @@
         <p:spPr>
           <a:xfrm>
             <a:off x="6327648" y="2103120"/>
-            <a:ext cx="5266944" cy="3537204"/>
+            <a:ext cx="5266944" cy="3692144"/>
           </a:xfrm>
           <a:prstGeom prst="roundRect">
             <a:avLst>
-              <a:gd name="adj" fmla="val 1551"/>
+              <a:gd name="adj" fmla="val 1486"/>
             </a:avLst>
           </a:prstGeom>
           <a:solidFill>
@@ -7777,7 +7801,7 @@
         <p:spPr>
           <a:xfrm>
             <a:off x="6583680" y="2615184"/>
-            <a:ext cx="4754880" cy="2842260"/>
+            <a:ext cx="4754880" cy="2997200"/>
           </a:xfrm>
           <a:prstGeom prst="rect">
             <a:avLst/>
@@ -7791,7 +7815,7 @@
           <a:p>
             <a:pPr marL="342900" indent="-342900">
               <a:lnSpc>
-                <a:spcPts val="1600"/>
+                <a:spcPts val="1300"/>
               </a:lnSpc>
               <a:spcAft>
                 <a:spcPts val="700"/>
@@ -7800,7 +7824,7 @@
               <a:buChar char="•"/>
             </a:pPr>
             <a:r>
-              <a:rPr lang="en-US" sz="1200" dirty="0">
+              <a:rPr lang="en-US" sz="1000" dirty="0">
                 <a:solidFill>
                   <a:srgbClr val="4D5A68"/>
                 </a:solidFill>
@@ -7810,12 +7834,12 @@
               </a:rPr>
               <a:t>POST /keys; POST /keys/{uid}/activate | revoke | rekey; DELETE /keys/{uid}; PUT /keys/{uid}/cryptoperiod; grants, groups and role permissions; POST /approvals/{id}/approve.</a:t>
             </a:r>
-            <a:endParaRPr lang="en-US" sz="1200" dirty="0"/>
+            <a:endParaRPr lang="en-US" sz="1000" dirty="0"/>
           </a:p>
           <a:p>
             <a:pPr marL="342900" indent="-342900">
               <a:lnSpc>
-                <a:spcPts val="1600"/>
+                <a:spcPts val="1300"/>
               </a:lnSpc>
               <a:spcAft>
                 <a:spcPts val="700"/>
@@ -7824,7 +7848,7 @@
               <a:buChar char="•"/>
             </a:pPr>
             <a:r>
-              <a:rPr lang="en-US" sz="1200" dirty="0">
+              <a:rPr lang="en-US" sz="1000" dirty="0">
                 <a:solidFill>
                   <a:srgbClr val="4D5A68"/>
                 </a:solidFill>
@@ -7834,12 +7858,12 @@
               </a:rPr>
               <a:t>A dual-control refusal returns 403 carrying the approval request id and the count outstanding, so the console can render 'awaiting 2 approvals' and link to the queue. That falls out of the existing enforcement.</a:t>
             </a:r>
-            <a:endParaRPr lang="en-US" sz="1200" dirty="0"/>
+            <a:endParaRPr lang="en-US" sz="1000" dirty="0"/>
           </a:p>
           <a:p>
             <a:pPr marL="342900" indent="-342900">
               <a:lnSpc>
-                <a:spcPts val="1600"/>
+                <a:spcPts val="1300"/>
               </a:lnSpc>
               <a:spcAft>
                 <a:spcPts val="700"/>
@@ -7848,7 +7872,7 @@
               <a:buChar char="•"/>
             </a:pPr>
             <a:r>
-              <a:rPr lang="en-US" sz="1200" dirty="0">
+              <a:rPr lang="en-US" sz="1000" dirty="0">
                 <a:solidFill>
                   <a:srgbClr val="4D5A68"/>
                 </a:solidFill>
@@ -7858,7 +7882,31 @@
               </a:rPr>
               <a:t>Three matrix gaps are closed here because they are lifecycle work: asymmetric auto-rotation, Shamir threshold split keys, and batch atomicity via a service-level transaction.</a:t>
             </a:r>
-            <a:endParaRPr lang="en-US" sz="1200" dirty="0"/>
+            <a:endParaRPr lang="en-US" sz="1000" dirty="0"/>
+          </a:p>
+          <a:p>
+            <a:pPr marL="342900" indent="-342900">
+              <a:lnSpc>
+                <a:spcPts val="1300"/>
+              </a:lnSpc>
+              <a:spcAft>
+                <a:spcPts val="700"/>
+              </a:spcAft>
+              <a:buSzPct val="100000"/>
+              <a:buChar char="•"/>
+            </a:pPr>
+            <a:r>
+              <a:rPr lang="en-US" sz="1000" dirty="0">
+                <a:solidFill>
+                  <a:srgbClr val="4D5A68"/>
+                </a:solidFill>
+                <a:latin typeface="Calibri" pitchFamily="34" charset="0"/>
+                <a:ea typeface="Calibri" pitchFamily="34" charset="-122"/>
+                <a:cs typeface="Calibri" pitchFamily="34" charset="-120"/>
+              </a:rPr>
+              <a:t>The data plane beside the control plane: POST /keys/{uid}/encrypt | decrypt | sign | mac, and /datakey returning a fresh key both wrapped under the named key and in the clear — the surface applications actually consume, and the primitives already run inside the token.</a:t>
+            </a:r>
+            <a:endParaRPr lang="en-US" sz="1000" dirty="0"/>
           </a:p>
         </p:txBody>
       </p:sp>
@@ -8086,11 +8134,11 @@
         <p:spPr>
           <a:xfrm>
             <a:off x="566928" y="2103120"/>
-            <a:ext cx="6766560" cy="1920240"/>
+            <a:ext cx="6766560" cy="2936494"/>
           </a:xfrm>
           <a:prstGeom prst="roundRect">
             <a:avLst>
-              <a:gd name="adj" fmla="val 2857"/>
+              <a:gd name="adj" fmla="val 1868"/>
             </a:avLst>
           </a:prstGeom>
           <a:solidFill>
@@ -8159,7 +8207,7 @@
         <p:spPr>
           <a:xfrm>
             <a:off x="822960" y="2615184"/>
-            <a:ext cx="6254496" cy="1225296"/>
+            <a:ext cx="6254496" cy="2241550"/>
           </a:xfrm>
           <a:prstGeom prst="rect">
             <a:avLst/>
@@ -8173,7 +8221,7 @@
           <a:p>
             <a:pPr marL="342900" indent="-342900">
               <a:lnSpc>
-                <a:spcPts val="1600"/>
+                <a:spcPts val="1625"/>
               </a:lnSpc>
               <a:spcAft>
                 <a:spcPts val="700"/>
@@ -8194,6 +8242,30 @@
             </a:r>
             <a:endParaRPr lang="en-US" sz="1250" dirty="0"/>
           </a:p>
+          <a:p>
+            <a:pPr marL="342900" indent="-342900">
+              <a:lnSpc>
+                <a:spcPts val="1625"/>
+              </a:lnSpc>
+              <a:spcAft>
+                <a:spcPts val="700"/>
+              </a:spcAft>
+              <a:buSzPct val="100000"/>
+              <a:buChar char="•"/>
+            </a:pPr>
+            <a:r>
+              <a:rPr lang="en-US" sz="1250" dirty="0">
+                <a:solidFill>
+                  <a:srgbClr val="4D5A68"/>
+                </a:solidFill>
+                <a:latin typeface="Calibri" pitchFamily="34" charset="0"/>
+                <a:ea typeface="Calibri" pitchFamily="34" charset="-122"/>
+                <a:cs typeface="Calibri" pitchFamily="34" charset="-120"/>
+              </a:rPr>
+              <a:t>The crypto endpoints are thin: they translate JSON to the arguments the existing Encrypt, Decrypt, Sign and MAC handlers already take. Re-wrap is decrypt-then-encrypt under the successor key, inside one guarded call so plaintext never leaves the process.</a:t>
+            </a:r>
+            <a:endParaRPr lang="en-US" sz="1250" dirty="0"/>
+          </a:p>
         </p:txBody>
       </p:sp>
       <p:sp>
@@ -8205,11 +8277,11 @@
         <p:spPr>
           <a:xfrm>
             <a:off x="7607808" y="2103120"/>
-            <a:ext cx="3986784" cy="1920240"/>
+            <a:ext cx="3986784" cy="2936494"/>
           </a:xfrm>
           <a:prstGeom prst="roundRect">
             <a:avLst>
-              <a:gd name="adj" fmla="val 2857"/>
+              <a:gd name="adj" fmla="val 1868"/>
             </a:avLst>
           </a:prstGeom>
           <a:solidFill>
@@ -8263,7 +8335,7 @@
                 <a:ea typeface="Calibri" pitchFamily="34" charset="-122"/>
                 <a:cs typeface="Calibri" pitchFamily="34" charset="-120"/>
               </a:rPr>
-              <a:t>CLOSES 3 GAP-MATRIX FEATURES</a:t>
+              <a:t>CLOSES 4 GAP-MATRIX FEATURES</a:t>
             </a:r>
             <a:endParaRPr lang="en-US" sz="1000" dirty="0"/>
           </a:p>
@@ -8278,7 +8350,7 @@
         <p:spPr>
           <a:xfrm>
             <a:off x="7863840" y="2615184"/>
-            <a:ext cx="3474720" cy="1225296"/>
+            <a:ext cx="3474720" cy="2241550"/>
           </a:xfrm>
           <a:prstGeom prst="rect">
             <a:avLst/>
@@ -8292,7 +8364,7 @@
           <a:p>
             <a:pPr marL="342900" indent="-342900">
               <a:lnSpc>
-                <a:spcPts val="1600"/>
+                <a:spcPts val="1560"/>
               </a:lnSpc>
               <a:spcAft>
                 <a:spcPts val="700"/>
@@ -8316,7 +8388,7 @@
           <a:p>
             <a:pPr marL="342900" indent="-342900">
               <a:lnSpc>
-                <a:spcPts val="1600"/>
+                <a:spcPts val="1560"/>
               </a:lnSpc>
               <a:spcAft>
                 <a:spcPts val="700"/>
@@ -8340,7 +8412,7 @@
           <a:p>
             <a:pPr marL="342900" indent="-342900">
               <a:lnSpc>
-                <a:spcPts val="1600"/>
+                <a:spcPts val="1560"/>
               </a:lnSpc>
               <a:spcAft>
                 <a:spcPts val="700"/>
@@ -8361,6 +8433,30 @@
             </a:r>
             <a:endParaRPr lang="en-US" sz="1200" dirty="0"/>
           </a:p>
+          <a:p>
+            <a:pPr marL="342900" indent="-342900">
+              <a:lnSpc>
+                <a:spcPts val="1560"/>
+              </a:lnSpc>
+              <a:spcAft>
+                <a:spcPts val="700"/>
+              </a:spcAft>
+              <a:buSzPct val="100000"/>
+              <a:buChar char="•"/>
+            </a:pPr>
+            <a:r>
+              <a:rPr lang="en-US" sz="1200" dirty="0">
+                <a:solidFill>
+                  <a:srgbClr val="1A3A5C"/>
+                </a:solidFill>
+                <a:latin typeface="Calibri" pitchFamily="34" charset="0"/>
+                <a:ea typeface="Calibri" pitchFamily="34" charset="-122"/>
+                <a:cs typeface="Calibri" pitchFamily="34" charset="-120"/>
+              </a:rPr>
+              <a:t>Encryption as a service (data-plane API)</a:t>
+            </a:r>
+            <a:endParaRPr lang="en-US" sz="1200" dirty="0"/>
+          </a:p>
         </p:txBody>
       </p:sp>
       <p:sp>
@@ -8396,7 +8492,7 @@
                 <a:ea typeface="Calibri" pitchFamily="34" charset="-122"/>
                 <a:cs typeface="Calibri" pitchFamily="34" charset="-120"/>
               </a:rPr>
-              <a:t>Estimated size: ~1,100 lines, ~55 tests.</a:t>
+              <a:t>Estimated size: ~1,350 lines, ~68 tests.</a:t>
             </a:r>
             <a:endParaRPr lang="en-US" sz="1050" dirty="0"/>
           </a:p>
@@ -8626,11 +8722,11 @@
         <p:spPr>
           <a:xfrm>
             <a:off x="566928" y="2103120"/>
-            <a:ext cx="11027664" cy="2584069"/>
+            <a:ext cx="11027664" cy="3405759"/>
           </a:xfrm>
           <a:prstGeom prst="roundRect">
             <a:avLst>
-              <a:gd name="adj" fmla="val 2123"/>
+              <a:gd name="adj" fmla="val 1611"/>
             </a:avLst>
           </a:prstGeom>
           <a:solidFill>
@@ -8699,7 +8795,7 @@
         <p:spPr>
           <a:xfrm>
             <a:off x="822960" y="2615184"/>
-            <a:ext cx="10515600" cy="1889125"/>
+            <a:ext cx="10515600" cy="2710815"/>
           </a:xfrm>
           <a:prstGeom prst="rect">
             <a:avLst/>
@@ -8713,7 +8809,7 @@
           <a:p>
             <a:pPr marL="342900" indent="-342900">
               <a:lnSpc>
-                <a:spcPts val="1600"/>
+                <a:spcPts val="1495"/>
               </a:lnSpc>
               <a:spcAft>
                 <a:spcPts val="700"/>
@@ -8722,7 +8818,7 @@
               <a:buChar char="•"/>
             </a:pPr>
             <a:r>
-              <a:rPr lang="en-US" sz="1250" dirty="0">
+              <a:rPr lang="en-US" sz="1150" dirty="0">
                 <a:solidFill>
                   <a:srgbClr val="4D5A68"/>
                 </a:solidFill>
@@ -8732,12 +8828,12 @@
               </a:rPr>
               <a:t>The dual-control assertion from the KMIP wire test, run verbatim against REST: the first Destroy is refused, the key survives, two other identities approve, the retry succeeds, and the approval is spent.</a:t>
             </a:r>
-            <a:endParaRPr lang="en-US" sz="1250" dirty="0"/>
+            <a:endParaRPr lang="en-US" sz="1150" dirty="0"/>
           </a:p>
           <a:p>
             <a:pPr marL="342900" indent="-342900">
               <a:lnSpc>
-                <a:spcPts val="1600"/>
+                <a:spcPts val="1495"/>
               </a:lnSpc>
               <a:spcAft>
                 <a:spcPts val="700"/>
@@ -8746,7 +8842,7 @@
               <a:buChar char="•"/>
             </a:pPr>
             <a:r>
-              <a:rPr lang="en-US" sz="1250" dirty="0">
+              <a:rPr lang="en-US" sz="1150" dirty="0">
                 <a:solidFill>
                   <a:srgbClr val="4D5A68"/>
                 </a:solidFill>
@@ -8756,12 +8852,12 @@
               </a:rPr>
               <a:t>Role allowlists and group grants behave identically over both transports — parametrised over the transport, one test body.</a:t>
             </a:r>
-            <a:endParaRPr lang="en-US" sz="1250" dirty="0"/>
+            <a:endParaRPr lang="en-US" sz="1150" dirty="0"/>
           </a:p>
           <a:p>
             <a:pPr marL="342900" indent="-342900">
               <a:lnSpc>
-                <a:spcPts val="1600"/>
+                <a:spcPts val="1495"/>
               </a:lnSpc>
               <a:spcAft>
                 <a:spcPts val="700"/>
@@ -8770,7 +8866,7 @@
               <a:buChar char="•"/>
             </a:pPr>
             <a:r>
-              <a:rPr lang="en-US" sz="1250" dirty="0">
+              <a:rPr lang="en-US" sz="1150" dirty="0">
                 <a:solidFill>
                   <a:srgbClr val="4D5A68"/>
                 </a:solidFill>
@@ -8780,12 +8876,12 @@
               </a:rPr>
               <a:t>Asymmetric rotation cross-links both new objects to both old ones.</a:t>
             </a:r>
-            <a:endParaRPr lang="en-US" sz="1250" dirty="0"/>
+            <a:endParaRPr lang="en-US" sz="1150" dirty="0"/>
           </a:p>
           <a:p>
             <a:pPr marL="342900" indent="-342900">
               <a:lnSpc>
-                <a:spcPts val="1600"/>
+                <a:spcPts val="1495"/>
               </a:lnSpc>
               <a:spcAft>
                 <a:spcPts val="700"/>
@@ -8794,7 +8890,7 @@
               <a:buChar char="•"/>
             </a:pPr>
             <a:r>
-              <a:rPr lang="en-US" sz="1250" dirty="0">
+              <a:rPr lang="en-US" sz="1150" dirty="0">
                 <a:solidFill>
                   <a:srgbClr val="4D5A68"/>
                 </a:solidFill>
@@ -8804,12 +8900,12 @@
               </a:rPr>
               <a:t>Shamir: any k of n shares reconstruct, any k-1 fail.</a:t>
             </a:r>
-            <a:endParaRPr lang="en-US" sz="1250" dirty="0"/>
+            <a:endParaRPr lang="en-US" sz="1150" dirty="0"/>
           </a:p>
           <a:p>
             <a:pPr marL="342900" indent="-342900">
               <a:lnSpc>
-                <a:spcPts val="1600"/>
+                <a:spcPts val="1495"/>
               </a:lnSpc>
               <a:spcAft>
                 <a:spcPts val="700"/>
@@ -8818,7 +8914,7 @@
               <a:buChar char="•"/>
             </a:pPr>
             <a:r>
-              <a:rPr lang="en-US" sz="1250" dirty="0">
+              <a:rPr lang="en-US" sz="1150" dirty="0">
                 <a:solidFill>
                   <a:srgbClr val="4D5A68"/>
                 </a:solidFill>
@@ -8828,7 +8924,55 @@
               </a:rPr>
               <a:t>A batch whose third item fails leaves the first two unapplied.</a:t>
             </a:r>
-            <a:endParaRPr lang="en-US" sz="1250" dirty="0"/>
+            <a:endParaRPr lang="en-US" sz="1150" dirty="0"/>
+          </a:p>
+          <a:p>
+            <a:pPr marL="342900" indent="-342900">
+              <a:lnSpc>
+                <a:spcPts val="1495"/>
+              </a:lnSpc>
+              <a:spcAft>
+                <a:spcPts val="700"/>
+              </a:spcAft>
+              <a:buSzPct val="100000"/>
+              <a:buChar char="•"/>
+            </a:pPr>
+            <a:r>
+              <a:rPr lang="en-US" sz="1150" dirty="0">
+                <a:solidFill>
+                  <a:srgbClr val="4D5A68"/>
+                </a:solidFill>
+                <a:latin typeface="Calibri" pitchFamily="34" charset="0"/>
+                <a:ea typeface="Calibri" pitchFamily="34" charset="-122"/>
+                <a:cs typeface="Calibri" pitchFamily="34" charset="-120"/>
+              </a:rPr>
+              <a:t>Ciphertext from the REST encrypt endpoint decrypts over KMIP and the reverse — one test body, both transports, so the two cannot diverge.</a:t>
+            </a:r>
+            <a:endParaRPr lang="en-US" sz="1150" dirty="0"/>
+          </a:p>
+          <a:p>
+            <a:pPr marL="342900" indent="-342900">
+              <a:lnSpc>
+                <a:spcPts val="1495"/>
+              </a:lnSpc>
+              <a:spcAft>
+                <a:spcPts val="700"/>
+              </a:spcAft>
+              <a:buSzPct val="100000"/>
+              <a:buChar char="•"/>
+            </a:pPr>
+            <a:r>
+              <a:rPr lang="en-US" sz="1150" dirty="0">
+                <a:solidFill>
+                  <a:srgbClr val="4D5A68"/>
+                </a:solidFill>
+                <a:latin typeface="Calibri" pitchFamily="34" charset="0"/>
+                <a:ea typeface="Calibri" pitchFamily="34" charset="-122"/>
+                <a:cs typeface="Calibri" pitchFamily="34" charset="-120"/>
+              </a:rPr>
+              <a:t>A data key returns a wrapped form that unwraps to the plaintext form; re-wrap to the successor key yields the original plaintext and the old ciphertext no longer decrypts under the new version.</a:t>
+            </a:r>
+            <a:endParaRPr lang="en-US" sz="1150" dirty="0"/>
           </a:p>
         </p:txBody>
       </p:sp>
@@ -8840,7 +8984,7 @@
         </p:nvSpPr>
         <p:spPr>
           <a:xfrm>
-            <a:off x="566928" y="4961509"/>
+            <a:off x="566928" y="5783199"/>
             <a:ext cx="11027664" cy="914400"/>
           </a:xfrm>
           <a:prstGeom prst="roundRect">
@@ -8874,7 +9018,7 @@
         </p:nvSpPr>
         <p:spPr>
           <a:xfrm>
-            <a:off x="822960" y="5107813"/>
+            <a:off x="822960" y="5929503"/>
             <a:ext cx="914400" cy="219456"/>
           </a:xfrm>
           <a:prstGeom prst="rect">
@@ -8913,7 +9057,7 @@
         </p:nvSpPr>
         <p:spPr>
           <a:xfrm>
-            <a:off x="1773936" y="5071237"/>
+            <a:off x="1773936" y="5892927"/>
             <a:ext cx="9564624" cy="694944"/>
           </a:xfrm>
           <a:prstGeom prst="rect">
@@ -9168,11 +9312,11 @@
         <p:spPr>
           <a:xfrm>
             <a:off x="566928" y="2103120"/>
-            <a:ext cx="5486400" cy="2546604"/>
+            <a:ext cx="5486400" cy="3824224"/>
           </a:xfrm>
           <a:prstGeom prst="roundRect">
             <a:avLst>
-              <a:gd name="adj" fmla="val 2154"/>
+              <a:gd name="adj" fmla="val 1435"/>
             </a:avLst>
           </a:prstGeom>
           <a:solidFill>
@@ -9241,7 +9385,7 @@
         <p:spPr>
           <a:xfrm>
             <a:off x="822960" y="2615184"/>
-            <a:ext cx="4974336" cy="1851660"/>
+            <a:ext cx="4974336" cy="3129280"/>
           </a:xfrm>
           <a:prstGeom prst="rect">
             <a:avLst/>
@@ -9255,7 +9399,7 @@
           <a:p>
             <a:pPr marL="342900" indent="-342900">
               <a:lnSpc>
-                <a:spcPts val="1600"/>
+                <a:spcPts val="1625"/>
               </a:lnSpc>
               <a:spcAft>
                 <a:spcPts val="700"/>
@@ -9279,7 +9423,7 @@
           <a:p>
             <a:pPr marL="342900" indent="-342900">
               <a:lnSpc>
-                <a:spcPts val="1600"/>
+                <a:spcPts val="1625"/>
               </a:lnSpc>
               <a:spcAft>
                 <a:spcPts val="700"/>
@@ -9311,11 +9455,11 @@
         <p:spPr>
           <a:xfrm>
             <a:off x="6327648" y="2103120"/>
-            <a:ext cx="5266944" cy="2546604"/>
+            <a:ext cx="5266944" cy="3824224"/>
           </a:xfrm>
           <a:prstGeom prst="roundRect">
             <a:avLst>
-              <a:gd name="adj" fmla="val 2154"/>
+              <a:gd name="adj" fmla="val 1435"/>
             </a:avLst>
           </a:prstGeom>
           <a:solidFill>
@@ -9384,7 +9528,7 @@
         <p:spPr>
           <a:xfrm>
             <a:off x="6583680" y="2615184"/>
-            <a:ext cx="4754880" cy="1851660"/>
+            <a:ext cx="4754880" cy="3129280"/>
           </a:xfrm>
           <a:prstGeom prst="rect">
             <a:avLst/>
@@ -9398,7 +9542,7 @@
           <a:p>
             <a:pPr marL="342900" indent="-342900">
               <a:lnSpc>
-                <a:spcPts val="1600"/>
+                <a:spcPts val="1560"/>
               </a:lnSpc>
               <a:spcAft>
                 <a:spcPts val="700"/>
@@ -9422,7 +9566,7 @@
           <a:p>
             <a:pPr marL="342900" indent="-342900">
               <a:lnSpc>
-                <a:spcPts val="1600"/>
+                <a:spcPts val="1560"/>
               </a:lnSpc>
               <a:spcAft>
                 <a:spcPts val="700"/>
@@ -9446,7 +9590,7 @@
           <a:p>
             <a:pPr marL="342900" indent="-342900">
               <a:lnSpc>
-                <a:spcPts val="1600"/>
+                <a:spcPts val="1560"/>
               </a:lnSpc>
               <a:spcAft>
                 <a:spcPts val="700"/>
@@ -9464,6 +9608,30 @@
                 <a:cs typeface="Calibri" pitchFamily="34" charset="-120"/>
               </a:rPr>
               <a:t>An OpenAPI 3.1 document generated from the router's route table, not hand-written — a hand-written spec drifts within a month.</a:t>
+            </a:r>
+            <a:endParaRPr lang="en-US" sz="1200" dirty="0"/>
+          </a:p>
+          <a:p>
+            <a:pPr marL="342900" indent="-342900">
+              <a:lnSpc>
+                <a:spcPts val="1560"/>
+              </a:lnSpc>
+              <a:spcAft>
+                <a:spcPts val="700"/>
+              </a:spcAft>
+              <a:buSzPct val="100000"/>
+              <a:buChar char="•"/>
+            </a:pPr>
+            <a:r>
+              <a:rPr lang="en-US" sz="1200" dirty="0">
+                <a:solidFill>
+                  <a:srgbClr val="4D5A68"/>
+                </a:solidFill>
+                <a:latin typeface="Calibri" pitchFamily="34" charset="0"/>
+                <a:ea typeface="Calibri" pitchFamily="34" charset="-122"/>
+                <a:cs typeface="Calibri" pitchFamily="34" charset="-120"/>
+              </a:rPr>
+              <a:t>An interactive explorer served from that document, and client libraries generated from it in CI rather than written by hand, for the same reason: anything maintained separately from the router drifts from it.</a:t>
             </a:r>
             <a:endParaRPr lang="en-US" sz="1200" dirty="0"/>
           </a:p>
@@ -9780,7 +9948,7 @@
           <a:p>
             <a:pPr marL="342900" indent="-342900">
               <a:lnSpc>
-                <a:spcPts val="1600"/>
+                <a:spcPts val="1625"/>
               </a:lnSpc>
               <a:spcAft>
                 <a:spcPts val="700"/>
@@ -9870,7 +10038,7 @@
                 <a:ea typeface="Calibri" pitchFamily="34" charset="-122"/>
                 <a:cs typeface="Calibri" pitchFamily="34" charset="-120"/>
               </a:rPr>
-              <a:t>CLOSES 2 GAP-MATRIX FEATURES</a:t>
+              <a:t>CLOSES 3 GAP-MATRIX FEATURES</a:t>
             </a:r>
             <a:endParaRPr lang="en-US" sz="1000" dirty="0"/>
           </a:p>
@@ -9899,7 +10067,7 @@
           <a:p>
             <a:pPr marL="342900" indent="-342900">
               <a:lnSpc>
-                <a:spcPts val="1600"/>
+                <a:spcPts val="1560"/>
               </a:lnSpc>
               <a:spcAft>
                 <a:spcPts val="700"/>
@@ -9923,7 +10091,7 @@
           <a:p>
             <a:pPr marL="342900" indent="-342900">
               <a:lnSpc>
-                <a:spcPts val="1600"/>
+                <a:spcPts val="1560"/>
               </a:lnSpc>
               <a:spcAft>
                 <a:spcPts val="700"/>
@@ -9944,6 +10112,30 @@
             </a:r>
             <a:endParaRPr lang="en-US" sz="1200" dirty="0"/>
           </a:p>
+          <a:p>
+            <a:pPr marL="342900" indent="-342900">
+              <a:lnSpc>
+                <a:spcPts val="1560"/>
+              </a:lnSpc>
+              <a:spcAft>
+                <a:spcPts val="700"/>
+              </a:spcAft>
+              <a:buSzPct val="100000"/>
+              <a:buChar char="•"/>
+            </a:pPr>
+            <a:r>
+              <a:rPr lang="en-US" sz="1200" dirty="0">
+                <a:solidFill>
+                  <a:srgbClr val="1A3A5C"/>
+                </a:solidFill>
+                <a:latin typeface="Calibri" pitchFamily="34" charset="0"/>
+                <a:ea typeface="Calibri" pitchFamily="34" charset="-122"/>
+                <a:cs typeface="Calibri" pitchFamily="34" charset="-120"/>
+              </a:rPr>
+              <a:t>OpenAPI specification and generated clients</a:t>
+            </a:r>
+            <a:endParaRPr lang="en-US" sz="1200" dirty="0"/>
+          </a:p>
         </p:txBody>
       </p:sp>
       <p:sp>
@@ -9979,7 +10171,7 @@
                 <a:ea typeface="Calibri" pitchFamily="34" charset="-122"/>
                 <a:cs typeface="Calibri" pitchFamily="34" charset="-120"/>
               </a:rPr>
-              <a:t>Estimated size: ~800 lines, ~45 tests.</a:t>
+              <a:t>Estimated size: ~900 lines, ~50 tests.</a:t>
             </a:r>
             <a:endParaRPr lang="en-US" sz="1050" dirty="0"/>
           </a:p>
@@ -11044,7 +11236,7 @@
                 <a:ea typeface="Calibri" pitchFamily="34" charset="-122"/>
                 <a:cs typeface="Calibri" pitchFamily="34" charset="-120"/>
               </a:rPr>
-              <a:t>+3</a:t>
+              <a:t>+4</a:t>
             </a:r>
             <a:endParaRPr lang="en-US" sz="1050" dirty="0"/>
           </a:p>
@@ -11188,7 +11380,7 @@
                 <a:ea typeface="Calibri" pitchFamily="34" charset="-122"/>
                 <a:cs typeface="Calibri" pitchFamily="34" charset="-120"/>
               </a:rPr>
-              <a:t>+2</a:t>
+              <a:t>+3</a:t>
             </a:r>
             <a:endParaRPr lang="en-US" sz="1050" dirty="0"/>
           </a:p>
@@ -11750,7 +11942,7 @@
                 <a:ea typeface="Calibri" pitchFamily="34" charset="-122"/>
                 <a:cs typeface="Calibri" pitchFamily="34" charset="-120"/>
               </a:rPr>
-              <a:t>+5</a:t>
+              <a:t>+7</a:t>
             </a:r>
             <a:endParaRPr lang="en-US" sz="1050" dirty="0"/>
           </a:p>
@@ -12581,11 +12773,11 @@
         <p:spPr>
           <a:xfrm>
             <a:off x="566928" y="2103120"/>
-            <a:ext cx="11027664" cy="1993519"/>
+            <a:ext cx="11027664" cy="2495169"/>
           </a:xfrm>
           <a:prstGeom prst="roundRect">
             <a:avLst>
-              <a:gd name="adj" fmla="val 2752"/>
+              <a:gd name="adj" fmla="val 2199"/>
             </a:avLst>
           </a:prstGeom>
           <a:solidFill>
@@ -12654,7 +12846,7 @@
         <p:spPr>
           <a:xfrm>
             <a:off x="822960" y="2615184"/>
-            <a:ext cx="10515600" cy="1298575"/>
+            <a:ext cx="10515600" cy="1800225"/>
           </a:xfrm>
           <a:prstGeom prst="rect">
             <a:avLst/>
@@ -12668,7 +12860,7 @@
           <a:p>
             <a:pPr marL="342900" indent="-342900">
               <a:lnSpc>
-                <a:spcPts val="1600"/>
+                <a:spcPts val="1625"/>
               </a:lnSpc>
               <a:spcAft>
                 <a:spcPts val="700"/>
@@ -12692,7 +12884,7 @@
           <a:p>
             <a:pPr marL="342900" indent="-342900">
               <a:lnSpc>
-                <a:spcPts val="1600"/>
+                <a:spcPts val="1625"/>
               </a:lnSpc>
               <a:spcAft>
                 <a:spcPts val="700"/>
@@ -12716,7 +12908,7 @@
           <a:p>
             <a:pPr marL="342900" indent="-342900">
               <a:lnSpc>
-                <a:spcPts val="1600"/>
+                <a:spcPts val="1625"/>
               </a:lnSpc>
               <a:spcAft>
                 <a:spcPts val="700"/>
@@ -12733,6 +12925,30 @@
                 <a:ea typeface="Calibri" pitchFamily="34" charset="-122"/>
                 <a:cs typeface="Calibri" pitchFamily="34" charset="-120"/>
               </a:rPr>
+              <a:t>A client generated from the document round-trips a create, read and delete against a live server, so the specification is proved usable and not merely well-formed.</a:t>
+            </a:r>
+            <a:endParaRPr lang="en-US" sz="1250" dirty="0"/>
+          </a:p>
+          <a:p>
+            <a:pPr marL="342900" indent="-342900">
+              <a:lnSpc>
+                <a:spcPts val="1625"/>
+              </a:lnSpc>
+              <a:spcAft>
+                <a:spcPts val="700"/>
+              </a:spcAft>
+              <a:buSzPct val="100000"/>
+              <a:buChar char="•"/>
+            </a:pPr>
+            <a:r>
+              <a:rPr lang="en-US" sz="1250" dirty="0">
+                <a:solidFill>
+                  <a:srgbClr val="4D5A68"/>
+                </a:solidFill>
+                <a:latin typeface="Calibri" pitchFamily="34" charset="0"/>
+                <a:ea typeface="Calibri" pitchFamily="34" charset="-122"/>
+                <a:cs typeface="Calibri" pitchFamily="34" charset="-120"/>
+              </a:rPr>
               <a:t>Responses for a sample of endpoints match their declared schemas.</a:t>
             </a:r>
             <a:endParaRPr lang="en-US" sz="1250" dirty="0"/>
@@ -12747,7 +12963,7 @@
         </p:nvSpPr>
         <p:spPr>
           <a:xfrm>
-            <a:off x="566928" y="4370959"/>
+            <a:off x="566928" y="4872609"/>
             <a:ext cx="11027664" cy="914400"/>
           </a:xfrm>
           <a:prstGeom prst="roundRect">
@@ -12781,7 +12997,7 @@
         </p:nvSpPr>
         <p:spPr>
           <a:xfrm>
-            <a:off x="822960" y="4517263"/>
+            <a:off x="822960" y="5018913"/>
             <a:ext cx="914400" cy="219456"/>
           </a:xfrm>
           <a:prstGeom prst="rect">
@@ -12820,7 +13036,7 @@
         </p:nvSpPr>
         <p:spPr>
           <a:xfrm>
-            <a:off x="1773936" y="4480687"/>
+            <a:off x="1773936" y="4982337"/>
             <a:ext cx="9564624" cy="694944"/>
           </a:xfrm>
           <a:prstGeom prst="rect">
@@ -13162,7 +13378,7 @@
           <a:p>
             <a:pPr marL="342900" indent="-342900">
               <a:lnSpc>
-                <a:spcPts val="1600"/>
+                <a:spcPts val="1625"/>
               </a:lnSpc>
               <a:spcAft>
                 <a:spcPts val="700"/>
@@ -13186,7 +13402,7 @@
           <a:p>
             <a:pPr marL="342900" indent="-342900">
               <a:lnSpc>
-                <a:spcPts val="1600"/>
+                <a:spcPts val="1625"/>
               </a:lnSpc>
               <a:spcAft>
                 <a:spcPts val="700"/>
@@ -13305,7 +13521,7 @@
           <a:p>
             <a:pPr marL="342900" indent="-342900">
               <a:lnSpc>
-                <a:spcPts val="1600"/>
+                <a:spcPts val="1560"/>
               </a:lnSpc>
               <a:spcAft>
                 <a:spcPts val="700"/>
@@ -13329,7 +13545,7 @@
           <a:p>
             <a:pPr marL="342900" indent="-342900">
               <a:lnSpc>
-                <a:spcPts val="1600"/>
+                <a:spcPts val="1560"/>
               </a:lnSpc>
               <a:spcAft>
                 <a:spcPts val="700"/>
@@ -13353,7 +13569,7 @@
           <a:p>
             <a:pPr marL="342900" indent="-342900">
               <a:lnSpc>
-                <a:spcPts val="1600"/>
+                <a:spcPts val="1560"/>
               </a:lnSpc>
               <a:spcAft>
                 <a:spcPts val="700"/>
@@ -13687,7 +13903,7 @@
           <a:p>
             <a:pPr marL="342900" indent="-342900">
               <a:lnSpc>
-                <a:spcPts val="1600"/>
+                <a:spcPts val="1625"/>
               </a:lnSpc>
               <a:spcAft>
                 <a:spcPts val="700"/>
@@ -13806,7 +14022,7 @@
           <a:p>
             <a:pPr marL="342900" indent="-342900">
               <a:lnSpc>
-                <a:spcPts val="1600"/>
+                <a:spcPts val="1560"/>
               </a:lnSpc>
               <a:spcAft>
                 <a:spcPts val="700"/>
@@ -13830,7 +14046,7 @@
           <a:p>
             <a:pPr marL="342900" indent="-342900">
               <a:lnSpc>
-                <a:spcPts val="1600"/>
+                <a:spcPts val="1560"/>
               </a:lnSpc>
               <a:spcAft>
                 <a:spcPts val="700"/>
@@ -14203,7 +14419,7 @@
           <a:p>
             <a:pPr marL="342900" indent="-342900">
               <a:lnSpc>
-                <a:spcPts val="1600"/>
+                <a:spcPts val="1625"/>
               </a:lnSpc>
               <a:spcAft>
                 <a:spcPts val="700"/>
@@ -14227,7 +14443,7 @@
           <a:p>
             <a:pPr marL="342900" indent="-342900">
               <a:lnSpc>
-                <a:spcPts val="1600"/>
+                <a:spcPts val="1625"/>
               </a:lnSpc>
               <a:spcAft>
                 <a:spcPts val="700"/>
@@ -14251,7 +14467,7 @@
           <a:p>
             <a:pPr marL="342900" indent="-342900">
               <a:lnSpc>
-                <a:spcPts val="1600"/>
+                <a:spcPts val="1625"/>
               </a:lnSpc>
               <a:spcAft>
                 <a:spcPts val="700"/>
@@ -14697,7 +14913,7 @@
           <a:p>
             <a:pPr marL="342900" indent="-342900">
               <a:lnSpc>
-                <a:spcPts val="1600"/>
+                <a:spcPts val="1625"/>
               </a:lnSpc>
               <a:spcAft>
                 <a:spcPts val="700"/>
@@ -14721,7 +14937,7 @@
           <a:p>
             <a:pPr marL="342900" indent="-342900">
               <a:lnSpc>
-                <a:spcPts val="1600"/>
+                <a:spcPts val="1625"/>
               </a:lnSpc>
               <a:spcAft>
                 <a:spcPts val="700"/>
@@ -14840,7 +15056,7 @@
           <a:p>
             <a:pPr marL="342900" indent="-342900">
               <a:lnSpc>
-                <a:spcPts val="1600"/>
+                <a:spcPts val="1560"/>
               </a:lnSpc>
               <a:spcAft>
                 <a:spcPts val="700"/>
@@ -14864,7 +15080,7 @@
           <a:p>
             <a:pPr marL="342900" indent="-342900">
               <a:lnSpc>
-                <a:spcPts val="1600"/>
+                <a:spcPts val="1560"/>
               </a:lnSpc>
               <a:spcAft>
                 <a:spcPts val="700"/>
@@ -14888,7 +15104,7 @@
           <a:p>
             <a:pPr marL="342900" indent="-342900">
               <a:lnSpc>
-                <a:spcPts val="1600"/>
+                <a:spcPts val="1560"/>
               </a:lnSpc>
               <a:spcAft>
                 <a:spcPts val="700"/>
@@ -15222,7 +15438,7 @@
           <a:p>
             <a:pPr marL="342900" indent="-342900">
               <a:lnSpc>
-                <a:spcPts val="1600"/>
+                <a:spcPts val="1625"/>
               </a:lnSpc>
               <a:spcAft>
                 <a:spcPts val="700"/>
@@ -15246,7 +15462,7 @@
           <a:p>
             <a:pPr marL="342900" indent="-342900">
               <a:lnSpc>
-                <a:spcPts val="1600"/>
+                <a:spcPts val="1625"/>
               </a:lnSpc>
               <a:spcAft>
                 <a:spcPts val="700"/>
@@ -15365,7 +15581,7 @@
           <a:p>
             <a:pPr marL="342900" indent="-342900">
               <a:lnSpc>
-                <a:spcPts val="1600"/>
+                <a:spcPts val="1560"/>
               </a:lnSpc>
               <a:spcAft>
                 <a:spcPts val="700"/>
@@ -15389,7 +15605,7 @@
           <a:p>
             <a:pPr marL="342900" indent="-342900">
               <a:lnSpc>
-                <a:spcPts val="1600"/>
+                <a:spcPts val="1560"/>
               </a:lnSpc>
               <a:spcAft>
                 <a:spcPts val="700"/>
@@ -15762,7 +15978,7 @@
           <a:p>
             <a:pPr marL="342900" indent="-342900">
               <a:lnSpc>
-                <a:spcPts val="1600"/>
+                <a:spcPts val="1625"/>
               </a:lnSpc>
               <a:spcAft>
                 <a:spcPts val="700"/>
@@ -15786,7 +16002,7 @@
           <a:p>
             <a:pPr marL="342900" indent="-342900">
               <a:lnSpc>
-                <a:spcPts val="1600"/>
+                <a:spcPts val="1625"/>
               </a:lnSpc>
               <a:spcAft>
                 <a:spcPts val="700"/>
@@ -15810,7 +16026,7 @@
           <a:p>
             <a:pPr marL="342900" indent="-342900">
               <a:lnSpc>
-                <a:spcPts val="1600"/>
+                <a:spcPts val="1625"/>
               </a:lnSpc>
               <a:spcAft>
                 <a:spcPts val="700"/>
@@ -15834,7 +16050,7 @@
           <a:p>
             <a:pPr marL="342900" indent="-342900">
               <a:lnSpc>
-                <a:spcPts val="1600"/>
+                <a:spcPts val="1625"/>
               </a:lnSpc>
               <a:spcAft>
                 <a:spcPts val="700"/>
@@ -16193,11 +16409,11 @@
         <p:spPr>
           <a:xfrm>
             <a:off x="566928" y="2103120"/>
-            <a:ext cx="5486400" cy="3913124"/>
+            <a:ext cx="5486400" cy="3894709"/>
           </a:xfrm>
           <a:prstGeom prst="roundRect">
             <a:avLst>
-              <a:gd name="adj" fmla="val 1402"/>
+              <a:gd name="adj" fmla="val 1409"/>
             </a:avLst>
           </a:prstGeom>
           <a:solidFill>
@@ -16266,7 +16482,7 @@
         <p:spPr>
           <a:xfrm>
             <a:off x="822960" y="2615184"/>
-            <a:ext cx="4974336" cy="3218180"/>
+            <a:ext cx="4974336" cy="3199765"/>
           </a:xfrm>
           <a:prstGeom prst="rect">
             <a:avLst/>
@@ -16280,7 +16496,7 @@
           <a:p>
             <a:pPr marL="342900" indent="-342900">
               <a:lnSpc>
-                <a:spcPts val="1600"/>
+                <a:spcPts val="1625"/>
               </a:lnSpc>
               <a:spcAft>
                 <a:spcPts val="700"/>
@@ -16304,7 +16520,7 @@
           <a:p>
             <a:pPr marL="342900" indent="-342900">
               <a:lnSpc>
-                <a:spcPts val="1600"/>
+                <a:spcPts val="1625"/>
               </a:lnSpc>
               <a:spcAft>
                 <a:spcPts val="700"/>
@@ -16325,6 +16541,30 @@
             </a:r>
             <a:endParaRPr lang="en-US" sz="1250" dirty="0"/>
           </a:p>
+          <a:p>
+            <a:pPr marL="342900" indent="-342900">
+              <a:lnSpc>
+                <a:spcPts val="1625"/>
+              </a:lnSpc>
+              <a:spcAft>
+                <a:spcPts val="700"/>
+              </a:spcAft>
+              <a:buSzPct val="100000"/>
+              <a:buChar char="•"/>
+            </a:pPr>
+            <a:r>
+              <a:rPr lang="en-US" sz="1250" dirty="0">
+                <a:solidFill>
+                  <a:srgbClr val="4D5A68"/>
+                </a:solidFill>
+                <a:latin typeface="Calibri" pitchFamily="34" charset="0"/>
+                <a:ea typeface="Calibri" pitchFamily="34" charset="-122"/>
+                <a:cs typeface="Calibri" pitchFamily="34" charset="-120"/>
+              </a:rPr>
+              <a:t>Startup gains a sealed state. Every health check, every deployment script and every operator runbook has to account for a service that is running but not yet open.</a:t>
+            </a:r>
+            <a:endParaRPr lang="en-US" sz="1250" dirty="0"/>
+          </a:p>
         </p:txBody>
       </p:sp>
       <p:sp>
@@ -16336,11 +16576,11 @@
         <p:spPr>
           <a:xfrm>
             <a:off x="6327648" y="2103120"/>
-            <a:ext cx="5266944" cy="3913124"/>
+            <a:ext cx="5266944" cy="3894709"/>
           </a:xfrm>
           <a:prstGeom prst="roundRect">
             <a:avLst>
-              <a:gd name="adj" fmla="val 1402"/>
+              <a:gd name="adj" fmla="val 1409"/>
             </a:avLst>
           </a:prstGeom>
           <a:solidFill>
@@ -16409,7 +16649,7 @@
         <p:spPr>
           <a:xfrm>
             <a:off x="6583680" y="2615184"/>
-            <a:ext cx="4754880" cy="3218180"/>
+            <a:ext cx="4754880" cy="3199765"/>
           </a:xfrm>
           <a:prstGeom prst="rect">
             <a:avLst/>
@@ -16423,7 +16663,7 @@
           <a:p>
             <a:pPr marL="342900" indent="-342900">
               <a:lnSpc>
-                <a:spcPts val="1600"/>
+                <a:spcPts val="1235"/>
               </a:lnSpc>
               <a:spcAft>
                 <a:spcPts val="700"/>
@@ -16432,7 +16672,7 @@
               <a:buChar char="•"/>
             </a:pPr>
             <a:r>
-              <a:rPr lang="en-US" sz="1200" dirty="0">
+              <a:rPr lang="en-US" sz="950" dirty="0">
                 <a:solidFill>
                   <a:srgbClr val="4D5A68"/>
                 </a:solidFill>
@@ -16442,12 +16682,12 @@
               </a:rPr>
               <a:t>A shipper emitting audit rows as syslog/CEF, with a persisted cursor so a restart neither duplicates nor loses entries.</a:t>
             </a:r>
-            <a:endParaRPr lang="en-US" sz="1200" dirty="0"/>
+            <a:endParaRPr lang="en-US" sz="950" dirty="0"/>
           </a:p>
           <a:p>
             <a:pPr marL="342900" indent="-342900">
               <a:lnSpc>
-                <a:spcPts val="1600"/>
+                <a:spcPts val="1235"/>
               </a:lnSpc>
               <a:spcAft>
                 <a:spcPts val="700"/>
@@ -16456,7 +16696,7 @@
               <a:buChar char="•"/>
             </a:pPr>
             <a:r>
-              <a:rPr lang="en-US" sz="1200" dirty="0">
+              <a:rPr lang="en-US" sz="950" dirty="0">
                 <a:solidFill>
                   <a:srgbClr val="4D5A68"/>
                 </a:solidFill>
@@ -16466,12 +16706,12 @@
               </a:rPr>
               <a:t>Periodic notarisation of the chain digest to an append-only external endpoint. This is the one thing the local chain cannot do: detect a wholesale, internally consistent rewrite.</a:t>
             </a:r>
-            <a:endParaRPr lang="en-US" sz="1200" dirty="0"/>
+            <a:endParaRPr lang="en-US" sz="950" dirty="0"/>
           </a:p>
           <a:p>
             <a:pPr marL="342900" indent="-342900">
               <a:lnSpc>
-                <a:spcPts val="1600"/>
+                <a:spcPts val="1235"/>
               </a:lnSpc>
               <a:spcAft>
                 <a:spcPts val="700"/>
@@ -16480,7 +16720,7 @@
               <a:buChar char="•"/>
             </a:pPr>
             <a:r>
-              <a:rPr lang="en-US" sz="1200" dirty="0">
+              <a:rPr lang="en-US" sz="950" dirty="0">
                 <a:solidFill>
                   <a:srgbClr val="4D5A68"/>
                 </a:solidFill>
@@ -16490,12 +16730,12 @@
               </a:rPr>
               <a:t>Compliance report generators over the audit log and key inventory — PCI DSS key-management evidence, NIST SP 800-57 cryptoperiod evidence.</a:t>
             </a:r>
-            <a:endParaRPr lang="en-US" sz="1200" dirty="0"/>
+            <a:endParaRPr lang="en-US" sz="950" dirty="0"/>
           </a:p>
           <a:p>
             <a:pPr marL="342900" indent="-342900">
               <a:lnSpc>
-                <a:spcPts val="1600"/>
+                <a:spcPts val="1235"/>
               </a:lnSpc>
               <a:spcAft>
                 <a:spcPts val="700"/>
@@ -16504,7 +16744,7 @@
               <a:buChar char="•"/>
             </a:pPr>
             <a:r>
-              <a:rPr lang="en-US" sz="1200" dirty="0">
+              <a:rPr lang="en-US" sz="950" dirty="0">
                 <a:solidFill>
                   <a:srgbClr val="4D5A68"/>
                 </a:solidFill>
@@ -16512,14 +16752,14 @@
                 <a:ea typeface="Calibri" pitchFamily="34" charset="-122"/>
                 <a:cs typeface="Calibri" pitchFamily="34" charset="-120"/>
               </a:rPr>
-              <a:t>A key ceremony runbook, and a kmip-admin command that produces a signed transcript of what was done, by whom, witnessed by whom.</a:t>
-            </a:r>
-            <a:endParaRPr lang="en-US" sz="1200" dirty="0"/>
+              <a:t>A key ceremony runbook, and a kmip-admin command producing a signed transcript of what was done, by whom and witnessed by whom — extended to the token PIN itself, split into operator-held shares so the service starts sealed and a quorum opens it. Today one PIN holder is the whole ceremony.</a:t>
+            </a:r>
+            <a:endParaRPr lang="en-US" sz="950" dirty="0"/>
           </a:p>
           <a:p>
             <a:pPr marL="342900" indent="-342900">
               <a:lnSpc>
-                <a:spcPts val="1600"/>
+                <a:spcPts val="1235"/>
               </a:lnSpc>
               <a:spcAft>
                 <a:spcPts val="700"/>
@@ -16528,7 +16768,7 @@
               <a:buChar char="•"/>
             </a:pPr>
             <a:r>
-              <a:rPr lang="en-US" sz="1200" dirty="0">
+              <a:rPr lang="en-US" sz="950" dirty="0">
                 <a:solidFill>
                   <a:srgbClr val="4D5A68"/>
                 </a:solidFill>
@@ -16536,9 +16776,33 @@
                 <a:ea typeface="Calibri" pitchFamily="34" charset="-122"/>
                 <a:cs typeface="Calibri" pitchFamily="34" charset="-120"/>
               </a:rPr>
+              <a:t>OpenTelemetry spans around every guarded operation and token call. Metrics say a request was slow; a span says which PKCS#11 call it waited on.</a:t>
+            </a:r>
+            <a:endParaRPr lang="en-US" sz="950" dirty="0"/>
+          </a:p>
+          <a:p>
+            <a:pPr marL="342900" indent="-342900">
+              <a:lnSpc>
+                <a:spcPts val="1235"/>
+              </a:lnSpc>
+              <a:spcAft>
+                <a:spcPts val="700"/>
+              </a:spcAft>
+              <a:buSzPct val="100000"/>
+              <a:buChar char="•"/>
+            </a:pPr>
+            <a:r>
+              <a:rPr lang="en-US" sz="950" dirty="0">
+                <a:solidFill>
+                  <a:srgbClr val="4D5A68"/>
+                </a:solidFill>
+                <a:latin typeface="Calibri" pitchFamily="34" charset="0"/>
+                <a:ea typeface="Calibri" pitchFamily="34" charset="-122"/>
+                <a:cs typeface="Calibri" pitchFamily="34" charset="-120"/>
+              </a:rPr>
               <a:t>Alerting rules over the metrics already exported.</a:t>
             </a:r>
-            <a:endParaRPr lang="en-US" sz="1200" dirty="0"/>
+            <a:endParaRPr lang="en-US" sz="950" dirty="0"/>
           </a:p>
         </p:txBody>
       </p:sp>
@@ -16766,11 +17030,11 @@
         <p:spPr>
           <a:xfrm>
             <a:off x="566928" y="2103120"/>
-            <a:ext cx="6766560" cy="2130044"/>
+            <a:ext cx="6766560" cy="2704084"/>
           </a:xfrm>
           <a:prstGeom prst="roundRect">
             <a:avLst>
-              <a:gd name="adj" fmla="val 2576"/>
+              <a:gd name="adj" fmla="val 2029"/>
             </a:avLst>
           </a:prstGeom>
           <a:solidFill>
@@ -16839,7 +17103,7 @@
         <p:spPr>
           <a:xfrm>
             <a:off x="822960" y="2615184"/>
-            <a:ext cx="6254496" cy="1435100"/>
+            <a:ext cx="6254496" cy="2009140"/>
           </a:xfrm>
           <a:prstGeom prst="rect">
             <a:avLst/>
@@ -16853,7 +17117,7 @@
           <a:p>
             <a:pPr marL="342900" indent="-342900">
               <a:lnSpc>
-                <a:spcPts val="1600"/>
+                <a:spcPts val="1625"/>
               </a:lnSpc>
               <a:spcAft>
                 <a:spcPts val="700"/>
@@ -16885,11 +17149,11 @@
         <p:spPr>
           <a:xfrm>
             <a:off x="7607808" y="2103120"/>
-            <a:ext cx="3986784" cy="2130044"/>
+            <a:ext cx="3986784" cy="2704084"/>
           </a:xfrm>
           <a:prstGeom prst="roundRect">
             <a:avLst>
-              <a:gd name="adj" fmla="val 2576"/>
+              <a:gd name="adj" fmla="val 2029"/>
             </a:avLst>
           </a:prstGeom>
           <a:solidFill>
@@ -16943,7 +17207,7 @@
                 <a:ea typeface="Calibri" pitchFamily="34" charset="-122"/>
                 <a:cs typeface="Calibri" pitchFamily="34" charset="-120"/>
               </a:rPr>
-              <a:t>CLOSES 5 GAP-MATRIX FEATURES</a:t>
+              <a:t>CLOSES 7 GAP-MATRIX FEATURES</a:t>
             </a:r>
             <a:endParaRPr lang="en-US" sz="1000" dirty="0"/>
           </a:p>
@@ -16958,7 +17222,7 @@
         <p:spPr>
           <a:xfrm>
             <a:off x="7863840" y="2615184"/>
-            <a:ext cx="3474720" cy="1435100"/>
+            <a:ext cx="3474720" cy="2009140"/>
           </a:xfrm>
           <a:prstGeom prst="rect">
             <a:avLst/>
@@ -16972,7 +17236,7 @@
           <a:p>
             <a:pPr marL="342900" indent="-342900">
               <a:lnSpc>
-                <a:spcPts val="1600"/>
+                <a:spcPts val="1560"/>
               </a:lnSpc>
               <a:spcAft>
                 <a:spcPts val="700"/>
@@ -16996,7 +17260,7 @@
           <a:p>
             <a:pPr marL="342900" indent="-342900">
               <a:lnSpc>
-                <a:spcPts val="1600"/>
+                <a:spcPts val="1560"/>
               </a:lnSpc>
               <a:spcAft>
                 <a:spcPts val="700"/>
@@ -17020,7 +17284,7 @@
           <a:p>
             <a:pPr marL="342900" indent="-342900">
               <a:lnSpc>
-                <a:spcPts val="1600"/>
+                <a:spcPts val="1560"/>
               </a:lnSpc>
               <a:spcAft>
                 <a:spcPts val="700"/>
@@ -17044,7 +17308,7 @@
           <a:p>
             <a:pPr marL="342900" indent="-342900">
               <a:lnSpc>
-                <a:spcPts val="1600"/>
+                <a:spcPts val="1560"/>
               </a:lnSpc>
               <a:spcAft>
                 <a:spcPts val="700"/>
@@ -17068,7 +17332,7 @@
           <a:p>
             <a:pPr marL="342900" indent="-342900">
               <a:lnSpc>
-                <a:spcPts val="1600"/>
+                <a:spcPts val="1560"/>
               </a:lnSpc>
               <a:spcAft>
                 <a:spcPts val="700"/>
@@ -17089,6 +17353,54 @@
             </a:r>
             <a:endParaRPr lang="en-US" sz="1200" dirty="0"/>
           </a:p>
+          <a:p>
+            <a:pPr marL="342900" indent="-342900">
+              <a:lnSpc>
+                <a:spcPts val="1560"/>
+              </a:lnSpc>
+              <a:spcAft>
+                <a:spcPts val="700"/>
+              </a:spcAft>
+              <a:buSzPct val="100000"/>
+              <a:buChar char="•"/>
+            </a:pPr>
+            <a:r>
+              <a:rPr lang="en-US" sz="1200" dirty="0">
+                <a:solidFill>
+                  <a:srgbClr val="1A3A5C"/>
+                </a:solidFill>
+                <a:latin typeface="Calibri" pitchFamily="34" charset="0"/>
+                <a:ea typeface="Calibri" pitchFamily="34" charset="-122"/>
+                <a:cs typeface="Calibri" pitchFamily="34" charset="-120"/>
+              </a:rPr>
+              <a:t>Distributed tracing</a:t>
+            </a:r>
+            <a:endParaRPr lang="en-US" sz="1200" dirty="0"/>
+          </a:p>
+          <a:p>
+            <a:pPr marL="342900" indent="-342900">
+              <a:lnSpc>
+                <a:spcPts val="1560"/>
+              </a:lnSpc>
+              <a:spcAft>
+                <a:spcPts val="700"/>
+              </a:spcAft>
+              <a:buSzPct val="100000"/>
+              <a:buChar char="•"/>
+            </a:pPr>
+            <a:r>
+              <a:rPr lang="en-US" sz="1200" dirty="0">
+                <a:solidFill>
+                  <a:srgbClr val="1A3A5C"/>
+                </a:solidFill>
+                <a:latin typeface="Calibri" pitchFamily="34" charset="0"/>
+                <a:ea typeface="Calibri" pitchFamily="34" charset="-122"/>
+                <a:cs typeface="Calibri" pitchFamily="34" charset="-120"/>
+              </a:rPr>
+              <a:t>Sealed startup with quorum unseal</a:t>
+            </a:r>
+            <a:endParaRPr lang="en-US" sz="1200" dirty="0"/>
+          </a:p>
         </p:txBody>
       </p:sp>
       <p:sp>
@@ -17124,7 +17436,7 @@
                 <a:ea typeface="Calibri" pitchFamily="34" charset="-122"/>
                 <a:cs typeface="Calibri" pitchFamily="34" charset="-120"/>
               </a:rPr>
-              <a:t>Estimated size: ~1,000 lines, ~45 tests.</a:t>
+              <a:t>Estimated size: ~1,350 lines, ~60 tests.</a:t>
             </a:r>
             <a:endParaRPr lang="en-US" sz="1050" dirty="0"/>
           </a:p>
@@ -17354,11 +17666,11 @@
         <p:spPr>
           <a:xfrm>
             <a:off x="566928" y="2103120"/>
-            <a:ext cx="11027664" cy="2584069"/>
+            <a:ext cx="11027664" cy="3405759"/>
           </a:xfrm>
           <a:prstGeom prst="roundRect">
             <a:avLst>
-              <a:gd name="adj" fmla="val 2123"/>
+              <a:gd name="adj" fmla="val 1611"/>
             </a:avLst>
           </a:prstGeom>
           <a:solidFill>
@@ -17427,7 +17739,7 @@
         <p:spPr>
           <a:xfrm>
             <a:off x="822960" y="2615184"/>
-            <a:ext cx="10515600" cy="1889125"/>
+            <a:ext cx="10515600" cy="2710815"/>
           </a:xfrm>
           <a:prstGeom prst="rect">
             <a:avLst/>
@@ -17441,7 +17753,7 @@
           <a:p>
             <a:pPr marL="342900" indent="-342900">
               <a:lnSpc>
-                <a:spcPts val="1600"/>
+                <a:spcPts val="1495"/>
               </a:lnSpc>
               <a:spcAft>
                 <a:spcPts val="700"/>
@@ -17450,7 +17762,7 @@
               <a:buChar char="•"/>
             </a:pPr>
             <a:r>
-              <a:rPr lang="en-US" sz="1250" dirty="0">
+              <a:rPr lang="en-US" sz="1150" dirty="0">
                 <a:solidFill>
                   <a:srgbClr val="4D5A68"/>
                 </a:solidFill>
@@ -17460,12 +17772,12 @@
               </a:rPr>
               <a:t>The shipper emits every row exactly once across a restart — kill it mid-stream and assert the union at the collector.</a:t>
             </a:r>
-            <a:endParaRPr lang="en-US" sz="1250" dirty="0"/>
+            <a:endParaRPr lang="en-US" sz="1150" dirty="0"/>
           </a:p>
           <a:p>
             <a:pPr marL="342900" indent="-342900">
               <a:lnSpc>
-                <a:spcPts val="1600"/>
+                <a:spcPts val="1495"/>
               </a:lnSpc>
               <a:spcAft>
                 <a:spcPts val="700"/>
@@ -17474,7 +17786,7 @@
               <a:buChar char="•"/>
             </a:pPr>
             <a:r>
-              <a:rPr lang="en-US" sz="1250" dirty="0">
+              <a:rPr lang="en-US" sz="1150" dirty="0">
                 <a:solidFill>
                   <a:srgbClr val="4D5A68"/>
                 </a:solidFill>
@@ -17484,12 +17796,12 @@
               </a:rPr>
               <a:t>CEF output parses with a standard parser.</a:t>
             </a:r>
-            <a:endParaRPr lang="en-US" sz="1250" dirty="0"/>
+            <a:endParaRPr lang="en-US" sz="1150" dirty="0"/>
           </a:p>
           <a:p>
             <a:pPr marL="342900" indent="-342900">
               <a:lnSpc>
-                <a:spcPts val="1600"/>
+                <a:spcPts val="1495"/>
               </a:lnSpc>
               <a:spcAft>
                 <a:spcPts val="700"/>
@@ -17498,7 +17810,7 @@
               <a:buChar char="•"/>
             </a:pPr>
             <a:r>
-              <a:rPr lang="en-US" sz="1250" dirty="0">
+              <a:rPr lang="en-US" sz="1150" dirty="0">
                 <a:solidFill>
                   <a:srgbClr val="4D5A68"/>
                 </a:solidFill>
@@ -17508,12 +17820,12 @@
               </a:rPr>
               <a:t>Anchoring detects tampering the local chain cannot: rewrite the whole log consistently, re-chain it so verify_audit_chain passes, and assert the anchor comparison fails.</a:t>
             </a:r>
-            <a:endParaRPr lang="en-US" sz="1250" dirty="0"/>
+            <a:endParaRPr lang="en-US" sz="1150" dirty="0"/>
           </a:p>
           <a:p>
             <a:pPr marL="342900" indent="-342900">
               <a:lnSpc>
-                <a:spcPts val="1600"/>
+                <a:spcPts val="1495"/>
               </a:lnSpc>
               <a:spcAft>
                 <a:spcPts val="700"/>
@@ -17522,7 +17834,7 @@
               <a:buChar char="•"/>
             </a:pPr>
             <a:r>
-              <a:rPr lang="en-US" sz="1250" dirty="0">
+              <a:rPr lang="en-US" sz="1150" dirty="0">
                 <a:solidFill>
                   <a:srgbClr val="4D5A68"/>
                 </a:solidFill>
@@ -17532,12 +17844,12 @@
               </a:rPr>
               <a:t>Report figures match direct store queries.</a:t>
             </a:r>
-            <a:endParaRPr lang="en-US" sz="1250" dirty="0"/>
+            <a:endParaRPr lang="en-US" sz="1150" dirty="0"/>
           </a:p>
           <a:p>
             <a:pPr marL="342900" indent="-342900">
               <a:lnSpc>
-                <a:spcPts val="1600"/>
+                <a:spcPts val="1495"/>
               </a:lnSpc>
               <a:spcAft>
                 <a:spcPts val="700"/>
@@ -17546,7 +17858,7 @@
               <a:buChar char="•"/>
             </a:pPr>
             <a:r>
-              <a:rPr lang="en-US" sz="1250" dirty="0">
+              <a:rPr lang="en-US" sz="1150" dirty="0">
                 <a:solidFill>
                   <a:srgbClr val="4D5A68"/>
                 </a:solidFill>
@@ -17556,7 +17868,55 @@
               </a:rPr>
               <a:t>A ceremony transcript verifies against its signature and fails after a single byte is changed.</a:t>
             </a:r>
-            <a:endParaRPr lang="en-US" sz="1250" dirty="0"/>
+            <a:endParaRPr lang="en-US" sz="1150" dirty="0"/>
+          </a:p>
+          <a:p>
+            <a:pPr marL="342900" indent="-342900">
+              <a:lnSpc>
+                <a:spcPts val="1495"/>
+              </a:lnSpc>
+              <a:spcAft>
+                <a:spcPts val="700"/>
+              </a:spcAft>
+              <a:buSzPct val="100000"/>
+              <a:buChar char="•"/>
+            </a:pPr>
+            <a:r>
+              <a:rPr lang="en-US" sz="1150" dirty="0">
+                <a:solidFill>
+                  <a:srgbClr val="4D5A68"/>
+                </a:solidFill>
+                <a:latin typeface="Calibri" pitchFamily="34" charset="0"/>
+                <a:ea typeface="Calibri" pitchFamily="34" charset="-122"/>
+                <a:cs typeface="Calibri" pitchFamily="34" charset="-120"/>
+              </a:rPr>
+              <a:t>Any k of n unseal shares start the service and any k-1 leave it sealed; a sealed service answers /health and refuses every KMIP and REST operation rather than failing obscurely deep in the shim.</a:t>
+            </a:r>
+            <a:endParaRPr lang="en-US" sz="1150" dirty="0"/>
+          </a:p>
+          <a:p>
+            <a:pPr marL="342900" indent="-342900">
+              <a:lnSpc>
+                <a:spcPts val="1495"/>
+              </a:lnSpc>
+              <a:spcAft>
+                <a:spcPts val="700"/>
+              </a:spcAft>
+              <a:buSzPct val="100000"/>
+              <a:buChar char="•"/>
+            </a:pPr>
+            <a:r>
+              <a:rPr lang="en-US" sz="1150" dirty="0">
+                <a:solidFill>
+                  <a:srgbClr val="4D5A68"/>
+                </a:solidFill>
+                <a:latin typeface="Calibri" pitchFamily="34" charset="0"/>
+                <a:ea typeface="Calibri" pitchFamily="34" charset="-122"/>
+                <a:cs typeface="Calibri" pitchFamily="34" charset="-120"/>
+              </a:rPr>
+              <a:t>A traced request carries one trace id from the HTTP layer through the guard to the token call, and a sampled-out request costs no spans.</a:t>
+            </a:r>
+            <a:endParaRPr lang="en-US" sz="1150" dirty="0"/>
           </a:p>
         </p:txBody>
       </p:sp>
@@ -17568,7 +17928,7 @@
         </p:nvSpPr>
         <p:spPr>
           <a:xfrm>
-            <a:off x="566928" y="4961509"/>
+            <a:off x="566928" y="5783199"/>
             <a:ext cx="11027664" cy="914400"/>
           </a:xfrm>
           <a:prstGeom prst="roundRect">
@@ -17602,7 +17962,7 @@
         </p:nvSpPr>
         <p:spPr>
           <a:xfrm>
-            <a:off x="822960" y="5107813"/>
+            <a:off x="822960" y="5929503"/>
             <a:ext cx="914400" cy="219456"/>
           </a:xfrm>
           <a:prstGeom prst="rect">
@@ -17641,7 +18001,7 @@
         </p:nvSpPr>
         <p:spPr>
           <a:xfrm>
-            <a:off x="1773936" y="5071237"/>
+            <a:off x="1773936" y="5892927"/>
             <a:ext cx="9564624" cy="694944"/>
           </a:xfrm>
           <a:prstGeom prst="rect">
@@ -17983,7 +18343,7 @@
           <a:p>
             <a:pPr marL="342900" indent="-342900">
               <a:lnSpc>
-                <a:spcPts val="1600"/>
+                <a:spcPts val="1625"/>
               </a:lnSpc>
               <a:spcAft>
                 <a:spcPts val="700"/>
@@ -18007,7 +18367,7 @@
           <a:p>
             <a:pPr marL="342900" indent="-342900">
               <a:lnSpc>
-                <a:spcPts val="1600"/>
+                <a:spcPts val="1625"/>
               </a:lnSpc>
               <a:spcAft>
                 <a:spcPts val="700"/>
@@ -18031,7 +18391,7 @@
           <a:p>
             <a:pPr marL="342900" indent="-342900">
               <a:lnSpc>
-                <a:spcPts val="1600"/>
+                <a:spcPts val="1625"/>
               </a:lnSpc>
               <a:spcAft>
                 <a:spcPts val="700"/>
@@ -18150,7 +18510,7 @@
           <a:p>
             <a:pPr marL="342900" indent="-342900">
               <a:lnSpc>
-                <a:spcPts val="1600"/>
+                <a:spcPts val="1560"/>
               </a:lnSpc>
               <a:spcAft>
                 <a:spcPts val="700"/>
@@ -18174,7 +18534,7 @@
           <a:p>
             <a:pPr marL="342900" indent="-342900">
               <a:lnSpc>
-                <a:spcPts val="1600"/>
+                <a:spcPts val="1560"/>
               </a:lnSpc>
               <a:spcAft>
                 <a:spcPts val="700"/>
@@ -18198,7 +18558,7 @@
           <a:p>
             <a:pPr marL="342900" indent="-342900">
               <a:lnSpc>
-                <a:spcPts val="1600"/>
+                <a:spcPts val="1560"/>
               </a:lnSpc>
               <a:spcAft>
                 <a:spcPts val="700"/>
@@ -18532,7 +18892,7 @@
           <a:p>
             <a:pPr marL="342900" indent="-342900">
               <a:lnSpc>
-                <a:spcPts val="1600"/>
+                <a:spcPts val="1625"/>
               </a:lnSpc>
               <a:spcAft>
                 <a:spcPts val="700"/>
@@ -18556,7 +18916,7 @@
           <a:p>
             <a:pPr marL="342900" indent="-342900">
               <a:lnSpc>
-                <a:spcPts val="1600"/>
+                <a:spcPts val="1625"/>
               </a:lnSpc>
               <a:spcAft>
                 <a:spcPts val="700"/>
@@ -18675,7 +19035,7 @@
           <a:p>
             <a:pPr marL="342900" indent="-342900">
               <a:lnSpc>
-                <a:spcPts val="1600"/>
+                <a:spcPts val="1560"/>
               </a:lnSpc>
               <a:spcAft>
                 <a:spcPts val="700"/>
@@ -18699,7 +19059,7 @@
           <a:p>
             <a:pPr marL="342900" indent="-342900">
               <a:lnSpc>
-                <a:spcPts val="1600"/>
+                <a:spcPts val="1560"/>
               </a:lnSpc>
               <a:spcAft>
                 <a:spcPts val="700"/>
@@ -19033,7 +19393,7 @@
           <a:p>
             <a:pPr marL="342900" indent="-342900">
               <a:lnSpc>
-                <a:spcPts val="1600"/>
+                <a:spcPts val="1625"/>
               </a:lnSpc>
               <a:spcAft>
                 <a:spcPts val="700"/>
@@ -19152,7 +19512,7 @@
           <a:p>
             <a:pPr marL="342900" indent="-342900">
               <a:lnSpc>
-                <a:spcPts val="1600"/>
+                <a:spcPts val="1560"/>
               </a:lnSpc>
               <a:spcAft>
                 <a:spcPts val="700"/>
@@ -19525,7 +19885,7 @@
           <a:p>
             <a:pPr marL="342900" indent="-342900">
               <a:lnSpc>
-                <a:spcPts val="1600"/>
+                <a:spcPts val="1625"/>
               </a:lnSpc>
               <a:spcAft>
                 <a:spcPts val="700"/>
@@ -19549,7 +19909,7 @@
           <a:p>
             <a:pPr marL="342900" indent="-342900">
               <a:lnSpc>
-                <a:spcPts val="1600"/>
+                <a:spcPts val="1625"/>
               </a:lnSpc>
               <a:spcAft>
                 <a:spcPts val="700"/>
@@ -19573,7 +19933,7 @@
           <a:p>
             <a:pPr marL="342900" indent="-342900">
               <a:lnSpc>
-                <a:spcPts val="1600"/>
+                <a:spcPts val="1625"/>
               </a:lnSpc>
               <a:spcAft>
                 <a:spcPts val="700"/>
@@ -19597,7 +19957,7 @@
           <a:p>
             <a:pPr marL="342900" indent="-342900">
               <a:lnSpc>
-                <a:spcPts val="1600"/>
+                <a:spcPts val="1625"/>
               </a:lnSpc>
               <a:spcAft>
                 <a:spcPts val="700"/>
@@ -20043,7 +20403,7 @@
           <a:p>
             <a:pPr marL="342900" indent="-342900">
               <a:lnSpc>
-                <a:spcPts val="1600"/>
+                <a:spcPts val="1625"/>
               </a:lnSpc>
               <a:spcAft>
                 <a:spcPts val="700"/>
@@ -20067,7 +20427,7 @@
           <a:p>
             <a:pPr marL="342900" indent="-342900">
               <a:lnSpc>
-                <a:spcPts val="1600"/>
+                <a:spcPts val="1625"/>
               </a:lnSpc>
               <a:spcAft>
                 <a:spcPts val="700"/>
@@ -20186,7 +20546,7 @@
           <a:p>
             <a:pPr marL="342900" indent="-342900">
               <a:lnSpc>
-                <a:spcPts val="1600"/>
+                <a:spcPts val="1560"/>
               </a:lnSpc>
               <a:spcAft>
                 <a:spcPts val="700"/>
@@ -20210,7 +20570,7 @@
           <a:p>
             <a:pPr marL="342900" indent="-342900">
               <a:lnSpc>
-                <a:spcPts val="1600"/>
+                <a:spcPts val="1560"/>
               </a:lnSpc>
               <a:spcAft>
                 <a:spcPts val="700"/>
@@ -20234,7 +20594,7 @@
           <a:p>
             <a:pPr marL="342900" indent="-342900">
               <a:lnSpc>
-                <a:spcPts val="1600"/>
+                <a:spcPts val="1560"/>
               </a:lnSpc>
               <a:spcAft>
                 <a:spcPts val="700"/>
@@ -20568,7 +20928,7 @@
           <a:p>
             <a:pPr marL="342900" indent="-342900">
               <a:lnSpc>
-                <a:spcPts val="1600"/>
+                <a:spcPts val="1625"/>
               </a:lnSpc>
               <a:spcAft>
                 <a:spcPts val="700"/>
@@ -20687,7 +21047,7 @@
           <a:p>
             <a:pPr marL="342900" indent="-342900">
               <a:lnSpc>
-                <a:spcPts val="1600"/>
+                <a:spcPts val="1560"/>
               </a:lnSpc>
               <a:spcAft>
                 <a:spcPts val="700"/>
@@ -20711,7 +21071,7 @@
           <a:p>
             <a:pPr marL="342900" indent="-342900">
               <a:lnSpc>
-                <a:spcPts val="1600"/>
+                <a:spcPts val="1560"/>
               </a:lnSpc>
               <a:spcAft>
                 <a:spcPts val="700"/>
@@ -20735,7 +21095,7 @@
           <a:p>
             <a:pPr marL="342900" indent="-342900">
               <a:lnSpc>
-                <a:spcPts val="1600"/>
+                <a:spcPts val="1560"/>
               </a:lnSpc>
               <a:spcAft>
                 <a:spcPts val="700"/>
@@ -20759,7 +21119,7 @@
           <a:p>
             <a:pPr marL="342900" indent="-342900">
               <a:lnSpc>
-                <a:spcPts val="1600"/>
+                <a:spcPts val="1560"/>
               </a:lnSpc>
               <a:spcAft>
                 <a:spcPts val="700"/>
@@ -20783,7 +21143,7 @@
           <a:p>
             <a:pPr marL="342900" indent="-342900">
               <a:lnSpc>
-                <a:spcPts val="1600"/>
+                <a:spcPts val="1560"/>
               </a:lnSpc>
               <a:spcAft>
                 <a:spcPts val="700"/>
@@ -20807,7 +21167,7 @@
           <a:p>
             <a:pPr marL="342900" indent="-342900">
               <a:lnSpc>
-                <a:spcPts val="1600"/>
+                <a:spcPts val="1560"/>
               </a:lnSpc>
               <a:spcAft>
                 <a:spcPts val="700"/>
@@ -21180,7 +21540,7 @@
           <a:p>
             <a:pPr marL="342900" indent="-342900">
               <a:lnSpc>
-                <a:spcPts val="1600"/>
+                <a:spcPts val="1625"/>
               </a:lnSpc>
               <a:spcAft>
                 <a:spcPts val="700"/>
@@ -21204,7 +21564,7 @@
           <a:p>
             <a:pPr marL="342900" indent="-342900">
               <a:lnSpc>
-                <a:spcPts val="1600"/>
+                <a:spcPts val="1625"/>
               </a:lnSpc>
               <a:spcAft>
                 <a:spcPts val="700"/>
@@ -21228,7 +21588,7 @@
           <a:p>
             <a:pPr marL="342900" indent="-342900">
               <a:lnSpc>
-                <a:spcPts val="1600"/>
+                <a:spcPts val="1625"/>
               </a:lnSpc>
               <a:spcAft>
                 <a:spcPts val="700"/>
@@ -21252,7 +21612,7 @@
           <a:p>
             <a:pPr marL="342900" indent="-342900">
               <a:lnSpc>
-                <a:spcPts val="1600"/>
+                <a:spcPts val="1625"/>
               </a:lnSpc>
               <a:spcAft>
                 <a:spcPts val="700"/>
@@ -21276,7 +21636,7 @@
           <a:p>
             <a:pPr marL="342900" indent="-342900">
               <a:lnSpc>
-                <a:spcPts val="1600"/>
+                <a:spcPts val="1625"/>
               </a:lnSpc>
               <a:spcAft>
                 <a:spcPts val="700"/>
@@ -21722,7 +22082,7 @@
           <a:p>
             <a:pPr marL="342900" indent="-342900">
               <a:lnSpc>
-                <a:spcPts val="1600"/>
+                <a:spcPts val="1625"/>
               </a:lnSpc>
               <a:spcAft>
                 <a:spcPts val="700"/>
@@ -21746,7 +22106,7 @@
           <a:p>
             <a:pPr marL="342900" indent="-342900">
               <a:lnSpc>
-                <a:spcPts val="1600"/>
+                <a:spcPts val="1625"/>
               </a:lnSpc>
               <a:spcAft>
                 <a:spcPts val="700"/>
@@ -21865,7 +22225,7 @@
           <a:p>
             <a:pPr marL="342900" indent="-342900">
               <a:lnSpc>
-                <a:spcPts val="1600"/>
+                <a:spcPts val="1560"/>
               </a:lnSpc>
               <a:spcAft>
                 <a:spcPts val="700"/>
@@ -21889,7 +22249,7 @@
           <a:p>
             <a:pPr marL="342900" indent="-342900">
               <a:lnSpc>
-                <a:spcPts val="1600"/>
+                <a:spcPts val="1560"/>
               </a:lnSpc>
               <a:spcAft>
                 <a:spcPts val="700"/>
@@ -21913,7 +22273,7 @@
           <a:p>
             <a:pPr marL="342900" indent="-342900">
               <a:lnSpc>
-                <a:spcPts val="1600"/>
+                <a:spcPts val="1560"/>
               </a:lnSpc>
               <a:spcAft>
                 <a:spcPts val="700"/>
@@ -21937,7 +22297,7 @@
           <a:p>
             <a:pPr marL="342900" indent="-342900">
               <a:lnSpc>
-                <a:spcPts val="1600"/>
+                <a:spcPts val="1560"/>
               </a:lnSpc>
               <a:spcAft>
                 <a:spcPts val="700"/>
@@ -22271,7 +22631,7 @@
           <a:p>
             <a:pPr marL="342900" indent="-342900">
               <a:lnSpc>
-                <a:spcPts val="1600"/>
+                <a:spcPts val="1625"/>
               </a:lnSpc>
               <a:spcAft>
                 <a:spcPts val="700"/>
@@ -22390,7 +22750,7 @@
           <a:p>
             <a:pPr marL="342900" indent="-342900">
               <a:lnSpc>
-                <a:spcPts val="1600"/>
+                <a:spcPts val="1560"/>
               </a:lnSpc>
               <a:spcAft>
                 <a:spcPts val="700"/>
@@ -22414,7 +22774,7 @@
           <a:p>
             <a:pPr marL="342900" indent="-342900">
               <a:lnSpc>
-                <a:spcPts val="1600"/>
+                <a:spcPts val="1560"/>
               </a:lnSpc>
               <a:spcAft>
                 <a:spcPts val="700"/>
@@ -22787,7 +23147,7 @@
           <a:p>
             <a:pPr marL="342900" indent="-342900">
               <a:lnSpc>
-                <a:spcPts val="1600"/>
+                <a:spcPts val="1625"/>
               </a:lnSpc>
               <a:spcAft>
                 <a:spcPts val="700"/>
@@ -22811,7 +23171,7 @@
           <a:p>
             <a:pPr marL="342900" indent="-342900">
               <a:lnSpc>
-                <a:spcPts val="1600"/>
+                <a:spcPts val="1625"/>
               </a:lnSpc>
               <a:spcAft>
                 <a:spcPts val="700"/>
@@ -22835,7 +23195,7 @@
           <a:p>
             <a:pPr marL="342900" indent="-342900">
               <a:lnSpc>
-                <a:spcPts val="1600"/>
+                <a:spcPts val="1625"/>
               </a:lnSpc>
               <a:spcAft>
                 <a:spcPts val="700"/>
@@ -22859,7 +23219,7 @@
           <a:p>
             <a:pPr marL="342900" indent="-342900">
               <a:lnSpc>
-                <a:spcPts val="1600"/>
+                <a:spcPts val="1625"/>
               </a:lnSpc>
               <a:spcAft>
                 <a:spcPts val="700"/>
@@ -22883,7 +23243,7 @@
           <a:p>
             <a:pPr marL="342900" indent="-342900">
               <a:lnSpc>
-                <a:spcPts val="1600"/>
+                <a:spcPts val="1625"/>
               </a:lnSpc>
               <a:spcAft>
                 <a:spcPts val="700"/>
@@ -23365,7 +23725,7 @@
                 <a:ea typeface="Calibri" pitchFamily="34" charset="-122"/>
                 <a:cs typeface="Calibri" pitchFamily="34" charset="-120"/>
               </a:rPr>
-              <a:t>Secrets management · Certificate lifecycle</a:t>
+              <a:t>Secrets management · Certificate lifecycle · Certificate discovery and expiry monitoring</a:t>
             </a:r>
             <a:endParaRPr lang="en-US" sz="1150" dirty="0"/>
           </a:p>
@@ -23446,7 +23806,7 @@
                 <a:ea typeface="Calibri" pitchFamily="34" charset="-122"/>
                 <a:cs typeface="Calibri" pitchFamily="34" charset="-120"/>
               </a:rPr>
-              <a:t>Algorithm breadth · Post-quantum (ML-KEM, ML-DSA, SLH-DSA)</a:t>
+              <a:t>Algorithm breadth · Post-quantum (ML-KEM, ML-DSA, SLH-DSA) · Key-bound usage policy enforced in hardware</a:t>
             </a:r>
             <a:endParaRPr lang="en-US" sz="1150" dirty="0"/>
           </a:p>
@@ -23689,7 +24049,7 @@
                 <a:ea typeface="Calibri" pitchFamily="34" charset="-122"/>
                 <a:cs typeface="Calibri" pitchFamily="34" charset="-120"/>
               </a:rPr>
-              <a:t>PKCS#11 provider for applications</a:t>
+              <a:t>PKCS#11 provider for applications · KMIP JSON and XML encodings</a:t>
             </a:r>
             <a:endParaRPr lang="en-US" sz="1150" dirty="0"/>
           </a:p>
@@ -23920,7 +24280,7 @@
                 <a:ea typeface="Cambria" pitchFamily="34" charset="-122"/>
                 <a:cs typeface="Cambria" pitchFamily="34" charset="-120"/>
               </a:rPr>
-              <a:t>28 of 42 closed by the twelve steps. Six more are ordinary integration work once the REST layer exists to configure them. The last eight depend on a supplier, a procurement decision or an OASIS event — no amount of planning moves them.</a:t>
+              <a:t>32 of 50 closed by the twelve steps. Six more are ordinary integration work once the REST layer exists to configure them. The last eight depend on a supplier, a procurement decision or an OASIS event — no amount of planning moves them.</a:t>
             </a:r>
             <a:endParaRPr lang="en-US" sz="1300" dirty="0"/>
           </a:p>
@@ -24237,7 +24597,7 @@
           <a:p>
             <a:pPr marL="342900" indent="-342900">
               <a:lnSpc>
-                <a:spcPts val="1600"/>
+                <a:spcPts val="1625"/>
               </a:lnSpc>
               <a:spcAft>
                 <a:spcPts val="700"/>
@@ -24261,7 +24621,7 @@
           <a:p>
             <a:pPr marL="342900" indent="-342900">
               <a:lnSpc>
-                <a:spcPts val="1600"/>
+                <a:spcPts val="1625"/>
               </a:lnSpc>
               <a:spcAft>
                 <a:spcPts val="700"/>
@@ -24700,7 +25060,7 @@
           <a:p>
             <a:pPr marL="342900" indent="-342900">
               <a:lnSpc>
-                <a:spcPts val="1600"/>
+                <a:spcPts val="1625"/>
               </a:lnSpc>
               <a:spcAft>
                 <a:spcPts val="700"/>
@@ -24724,7 +25084,7 @@
           <a:p>
             <a:pPr marL="342900" indent="-342900">
               <a:lnSpc>
-                <a:spcPts val="1600"/>
+                <a:spcPts val="1625"/>
               </a:lnSpc>
               <a:spcAft>
                 <a:spcPts val="700"/>
@@ -24748,7 +25108,7 @@
           <a:p>
             <a:pPr marL="342900" indent="-342900">
               <a:lnSpc>
-                <a:spcPts val="1600"/>
+                <a:spcPts val="1625"/>
               </a:lnSpc>
               <a:spcAft>
                 <a:spcPts val="700"/>
@@ -25194,7 +25554,7 @@
           <a:p>
             <a:pPr marL="342900" indent="-342900">
               <a:lnSpc>
-                <a:spcPts val="1600"/>
+                <a:spcPts val="1625"/>
               </a:lnSpc>
               <a:spcAft>
                 <a:spcPts val="700"/>
@@ -25218,7 +25578,7 @@
           <a:p>
             <a:pPr marL="342900" indent="-342900">
               <a:lnSpc>
-                <a:spcPts val="1600"/>
+                <a:spcPts val="1625"/>
               </a:lnSpc>
               <a:spcAft>
                 <a:spcPts val="700"/>
@@ -25337,7 +25697,7 @@
           <a:p>
             <a:pPr marL="342900" indent="-342900">
               <a:lnSpc>
-                <a:spcPts val="1600"/>
+                <a:spcPts val="1560"/>
               </a:lnSpc>
               <a:spcAft>
                 <a:spcPts val="700"/>
@@ -25361,7 +25721,7 @@
           <a:p>
             <a:pPr marL="342900" indent="-342900">
               <a:lnSpc>
-                <a:spcPts val="1600"/>
+                <a:spcPts val="1560"/>
               </a:lnSpc>
               <a:spcAft>
                 <a:spcPts val="700"/>
@@ -25385,7 +25745,7 @@
           <a:p>
             <a:pPr marL="342900" indent="-342900">
               <a:lnSpc>
-                <a:spcPts val="1600"/>
+                <a:spcPts val="1560"/>
               </a:lnSpc>
               <a:spcAft>
                 <a:spcPts val="700"/>
@@ -25719,7 +26079,7 @@
           <a:p>
             <a:pPr marL="342900" indent="-342900">
               <a:lnSpc>
-                <a:spcPts val="1600"/>
+                <a:spcPts val="1625"/>
               </a:lnSpc>
               <a:spcAft>
                 <a:spcPts val="700"/>
@@ -25743,7 +26103,7 @@
           <a:p>
             <a:pPr marL="342900" indent="-342900">
               <a:lnSpc>
-                <a:spcPts val="1600"/>
+                <a:spcPts val="1625"/>
               </a:lnSpc>
               <a:spcAft>
                 <a:spcPts val="700"/>
@@ -25862,7 +26222,7 @@
           <a:p>
             <a:pPr marL="342900" indent="-342900">
               <a:lnSpc>
-                <a:spcPts val="1600"/>
+                <a:spcPts val="1560"/>
               </a:lnSpc>
               <a:spcAft>
                 <a:spcPts val="700"/>
@@ -25886,7 +26246,7 @@
           <a:p>
             <a:pPr marL="342900" indent="-342900">
               <a:lnSpc>
-                <a:spcPts val="1600"/>
+                <a:spcPts val="1560"/>
               </a:lnSpc>
               <a:spcAft>
                 <a:spcPts val="700"/>
@@ -26259,7 +26619,7 @@
           <a:p>
             <a:pPr marL="342900" indent="-342900">
               <a:lnSpc>
-                <a:spcPts val="1600"/>
+                <a:spcPts val="1625"/>
               </a:lnSpc>
               <a:spcAft>
                 <a:spcPts val="700"/>
@@ -26283,7 +26643,7 @@
           <a:p>
             <a:pPr marL="342900" indent="-342900">
               <a:lnSpc>
-                <a:spcPts val="1600"/>
+                <a:spcPts val="1625"/>
               </a:lnSpc>
               <a:spcAft>
                 <a:spcPts val="700"/>
@@ -26307,7 +26667,7 @@
           <a:p>
             <a:pPr marL="342900" indent="-342900">
               <a:lnSpc>
-                <a:spcPts val="1600"/>
+                <a:spcPts val="1625"/>
               </a:lnSpc>
               <a:spcAft>
                 <a:spcPts val="700"/>
@@ -26666,11 +27026,11 @@
         <p:spPr>
           <a:xfrm>
             <a:off x="566928" y="2103120"/>
-            <a:ext cx="5486400" cy="3824224"/>
+            <a:ext cx="5486400" cy="4022344"/>
           </a:xfrm>
           <a:prstGeom prst="roundRect">
             <a:avLst>
-              <a:gd name="adj" fmla="val 1435"/>
+              <a:gd name="adj" fmla="val 1364"/>
             </a:avLst>
           </a:prstGeom>
           <a:solidFill>
@@ -26739,7 +27099,7 @@
         <p:spPr>
           <a:xfrm>
             <a:off x="822960" y="2615184"/>
-            <a:ext cx="4974336" cy="3129280"/>
+            <a:ext cx="4974336" cy="3327400"/>
           </a:xfrm>
           <a:prstGeom prst="rect">
             <a:avLst/>
@@ -26753,7 +27113,7 @@
           <a:p>
             <a:pPr marL="342900" indent="-342900">
               <a:lnSpc>
-                <a:spcPts val="1600"/>
+                <a:spcPts val="1625"/>
               </a:lnSpc>
               <a:spcAft>
                 <a:spcPts val="700"/>
@@ -26777,7 +27137,7 @@
           <a:p>
             <a:pPr marL="342900" indent="-342900">
               <a:lnSpc>
-                <a:spcPts val="1600"/>
+                <a:spcPts val="1625"/>
               </a:lnSpc>
               <a:spcAft>
                 <a:spcPts val="700"/>
@@ -26801,7 +27161,7 @@
           <a:p>
             <a:pPr marL="342900" indent="-342900">
               <a:lnSpc>
-                <a:spcPts val="1600"/>
+                <a:spcPts val="1625"/>
               </a:lnSpc>
               <a:spcAft>
                 <a:spcPts val="700"/>
@@ -26833,11 +27193,11 @@
         <p:spPr>
           <a:xfrm>
             <a:off x="6327648" y="2103120"/>
-            <a:ext cx="5266944" cy="3824224"/>
+            <a:ext cx="5266944" cy="4022344"/>
           </a:xfrm>
           <a:prstGeom prst="roundRect">
             <a:avLst>
-              <a:gd name="adj" fmla="val 1435"/>
+              <a:gd name="adj" fmla="val 1364"/>
             </a:avLst>
           </a:prstGeom>
           <a:solidFill>
@@ -26906,7 +27266,7 @@
         <p:spPr>
           <a:xfrm>
             <a:off x="6583680" y="2615184"/>
-            <a:ext cx="4754880" cy="3129280"/>
+            <a:ext cx="4754880" cy="3327400"/>
           </a:xfrm>
           <a:prstGeom prst="rect">
             <a:avLst/>
@@ -26920,7 +27280,7 @@
           <a:p>
             <a:pPr marL="342900" indent="-342900">
               <a:lnSpc>
-                <a:spcPts val="1600"/>
+                <a:spcPts val="1560"/>
               </a:lnSpc>
               <a:spcAft>
                 <a:spcPts val="700"/>
@@ -26944,7 +27304,7 @@
           <a:p>
             <a:pPr marL="342900" indent="-342900">
               <a:lnSpc>
-                <a:spcPts val="1600"/>
+                <a:spcPts val="1560"/>
               </a:lnSpc>
               <a:spcAft>
                 <a:spcPts val="700"/>
@@ -26968,7 +27328,7 @@
           <a:p>
             <a:pPr marL="342900" indent="-342900">
               <a:lnSpc>
-                <a:spcPts val="1600"/>
+                <a:spcPts val="1560"/>
               </a:lnSpc>
               <a:spcAft>
                 <a:spcPts val="700"/>
@@ -26992,7 +27352,7 @@
           <a:p>
             <a:pPr marL="342900" indent="-342900">
               <a:lnSpc>
-                <a:spcPts val="1600"/>
+                <a:spcPts val="1560"/>
               </a:lnSpc>
               <a:spcAft>
                 <a:spcPts val="700"/>

--- a/KMIP_PKCS11_REST_KMS_Plan_Deck.pptx
+++ b/KMIP_PKCS11_REST_KMS_Plan_Deck.pptx
@@ -44,9 +44,15 @@
     <p:sldId id="292" r:id="rId38"/>
     <p:sldId id="293" r:id="rId39"/>
     <p:sldId id="294" r:id="rId40"/>
+    <p:sldId id="295" r:id="rId41"/>
+    <p:sldId id="296" r:id="rId42"/>
+    <p:sldId id="297" r:id="rId43"/>
+    <p:sldId id="298" r:id="rId44"/>
+    <p:sldId id="299" r:id="rId45"/>
+    <p:sldId id="300" r:id="rId46"/>
   </p:sldIdLst>
   <p:notesMasterIdLst>
-    <p:notesMasterId r:id="rId41"/>
+    <p:notesMasterId r:id="rId47"/>
   </p:notesMasterIdLst>
   <p:sldSz cx="12192000" cy="6858000"/>
   <p:notesSz cx="6858000" cy="12192000"/>
@@ -3356,7 +3362,7 @@
           <a:p>
             <a:r>
               <a:rPr lang="en-US" dirty="0"/>
-              <a:t>Close on the honest boundary: the plan says what it cannot do as clearly as what it can, and the generator refuses to build if those two lists stop adding up to the gap matrix.</a:t>
+              <a:t>Objective: Let a client speak KMIP without implementing a TTLV codec.</a:t>
             </a:r>
             <a:endParaRPr lang="en-US" dirty="0"/>
           </a:p>
@@ -3468,6 +3474,534 @@
             <a:fld id="{F7021451-1387-4CA6-816F-3879F97B5CBC}" type="slidenum">
               <a:rPr lang="en-US"/>
               <a:t>4</a:t>
+            </a:fld>
+            <a:endParaRPr lang="en-US"/>
+          </a:p>
+        </p:txBody>
+      </p:sp>
+    </p:spTree>
+    <p:extLst>
+      <p:ext uri="{BB962C8B-B14F-4D97-AF65-F5344CB8AC3E}">
+        <p14:creationId xmlns:p14="http://schemas.microsoft.com/office/powerpoint/2010/main" val="1024086991"/>
+      </p:ext>
+    </p:extLst>
+  </p:cSld>
+  <p:clrMapOvr>
+    <a:masterClrMapping/>
+  </p:clrMapOvr>
+</p:notes>
+</file>
+
+<file path=ppt/notesSlides/notesSlide40.xml><?xml version="1.0" encoding="utf-8"?>
+<p:notes xmlns:a="http://schemas.openxmlformats.org/drawingml/2006/main" xmlns:r="http://schemas.openxmlformats.org/officeDocument/2006/relationships" xmlns:p="http://schemas.openxmlformats.org/presentationml/2006/main">
+  <p:cSld>
+    <p:spTree>
+      <p:nvGrpSpPr>
+        <p:cNvPr id="1" name=""/>
+        <p:cNvGrpSpPr/>
+        <p:nvPr/>
+      </p:nvGrpSpPr>
+      <p:grpSpPr>
+        <a:xfrm>
+          <a:off x="0" y="0"/>
+          <a:ext cx="0" cy="0"/>
+          <a:chOff x="0" y="0"/>
+          <a:chExt cx="0" cy="0"/>
+        </a:xfrm>
+      </p:grpSpPr>
+      <p:sp>
+        <p:nvSpPr>
+          <p:cNvPr id="2" name="Slide Image Placeholder 1"/>
+          <p:cNvSpPr>
+            <a:spLocks noGrp="1" noRot="1" noChangeAspect="1"/>
+          </p:cNvSpPr>
+          <p:nvPr>
+            <p:ph type="sldImg"/>
+          </p:nvPr>
+        </p:nvSpPr>
+        <p:spPr/>
+      </p:sp>
+      <p:sp>
+        <p:nvSpPr>
+          <p:cNvPr id="3" name="Notes Placeholder 2"/>
+          <p:cNvSpPr>
+            <a:spLocks noGrp="1"/>
+          </p:cNvSpPr>
+          <p:nvPr>
+            <p:ph type="body" idx="1"/>
+          </p:nvPr>
+        </p:nvSpPr>
+        <p:spPr/>
+        <p:txBody>
+          <a:bodyPr/>
+          <a:lstStyle/>
+          <a:p>
+            <a:r>
+              <a:rPr lang="en-US" dirty="0"/>
+              <a:t>Objective: Let a client speak KMIP without implementing a TTLV codec.</a:t>
+            </a:r>
+            <a:endParaRPr lang="en-US" dirty="0"/>
+          </a:p>
+        </p:txBody>
+      </p:sp>
+      <p:sp>
+        <p:nvSpPr>
+          <p:cNvPr id="4" name="Slide Number Placeholder 3"/>
+          <p:cNvSpPr>
+            <a:spLocks noGrp="1"/>
+          </p:cNvSpPr>
+          <p:nvPr>
+            <p:ph type="sldNum" sz="quarter" idx="10"/>
+          </p:nvPr>
+        </p:nvSpPr>
+        <p:spPr/>
+        <p:txBody>
+          <a:bodyPr/>
+          <a:lstStyle/>
+          <a:p>
+            <a:fld id="{F7021451-1387-4CA6-816F-3879F97B5CBC}" type="slidenum">
+              <a:rPr lang="en-US"/>
+              <a:t>40</a:t>
+            </a:fld>
+            <a:endParaRPr lang="en-US"/>
+          </a:p>
+        </p:txBody>
+      </p:sp>
+    </p:spTree>
+    <p:extLst>
+      <p:ext uri="{BB962C8B-B14F-4D97-AF65-F5344CB8AC3E}">
+        <p14:creationId xmlns:p14="http://schemas.microsoft.com/office/powerpoint/2010/main" val="1024086991"/>
+      </p:ext>
+    </p:extLst>
+  </p:cSld>
+  <p:clrMapOvr>
+    <a:masterClrMapping/>
+  </p:clrMapOvr>
+</p:notes>
+</file>
+
+<file path=ppt/notesSlides/notesSlide41.xml><?xml version="1.0" encoding="utf-8"?>
+<p:notes xmlns:a="http://schemas.openxmlformats.org/drawingml/2006/main" xmlns:r="http://schemas.openxmlformats.org/officeDocument/2006/relationships" xmlns:p="http://schemas.openxmlformats.org/presentationml/2006/main">
+  <p:cSld>
+    <p:spTree>
+      <p:nvGrpSpPr>
+        <p:cNvPr id="1" name=""/>
+        <p:cNvGrpSpPr/>
+        <p:nvPr/>
+      </p:nvGrpSpPr>
+      <p:grpSpPr>
+        <a:xfrm>
+          <a:off x="0" y="0"/>
+          <a:ext cx="0" cy="0"/>
+          <a:chOff x="0" y="0"/>
+          <a:chExt cx="0" cy="0"/>
+        </a:xfrm>
+      </p:grpSpPr>
+      <p:sp>
+        <p:nvSpPr>
+          <p:cNvPr id="2" name="Slide Image Placeholder 1"/>
+          <p:cNvSpPr>
+            <a:spLocks noGrp="1" noRot="1" noChangeAspect="1"/>
+          </p:cNvSpPr>
+          <p:nvPr>
+            <p:ph type="sldImg"/>
+          </p:nvPr>
+        </p:nvSpPr>
+        <p:spPr/>
+      </p:sp>
+      <p:sp>
+        <p:nvSpPr>
+          <p:cNvPr id="3" name="Notes Placeholder 2"/>
+          <p:cNvSpPr>
+            <a:spLocks noGrp="1"/>
+          </p:cNvSpPr>
+          <p:nvPr>
+            <p:ph type="body" idx="1"/>
+          </p:nvPr>
+        </p:nvSpPr>
+        <p:spPr/>
+        <p:txBody>
+          <a:bodyPr/>
+          <a:lstStyle/>
+          <a:p>
+            <a:r>
+              <a:rPr lang="en-US" dirty="0"/>
+              <a:t>A step is finished when its gate is demonstrated, not when its code is written. Tests run live against a real SoftHSM2 token — the token is never mocked, because the defects worth catching are at that boundary.</a:t>
+            </a:r>
+            <a:endParaRPr lang="en-US" dirty="0"/>
+          </a:p>
+        </p:txBody>
+      </p:sp>
+      <p:sp>
+        <p:nvSpPr>
+          <p:cNvPr id="4" name="Slide Number Placeholder 3"/>
+          <p:cNvSpPr>
+            <a:spLocks noGrp="1"/>
+          </p:cNvSpPr>
+          <p:nvPr>
+            <p:ph type="sldNum" sz="quarter" idx="10"/>
+          </p:nvPr>
+        </p:nvSpPr>
+        <p:spPr/>
+        <p:txBody>
+          <a:bodyPr/>
+          <a:lstStyle/>
+          <a:p>
+            <a:fld id="{F7021451-1387-4CA6-816F-3879F97B5CBC}" type="slidenum">
+              <a:rPr lang="en-US"/>
+              <a:t>41</a:t>
+            </a:fld>
+            <a:endParaRPr lang="en-US"/>
+          </a:p>
+        </p:txBody>
+      </p:sp>
+    </p:spTree>
+    <p:extLst>
+      <p:ext uri="{BB962C8B-B14F-4D97-AF65-F5344CB8AC3E}">
+        <p14:creationId xmlns:p14="http://schemas.microsoft.com/office/powerpoint/2010/main" val="1024086991"/>
+      </p:ext>
+    </p:extLst>
+  </p:cSld>
+  <p:clrMapOvr>
+    <a:masterClrMapping/>
+  </p:clrMapOvr>
+</p:notes>
+</file>
+
+<file path=ppt/notesSlides/notesSlide42.xml><?xml version="1.0" encoding="utf-8"?>
+<p:notes xmlns:a="http://schemas.openxmlformats.org/drawingml/2006/main" xmlns:r="http://schemas.openxmlformats.org/officeDocument/2006/relationships" xmlns:p="http://schemas.openxmlformats.org/presentationml/2006/main">
+  <p:cSld>
+    <p:spTree>
+      <p:nvGrpSpPr>
+        <p:cNvPr id="1" name=""/>
+        <p:cNvGrpSpPr/>
+        <p:nvPr/>
+      </p:nvGrpSpPr>
+      <p:grpSpPr>
+        <a:xfrm>
+          <a:off x="0" y="0"/>
+          <a:ext cx="0" cy="0"/>
+          <a:chOff x="0" y="0"/>
+          <a:chExt cx="0" cy="0"/>
+        </a:xfrm>
+      </p:grpSpPr>
+      <p:sp>
+        <p:nvSpPr>
+          <p:cNvPr id="2" name="Slide Image Placeholder 1"/>
+          <p:cNvSpPr>
+            <a:spLocks noGrp="1" noRot="1" noChangeAspect="1"/>
+          </p:cNvSpPr>
+          <p:nvPr>
+            <p:ph type="sldImg"/>
+          </p:nvPr>
+        </p:nvSpPr>
+        <p:spPr/>
+      </p:sp>
+      <p:sp>
+        <p:nvSpPr>
+          <p:cNvPr id="3" name="Notes Placeholder 2"/>
+          <p:cNvSpPr>
+            <a:spLocks noGrp="1"/>
+          </p:cNvSpPr>
+          <p:nvPr>
+            <p:ph type="body" idx="1"/>
+          </p:nvPr>
+        </p:nvSpPr>
+        <p:spPr/>
+        <p:txBody>
+          <a:bodyPr/>
+          <a:lstStyle/>
+          <a:p>
+            <a:r>
+              <a:rPr lang="en-US" dirty="0"/>
+              <a:t>Objective: Know which certificates the estate is actually running, and warn before one expires.</a:t>
+            </a:r>
+            <a:endParaRPr lang="en-US" dirty="0"/>
+          </a:p>
+        </p:txBody>
+      </p:sp>
+      <p:sp>
+        <p:nvSpPr>
+          <p:cNvPr id="4" name="Slide Number Placeholder 3"/>
+          <p:cNvSpPr>
+            <a:spLocks noGrp="1"/>
+          </p:cNvSpPr>
+          <p:nvPr>
+            <p:ph type="sldNum" sz="quarter" idx="10"/>
+          </p:nvPr>
+        </p:nvSpPr>
+        <p:spPr/>
+        <p:txBody>
+          <a:bodyPr/>
+          <a:lstStyle/>
+          <a:p>
+            <a:fld id="{F7021451-1387-4CA6-816F-3879F97B5CBC}" type="slidenum">
+              <a:rPr lang="en-US"/>
+              <a:t>42</a:t>
+            </a:fld>
+            <a:endParaRPr lang="en-US"/>
+          </a:p>
+        </p:txBody>
+      </p:sp>
+    </p:spTree>
+    <p:extLst>
+      <p:ext uri="{BB962C8B-B14F-4D97-AF65-F5344CB8AC3E}">
+        <p14:creationId xmlns:p14="http://schemas.microsoft.com/office/powerpoint/2010/main" val="1024086991"/>
+      </p:ext>
+    </p:extLst>
+  </p:cSld>
+  <p:clrMapOvr>
+    <a:masterClrMapping/>
+  </p:clrMapOvr>
+</p:notes>
+</file>
+
+<file path=ppt/notesSlides/notesSlide43.xml><?xml version="1.0" encoding="utf-8"?>
+<p:notes xmlns:a="http://schemas.openxmlformats.org/drawingml/2006/main" xmlns:r="http://schemas.openxmlformats.org/officeDocument/2006/relationships" xmlns:p="http://schemas.openxmlformats.org/presentationml/2006/main">
+  <p:cSld>
+    <p:spTree>
+      <p:nvGrpSpPr>
+        <p:cNvPr id="1" name=""/>
+        <p:cNvGrpSpPr/>
+        <p:nvPr/>
+      </p:nvGrpSpPr>
+      <p:grpSpPr>
+        <a:xfrm>
+          <a:off x="0" y="0"/>
+          <a:ext cx="0" cy="0"/>
+          <a:chOff x="0" y="0"/>
+          <a:chExt cx="0" cy="0"/>
+        </a:xfrm>
+      </p:grpSpPr>
+      <p:sp>
+        <p:nvSpPr>
+          <p:cNvPr id="2" name="Slide Image Placeholder 1"/>
+          <p:cNvSpPr>
+            <a:spLocks noGrp="1" noRot="1" noChangeAspect="1"/>
+          </p:cNvSpPr>
+          <p:nvPr>
+            <p:ph type="sldImg"/>
+          </p:nvPr>
+        </p:nvSpPr>
+        <p:spPr/>
+      </p:sp>
+      <p:sp>
+        <p:nvSpPr>
+          <p:cNvPr id="3" name="Notes Placeholder 2"/>
+          <p:cNvSpPr>
+            <a:spLocks noGrp="1"/>
+          </p:cNvSpPr>
+          <p:nvPr>
+            <p:ph type="body" idx="1"/>
+          </p:nvPr>
+        </p:nvSpPr>
+        <p:spPr/>
+        <p:txBody>
+          <a:bodyPr/>
+          <a:lstStyle/>
+          <a:p>
+            <a:r>
+              <a:rPr lang="en-US" dirty="0"/>
+              <a:t>Objective: Know which certificates the estate is actually running, and warn before one expires.</a:t>
+            </a:r>
+            <a:endParaRPr lang="en-US" dirty="0"/>
+          </a:p>
+        </p:txBody>
+      </p:sp>
+      <p:sp>
+        <p:nvSpPr>
+          <p:cNvPr id="4" name="Slide Number Placeholder 3"/>
+          <p:cNvSpPr>
+            <a:spLocks noGrp="1"/>
+          </p:cNvSpPr>
+          <p:nvPr>
+            <p:ph type="sldNum" sz="quarter" idx="10"/>
+          </p:nvPr>
+        </p:nvSpPr>
+        <p:spPr/>
+        <p:txBody>
+          <a:bodyPr/>
+          <a:lstStyle/>
+          <a:p>
+            <a:fld id="{F7021451-1387-4CA6-816F-3879F97B5CBC}" type="slidenum">
+              <a:rPr lang="en-US"/>
+              <a:t>43</a:t>
+            </a:fld>
+            <a:endParaRPr lang="en-US"/>
+          </a:p>
+        </p:txBody>
+      </p:sp>
+    </p:spTree>
+    <p:extLst>
+      <p:ext uri="{BB962C8B-B14F-4D97-AF65-F5344CB8AC3E}">
+        <p14:creationId xmlns:p14="http://schemas.microsoft.com/office/powerpoint/2010/main" val="1024086991"/>
+      </p:ext>
+    </p:extLst>
+  </p:cSld>
+  <p:clrMapOvr>
+    <a:masterClrMapping/>
+  </p:clrMapOvr>
+</p:notes>
+</file>
+
+<file path=ppt/notesSlides/notesSlide44.xml><?xml version="1.0" encoding="utf-8"?>
+<p:notes xmlns:a="http://schemas.openxmlformats.org/drawingml/2006/main" xmlns:r="http://schemas.openxmlformats.org/officeDocument/2006/relationships" xmlns:p="http://schemas.openxmlformats.org/presentationml/2006/main">
+  <p:cSld>
+    <p:spTree>
+      <p:nvGrpSpPr>
+        <p:cNvPr id="1" name=""/>
+        <p:cNvGrpSpPr/>
+        <p:nvPr/>
+      </p:nvGrpSpPr>
+      <p:grpSpPr>
+        <a:xfrm>
+          <a:off x="0" y="0"/>
+          <a:ext cx="0" cy="0"/>
+          <a:chOff x="0" y="0"/>
+          <a:chExt cx="0" cy="0"/>
+        </a:xfrm>
+      </p:grpSpPr>
+      <p:sp>
+        <p:nvSpPr>
+          <p:cNvPr id="2" name="Slide Image Placeholder 1"/>
+          <p:cNvSpPr>
+            <a:spLocks noGrp="1" noRot="1" noChangeAspect="1"/>
+          </p:cNvSpPr>
+          <p:nvPr>
+            <p:ph type="sldImg"/>
+          </p:nvPr>
+        </p:nvSpPr>
+        <p:spPr/>
+      </p:sp>
+      <p:sp>
+        <p:nvSpPr>
+          <p:cNvPr id="3" name="Notes Placeholder 2"/>
+          <p:cNvSpPr>
+            <a:spLocks noGrp="1"/>
+          </p:cNvSpPr>
+          <p:nvPr>
+            <p:ph type="body" idx="1"/>
+          </p:nvPr>
+        </p:nvSpPr>
+        <p:spPr/>
+        <p:txBody>
+          <a:bodyPr/>
+          <a:lstStyle/>
+          <a:p>
+            <a:r>
+              <a:rPr lang="en-US" dirty="0"/>
+              <a:t>A step is finished when its gate is demonstrated, not when its code is written. Tests run live against a real SoftHSM2 token — the token is never mocked, because the defects worth catching are at that boundary.</a:t>
+            </a:r>
+            <a:endParaRPr lang="en-US" dirty="0"/>
+          </a:p>
+        </p:txBody>
+      </p:sp>
+      <p:sp>
+        <p:nvSpPr>
+          <p:cNvPr id="4" name="Slide Number Placeholder 3"/>
+          <p:cNvSpPr>
+            <a:spLocks noGrp="1"/>
+          </p:cNvSpPr>
+          <p:nvPr>
+            <p:ph type="sldNum" sz="quarter" idx="10"/>
+          </p:nvPr>
+        </p:nvSpPr>
+        <p:spPr/>
+        <p:txBody>
+          <a:bodyPr/>
+          <a:lstStyle/>
+          <a:p>
+            <a:fld id="{F7021451-1387-4CA6-816F-3879F97B5CBC}" type="slidenum">
+              <a:rPr lang="en-US"/>
+              <a:t>44</a:t>
+            </a:fld>
+            <a:endParaRPr lang="en-US"/>
+          </a:p>
+        </p:txBody>
+      </p:sp>
+    </p:spTree>
+    <p:extLst>
+      <p:ext uri="{BB962C8B-B14F-4D97-AF65-F5344CB8AC3E}">
+        <p14:creationId xmlns:p14="http://schemas.microsoft.com/office/powerpoint/2010/main" val="1024086991"/>
+      </p:ext>
+    </p:extLst>
+  </p:cSld>
+  <p:clrMapOvr>
+    <a:masterClrMapping/>
+  </p:clrMapOvr>
+</p:notes>
+</file>
+
+<file path=ppt/notesSlides/notesSlide45.xml><?xml version="1.0" encoding="utf-8"?>
+<p:notes xmlns:a="http://schemas.openxmlformats.org/drawingml/2006/main" xmlns:r="http://schemas.openxmlformats.org/officeDocument/2006/relationships" xmlns:p="http://schemas.openxmlformats.org/presentationml/2006/main">
+  <p:cSld>
+    <p:spTree>
+      <p:nvGrpSpPr>
+        <p:cNvPr id="1" name=""/>
+        <p:cNvGrpSpPr/>
+        <p:nvPr/>
+      </p:nvGrpSpPr>
+      <p:grpSpPr>
+        <a:xfrm>
+          <a:off x="0" y="0"/>
+          <a:ext cx="0" cy="0"/>
+          <a:chOff x="0" y="0"/>
+          <a:chExt cx="0" cy="0"/>
+        </a:xfrm>
+      </p:grpSpPr>
+      <p:sp>
+        <p:nvSpPr>
+          <p:cNvPr id="2" name="Slide Image Placeholder 1"/>
+          <p:cNvSpPr>
+            <a:spLocks noGrp="1" noRot="1" noChangeAspect="1"/>
+          </p:cNvSpPr>
+          <p:nvPr>
+            <p:ph type="sldImg"/>
+          </p:nvPr>
+        </p:nvSpPr>
+        <p:spPr/>
+      </p:sp>
+      <p:sp>
+        <p:nvSpPr>
+          <p:cNvPr id="3" name="Notes Placeholder 2"/>
+          <p:cNvSpPr>
+            <a:spLocks noGrp="1"/>
+          </p:cNvSpPr>
+          <p:nvPr>
+            <p:ph type="body" idx="1"/>
+          </p:nvPr>
+        </p:nvSpPr>
+        <p:spPr/>
+        <p:txBody>
+          <a:bodyPr/>
+          <a:lstStyle/>
+          <a:p>
+            <a:r>
+              <a:rPr lang="en-US" dirty="0"/>
+              <a:t>Close on the honest boundary: the plan says what it cannot do as clearly as what it can, and the generator refuses to build if those two lists stop adding up to the gap matrix.</a:t>
+            </a:r>
+            <a:endParaRPr lang="en-US" dirty="0"/>
+          </a:p>
+        </p:txBody>
+      </p:sp>
+      <p:sp>
+        <p:nvSpPr>
+          <p:cNvPr id="4" name="Slide Number Placeholder 3"/>
+          <p:cNvSpPr>
+            <a:spLocks noGrp="1"/>
+          </p:cNvSpPr>
+          <p:nvPr>
+            <p:ph type="sldNum" sz="quarter" idx="10"/>
+          </p:nvPr>
+        </p:nvSpPr>
+        <p:spPr/>
+        <p:txBody>
+          <a:bodyPr/>
+          <a:lstStyle/>
+          <a:p>
+            <a:fld id="{F7021451-1387-4CA6-816F-3879F97B5CBC}" type="slidenum">
+              <a:rPr lang="en-US"/>
+              <a:t>45</a:t>
             </a:fld>
             <a:endParaRPr lang="en-US"/>
           </a:p>
@@ -4329,7 +4863,7 @@
                 <a:ea typeface="Cambria" pitchFamily="34" charset="-122"/>
                 <a:cs typeface="Cambria" pitchFamily="34" charset="-120"/>
               </a:rPr>
-              <a:t>Twelve steps to a REST-fronted key management service</a:t>
+              <a:t>14 steps to a REST-fronted key management service</a:t>
             </a:r>
             <a:endParaRPr lang="en-US" sz="2200" dirty="0"/>
           </a:p>
@@ -4407,7 +4941,7 @@
                 <a:ea typeface="Cambria" pitchFamily="34" charset="-122"/>
                 <a:cs typeface="Cambria" pitchFamily="34" charset="-120"/>
               </a:rPr>
-              <a:t>12</a:t>
+              <a:t>14</a:t>
             </a:r>
             <a:endParaRPr lang="en-US" sz="3200" dirty="0"/>
           </a:p>
@@ -4446,7 +4980,7 @@
                 <a:ea typeface="Calibri" pitchFamily="34" charset="-122"/>
                 <a:cs typeface="Calibri" pitchFamily="34" charset="-120"/>
               </a:rPr>
-              <a:t>steps in four stages</a:t>
+              <a:t>steps in 5 stages</a:t>
             </a:r>
             <a:endParaRPr lang="en-US" sz="1150" dirty="0"/>
           </a:p>
@@ -4563,7 +5097,7 @@
                 <a:ea typeface="Cambria" pitchFamily="34" charset="-122"/>
                 <a:cs typeface="Cambria" pitchFamily="34" charset="-120"/>
               </a:rPr>
-              <a:t>32</a:t>
+              <a:t>34</a:t>
             </a:r>
             <a:endParaRPr lang="en-US" sz="3200" dirty="0"/>
           </a:p>
@@ -4641,7 +5175,7 @@
                 <a:ea typeface="Cambria" pitchFamily="34" charset="-122"/>
                 <a:cs typeface="Cambria" pitchFamily="34" charset="-120"/>
               </a:rPr>
-              <a:t>18</a:t>
+              <a:t>16</a:t>
             </a:r>
             <a:endParaRPr lang="en-US" sz="3200" dirty="0"/>
           </a:p>
@@ -4790,7 +5324,7 @@
                 <a:ea typeface="Calibri" pitchFamily="34" charset="-122"/>
                 <a:cs typeface="Calibri" pitchFamily="34" charset="-120"/>
               </a:rPr>
-              <a:t>STEP 3 OF 12 · PROPOSED SOLUTION</a:t>
+              <a:t>STEP 3 OF 14 · PROPOSED SOLUTION</a:t>
             </a:r>
             <a:endParaRPr lang="en-US" sz="1150" dirty="0"/>
           </a:p>
@@ -5378,7 +5912,7 @@
                 <a:ea typeface="Calibri" pitchFamily="34" charset="-122"/>
                 <a:cs typeface="Calibri" pitchFamily="34" charset="-120"/>
               </a:rPr>
-              <a:t>STEP 3 OF 12 · TEST STRATEGY</a:t>
+              <a:t>STEP 3 OF 14 · TEST STRATEGY</a:t>
             </a:r>
             <a:endParaRPr lang="en-US" sz="1150" dirty="0"/>
           </a:p>
@@ -5920,7 +6454,7 @@
                 <a:ea typeface="Calibri" pitchFamily="34" charset="-122"/>
                 <a:cs typeface="Calibri" pitchFamily="34" charset="-120"/>
               </a:rPr>
-              <a:t>STEP 4 OF 12 · DESIGN IMPACT</a:t>
+              <a:t>STEP 4 OF 14 · DESIGN IMPACT</a:t>
             </a:r>
             <a:endParaRPr lang="en-US" sz="1150" dirty="0"/>
           </a:p>
@@ -6421,7 +6955,7 @@
                 <a:ea typeface="Calibri" pitchFamily="34" charset="-122"/>
                 <a:cs typeface="Calibri" pitchFamily="34" charset="-120"/>
               </a:rPr>
-              <a:t>STEP 4 OF 12 · PROPOSED SOLUTION</a:t>
+              <a:t>STEP 4 OF 14 · PROPOSED SOLUTION</a:t>
             </a:r>
             <a:endParaRPr lang="en-US" sz="1150" dirty="0"/>
           </a:p>
@@ -6860,7 +7394,7 @@
                 <a:ea typeface="Calibri" pitchFamily="34" charset="-122"/>
                 <a:cs typeface="Calibri" pitchFamily="34" charset="-120"/>
               </a:rPr>
-              <a:t>STEP 4 OF 12 · TEST STRATEGY</a:t>
+              <a:t>STEP 4 OF 14 · TEST STRATEGY</a:t>
             </a:r>
             <a:endParaRPr lang="en-US" sz="1150" dirty="0"/>
           </a:p>
@@ -7402,7 +7936,7 @@
                 <a:ea typeface="Calibri" pitchFamily="34" charset="-122"/>
                 <a:cs typeface="Calibri" pitchFamily="34" charset="-120"/>
               </a:rPr>
-              <a:t>STEP 5 OF 12 · DESIGN IMPACT</a:t>
+              <a:t>STEP 5 OF 14 · DESIGN IMPACT</a:t>
             </a:r>
             <a:endParaRPr lang="en-US" sz="1150" dirty="0"/>
           </a:p>
@@ -7975,7 +8509,7 @@
                 <a:ea typeface="Calibri" pitchFamily="34" charset="-122"/>
                 <a:cs typeface="Calibri" pitchFamily="34" charset="-120"/>
               </a:rPr>
-              <a:t>STEP 5 OF 12 · PROPOSED SOLUTION</a:t>
+              <a:t>STEP 5 OF 14 · PROPOSED SOLUTION</a:t>
             </a:r>
             <a:endParaRPr lang="en-US" sz="1150" dirty="0"/>
           </a:p>
@@ -8563,7 +9097,7 @@
                 <a:ea typeface="Calibri" pitchFamily="34" charset="-122"/>
                 <a:cs typeface="Calibri" pitchFamily="34" charset="-120"/>
               </a:rPr>
-              <a:t>STEP 5 OF 12 · TEST STRATEGY</a:t>
+              <a:t>STEP 5 OF 14 · TEST STRATEGY</a:t>
             </a:r>
             <a:endParaRPr lang="en-US" sz="1150" dirty="0"/>
           </a:p>
@@ -9153,7 +9687,7 @@
                 <a:ea typeface="Calibri" pitchFamily="34" charset="-122"/>
                 <a:cs typeface="Calibri" pitchFamily="34" charset="-120"/>
               </a:rPr>
-              <a:t>STEP 6 OF 12 · DESIGN IMPACT</a:t>
+              <a:t>STEP 6 OF 14 · DESIGN IMPACT</a:t>
             </a:r>
             <a:endParaRPr lang="en-US" sz="1150" dirty="0"/>
           </a:p>
@@ -9702,7 +10236,7 @@
                 <a:ea typeface="Calibri" pitchFamily="34" charset="-122"/>
                 <a:cs typeface="Calibri" pitchFamily="34" charset="-120"/>
               </a:rPr>
-              <a:t>STEP 6 OF 12 · PROPOSED SOLUTION</a:t>
+              <a:t>STEP 6 OF 14 · PROPOSED SOLUTION</a:t>
             </a:r>
             <a:endParaRPr lang="en-US" sz="1150" dirty="0"/>
           </a:p>
@@ -10281,7 +10815,7 @@
                 <a:ea typeface="Cambria" pitchFamily="34" charset="-122"/>
                 <a:cs typeface="Cambria" pitchFamily="34" charset="-120"/>
               </a:rPr>
-              <a:t>Four stages, twelve steps</a:t>
+              <a:t>5 stages, 14 steps</a:t>
             </a:r>
             <a:endParaRPr lang="en-US" sz="3000" dirty="0"/>
           </a:p>
@@ -10296,7 +10830,7 @@
         <p:spPr>
           <a:xfrm>
             <a:off x="566928" y="1463040"/>
-            <a:ext cx="2578608" cy="658368"/>
+            <a:ext cx="2044598" cy="658368"/>
           </a:xfrm>
           <a:prstGeom prst="roundRect">
             <a:avLst>
@@ -10323,7 +10857,7 @@
         <p:spPr>
           <a:xfrm>
             <a:off x="694944" y="1463040"/>
-            <a:ext cx="2322576" cy="658368"/>
+            <a:ext cx="1788566" cy="658368"/>
           </a:xfrm>
           <a:prstGeom prst="rect">
             <a:avLst/>
@@ -10339,7 +10873,7 @@
               <a:buNone/>
             </a:pPr>
             <a:r>
-              <a:rPr lang="en-US" sz="1400" b="1" dirty="0">
+              <a:rPr lang="en-US" sz="1250" b="1" dirty="0">
                 <a:solidFill>
                   <a:srgbClr val="FFFFFF"/>
                 </a:solidFill>
@@ -10349,7 +10883,7 @@
               </a:rPr>
               <a:t>A · Foundation</a:t>
             </a:r>
-            <a:endParaRPr lang="en-US" sz="1400" dirty="0"/>
+            <a:endParaRPr lang="en-US" sz="1250" dirty="0"/>
           </a:p>
         </p:txBody>
       </p:sp>
@@ -10362,7 +10896,7 @@
         <p:spPr>
           <a:xfrm>
             <a:off x="658368" y="2176272"/>
-            <a:ext cx="2395728" cy="475488"/>
+            <a:ext cx="1861718" cy="512064"/>
           </a:xfrm>
           <a:prstGeom prst="rect">
             <a:avLst/>
@@ -10378,7 +10912,7 @@
               <a:buNone/>
             </a:pPr>
             <a:r>
-              <a:rPr lang="en-US" sz="1000" i="1" dirty="0">
+              <a:rPr lang="en-US" sz="900" i="1" dirty="0">
                 <a:solidFill>
                   <a:srgbClr val="7B8794"/>
                 </a:solidFill>
@@ -10388,7 +10922,7 @@
               </a:rPr>
               <a:t>No new attack surface. Makes the rest safe to build.</a:t>
             </a:r>
-            <a:endParaRPr lang="en-US" sz="1000" dirty="0"/>
+            <a:endParaRPr lang="en-US" sz="900" dirty="0"/>
           </a:p>
         </p:txBody>
       </p:sp>
@@ -10401,7 +10935,7 @@
         <p:spPr>
           <a:xfrm>
             <a:off x="566928" y="2743200"/>
-            <a:ext cx="2578608" cy="566928"/>
+            <a:ext cx="2044598" cy="566928"/>
           </a:xfrm>
           <a:prstGeom prst="roundRect">
             <a:avLst>
@@ -10427,8 +10961,8 @@
         </p:nvSpPr>
         <p:spPr>
           <a:xfrm>
-            <a:off x="694944" y="2743200"/>
-            <a:ext cx="347472" cy="566928"/>
+            <a:off x="658368" y="2743200"/>
+            <a:ext cx="310896" cy="566928"/>
           </a:xfrm>
           <a:prstGeom prst="rect">
             <a:avLst/>
@@ -10444,7 +10978,7 @@
               <a:buNone/>
             </a:pPr>
             <a:r>
-              <a:rPr lang="en-US" sz="1500" b="1" dirty="0">
+              <a:rPr lang="en-US" sz="1300" b="1" dirty="0">
                 <a:solidFill>
                   <a:srgbClr val="C8952B"/>
                 </a:solidFill>
@@ -10454,7 +10988,7 @@
               </a:rPr>
               <a:t>1</a:t>
             </a:r>
-            <a:endParaRPr lang="en-US" sz="1500" dirty="0"/>
+            <a:endParaRPr lang="en-US" sz="1300" dirty="0"/>
           </a:p>
         </p:txBody>
       </p:sp>
@@ -10466,8 +11000,8 @@
         </p:nvSpPr>
         <p:spPr>
           <a:xfrm>
-            <a:off x="1060704" y="2743200"/>
-            <a:ext cx="1572768" cy="566928"/>
+            <a:off x="987552" y="2743200"/>
+            <a:ext cx="1185062" cy="566928"/>
           </a:xfrm>
           <a:prstGeom prst="rect">
             <a:avLst/>
@@ -10483,7 +11017,7 @@
               <a:buNone/>
             </a:pPr>
             <a:r>
-              <a:rPr lang="en-US" sz="1050" dirty="0">
+              <a:rPr lang="en-US" sz="900" dirty="0">
                 <a:solidFill>
                   <a:srgbClr val="1A3A5C"/>
                 </a:solidFill>
@@ -10493,7 +11027,7 @@
               </a:rPr>
               <a:t>Service layer and guard</a:t>
             </a:r>
-            <a:endParaRPr lang="en-US" sz="1050" dirty="0"/>
+            <a:endParaRPr lang="en-US" sz="900" dirty="0"/>
           </a:p>
         </p:txBody>
       </p:sp>
@@ -10505,8 +11039,8 @@
         </p:nvSpPr>
         <p:spPr>
           <a:xfrm>
-            <a:off x="2670048" y="2743200"/>
-            <a:ext cx="347472" cy="566928"/>
+            <a:off x="2190902" y="2743200"/>
+            <a:ext cx="310896" cy="566928"/>
           </a:xfrm>
           <a:prstGeom prst="rect">
             <a:avLst/>
@@ -10522,7 +11056,7 @@
               <a:buNone/>
             </a:pPr>
             <a:r>
-              <a:rPr lang="en-US" sz="1050" b="1" dirty="0">
+              <a:rPr lang="en-US" sz="950" b="1" dirty="0">
                 <a:solidFill>
                   <a:srgbClr val="7B8794"/>
                 </a:solidFill>
@@ -10532,7 +11066,7 @@
               </a:rPr>
               <a:t>—</a:t>
             </a:r>
-            <a:endParaRPr lang="en-US" sz="1050" dirty="0"/>
+            <a:endParaRPr lang="en-US" sz="950" dirty="0"/>
           </a:p>
         </p:txBody>
       </p:sp>
@@ -10545,7 +11079,7 @@
         <p:spPr>
           <a:xfrm>
             <a:off x="566928" y="3383280"/>
-            <a:ext cx="2578608" cy="566928"/>
+            <a:ext cx="2044598" cy="566928"/>
           </a:xfrm>
           <a:prstGeom prst="roundRect">
             <a:avLst>
@@ -10571,8 +11105,8 @@
         </p:nvSpPr>
         <p:spPr>
           <a:xfrm>
-            <a:off x="694944" y="3383280"/>
-            <a:ext cx="347472" cy="566928"/>
+            <a:off x="658368" y="3383280"/>
+            <a:ext cx="310896" cy="566928"/>
           </a:xfrm>
           <a:prstGeom prst="rect">
             <a:avLst/>
@@ -10588,7 +11122,7 @@
               <a:buNone/>
             </a:pPr>
             <a:r>
-              <a:rPr lang="en-US" sz="1500" b="1" dirty="0">
+              <a:rPr lang="en-US" sz="1300" b="1" dirty="0">
                 <a:solidFill>
                   <a:srgbClr val="C8952B"/>
                 </a:solidFill>
@@ -10598,7 +11132,7 @@
               </a:rPr>
               <a:t>2</a:t>
             </a:r>
-            <a:endParaRPr lang="en-US" sz="1500" dirty="0"/>
+            <a:endParaRPr lang="en-US" sz="1300" dirty="0"/>
           </a:p>
         </p:txBody>
       </p:sp>
@@ -10610,8 +11144,8 @@
         </p:nvSpPr>
         <p:spPr>
           <a:xfrm>
-            <a:off x="1060704" y="3383280"/>
-            <a:ext cx="1572768" cy="566928"/>
+            <a:off x="987552" y="3383280"/>
+            <a:ext cx="1185062" cy="566928"/>
           </a:xfrm>
           <a:prstGeom prst="rect">
             <a:avLst/>
@@ -10627,7 +11161,7 @@
               <a:buNone/>
             </a:pPr>
             <a:r>
-              <a:rPr lang="en-US" sz="1050" dirty="0">
+              <a:rPr lang="en-US" sz="900" dirty="0">
                 <a:solidFill>
                   <a:srgbClr val="1A3A5C"/>
                 </a:solidFill>
@@ -10637,7 +11171,7 @@
               </a:rPr>
               <a:t>Query and reporting layer</a:t>
             </a:r>
-            <a:endParaRPr lang="en-US" sz="1050" dirty="0"/>
+            <a:endParaRPr lang="en-US" sz="900" dirty="0"/>
           </a:p>
         </p:txBody>
       </p:sp>
@@ -10649,8 +11183,8 @@
         </p:nvSpPr>
         <p:spPr>
           <a:xfrm>
-            <a:off x="2670048" y="3383280"/>
-            <a:ext cx="347472" cy="566928"/>
+            <a:off x="2190902" y="3383280"/>
+            <a:ext cx="310896" cy="566928"/>
           </a:xfrm>
           <a:prstGeom prst="rect">
             <a:avLst/>
@@ -10666,7 +11200,7 @@
               <a:buNone/>
             </a:pPr>
             <a:r>
-              <a:rPr lang="en-US" sz="1050" b="1" dirty="0">
+              <a:rPr lang="en-US" sz="950" b="1" dirty="0">
                 <a:solidFill>
                   <a:srgbClr val="1F7A43"/>
                 </a:solidFill>
@@ -10676,7 +11210,7 @@
               </a:rPr>
               <a:t>+2</a:t>
             </a:r>
-            <a:endParaRPr lang="en-US" sz="1050" dirty="0"/>
+            <a:endParaRPr lang="en-US" sz="950" dirty="0"/>
           </a:p>
         </p:txBody>
       </p:sp>
@@ -10688,8 +11222,8 @@
         </p:nvSpPr>
         <p:spPr>
           <a:xfrm>
-            <a:off x="3182112" y="1709928"/>
-            <a:ext cx="173736" cy="164592"/>
+            <a:off x="2638958" y="1709928"/>
+            <a:ext cx="164592" cy="164592"/>
           </a:xfrm>
           <a:prstGeom prst="rightArrow">
             <a:avLst/>
@@ -10713,8 +11247,8 @@
         </p:nvSpPr>
         <p:spPr>
           <a:xfrm>
-            <a:off x="3383280" y="1463040"/>
-            <a:ext cx="2578608" cy="658368"/>
+            <a:off x="2812694" y="1463040"/>
+            <a:ext cx="2044598" cy="658368"/>
           </a:xfrm>
           <a:prstGeom prst="roundRect">
             <a:avLst>
@@ -10740,8 +11274,8 @@
         </p:nvSpPr>
         <p:spPr>
           <a:xfrm>
-            <a:off x="3511296" y="1463040"/>
-            <a:ext cx="2322576" cy="658368"/>
+            <a:off x="2940710" y="1463040"/>
+            <a:ext cx="1788566" cy="658368"/>
           </a:xfrm>
           <a:prstGeom prst="rect">
             <a:avLst/>
@@ -10757,7 +11291,7 @@
               <a:buNone/>
             </a:pPr>
             <a:r>
-              <a:rPr lang="en-US" sz="1400" b="1" dirty="0">
+              <a:rPr lang="en-US" sz="1250" b="1" dirty="0">
                 <a:solidFill>
                   <a:srgbClr val="FFFFFF"/>
                 </a:solidFill>
@@ -10767,7 +11301,7 @@
               </a:rPr>
               <a:t>B · The REST control plane</a:t>
             </a:r>
-            <a:endParaRPr lang="en-US" sz="1400" dirty="0"/>
+            <a:endParaRPr lang="en-US" sz="1250" dirty="0"/>
           </a:p>
         </p:txBody>
       </p:sp>
@@ -10779,8 +11313,8 @@
         </p:nvSpPr>
         <p:spPr>
           <a:xfrm>
-            <a:off x="3474720" y="2176272"/>
-            <a:ext cx="2395728" cy="475488"/>
+            <a:off x="2904134" y="2176272"/>
+            <a:ext cx="1861718" cy="512064"/>
           </a:xfrm>
           <a:prstGeom prst="rect">
             <a:avLst/>
@@ -10796,7 +11330,7 @@
               <a:buNone/>
             </a:pPr>
             <a:r>
-              <a:rPr lang="en-US" sz="1000" i="1" dirty="0">
+              <a:rPr lang="en-US" sz="900" i="1" dirty="0">
                 <a:solidFill>
                   <a:srgbClr val="7B8794"/>
                 </a:solidFill>
@@ -10806,7 +11340,7 @@
               </a:rPr>
               <a:t>The API, then the console that uses it.</a:t>
             </a:r>
-            <a:endParaRPr lang="en-US" sz="1000" dirty="0"/>
+            <a:endParaRPr lang="en-US" sz="900" dirty="0"/>
           </a:p>
         </p:txBody>
       </p:sp>
@@ -10818,8 +11352,8 @@
         </p:nvSpPr>
         <p:spPr>
           <a:xfrm>
-            <a:off x="3383280" y="2743200"/>
-            <a:ext cx="2578608" cy="566928"/>
+            <a:off x="2812694" y="2743200"/>
+            <a:ext cx="2044598" cy="566928"/>
           </a:xfrm>
           <a:prstGeom prst="roundRect">
             <a:avLst>
@@ -10845,8 +11379,8 @@
         </p:nvSpPr>
         <p:spPr>
           <a:xfrm>
-            <a:off x="3511296" y="2743200"/>
-            <a:ext cx="347472" cy="566928"/>
+            <a:off x="2904134" y="2743200"/>
+            <a:ext cx="310896" cy="566928"/>
           </a:xfrm>
           <a:prstGeom prst="rect">
             <a:avLst/>
@@ -10862,7 +11396,7 @@
               <a:buNone/>
             </a:pPr>
             <a:r>
-              <a:rPr lang="en-US" sz="1500" b="1" dirty="0">
+              <a:rPr lang="en-US" sz="1300" b="1" dirty="0">
                 <a:solidFill>
                   <a:srgbClr val="C8952B"/>
                 </a:solidFill>
@@ -10872,7 +11406,7 @@
               </a:rPr>
               <a:t>3</a:t>
             </a:r>
-            <a:endParaRPr lang="en-US" sz="1500" dirty="0"/>
+            <a:endParaRPr lang="en-US" sz="1300" dirty="0"/>
           </a:p>
         </p:txBody>
       </p:sp>
@@ -10884,8 +11418,8 @@
         </p:nvSpPr>
         <p:spPr>
           <a:xfrm>
-            <a:off x="3877056" y="2743200"/>
-            <a:ext cx="1572768" cy="566928"/>
+            <a:off x="3233318" y="2743200"/>
+            <a:ext cx="1185062" cy="566928"/>
           </a:xfrm>
           <a:prstGeom prst="rect">
             <a:avLst/>
@@ -10901,7 +11435,7 @@
               <a:buNone/>
             </a:pPr>
             <a:r>
-              <a:rPr lang="en-US" sz="1050" dirty="0">
+              <a:rPr lang="en-US" sz="900" dirty="0">
                 <a:solidFill>
                   <a:srgbClr val="1A3A5C"/>
                 </a:solidFill>
@@ -10911,7 +11445,7 @@
               </a:rPr>
               <a:t>HTTP transport, sessions and service accounts</a:t>
             </a:r>
-            <a:endParaRPr lang="en-US" sz="1050" dirty="0"/>
+            <a:endParaRPr lang="en-US" sz="900" dirty="0"/>
           </a:p>
         </p:txBody>
       </p:sp>
@@ -10923,8 +11457,8 @@
         </p:nvSpPr>
         <p:spPr>
           <a:xfrm>
-            <a:off x="5486400" y="2743200"/>
-            <a:ext cx="347472" cy="566928"/>
+            <a:off x="4436669" y="2743200"/>
+            <a:ext cx="310896" cy="566928"/>
           </a:xfrm>
           <a:prstGeom prst="rect">
             <a:avLst/>
@@ -10940,7 +11474,7 @@
               <a:buNone/>
             </a:pPr>
             <a:r>
-              <a:rPr lang="en-US" sz="1050" b="1" dirty="0">
+              <a:rPr lang="en-US" sz="950" b="1" dirty="0">
                 <a:solidFill>
                   <a:srgbClr val="1F7A43"/>
                 </a:solidFill>
@@ -10950,7 +11484,7 @@
               </a:rPr>
               <a:t>+3</a:t>
             </a:r>
-            <a:endParaRPr lang="en-US" sz="1050" dirty="0"/>
+            <a:endParaRPr lang="en-US" sz="950" dirty="0"/>
           </a:p>
         </p:txBody>
       </p:sp>
@@ -10962,8 +11496,8 @@
         </p:nvSpPr>
         <p:spPr>
           <a:xfrm>
-            <a:off x="3383280" y="3383280"/>
-            <a:ext cx="2578608" cy="566928"/>
+            <a:off x="2812694" y="3383280"/>
+            <a:ext cx="2044598" cy="566928"/>
           </a:xfrm>
           <a:prstGeom prst="roundRect">
             <a:avLst>
@@ -10989,8 +11523,8 @@
         </p:nvSpPr>
         <p:spPr>
           <a:xfrm>
-            <a:off x="3511296" y="3383280"/>
-            <a:ext cx="347472" cy="566928"/>
+            <a:off x="2904134" y="3383280"/>
+            <a:ext cx="310896" cy="566928"/>
           </a:xfrm>
           <a:prstGeom prst="rect">
             <a:avLst/>
@@ -11006,7 +11540,7 @@
               <a:buNone/>
             </a:pPr>
             <a:r>
-              <a:rPr lang="en-US" sz="1500" b="1" dirty="0">
+              <a:rPr lang="en-US" sz="1300" b="1" dirty="0">
                 <a:solidFill>
                   <a:srgbClr val="C8952B"/>
                 </a:solidFill>
@@ -11016,7 +11550,7 @@
               </a:rPr>
               <a:t>4</a:t>
             </a:r>
-            <a:endParaRPr lang="en-US" sz="1500" dirty="0"/>
+            <a:endParaRPr lang="en-US" sz="1300" dirty="0"/>
           </a:p>
         </p:txBody>
       </p:sp>
@@ -11028,8 +11562,8 @@
         </p:nvSpPr>
         <p:spPr>
           <a:xfrm>
-            <a:off x="3877056" y="3383280"/>
-            <a:ext cx="1572768" cy="566928"/>
+            <a:off x="3233318" y="3383280"/>
+            <a:ext cx="1185062" cy="566928"/>
           </a:xfrm>
           <a:prstGeom prst="rect">
             <a:avLst/>
@@ -11045,7 +11579,7 @@
               <a:buNone/>
             </a:pPr>
             <a:r>
-              <a:rPr lang="en-US" sz="1050" dirty="0">
+              <a:rPr lang="en-US" sz="900" dirty="0">
                 <a:solidFill>
                   <a:srgbClr val="1A3A5C"/>
                 </a:solidFill>
@@ -11055,7 +11589,7 @@
               </a:rPr>
               <a:t>Read endpoints</a:t>
             </a:r>
-            <a:endParaRPr lang="en-US" sz="1050" dirty="0"/>
+            <a:endParaRPr lang="en-US" sz="900" dirty="0"/>
           </a:p>
         </p:txBody>
       </p:sp>
@@ -11067,8 +11601,8 @@
         </p:nvSpPr>
         <p:spPr>
           <a:xfrm>
-            <a:off x="5486400" y="3383280"/>
-            <a:ext cx="347472" cy="566928"/>
+            <a:off x="4436669" y="3383280"/>
+            <a:ext cx="310896" cy="566928"/>
           </a:xfrm>
           <a:prstGeom prst="rect">
             <a:avLst/>
@@ -11084,7 +11618,7 @@
               <a:buNone/>
             </a:pPr>
             <a:r>
-              <a:rPr lang="en-US" sz="1050" b="1" dirty="0">
+              <a:rPr lang="en-US" sz="950" b="1" dirty="0">
                 <a:solidFill>
                   <a:srgbClr val="7B8794"/>
                 </a:solidFill>
@@ -11094,7 +11628,7 @@
               </a:rPr>
               <a:t>—</a:t>
             </a:r>
-            <a:endParaRPr lang="en-US" sz="1050" dirty="0"/>
+            <a:endParaRPr lang="en-US" sz="950" dirty="0"/>
           </a:p>
         </p:txBody>
       </p:sp>
@@ -11106,8 +11640,8 @@
         </p:nvSpPr>
         <p:spPr>
           <a:xfrm>
-            <a:off x="3383280" y="4023360"/>
-            <a:ext cx="2578608" cy="566928"/>
+            <a:off x="2812694" y="4023360"/>
+            <a:ext cx="2044598" cy="566928"/>
           </a:xfrm>
           <a:prstGeom prst="roundRect">
             <a:avLst>
@@ -11133,8 +11667,8 @@
         </p:nvSpPr>
         <p:spPr>
           <a:xfrm>
-            <a:off x="3511296" y="4023360"/>
-            <a:ext cx="347472" cy="566928"/>
+            <a:off x="2904134" y="4023360"/>
+            <a:ext cx="310896" cy="566928"/>
           </a:xfrm>
           <a:prstGeom prst="rect">
             <a:avLst/>
@@ -11150,7 +11684,7 @@
               <a:buNone/>
             </a:pPr>
             <a:r>
-              <a:rPr lang="en-US" sz="1500" b="1" dirty="0">
+              <a:rPr lang="en-US" sz="1300" b="1" dirty="0">
                 <a:solidFill>
                   <a:srgbClr val="C8952B"/>
                 </a:solidFill>
@@ -11160,7 +11694,7 @@
               </a:rPr>
               <a:t>5</a:t>
             </a:r>
-            <a:endParaRPr lang="en-US" sz="1500" dirty="0"/>
+            <a:endParaRPr lang="en-US" sz="1300" dirty="0"/>
           </a:p>
         </p:txBody>
       </p:sp>
@@ -11172,8 +11706,8 @@
         </p:nvSpPr>
         <p:spPr>
           <a:xfrm>
-            <a:off x="3877056" y="4023360"/>
-            <a:ext cx="1572768" cy="566928"/>
+            <a:off x="3233318" y="4023360"/>
+            <a:ext cx="1185062" cy="566928"/>
           </a:xfrm>
           <a:prstGeom prst="rect">
             <a:avLst/>
@@ -11189,7 +11723,7 @@
               <a:buNone/>
             </a:pPr>
             <a:r>
-              <a:rPr lang="en-US" sz="1050" dirty="0">
+              <a:rPr lang="en-US" sz="900" dirty="0">
                 <a:solidFill>
                   <a:srgbClr val="1A3A5C"/>
                 </a:solidFill>
@@ -11199,7 +11733,7 @@
               </a:rPr>
               <a:t>Write endpoints, and the governance gaps</a:t>
             </a:r>
-            <a:endParaRPr lang="en-US" sz="1050" dirty="0"/>
+            <a:endParaRPr lang="en-US" sz="900" dirty="0"/>
           </a:p>
         </p:txBody>
       </p:sp>
@@ -11211,8 +11745,8 @@
         </p:nvSpPr>
         <p:spPr>
           <a:xfrm>
-            <a:off x="5486400" y="4023360"/>
-            <a:ext cx="347472" cy="566928"/>
+            <a:off x="4436669" y="4023360"/>
+            <a:ext cx="310896" cy="566928"/>
           </a:xfrm>
           <a:prstGeom prst="rect">
             <a:avLst/>
@@ -11228,7 +11762,7 @@
               <a:buNone/>
             </a:pPr>
             <a:r>
-              <a:rPr lang="en-US" sz="1050" b="1" dirty="0">
+              <a:rPr lang="en-US" sz="950" b="1" dirty="0">
                 <a:solidFill>
                   <a:srgbClr val="1F7A43"/>
                 </a:solidFill>
@@ -11238,7 +11772,7 @@
               </a:rPr>
               <a:t>+4</a:t>
             </a:r>
-            <a:endParaRPr lang="en-US" sz="1050" dirty="0"/>
+            <a:endParaRPr lang="en-US" sz="950" dirty="0"/>
           </a:p>
         </p:txBody>
       </p:sp>
@@ -11250,8 +11784,8 @@
         </p:nvSpPr>
         <p:spPr>
           <a:xfrm>
-            <a:off x="3383280" y="4663440"/>
-            <a:ext cx="2578608" cy="566928"/>
+            <a:off x="2812694" y="4663440"/>
+            <a:ext cx="2044598" cy="566928"/>
           </a:xfrm>
           <a:prstGeom prst="roundRect">
             <a:avLst>
@@ -11277,8 +11811,8 @@
         </p:nvSpPr>
         <p:spPr>
           <a:xfrm>
-            <a:off x="3511296" y="4663440"/>
-            <a:ext cx="347472" cy="566928"/>
+            <a:off x="2904134" y="4663440"/>
+            <a:ext cx="310896" cy="566928"/>
           </a:xfrm>
           <a:prstGeom prst="rect">
             <a:avLst/>
@@ -11294,7 +11828,7 @@
               <a:buNone/>
             </a:pPr>
             <a:r>
-              <a:rPr lang="en-US" sz="1500" b="1" dirty="0">
+              <a:rPr lang="en-US" sz="1300" b="1" dirty="0">
                 <a:solidFill>
                   <a:srgbClr val="C8952B"/>
                 </a:solidFill>
@@ -11304,7 +11838,7 @@
               </a:rPr>
               <a:t>6</a:t>
             </a:r>
-            <a:endParaRPr lang="en-US" sz="1500" dirty="0"/>
+            <a:endParaRPr lang="en-US" sz="1300" dirty="0"/>
           </a:p>
         </p:txBody>
       </p:sp>
@@ -11316,8 +11850,8 @@
         </p:nvSpPr>
         <p:spPr>
           <a:xfrm>
-            <a:off x="3877056" y="4663440"/>
-            <a:ext cx="1572768" cy="566928"/>
+            <a:off x="3233318" y="4663440"/>
+            <a:ext cx="1185062" cy="566928"/>
           </a:xfrm>
           <a:prstGeom prst="rect">
             <a:avLst/>
@@ -11333,7 +11867,7 @@
               <a:buNone/>
             </a:pPr>
             <a:r>
-              <a:rPr lang="en-US" sz="1050" dirty="0">
+              <a:rPr lang="en-US" sz="900" dirty="0">
                 <a:solidFill>
                   <a:srgbClr val="1A3A5C"/>
                 </a:solidFill>
@@ -11343,7 +11877,7 @@
               </a:rPr>
               <a:t>Administration, OpenAPI, separation of duties</a:t>
             </a:r>
-            <a:endParaRPr lang="en-US" sz="1050" dirty="0"/>
+            <a:endParaRPr lang="en-US" sz="900" dirty="0"/>
           </a:p>
         </p:txBody>
       </p:sp>
@@ -11355,8 +11889,8 @@
         </p:nvSpPr>
         <p:spPr>
           <a:xfrm>
-            <a:off x="5486400" y="4663440"/>
-            <a:ext cx="347472" cy="566928"/>
+            <a:off x="4436669" y="4663440"/>
+            <a:ext cx="310896" cy="566928"/>
           </a:xfrm>
           <a:prstGeom prst="rect">
             <a:avLst/>
@@ -11372,7 +11906,7 @@
               <a:buNone/>
             </a:pPr>
             <a:r>
-              <a:rPr lang="en-US" sz="1050" b="1" dirty="0">
+              <a:rPr lang="en-US" sz="950" b="1" dirty="0">
                 <a:solidFill>
                   <a:srgbClr val="1F7A43"/>
                 </a:solidFill>
@@ -11382,7 +11916,7 @@
               </a:rPr>
               <a:t>+3</a:t>
             </a:r>
-            <a:endParaRPr lang="en-US" sz="1050" dirty="0"/>
+            <a:endParaRPr lang="en-US" sz="950" dirty="0"/>
           </a:p>
         </p:txBody>
       </p:sp>
@@ -11394,8 +11928,8 @@
         </p:nvSpPr>
         <p:spPr>
           <a:xfrm>
-            <a:off x="3383280" y="5303520"/>
-            <a:ext cx="2578608" cy="566928"/>
+            <a:off x="2812694" y="5303520"/>
+            <a:ext cx="2044598" cy="566928"/>
           </a:xfrm>
           <a:prstGeom prst="roundRect">
             <a:avLst>
@@ -11421,8 +11955,8 @@
         </p:nvSpPr>
         <p:spPr>
           <a:xfrm>
-            <a:off x="3511296" y="5303520"/>
-            <a:ext cx="347472" cy="566928"/>
+            <a:off x="2904134" y="5303520"/>
+            <a:ext cx="310896" cy="566928"/>
           </a:xfrm>
           <a:prstGeom prst="rect">
             <a:avLst/>
@@ -11438,7 +11972,7 @@
               <a:buNone/>
             </a:pPr>
             <a:r>
-              <a:rPr lang="en-US" sz="1500" b="1" dirty="0">
+              <a:rPr lang="en-US" sz="1300" b="1" dirty="0">
                 <a:solidFill>
                   <a:srgbClr val="C8952B"/>
                 </a:solidFill>
@@ -11448,7 +11982,7 @@
               </a:rPr>
               <a:t>7</a:t>
             </a:r>
-            <a:endParaRPr lang="en-US" sz="1500" dirty="0"/>
+            <a:endParaRPr lang="en-US" sz="1300" dirty="0"/>
           </a:p>
         </p:txBody>
       </p:sp>
@@ -11460,8 +11994,8 @@
         </p:nvSpPr>
         <p:spPr>
           <a:xfrm>
-            <a:off x="3877056" y="5303520"/>
-            <a:ext cx="1572768" cy="566928"/>
+            <a:off x="3233318" y="5303520"/>
+            <a:ext cx="1185062" cy="566928"/>
           </a:xfrm>
           <a:prstGeom prst="rect">
             <a:avLst/>
@@ -11477,7 +12011,7 @@
               <a:buNone/>
             </a:pPr>
             <a:r>
-              <a:rPr lang="en-US" sz="1050" dirty="0">
+              <a:rPr lang="en-US" sz="900" dirty="0">
                 <a:solidFill>
                   <a:srgbClr val="1A3A5C"/>
                 </a:solidFill>
@@ -11487,7 +12021,7 @@
               </a:rPr>
               <a:t>Web console and self-service</a:t>
             </a:r>
-            <a:endParaRPr lang="en-US" sz="1050" dirty="0"/>
+            <a:endParaRPr lang="en-US" sz="900" dirty="0"/>
           </a:p>
         </p:txBody>
       </p:sp>
@@ -11499,8 +12033,8 @@
         </p:nvSpPr>
         <p:spPr>
           <a:xfrm>
-            <a:off x="5486400" y="5303520"/>
-            <a:ext cx="347472" cy="566928"/>
+            <a:off x="4436669" y="5303520"/>
+            <a:ext cx="310896" cy="566928"/>
           </a:xfrm>
           <a:prstGeom prst="rect">
             <a:avLst/>
@@ -11516,7 +12050,7 @@
               <a:buNone/>
             </a:pPr>
             <a:r>
-              <a:rPr lang="en-US" sz="1050" b="1" dirty="0">
+              <a:rPr lang="en-US" sz="950" b="1" dirty="0">
                 <a:solidFill>
                   <a:srgbClr val="1F7A43"/>
                 </a:solidFill>
@@ -11526,7 +12060,7 @@
               </a:rPr>
               <a:t>+2</a:t>
             </a:r>
-            <a:endParaRPr lang="en-US" sz="1050" dirty="0"/>
+            <a:endParaRPr lang="en-US" sz="950" dirty="0"/>
           </a:p>
         </p:txBody>
       </p:sp>
@@ -11538,8 +12072,8 @@
         </p:nvSpPr>
         <p:spPr>
           <a:xfrm>
-            <a:off x="5998464" y="1709928"/>
-            <a:ext cx="173736" cy="164592"/>
+            <a:off x="4884725" y="1709928"/>
+            <a:ext cx="164592" cy="164592"/>
           </a:xfrm>
           <a:prstGeom prst="rightArrow">
             <a:avLst/>
@@ -11563,8 +12097,8 @@
         </p:nvSpPr>
         <p:spPr>
           <a:xfrm>
-            <a:off x="6199632" y="1463040"/>
-            <a:ext cx="2578608" cy="658368"/>
+            <a:off x="5058461" y="1463040"/>
+            <a:ext cx="2044598" cy="658368"/>
           </a:xfrm>
           <a:prstGeom prst="roundRect">
             <a:avLst>
@@ -11590,8 +12124,8 @@
         </p:nvSpPr>
         <p:spPr>
           <a:xfrm>
-            <a:off x="6327648" y="1463040"/>
-            <a:ext cx="2322576" cy="658368"/>
+            <a:off x="5186477" y="1463040"/>
+            <a:ext cx="1788566" cy="658368"/>
           </a:xfrm>
           <a:prstGeom prst="rect">
             <a:avLst/>
@@ -11607,7 +12141,7 @@
               <a:buNone/>
             </a:pPr>
             <a:r>
-              <a:rPr lang="en-US" sz="1400" b="1" dirty="0">
+              <a:rPr lang="en-US" sz="1250" b="1" dirty="0">
                 <a:solidFill>
                   <a:srgbClr val="FFFFFF"/>
                 </a:solidFill>
@@ -11617,7 +12151,7 @@
               </a:rPr>
               <a:t>C · Enterprise fit</a:t>
             </a:r>
-            <a:endParaRPr lang="en-US" sz="1400" dirty="0"/>
+            <a:endParaRPr lang="en-US" sz="1250" dirty="0"/>
           </a:p>
         </p:txBody>
       </p:sp>
@@ -11629,8 +12163,8 @@
         </p:nvSpPr>
         <p:spPr>
           <a:xfrm>
-            <a:off x="6291072" y="2176272"/>
-            <a:ext cx="2395728" cy="475488"/>
+            <a:off x="5149901" y="2176272"/>
+            <a:ext cx="1861718" cy="512064"/>
           </a:xfrm>
           <a:prstGeom prst="rect">
             <a:avLst/>
@@ -11646,7 +12180,7 @@
               <a:buNone/>
             </a:pPr>
             <a:r>
-              <a:rPr lang="en-US" sz="1000" i="1" dirty="0">
+              <a:rPr lang="en-US" sz="900" i="1" dirty="0">
                 <a:solidFill>
                   <a:srgbClr val="7B8794"/>
                 </a:solidFill>
@@ -11656,7 +12190,7 @@
               </a:rPr>
               <a:t>What an auditor and a security team ask for.</a:t>
             </a:r>
-            <a:endParaRPr lang="en-US" sz="1000" dirty="0"/>
+            <a:endParaRPr lang="en-US" sz="900" dirty="0"/>
           </a:p>
         </p:txBody>
       </p:sp>
@@ -11668,8 +12202,8 @@
         </p:nvSpPr>
         <p:spPr>
           <a:xfrm>
-            <a:off x="6199632" y="2743200"/>
-            <a:ext cx="2578608" cy="566928"/>
+            <a:off x="5058461" y="2743200"/>
+            <a:ext cx="2044598" cy="566928"/>
           </a:xfrm>
           <a:prstGeom prst="roundRect">
             <a:avLst>
@@ -11695,8 +12229,8 @@
         </p:nvSpPr>
         <p:spPr>
           <a:xfrm>
-            <a:off x="6327648" y="2743200"/>
-            <a:ext cx="347472" cy="566928"/>
+            <a:off x="5149901" y="2743200"/>
+            <a:ext cx="310896" cy="566928"/>
           </a:xfrm>
           <a:prstGeom prst="rect">
             <a:avLst/>
@@ -11712,7 +12246,7 @@
               <a:buNone/>
             </a:pPr>
             <a:r>
-              <a:rPr lang="en-US" sz="1500" b="1" dirty="0">
+              <a:rPr lang="en-US" sz="1300" b="1" dirty="0">
                 <a:solidFill>
                   <a:srgbClr val="C8952B"/>
                 </a:solidFill>
@@ -11722,7 +12256,7 @@
               </a:rPr>
               <a:t>8</a:t>
             </a:r>
-            <a:endParaRPr lang="en-US" sz="1500" dirty="0"/>
+            <a:endParaRPr lang="en-US" sz="1300" dirty="0"/>
           </a:p>
         </p:txBody>
       </p:sp>
@@ -11734,8 +12268,8 @@
         </p:nvSpPr>
         <p:spPr>
           <a:xfrm>
-            <a:off x="6693408" y="2743200"/>
-            <a:ext cx="1572768" cy="566928"/>
+            <a:off x="5479085" y="2743200"/>
+            <a:ext cx="1185062" cy="566928"/>
           </a:xfrm>
           <a:prstGeom prst="rect">
             <a:avLst/>
@@ -11751,7 +12285,7 @@
               <a:buNone/>
             </a:pPr>
             <a:r>
-              <a:rPr lang="en-US" sz="1050" dirty="0">
+              <a:rPr lang="en-US" sz="900" dirty="0">
                 <a:solidFill>
                   <a:srgbClr val="1A3A5C"/>
                 </a:solidFill>
@@ -11761,7 +12295,7 @@
               </a:rPr>
               <a:t>Enterprise identity and policy</a:t>
             </a:r>
-            <a:endParaRPr lang="en-US" sz="1050" dirty="0"/>
+            <a:endParaRPr lang="en-US" sz="900" dirty="0"/>
           </a:p>
         </p:txBody>
       </p:sp>
@@ -11773,8 +12307,8 @@
         </p:nvSpPr>
         <p:spPr>
           <a:xfrm>
-            <a:off x="8302752" y="2743200"/>
-            <a:ext cx="347472" cy="566928"/>
+            <a:off x="6682435" y="2743200"/>
+            <a:ext cx="310896" cy="566928"/>
           </a:xfrm>
           <a:prstGeom prst="rect">
             <a:avLst/>
@@ -11790,7 +12324,7 @@
               <a:buNone/>
             </a:pPr>
             <a:r>
-              <a:rPr lang="en-US" sz="1050" b="1" dirty="0">
+              <a:rPr lang="en-US" sz="950" b="1" dirty="0">
                 <a:solidFill>
                   <a:srgbClr val="1F7A43"/>
                 </a:solidFill>
@@ -11800,7 +12334,7 @@
               </a:rPr>
               <a:t>+2</a:t>
             </a:r>
-            <a:endParaRPr lang="en-US" sz="1050" dirty="0"/>
+            <a:endParaRPr lang="en-US" sz="950" dirty="0"/>
           </a:p>
         </p:txBody>
       </p:sp>
@@ -11812,8 +12346,8 @@
         </p:nvSpPr>
         <p:spPr>
           <a:xfrm>
-            <a:off x="6199632" y="3383280"/>
-            <a:ext cx="2578608" cy="566928"/>
+            <a:off x="5058461" y="3383280"/>
+            <a:ext cx="2044598" cy="566928"/>
           </a:xfrm>
           <a:prstGeom prst="roundRect">
             <a:avLst>
@@ -11839,8 +12373,8 @@
         </p:nvSpPr>
         <p:spPr>
           <a:xfrm>
-            <a:off x="6327648" y="3383280"/>
-            <a:ext cx="347472" cy="566928"/>
+            <a:off x="5149901" y="3383280"/>
+            <a:ext cx="310896" cy="566928"/>
           </a:xfrm>
           <a:prstGeom prst="rect">
             <a:avLst/>
@@ -11856,7 +12390,7 @@
               <a:buNone/>
             </a:pPr>
             <a:r>
-              <a:rPr lang="en-US" sz="1500" b="1" dirty="0">
+              <a:rPr lang="en-US" sz="1300" b="1" dirty="0">
                 <a:solidFill>
                   <a:srgbClr val="C8952B"/>
                 </a:solidFill>
@@ -11866,7 +12400,7 @@
               </a:rPr>
               <a:t>9</a:t>
             </a:r>
-            <a:endParaRPr lang="en-US" sz="1500" dirty="0"/>
+            <a:endParaRPr lang="en-US" sz="1300" dirty="0"/>
           </a:p>
         </p:txBody>
       </p:sp>
@@ -11878,8 +12412,8 @@
         </p:nvSpPr>
         <p:spPr>
           <a:xfrm>
-            <a:off x="6693408" y="3383280"/>
-            <a:ext cx="1572768" cy="566928"/>
+            <a:off x="5479085" y="3383280"/>
+            <a:ext cx="1185062" cy="566928"/>
           </a:xfrm>
           <a:prstGeom prst="rect">
             <a:avLst/>
@@ -11895,7 +12429,7 @@
               <a:buNone/>
             </a:pPr>
             <a:r>
-              <a:rPr lang="en-US" sz="1050" dirty="0">
+              <a:rPr lang="en-US" sz="900" dirty="0">
                 <a:solidFill>
                   <a:srgbClr val="1A3A5C"/>
                 </a:solidFill>
@@ -11905,7 +12439,7 @@
               </a:rPr>
               <a:t>Audit externalisation, compliance and ceremony</a:t>
             </a:r>
-            <a:endParaRPr lang="en-US" sz="1050" dirty="0"/>
+            <a:endParaRPr lang="en-US" sz="900" dirty="0"/>
           </a:p>
         </p:txBody>
       </p:sp>
@@ -11917,8 +12451,8 @@
         </p:nvSpPr>
         <p:spPr>
           <a:xfrm>
-            <a:off x="8302752" y="3383280"/>
-            <a:ext cx="347472" cy="566928"/>
+            <a:off x="6682435" y="3383280"/>
+            <a:ext cx="310896" cy="566928"/>
           </a:xfrm>
           <a:prstGeom prst="rect">
             <a:avLst/>
@@ -11934,7 +12468,7 @@
               <a:buNone/>
             </a:pPr>
             <a:r>
-              <a:rPr lang="en-US" sz="1050" b="1" dirty="0">
+              <a:rPr lang="en-US" sz="950" b="1" dirty="0">
                 <a:solidFill>
                   <a:srgbClr val="1F7A43"/>
                 </a:solidFill>
@@ -11944,7 +12478,7 @@
               </a:rPr>
               <a:t>+7</a:t>
             </a:r>
-            <a:endParaRPr lang="en-US" sz="1050" dirty="0"/>
+            <a:endParaRPr lang="en-US" sz="950" dirty="0"/>
           </a:p>
         </p:txBody>
       </p:sp>
@@ -11956,8 +12490,8 @@
         </p:nvSpPr>
         <p:spPr>
           <a:xfrm>
-            <a:off x="8814816" y="1709928"/>
-            <a:ext cx="173736" cy="164592"/>
+            <a:off x="7130491" y="1709928"/>
+            <a:ext cx="164592" cy="164592"/>
           </a:xfrm>
           <a:prstGeom prst="rightArrow">
             <a:avLst/>
@@ -11981,8 +12515,8 @@
         </p:nvSpPr>
         <p:spPr>
           <a:xfrm>
-            <a:off x="9015984" y="1463040"/>
-            <a:ext cx="2578608" cy="658368"/>
+            <a:off x="7304227" y="1463040"/>
+            <a:ext cx="2044598" cy="658368"/>
           </a:xfrm>
           <a:prstGeom prst="roundRect">
             <a:avLst>
@@ -12008,8 +12542,8 @@
         </p:nvSpPr>
         <p:spPr>
           <a:xfrm>
-            <a:off x="9144000" y="1463040"/>
-            <a:ext cx="2322576" cy="658368"/>
+            <a:off x="7432243" y="1463040"/>
+            <a:ext cx="1788566" cy="658368"/>
           </a:xfrm>
           <a:prstGeom prst="rect">
             <a:avLst/>
@@ -12025,7 +12559,7 @@
               <a:buNone/>
             </a:pPr>
             <a:r>
-              <a:rPr lang="en-US" sz="1400" b="1" dirty="0">
+              <a:rPr lang="en-US" sz="1250" b="1" dirty="0">
                 <a:solidFill>
                   <a:srgbClr val="FFFFFF"/>
                 </a:solidFill>
@@ -12035,7 +12569,7 @@
               </a:rPr>
               <a:t>D · Scale, availability and tenancy</a:t>
             </a:r>
-            <a:endParaRPr lang="en-US" sz="1400" dirty="0"/>
+            <a:endParaRPr lang="en-US" sz="1250" dirty="0"/>
           </a:p>
         </p:txBody>
       </p:sp>
@@ -12047,8 +12581,8 @@
         </p:nvSpPr>
         <p:spPr>
           <a:xfrm>
-            <a:off x="9107424" y="2176272"/>
-            <a:ext cx="2395728" cy="475488"/>
+            <a:off x="7395667" y="2176272"/>
+            <a:ext cx="1861718" cy="512064"/>
           </a:xfrm>
           <a:prstGeom prst="rect">
             <a:avLst/>
@@ -12064,7 +12598,7 @@
               <a:buNone/>
             </a:pPr>
             <a:r>
-              <a:rPr lang="en-US" sz="1000" i="1" dirty="0">
+              <a:rPr lang="en-US" sz="900" i="1" dirty="0">
                 <a:solidFill>
                   <a:srgbClr val="7B8794"/>
                 </a:solidFill>
@@ -12074,7 +12608,7 @@
               </a:rPr>
               <a:t>Needs infrastructure to verify.</a:t>
             </a:r>
-            <a:endParaRPr lang="en-US" sz="1000" dirty="0"/>
+            <a:endParaRPr lang="en-US" sz="900" dirty="0"/>
           </a:p>
         </p:txBody>
       </p:sp>
@@ -12086,8 +12620,8 @@
         </p:nvSpPr>
         <p:spPr>
           <a:xfrm>
-            <a:off x="9015984" y="2743200"/>
-            <a:ext cx="2578608" cy="566928"/>
+            <a:off x="7304227" y="2743200"/>
+            <a:ext cx="2044598" cy="566928"/>
           </a:xfrm>
           <a:prstGeom prst="roundRect">
             <a:avLst>
@@ -12113,8 +12647,8 @@
         </p:nvSpPr>
         <p:spPr>
           <a:xfrm>
-            <a:off x="9144000" y="2743200"/>
-            <a:ext cx="347472" cy="566928"/>
+            <a:off x="7395667" y="2743200"/>
+            <a:ext cx="310896" cy="566928"/>
           </a:xfrm>
           <a:prstGeom prst="rect">
             <a:avLst/>
@@ -12130,7 +12664,7 @@
               <a:buNone/>
             </a:pPr>
             <a:r>
-              <a:rPr lang="en-US" sz="1500" b="1" dirty="0">
+              <a:rPr lang="en-US" sz="1300" b="1" dirty="0">
                 <a:solidFill>
                   <a:srgbClr val="C8952B"/>
                 </a:solidFill>
@@ -12140,7 +12674,7 @@
               </a:rPr>
               <a:t>10</a:t>
             </a:r>
-            <a:endParaRPr lang="en-US" sz="1500" dirty="0"/>
+            <a:endParaRPr lang="en-US" sz="1300" dirty="0"/>
           </a:p>
         </p:txBody>
       </p:sp>
@@ -12152,8 +12686,8 @@
         </p:nvSpPr>
         <p:spPr>
           <a:xfrm>
-            <a:off x="9509760" y="2743200"/>
-            <a:ext cx="1572768" cy="566928"/>
+            <a:off x="7724851" y="2743200"/>
+            <a:ext cx="1185062" cy="566928"/>
           </a:xfrm>
           <a:prstGeom prst="rect">
             <a:avLst/>
@@ -12169,7 +12703,7 @@
               <a:buNone/>
             </a:pPr>
             <a:r>
-              <a:rPr lang="en-US" sz="1050" dirty="0">
+              <a:rPr lang="en-US" sz="900" dirty="0">
                 <a:solidFill>
                   <a:srgbClr val="1A3A5C"/>
                 </a:solidFill>
@@ -12179,7 +12713,7 @@
               </a:rPr>
               <a:t>Storage abstraction and PostgreSQL</a:t>
             </a:r>
-            <a:endParaRPr lang="en-US" sz="1050" dirty="0"/>
+            <a:endParaRPr lang="en-US" sz="900" dirty="0"/>
           </a:p>
         </p:txBody>
       </p:sp>
@@ -12191,8 +12725,8 @@
         </p:nvSpPr>
         <p:spPr>
           <a:xfrm>
-            <a:off x="11119104" y="2743200"/>
-            <a:ext cx="347472" cy="566928"/>
+            <a:off x="8928202" y="2743200"/>
+            <a:ext cx="310896" cy="566928"/>
           </a:xfrm>
           <a:prstGeom prst="rect">
             <a:avLst/>
@@ -12208,7 +12742,7 @@
               <a:buNone/>
             </a:pPr>
             <a:r>
-              <a:rPr lang="en-US" sz="1050" b="1" dirty="0">
+              <a:rPr lang="en-US" sz="950" b="1" dirty="0">
                 <a:solidFill>
                   <a:srgbClr val="1F7A43"/>
                 </a:solidFill>
@@ -12218,7 +12752,7 @@
               </a:rPr>
               <a:t>+1</a:t>
             </a:r>
-            <a:endParaRPr lang="en-US" sz="1050" dirty="0"/>
+            <a:endParaRPr lang="en-US" sz="950" dirty="0"/>
           </a:p>
         </p:txBody>
       </p:sp>
@@ -12230,8 +12764,8 @@
         </p:nvSpPr>
         <p:spPr>
           <a:xfrm>
-            <a:off x="9015984" y="3383280"/>
-            <a:ext cx="2578608" cy="566928"/>
+            <a:off x="7304227" y="3383280"/>
+            <a:ext cx="2044598" cy="566928"/>
           </a:xfrm>
           <a:prstGeom prst="roundRect">
             <a:avLst>
@@ -12257,8 +12791,8 @@
         </p:nvSpPr>
         <p:spPr>
           <a:xfrm>
-            <a:off x="9144000" y="3383280"/>
-            <a:ext cx="347472" cy="566928"/>
+            <a:off x="7395667" y="3383280"/>
+            <a:ext cx="310896" cy="566928"/>
           </a:xfrm>
           <a:prstGeom prst="rect">
             <a:avLst/>
@@ -12274,7 +12808,7 @@
               <a:buNone/>
             </a:pPr>
             <a:r>
-              <a:rPr lang="en-US" sz="1500" b="1" dirty="0">
+              <a:rPr lang="en-US" sz="1300" b="1" dirty="0">
                 <a:solidFill>
                   <a:srgbClr val="C8952B"/>
                 </a:solidFill>
@@ -12284,7 +12818,7 @@
               </a:rPr>
               <a:t>11</a:t>
             </a:r>
-            <a:endParaRPr lang="en-US" sz="1500" dirty="0"/>
+            <a:endParaRPr lang="en-US" sz="1300" dirty="0"/>
           </a:p>
         </p:txBody>
       </p:sp>
@@ -12296,8 +12830,8 @@
         </p:nvSpPr>
         <p:spPr>
           <a:xfrm>
-            <a:off x="9509760" y="3383280"/>
-            <a:ext cx="1572768" cy="566928"/>
+            <a:off x="7724851" y="3383280"/>
+            <a:ext cx="1185062" cy="566928"/>
           </a:xfrm>
           <a:prstGeom prst="rect">
             <a:avLst/>
@@ -12313,7 +12847,7 @@
               <a:buNone/>
             </a:pPr>
             <a:r>
-              <a:rPr lang="en-US" sz="1050" dirty="0">
+              <a:rPr lang="en-US" sz="900" dirty="0">
                 <a:solidFill>
                   <a:srgbClr val="1A3A5C"/>
                 </a:solidFill>
@@ -12323,7 +12857,7 @@
               </a:rPr>
               <a:t>High availability, failover and deployment</a:t>
             </a:r>
-            <a:endParaRPr lang="en-US" sz="1050" dirty="0"/>
+            <a:endParaRPr lang="en-US" sz="900" dirty="0"/>
           </a:p>
         </p:txBody>
       </p:sp>
@@ -12335,8 +12869,8 @@
         </p:nvSpPr>
         <p:spPr>
           <a:xfrm>
-            <a:off x="11119104" y="3383280"/>
-            <a:ext cx="347472" cy="566928"/>
+            <a:off x="8928202" y="3383280"/>
+            <a:ext cx="310896" cy="566928"/>
           </a:xfrm>
           <a:prstGeom prst="rect">
             <a:avLst/>
@@ -12352,7 +12886,7 @@
               <a:buNone/>
             </a:pPr>
             <a:r>
-              <a:rPr lang="en-US" sz="1050" b="1" dirty="0">
+              <a:rPr lang="en-US" sz="950" b="1" dirty="0">
                 <a:solidFill>
                   <a:srgbClr val="1F7A43"/>
                 </a:solidFill>
@@ -12362,7 +12896,7 @@
               </a:rPr>
               <a:t>+6</a:t>
             </a:r>
-            <a:endParaRPr lang="en-US" sz="1050" dirty="0"/>
+            <a:endParaRPr lang="en-US" sz="950" dirty="0"/>
           </a:p>
         </p:txBody>
       </p:sp>
@@ -12374,8 +12908,8 @@
         </p:nvSpPr>
         <p:spPr>
           <a:xfrm>
-            <a:off x="9015984" y="4023360"/>
-            <a:ext cx="2578608" cy="566928"/>
+            <a:off x="7304227" y="4023360"/>
+            <a:ext cx="2044598" cy="566928"/>
           </a:xfrm>
           <a:prstGeom prst="roundRect">
             <a:avLst>
@@ -12401,8 +12935,8 @@
         </p:nvSpPr>
         <p:spPr>
           <a:xfrm>
-            <a:off x="9144000" y="4023360"/>
-            <a:ext cx="347472" cy="566928"/>
+            <a:off x="7395667" y="4023360"/>
+            <a:ext cx="310896" cy="566928"/>
           </a:xfrm>
           <a:prstGeom prst="rect">
             <a:avLst/>
@@ -12418,7 +12952,7 @@
               <a:buNone/>
             </a:pPr>
             <a:r>
-              <a:rPr lang="en-US" sz="1500" b="1" dirty="0">
+              <a:rPr lang="en-US" sz="1300" b="1" dirty="0">
                 <a:solidFill>
                   <a:srgbClr val="C8952B"/>
                 </a:solidFill>
@@ -12428,7 +12962,7 @@
               </a:rPr>
               <a:t>12</a:t>
             </a:r>
-            <a:endParaRPr lang="en-US" sz="1500" dirty="0"/>
+            <a:endParaRPr lang="en-US" sz="1300" dirty="0"/>
           </a:p>
         </p:txBody>
       </p:sp>
@@ -12440,8 +12974,8 @@
         </p:nvSpPr>
         <p:spPr>
           <a:xfrm>
-            <a:off x="9509760" y="4023360"/>
-            <a:ext cx="1572768" cy="566928"/>
+            <a:off x="7724851" y="4023360"/>
+            <a:ext cx="1185062" cy="566928"/>
           </a:xfrm>
           <a:prstGeom prst="rect">
             <a:avLst/>
@@ -12457,7 +12991,7 @@
               <a:buNone/>
             </a:pPr>
             <a:r>
-              <a:rPr lang="en-US" sz="1050" dirty="0">
+              <a:rPr lang="en-US" sz="900" dirty="0">
                 <a:solidFill>
                   <a:srgbClr val="1A3A5C"/>
                 </a:solidFill>
@@ -12467,7 +13001,7 @@
               </a:rPr>
               <a:t>Multi-tenancy</a:t>
             </a:r>
-            <a:endParaRPr lang="en-US" sz="1050" dirty="0"/>
+            <a:endParaRPr lang="en-US" sz="900" dirty="0"/>
           </a:p>
         </p:txBody>
       </p:sp>
@@ -12479,8 +13013,8 @@
         </p:nvSpPr>
         <p:spPr>
           <a:xfrm>
-            <a:off x="11119104" y="4023360"/>
-            <a:ext cx="347472" cy="566928"/>
+            <a:off x="8928202" y="4023360"/>
+            <a:ext cx="310896" cy="566928"/>
           </a:xfrm>
           <a:prstGeom prst="rect">
             <a:avLst/>
@@ -12496,7 +13030,7 @@
               <a:buNone/>
             </a:pPr>
             <a:r>
-              <a:rPr lang="en-US" sz="1050" b="1" dirty="0">
+              <a:rPr lang="en-US" sz="950" b="1" dirty="0">
                 <a:solidFill>
                   <a:srgbClr val="1F7A43"/>
                 </a:solidFill>
@@ -12506,13 +13040,431 @@
               </a:rPr>
               <a:t>+2</a:t>
             </a:r>
-            <a:endParaRPr lang="en-US" sz="1050" dirty="0"/>
-          </a:p>
-        </p:txBody>
-      </p:sp>
-      <p:sp>
-        <p:nvSpPr>
-          <p:cNvPr id="67" name="Text 65"/>
+            <a:endParaRPr lang="en-US" sz="950" dirty="0"/>
+          </a:p>
+        </p:txBody>
+      </p:sp>
+      <p:sp>
+        <p:nvSpPr>
+          <p:cNvPr id="67" name="Shape 65"/>
+          <p:cNvSpPr/>
+          <p:nvPr/>
+        </p:nvSpPr>
+        <p:spPr>
+          <a:xfrm>
+            <a:off x="9376258" y="1709928"/>
+            <a:ext cx="164592" cy="164592"/>
+          </a:xfrm>
+          <a:prstGeom prst="rightArrow">
+            <a:avLst/>
+          </a:prstGeom>
+          <a:solidFill>
+            <a:srgbClr val="2E6DA4"/>
+          </a:solidFill>
+          <a:ln w="12700">
+            <a:solidFill>
+              <a:srgbClr val="2E6DA4"/>
+            </a:solidFill>
+            <a:prstDash val="solid"/>
+          </a:ln>
+        </p:spPr>
+      </p:sp>
+      <p:sp>
+        <p:nvSpPr>
+          <p:cNvPr id="68" name="Shape 66"/>
+          <p:cNvSpPr/>
+          <p:nvPr/>
+        </p:nvSpPr>
+        <p:spPr>
+          <a:xfrm>
+            <a:off x="9549994" y="1463040"/>
+            <a:ext cx="2044598" cy="658368"/>
+          </a:xfrm>
+          <a:prstGeom prst="roundRect">
+            <a:avLst>
+              <a:gd name="adj" fmla="val 8333"/>
+            </a:avLst>
+          </a:prstGeom>
+          <a:solidFill>
+            <a:srgbClr val="1A3A5C"/>
+          </a:solidFill>
+          <a:ln w="12700">
+            <a:solidFill>
+              <a:srgbClr val="1A3A5C"/>
+            </a:solidFill>
+            <a:prstDash val="solid"/>
+          </a:ln>
+        </p:spPr>
+      </p:sp>
+      <p:sp>
+        <p:nvSpPr>
+          <p:cNvPr id="69" name="Text 67"/>
+          <p:cNvSpPr txBox="1"/>
+          <p:nvPr/>
+        </p:nvSpPr>
+        <p:spPr>
+          <a:xfrm>
+            <a:off x="9678010" y="1463040"/>
+            <a:ext cx="1788566" cy="658368"/>
+          </a:xfrm>
+          <a:prstGeom prst="rect">
+            <a:avLst/>
+          </a:prstGeom>
+          <a:noFill/>
+          <a:ln/>
+        </p:spPr>
+        <p:txBody>
+          <a:bodyPr wrap="square" lIns="0" tIns="0" rIns="0" bIns="0" rtlCol="0" anchor="ctr"/>
+          <a:lstStyle/>
+          <a:p>
+            <a:pPr algn="ctr" indent="0" marL="0">
+              <a:buNone/>
+            </a:pPr>
+            <a:r>
+              <a:rPr lang="en-US" sz="1250" b="1" dirty="0">
+                <a:solidFill>
+                  <a:srgbClr val="FFFFFF"/>
+                </a:solidFill>
+                <a:latin typeface="Cambria" pitchFamily="34" charset="0"/>
+                <a:ea typeface="Cambria" pitchFamily="34" charset="-122"/>
+                <a:cs typeface="Cambria" pitchFamily="34" charset="-120"/>
+              </a:rPr>
+              <a:t>E · Protocol and estate reach</a:t>
+            </a:r>
+            <a:endParaRPr lang="en-US" sz="1250" dirty="0"/>
+          </a:p>
+        </p:txBody>
+      </p:sp>
+      <p:sp>
+        <p:nvSpPr>
+          <p:cNvPr id="70" name="Text 68"/>
+          <p:cNvSpPr txBox="1"/>
+          <p:nvPr/>
+        </p:nvSpPr>
+        <p:spPr>
+          <a:xfrm>
+            <a:off x="9641434" y="2176272"/>
+            <a:ext cx="1861718" cy="512064"/>
+          </a:xfrm>
+          <a:prstGeom prst="rect">
+            <a:avLst/>
+          </a:prstGeom>
+          <a:noFill/>
+          <a:ln/>
+        </p:spPr>
+        <p:txBody>
+          <a:bodyPr wrap="square" lIns="0" tIns="0" rIns="0" bIns="0" rtlCol="0" anchor="ctr"/>
+          <a:lstStyle/>
+          <a:p>
+            <a:pPr algn="ctr" indent="0" marL="0">
+              <a:buNone/>
+            </a:pPr>
+            <a:r>
+              <a:rPr lang="en-US" sz="900" i="1" dirty="0">
+                <a:solidFill>
+                  <a:srgbClr val="7B8794"/>
+                </a:solidFill>
+                <a:latin typeface="Calibri" pitchFamily="34" charset="0"/>
+                <a:ea typeface="Calibri" pitchFamily="34" charset="-122"/>
+                <a:cs typeface="Calibri" pitchFamily="34" charset="-120"/>
+              </a:rPr>
+              <a:t>Additive, independent of D, verifiable here.</a:t>
+            </a:r>
+            <a:endParaRPr lang="en-US" sz="900" dirty="0"/>
+          </a:p>
+        </p:txBody>
+      </p:sp>
+      <p:sp>
+        <p:nvSpPr>
+          <p:cNvPr id="71" name="Shape 69"/>
+          <p:cNvSpPr/>
+          <p:nvPr/>
+        </p:nvSpPr>
+        <p:spPr>
+          <a:xfrm>
+            <a:off x="9549994" y="2743200"/>
+            <a:ext cx="2044598" cy="566928"/>
+          </a:xfrm>
+          <a:prstGeom prst="roundRect">
+            <a:avLst>
+              <a:gd name="adj" fmla="val 8065"/>
+            </a:avLst>
+          </a:prstGeom>
+          <a:solidFill>
+            <a:srgbClr val="E8EFF6"/>
+          </a:solidFill>
+          <a:ln w="12700">
+            <a:solidFill>
+              <a:srgbClr val="E8EFF6"/>
+            </a:solidFill>
+            <a:prstDash val="solid"/>
+          </a:ln>
+        </p:spPr>
+      </p:sp>
+      <p:sp>
+        <p:nvSpPr>
+          <p:cNvPr id="72" name="Text 70"/>
+          <p:cNvSpPr txBox="1"/>
+          <p:nvPr/>
+        </p:nvSpPr>
+        <p:spPr>
+          <a:xfrm>
+            <a:off x="9641434" y="2743200"/>
+            <a:ext cx="310896" cy="566928"/>
+          </a:xfrm>
+          <a:prstGeom prst="rect">
+            <a:avLst/>
+          </a:prstGeom>
+          <a:noFill/>
+          <a:ln/>
+        </p:spPr>
+        <p:txBody>
+          <a:bodyPr wrap="square" lIns="0" tIns="0" rIns="0" bIns="0" rtlCol="0" anchor="ctr"/>
+          <a:lstStyle/>
+          <a:p>
+            <a:pPr indent="0" marL="0">
+              <a:buNone/>
+            </a:pPr>
+            <a:r>
+              <a:rPr lang="en-US" sz="1300" b="1" dirty="0">
+                <a:solidFill>
+                  <a:srgbClr val="C8952B"/>
+                </a:solidFill>
+                <a:latin typeface="Cambria" pitchFamily="34" charset="0"/>
+                <a:ea typeface="Cambria" pitchFamily="34" charset="-122"/>
+                <a:cs typeface="Cambria" pitchFamily="34" charset="-120"/>
+              </a:rPr>
+              <a:t>13</a:t>
+            </a:r>
+            <a:endParaRPr lang="en-US" sz="1300" dirty="0"/>
+          </a:p>
+        </p:txBody>
+      </p:sp>
+      <p:sp>
+        <p:nvSpPr>
+          <p:cNvPr id="73" name="Text 71"/>
+          <p:cNvSpPr txBox="1"/>
+          <p:nvPr/>
+        </p:nvSpPr>
+        <p:spPr>
+          <a:xfrm>
+            <a:off x="9970618" y="2743200"/>
+            <a:ext cx="1185062" cy="566928"/>
+          </a:xfrm>
+          <a:prstGeom prst="rect">
+            <a:avLst/>
+          </a:prstGeom>
+          <a:noFill/>
+          <a:ln/>
+        </p:spPr>
+        <p:txBody>
+          <a:bodyPr wrap="square" lIns="0" tIns="0" rIns="0" bIns="0" rtlCol="0" anchor="ctr"/>
+          <a:lstStyle/>
+          <a:p>
+            <a:pPr indent="0" marL="0">
+              <a:buNone/>
+            </a:pPr>
+            <a:r>
+              <a:rPr lang="en-US" sz="900" dirty="0">
+                <a:solidFill>
+                  <a:srgbClr val="1A3A5C"/>
+                </a:solidFill>
+                <a:latin typeface="Calibri" pitchFamily="34" charset="0"/>
+                <a:ea typeface="Calibri" pitchFamily="34" charset="-122"/>
+                <a:cs typeface="Calibri" pitchFamily="34" charset="-120"/>
+              </a:rPr>
+              <a:t>KMIP JSON and XML encodings</a:t>
+            </a:r>
+            <a:endParaRPr lang="en-US" sz="900" dirty="0"/>
+          </a:p>
+        </p:txBody>
+      </p:sp>
+      <p:sp>
+        <p:nvSpPr>
+          <p:cNvPr id="74" name="Text 72"/>
+          <p:cNvSpPr txBox="1"/>
+          <p:nvPr/>
+        </p:nvSpPr>
+        <p:spPr>
+          <a:xfrm>
+            <a:off x="11173968" y="2743200"/>
+            <a:ext cx="310896" cy="566928"/>
+          </a:xfrm>
+          <a:prstGeom prst="rect">
+            <a:avLst/>
+          </a:prstGeom>
+          <a:noFill/>
+          <a:ln/>
+        </p:spPr>
+        <p:txBody>
+          <a:bodyPr wrap="square" lIns="0" tIns="0" rIns="0" bIns="0" rtlCol="0" anchor="ctr"/>
+          <a:lstStyle/>
+          <a:p>
+            <a:pPr algn="r" indent="0" marL="0">
+              <a:buNone/>
+            </a:pPr>
+            <a:r>
+              <a:rPr lang="en-US" sz="950" b="1" dirty="0">
+                <a:solidFill>
+                  <a:srgbClr val="1F7A43"/>
+                </a:solidFill>
+                <a:latin typeface="Calibri" pitchFamily="34" charset="0"/>
+                <a:ea typeface="Calibri" pitchFamily="34" charset="-122"/>
+                <a:cs typeface="Calibri" pitchFamily="34" charset="-120"/>
+              </a:rPr>
+              <a:t>+1</a:t>
+            </a:r>
+            <a:endParaRPr lang="en-US" sz="950" dirty="0"/>
+          </a:p>
+        </p:txBody>
+      </p:sp>
+      <p:sp>
+        <p:nvSpPr>
+          <p:cNvPr id="75" name="Shape 73"/>
+          <p:cNvSpPr/>
+          <p:nvPr/>
+        </p:nvSpPr>
+        <p:spPr>
+          <a:xfrm>
+            <a:off x="9549994" y="3383280"/>
+            <a:ext cx="2044598" cy="566928"/>
+          </a:xfrm>
+          <a:prstGeom prst="roundRect">
+            <a:avLst>
+              <a:gd name="adj" fmla="val 8065"/>
+            </a:avLst>
+          </a:prstGeom>
+          <a:solidFill>
+            <a:srgbClr val="E8EFF6"/>
+          </a:solidFill>
+          <a:ln w="12700">
+            <a:solidFill>
+              <a:srgbClr val="E8EFF6"/>
+            </a:solidFill>
+            <a:prstDash val="solid"/>
+          </a:ln>
+        </p:spPr>
+      </p:sp>
+      <p:sp>
+        <p:nvSpPr>
+          <p:cNvPr id="76" name="Text 74"/>
+          <p:cNvSpPr txBox="1"/>
+          <p:nvPr/>
+        </p:nvSpPr>
+        <p:spPr>
+          <a:xfrm>
+            <a:off x="9641434" y="3383280"/>
+            <a:ext cx="310896" cy="566928"/>
+          </a:xfrm>
+          <a:prstGeom prst="rect">
+            <a:avLst/>
+          </a:prstGeom>
+          <a:noFill/>
+          <a:ln/>
+        </p:spPr>
+        <p:txBody>
+          <a:bodyPr wrap="square" lIns="0" tIns="0" rIns="0" bIns="0" rtlCol="0" anchor="ctr"/>
+          <a:lstStyle/>
+          <a:p>
+            <a:pPr indent="0" marL="0">
+              <a:buNone/>
+            </a:pPr>
+            <a:r>
+              <a:rPr lang="en-US" sz="1300" b="1" dirty="0">
+                <a:solidFill>
+                  <a:srgbClr val="C8952B"/>
+                </a:solidFill>
+                <a:latin typeface="Cambria" pitchFamily="34" charset="0"/>
+                <a:ea typeface="Cambria" pitchFamily="34" charset="-122"/>
+                <a:cs typeface="Cambria" pitchFamily="34" charset="-120"/>
+              </a:rPr>
+              <a:t>14</a:t>
+            </a:r>
+            <a:endParaRPr lang="en-US" sz="1300" dirty="0"/>
+          </a:p>
+        </p:txBody>
+      </p:sp>
+      <p:sp>
+        <p:nvSpPr>
+          <p:cNvPr id="77" name="Text 75"/>
+          <p:cNvSpPr txBox="1"/>
+          <p:nvPr/>
+        </p:nvSpPr>
+        <p:spPr>
+          <a:xfrm>
+            <a:off x="9970618" y="3383280"/>
+            <a:ext cx="1185062" cy="566928"/>
+          </a:xfrm>
+          <a:prstGeom prst="rect">
+            <a:avLst/>
+          </a:prstGeom>
+          <a:noFill/>
+          <a:ln/>
+        </p:spPr>
+        <p:txBody>
+          <a:bodyPr wrap="square" lIns="0" tIns="0" rIns="0" bIns="0" rtlCol="0" anchor="ctr"/>
+          <a:lstStyle/>
+          <a:p>
+            <a:pPr indent="0" marL="0">
+              <a:buNone/>
+            </a:pPr>
+            <a:r>
+              <a:rPr lang="en-US" sz="900" dirty="0">
+                <a:solidFill>
+                  <a:srgbClr val="1A3A5C"/>
+                </a:solidFill>
+                <a:latin typeface="Calibri" pitchFamily="34" charset="0"/>
+                <a:ea typeface="Calibri" pitchFamily="34" charset="-122"/>
+                <a:cs typeface="Calibri" pitchFamily="34" charset="-120"/>
+              </a:rPr>
+              <a:t>Certificate discovery and expiry monitoring</a:t>
+            </a:r>
+            <a:endParaRPr lang="en-US" sz="900" dirty="0"/>
+          </a:p>
+        </p:txBody>
+      </p:sp>
+      <p:sp>
+        <p:nvSpPr>
+          <p:cNvPr id="78" name="Text 76"/>
+          <p:cNvSpPr txBox="1"/>
+          <p:nvPr/>
+        </p:nvSpPr>
+        <p:spPr>
+          <a:xfrm>
+            <a:off x="11173968" y="3383280"/>
+            <a:ext cx="310896" cy="566928"/>
+          </a:xfrm>
+          <a:prstGeom prst="rect">
+            <a:avLst/>
+          </a:prstGeom>
+          <a:noFill/>
+          <a:ln/>
+        </p:spPr>
+        <p:txBody>
+          <a:bodyPr wrap="square" lIns="0" tIns="0" rIns="0" bIns="0" rtlCol="0" anchor="ctr"/>
+          <a:lstStyle/>
+          <a:p>
+            <a:pPr algn="r" indent="0" marL="0">
+              <a:buNone/>
+            </a:pPr>
+            <a:r>
+              <a:rPr lang="en-US" sz="950" b="1" dirty="0">
+                <a:solidFill>
+                  <a:srgbClr val="1F7A43"/>
+                </a:solidFill>
+                <a:latin typeface="Calibri" pitchFamily="34" charset="0"/>
+                <a:ea typeface="Calibri" pitchFamily="34" charset="-122"/>
+                <a:cs typeface="Calibri" pitchFamily="34" charset="-120"/>
+              </a:rPr>
+              <a:t>+1</a:t>
+            </a:r>
+            <a:endParaRPr lang="en-US" sz="950" dirty="0"/>
+          </a:p>
+        </p:txBody>
+      </p:sp>
+      <p:sp>
+        <p:nvSpPr>
+          <p:cNvPr id="79" name="Text 77"/>
           <p:cNvSpPr txBox="1"/>
           <p:nvPr/>
         </p:nvSpPr>
@@ -12614,7 +13566,7 @@
                 <a:ea typeface="Calibri" pitchFamily="34" charset="-122"/>
                 <a:cs typeface="Calibri" pitchFamily="34" charset="-120"/>
               </a:rPr>
-              <a:t>STEP 6 OF 12 · TEST STRATEGY</a:t>
+              <a:t>STEP 6 OF 14 · TEST STRATEGY</a:t>
             </a:r>
             <a:endParaRPr lang="en-US" sz="1150" dirty="0"/>
           </a:p>
@@ -13132,7 +14084,7 @@
                 <a:ea typeface="Calibri" pitchFamily="34" charset="-122"/>
                 <a:cs typeface="Calibri" pitchFamily="34" charset="-120"/>
               </a:rPr>
-              <a:t>STEP 7 OF 12 · DESIGN IMPACT</a:t>
+              <a:t>STEP 7 OF 14 · DESIGN IMPACT</a:t>
             </a:r>
             <a:endParaRPr lang="en-US" sz="1150" dirty="0"/>
           </a:p>
@@ -13657,7 +14609,7 @@
                 <a:ea typeface="Calibri" pitchFamily="34" charset="-122"/>
                 <a:cs typeface="Calibri" pitchFamily="34" charset="-120"/>
               </a:rPr>
-              <a:t>STEP 7 OF 12 · PROPOSED SOLUTION</a:t>
+              <a:t>STEP 7 OF 14 · PROPOSED SOLUTION</a:t>
             </a:r>
             <a:endParaRPr lang="en-US" sz="1150" dirty="0"/>
           </a:p>
@@ -14173,7 +15125,7 @@
                 <a:ea typeface="Calibri" pitchFamily="34" charset="-122"/>
                 <a:cs typeface="Calibri" pitchFamily="34" charset="-120"/>
               </a:rPr>
-              <a:t>STEP 7 OF 12 · TEST STRATEGY</a:t>
+              <a:t>STEP 7 OF 14 · TEST STRATEGY</a:t>
             </a:r>
             <a:endParaRPr lang="en-US" sz="1150" dirty="0"/>
           </a:p>
@@ -14667,7 +15619,7 @@
                 <a:ea typeface="Calibri" pitchFamily="34" charset="-122"/>
                 <a:cs typeface="Calibri" pitchFamily="34" charset="-120"/>
               </a:rPr>
-              <a:t>STEP 8 OF 12 · DESIGN IMPACT</a:t>
+              <a:t>STEP 8 OF 14 · DESIGN IMPACT</a:t>
             </a:r>
             <a:endParaRPr lang="en-US" sz="1150" dirty="0"/>
           </a:p>
@@ -15192,7 +16144,7 @@
                 <a:ea typeface="Calibri" pitchFamily="34" charset="-122"/>
                 <a:cs typeface="Calibri" pitchFamily="34" charset="-120"/>
               </a:rPr>
-              <a:t>STEP 8 OF 12 · PROPOSED SOLUTION</a:t>
+              <a:t>STEP 8 OF 14 · PROPOSED SOLUTION</a:t>
             </a:r>
             <a:endParaRPr lang="en-US" sz="1150" dirty="0"/>
           </a:p>
@@ -15732,7 +16684,7 @@
                 <a:ea typeface="Calibri" pitchFamily="34" charset="-122"/>
                 <a:cs typeface="Calibri" pitchFamily="34" charset="-120"/>
               </a:rPr>
-              <a:t>STEP 8 OF 12 · TEST STRATEGY</a:t>
+              <a:t>STEP 8 OF 14 · TEST STRATEGY</a:t>
             </a:r>
             <a:endParaRPr lang="en-US" sz="1150" dirty="0"/>
           </a:p>
@@ -16250,7 +17202,7 @@
                 <a:ea typeface="Calibri" pitchFamily="34" charset="-122"/>
                 <a:cs typeface="Calibri" pitchFamily="34" charset="-120"/>
               </a:rPr>
-              <a:t>STEP 9 OF 12 · DESIGN IMPACT</a:t>
+              <a:t>STEP 9 OF 14 · DESIGN IMPACT</a:t>
             </a:r>
             <a:endParaRPr lang="en-US" sz="1150" dirty="0"/>
           </a:p>
@@ -16871,7 +17823,7 @@
                 <a:ea typeface="Calibri" pitchFamily="34" charset="-122"/>
                 <a:cs typeface="Calibri" pitchFamily="34" charset="-120"/>
               </a:rPr>
-              <a:t>STEP 9 OF 12 · PROPOSED SOLUTION</a:t>
+              <a:t>STEP 9 OF 14 · PROPOSED SOLUTION</a:t>
             </a:r>
             <a:endParaRPr lang="en-US" sz="1150" dirty="0"/>
           </a:p>
@@ -17507,7 +18459,7 @@
                 <a:ea typeface="Calibri" pitchFamily="34" charset="-122"/>
                 <a:cs typeface="Calibri" pitchFamily="34" charset="-120"/>
               </a:rPr>
-              <a:t>STEP 9 OF 12 · TEST STRATEGY</a:t>
+              <a:t>STEP 9 OF 14 · TEST STRATEGY</a:t>
             </a:r>
             <a:endParaRPr lang="en-US" sz="1150" dirty="0"/>
           </a:p>
@@ -18097,7 +19049,7 @@
                 <a:ea typeface="Calibri" pitchFamily="34" charset="-122"/>
                 <a:cs typeface="Calibri" pitchFamily="34" charset="-120"/>
               </a:rPr>
-              <a:t>STEP 1 OF 12 · DESIGN IMPACT</a:t>
+              <a:t>STEP 1 OF 14 · DESIGN IMPACT</a:t>
             </a:r>
             <a:endParaRPr lang="en-US" sz="1150" dirty="0"/>
           </a:p>
@@ -18646,7 +19598,7 @@
                 <a:ea typeface="Calibri" pitchFamily="34" charset="-122"/>
                 <a:cs typeface="Calibri" pitchFamily="34" charset="-120"/>
               </a:rPr>
-              <a:t>STEP 10 OF 12 · DESIGN IMPACT</a:t>
+              <a:t>STEP 10 OF 14 · DESIGN IMPACT</a:t>
             </a:r>
             <a:endParaRPr lang="en-US" sz="1150" dirty="0"/>
           </a:p>
@@ -19147,7 +20099,7 @@
                 <a:ea typeface="Calibri" pitchFamily="34" charset="-122"/>
                 <a:cs typeface="Calibri" pitchFamily="34" charset="-120"/>
               </a:rPr>
-              <a:t>STEP 10 OF 12 · PROPOSED SOLUTION</a:t>
+              <a:t>STEP 10 OF 14 · PROPOSED SOLUTION</a:t>
             </a:r>
             <a:endParaRPr lang="en-US" sz="1150" dirty="0"/>
           </a:p>
@@ -19639,7 +20591,7 @@
                 <a:ea typeface="Calibri" pitchFamily="34" charset="-122"/>
                 <a:cs typeface="Calibri" pitchFamily="34" charset="-120"/>
               </a:rPr>
-              <a:t>STEP 10 OF 12 · TEST STRATEGY</a:t>
+              <a:t>STEP 10 OF 14 · TEST STRATEGY</a:t>
             </a:r>
             <a:endParaRPr lang="en-US" sz="1150" dirty="0"/>
           </a:p>
@@ -20157,7 +21109,7 @@
                 <a:ea typeface="Calibri" pitchFamily="34" charset="-122"/>
                 <a:cs typeface="Calibri" pitchFamily="34" charset="-120"/>
               </a:rPr>
-              <a:t>STEP 11 OF 12 · DESIGN IMPACT</a:t>
+              <a:t>STEP 11 OF 14 · DESIGN IMPACT</a:t>
             </a:r>
             <a:endParaRPr lang="en-US" sz="1150" dirty="0"/>
           </a:p>
@@ -20682,7 +21634,7 @@
                 <a:ea typeface="Calibri" pitchFamily="34" charset="-122"/>
                 <a:cs typeface="Calibri" pitchFamily="34" charset="-120"/>
               </a:rPr>
-              <a:t>STEP 11 OF 12 · PROPOSED SOLUTION</a:t>
+              <a:t>STEP 11 OF 14 · PROPOSED SOLUTION</a:t>
             </a:r>
             <a:endParaRPr lang="en-US" sz="1150" dirty="0"/>
           </a:p>
@@ -21294,7 +22246,7 @@
                 <a:ea typeface="Calibri" pitchFamily="34" charset="-122"/>
                 <a:cs typeface="Calibri" pitchFamily="34" charset="-120"/>
               </a:rPr>
-              <a:t>STEP 11 OF 12 · TEST STRATEGY</a:t>
+              <a:t>STEP 11 OF 14 · TEST STRATEGY</a:t>
             </a:r>
             <a:endParaRPr lang="en-US" sz="1150" dirty="0"/>
           </a:p>
@@ -21836,7 +22788,7 @@
                 <a:ea typeface="Calibri" pitchFamily="34" charset="-122"/>
                 <a:cs typeface="Calibri" pitchFamily="34" charset="-120"/>
               </a:rPr>
-              <a:t>STEP 12 OF 12 · DESIGN IMPACT</a:t>
+              <a:t>STEP 12 OF 14 · DESIGN IMPACT</a:t>
             </a:r>
             <a:endParaRPr lang="en-US" sz="1150" dirty="0"/>
           </a:p>
@@ -22385,7 +23337,7 @@
                 <a:ea typeface="Calibri" pitchFamily="34" charset="-122"/>
                 <a:cs typeface="Calibri" pitchFamily="34" charset="-120"/>
               </a:rPr>
-              <a:t>STEP 12 OF 12 · PROPOSED SOLUTION</a:t>
+              <a:t>STEP 12 OF 14 · PROPOSED SOLUTION</a:t>
             </a:r>
             <a:endParaRPr lang="en-US" sz="1150" dirty="0"/>
           </a:p>
@@ -22901,7 +23853,7 @@
                 <a:ea typeface="Calibri" pitchFamily="34" charset="-122"/>
                 <a:cs typeface="Calibri" pitchFamily="34" charset="-120"/>
               </a:rPr>
-              <a:t>STEP 12 OF 12 · TEST STRATEGY</a:t>
+              <a:t>STEP 12 OF 14 · TEST STRATEGY</a:t>
             </a:r>
             <a:endParaRPr lang="en-US" sz="1150" dirty="0"/>
           </a:p>
@@ -23392,7 +24344,7 @@
     <p:bg>
       <p:bgPr>
         <a:solidFill>
-          <a:srgbClr val="102437"/>
+          <a:srgbClr val="FFFFFF"/>
         </a:solidFill>
       </p:bgPr>
     </p:bg>
@@ -23443,7 +24395,7 @@
                 <a:ea typeface="Calibri" pitchFamily="34" charset="-122"/>
                 <a:cs typeface="Calibri" pitchFamily="34" charset="-120"/>
               </a:rPr>
-              <a:t>AFTER STEP 12</a:t>
+              <a:t>STEP 13 OF 14 · DESIGN IMPACT</a:t>
             </a:r>
             <a:endParaRPr lang="en-US" sz="1150" dirty="0"/>
           </a:p>
@@ -23476,13 +24428,13 @@
             <a:r>
               <a:rPr lang="en-US" sz="3000" b="1" dirty="0">
                 <a:solidFill>
-                  <a:srgbClr val="FFFFFF"/>
+                  <a:srgbClr val="1A3A5C"/>
                 </a:solidFill>
                 <a:latin typeface="Cambria" pitchFamily="34" charset="0"/>
                 <a:ea typeface="Cambria" pitchFamily="34" charset="-122"/>
                 <a:cs typeface="Cambria" pitchFamily="34" charset="-120"/>
               </a:rPr>
-              <a:t>What the plan does not close</a:t>
+              <a:t>KMIP JSON and XML encodings</a:t>
             </a:r>
             <a:endParaRPr lang="en-US" sz="3000" dirty="0"/>
           </a:p>
@@ -23490,755 +24442,26 @@
       </p:sp>
       <p:sp>
         <p:nvSpPr>
-          <p:cNvPr id="4" name="Text 2"/>
-          <p:cNvSpPr txBox="1"/>
-          <p:nvPr/>
-        </p:nvSpPr>
-        <p:spPr>
-          <a:xfrm>
-            <a:off x="566928" y="1536192"/>
-            <a:ext cx="3520440" cy="219456"/>
-          </a:xfrm>
-          <a:prstGeom prst="rect">
-            <a:avLst/>
-          </a:prstGeom>
-          <a:noFill/>
-          <a:ln/>
-        </p:spPr>
-        <p:txBody>
-          <a:bodyPr wrap="square" lIns="0" tIns="0" rIns="0" bIns="0" rtlCol="0" anchor="ctr"/>
-          <a:lstStyle/>
-          <a:p>
-            <a:pPr indent="0" marL="0">
-              <a:buNone/>
-            </a:pPr>
-            <a:r>
-              <a:rPr lang="en-US" sz="1000" b="1" spc="140" kern="0" dirty="0">
-                <a:solidFill>
-                  <a:srgbClr val="C8952B"/>
-                </a:solidFill>
-                <a:latin typeface="Calibri" pitchFamily="34" charset="0"/>
-                <a:ea typeface="Calibri" pitchFamily="34" charset="-122"/>
-                <a:cs typeface="Calibri" pitchFamily="34" charset="-120"/>
-              </a:rPr>
-              <a:t>INTEGRATION</a:t>
-            </a:r>
-            <a:endParaRPr lang="en-US" sz="1000" dirty="0"/>
-          </a:p>
-        </p:txBody>
-      </p:sp>
-      <p:sp>
-        <p:nvSpPr>
-          <p:cNvPr id="5" name="Text 3"/>
-          <p:cNvSpPr txBox="1"/>
-          <p:nvPr/>
-        </p:nvSpPr>
-        <p:spPr>
-          <a:xfrm>
-            <a:off x="566928" y="1792224"/>
-            <a:ext cx="3520440" cy="859536"/>
-          </a:xfrm>
-          <a:prstGeom prst="rect">
-            <a:avLst/>
-          </a:prstGeom>
-          <a:noFill/>
-          <a:ln/>
-        </p:spPr>
-        <p:txBody>
-          <a:bodyPr wrap="square" lIns="0" tIns="0" rIns="0" bIns="0" rtlCol="0" anchor="ctr"/>
-          <a:lstStyle/>
-          <a:p>
-            <a:pPr indent="0" marL="0">
-              <a:lnSpc>
-                <a:spcPts val="1500"/>
-              </a:lnSpc>
-              <a:buNone/>
-            </a:pPr>
-            <a:r>
-              <a:rPr lang="en-US" sz="1150" dirty="0">
-                <a:solidFill>
-                  <a:srgbClr val="9DB8D4"/>
-                </a:solidFill>
-                <a:latin typeface="Calibri" pitchFamily="34" charset="0"/>
-                <a:ea typeface="Calibri" pitchFamily="34" charset="-122"/>
-                <a:cs typeface="Calibri" pitchFamily="34" charset="-120"/>
-              </a:rPr>
-              <a:t>Cloud BYOK (AWS, Azure, GCP) · Cloud EKM / XKS / hold-your-own-key</a:t>
-            </a:r>
-            <a:endParaRPr lang="en-US" sz="1150" dirty="0"/>
-          </a:p>
-        </p:txBody>
-      </p:sp>
-      <p:sp>
-        <p:nvSpPr>
-          <p:cNvPr id="6" name="Text 4"/>
-          <p:cNvSpPr txBox="1"/>
-          <p:nvPr/>
-        </p:nvSpPr>
-        <p:spPr>
-          <a:xfrm>
-            <a:off x="566928" y="2779776"/>
-            <a:ext cx="3520440" cy="219456"/>
-          </a:xfrm>
-          <a:prstGeom prst="rect">
-            <a:avLst/>
-          </a:prstGeom>
-          <a:noFill/>
-          <a:ln/>
-        </p:spPr>
-        <p:txBody>
-          <a:bodyPr wrap="square" lIns="0" tIns="0" rIns="0" bIns="0" rtlCol="0" anchor="ctr"/>
-          <a:lstStyle/>
-          <a:p>
-            <a:pPr indent="0" marL="0">
-              <a:buNone/>
-            </a:pPr>
-            <a:r>
-              <a:rPr lang="en-US" sz="1000" b="1" spc="140" kern="0" dirty="0">
-                <a:solidFill>
-                  <a:srgbClr val="C8952B"/>
-                </a:solidFill>
-                <a:latin typeface="Calibri" pitchFamily="34" charset="0"/>
-                <a:ea typeface="Calibri" pitchFamily="34" charset="-122"/>
-                <a:cs typeface="Calibri" pitchFamily="34" charset="-120"/>
-              </a:rPr>
-              <a:t>VALIDATION</a:t>
-            </a:r>
-            <a:endParaRPr lang="en-US" sz="1000" dirty="0"/>
-          </a:p>
-        </p:txBody>
-      </p:sp>
-      <p:sp>
-        <p:nvSpPr>
-          <p:cNvPr id="7" name="Text 5"/>
-          <p:cNvSpPr txBox="1"/>
-          <p:nvPr/>
-        </p:nvSpPr>
-        <p:spPr>
-          <a:xfrm>
-            <a:off x="566928" y="3035808"/>
-            <a:ext cx="3520440" cy="859536"/>
-          </a:xfrm>
-          <a:prstGeom prst="rect">
-            <a:avLst/>
-          </a:prstGeom>
-          <a:noFill/>
-          <a:ln/>
-        </p:spPr>
-        <p:txBody>
-          <a:bodyPr wrap="square" lIns="0" tIns="0" rIns="0" bIns="0" rtlCol="0" anchor="ctr"/>
-          <a:lstStyle/>
-          <a:p>
-            <a:pPr indent="0" marL="0">
-              <a:lnSpc>
-                <a:spcPts val="1500"/>
-              </a:lnSpc>
-              <a:buNone/>
-            </a:pPr>
-            <a:r>
-              <a:rPr lang="en-US" sz="1150" dirty="0">
-                <a:solidFill>
-                  <a:srgbClr val="9DB8D4"/>
-                </a:solidFill>
-                <a:latin typeface="Calibri" pitchFamily="34" charset="0"/>
-                <a:ea typeface="Calibri" pitchFamily="34" charset="-122"/>
-                <a:cs typeface="Calibri" pitchFamily="34" charset="-120"/>
-              </a:rPr>
-              <a:t>Database TDE integration · Storage, backup and VM integrations</a:t>
-            </a:r>
-            <a:endParaRPr lang="en-US" sz="1150" dirty="0"/>
-          </a:p>
-        </p:txBody>
-      </p:sp>
-      <p:sp>
-        <p:nvSpPr>
-          <p:cNvPr id="8" name="Text 6"/>
-          <p:cNvSpPr txBox="1"/>
-          <p:nvPr/>
-        </p:nvSpPr>
-        <p:spPr>
-          <a:xfrm>
-            <a:off x="566928" y="4023360"/>
-            <a:ext cx="3520440" cy="219456"/>
-          </a:xfrm>
-          <a:prstGeom prst="rect">
-            <a:avLst/>
-          </a:prstGeom>
-          <a:noFill/>
-          <a:ln/>
-        </p:spPr>
-        <p:txBody>
-          <a:bodyPr wrap="square" lIns="0" tIns="0" rIns="0" bIns="0" rtlCol="0" anchor="ctr"/>
-          <a:lstStyle/>
-          <a:p>
-            <a:pPr indent="0" marL="0">
-              <a:buNone/>
-            </a:pPr>
-            <a:r>
-              <a:rPr lang="en-US" sz="1000" b="1" spc="140" kern="0" dirty="0">
-                <a:solidFill>
-                  <a:srgbClr val="C8952B"/>
-                </a:solidFill>
-                <a:latin typeface="Calibri" pitchFamily="34" charset="0"/>
-                <a:ea typeface="Calibri" pitchFamily="34" charset="-122"/>
-                <a:cs typeface="Calibri" pitchFamily="34" charset="-120"/>
-              </a:rPr>
-              <a:t>PRODUCT SCOPE</a:t>
-            </a:r>
-            <a:endParaRPr lang="en-US" sz="1000" dirty="0"/>
-          </a:p>
-        </p:txBody>
-      </p:sp>
-      <p:sp>
-        <p:nvSpPr>
-          <p:cNvPr id="9" name="Text 7"/>
-          <p:cNvSpPr txBox="1"/>
-          <p:nvPr/>
-        </p:nvSpPr>
-        <p:spPr>
-          <a:xfrm>
-            <a:off x="566928" y="4279392"/>
-            <a:ext cx="3520440" cy="859536"/>
-          </a:xfrm>
-          <a:prstGeom prst="rect">
-            <a:avLst/>
-          </a:prstGeom>
-          <a:noFill/>
-          <a:ln/>
-        </p:spPr>
-        <p:txBody>
-          <a:bodyPr wrap="square" lIns="0" tIns="0" rIns="0" bIns="0" rtlCol="0" anchor="ctr"/>
-          <a:lstStyle/>
-          <a:p>
-            <a:pPr indent="0" marL="0">
-              <a:lnSpc>
-                <a:spcPts val="1500"/>
-              </a:lnSpc>
-              <a:buNone/>
-            </a:pPr>
-            <a:r>
-              <a:rPr lang="en-US" sz="1150" dirty="0">
-                <a:solidFill>
-                  <a:srgbClr val="9DB8D4"/>
-                </a:solidFill>
-                <a:latin typeface="Calibri" pitchFamily="34" charset="0"/>
-                <a:ea typeface="Calibri" pitchFamily="34" charset="-122"/>
-                <a:cs typeface="Calibri" pitchFamily="34" charset="-120"/>
-              </a:rPr>
-              <a:t>Secrets management · Certificate lifecycle · Certificate discovery and expiry monitoring</a:t>
-            </a:r>
-            <a:endParaRPr lang="en-US" sz="1150" dirty="0"/>
-          </a:p>
-        </p:txBody>
-      </p:sp>
-      <p:sp>
-        <p:nvSpPr>
-          <p:cNvPr id="10" name="Text 8"/>
-          <p:cNvSpPr txBox="1"/>
-          <p:nvPr/>
-        </p:nvSpPr>
-        <p:spPr>
-          <a:xfrm>
-            <a:off x="4334256" y="1536192"/>
-            <a:ext cx="3520440" cy="219456"/>
-          </a:xfrm>
-          <a:prstGeom prst="rect">
-            <a:avLst/>
-          </a:prstGeom>
-          <a:noFill/>
-          <a:ln/>
-        </p:spPr>
-        <p:txBody>
-          <a:bodyPr wrap="square" lIns="0" tIns="0" rIns="0" bIns="0" rtlCol="0" anchor="ctr"/>
-          <a:lstStyle/>
-          <a:p>
-            <a:pPr indent="0" marL="0">
-              <a:buNone/>
-            </a:pPr>
-            <a:r>
-              <a:rPr lang="en-US" sz="1000" b="1" spc="140" kern="0" dirty="0">
-                <a:solidFill>
-                  <a:srgbClr val="C8952B"/>
-                </a:solidFill>
-                <a:latin typeface="Calibri" pitchFamily="34" charset="0"/>
-                <a:ea typeface="Calibri" pitchFamily="34" charset="-122"/>
-                <a:cs typeface="Calibri" pitchFamily="34" charset="-120"/>
-              </a:rPr>
-              <a:t>SUPPLIER</a:t>
-            </a:r>
-            <a:endParaRPr lang="en-US" sz="1000" dirty="0"/>
-          </a:p>
-        </p:txBody>
-      </p:sp>
-      <p:sp>
-        <p:nvSpPr>
-          <p:cNvPr id="11" name="Text 9"/>
-          <p:cNvSpPr txBox="1"/>
-          <p:nvPr/>
-        </p:nvSpPr>
-        <p:spPr>
-          <a:xfrm>
-            <a:off x="4334256" y="1792224"/>
-            <a:ext cx="3520440" cy="859536"/>
-          </a:xfrm>
-          <a:prstGeom prst="rect">
-            <a:avLst/>
-          </a:prstGeom>
-          <a:noFill/>
-          <a:ln/>
-        </p:spPr>
-        <p:txBody>
-          <a:bodyPr wrap="square" lIns="0" tIns="0" rIns="0" bIns="0" rtlCol="0" anchor="ctr"/>
-          <a:lstStyle/>
-          <a:p>
-            <a:pPr indent="0" marL="0">
-              <a:lnSpc>
-                <a:spcPts val="1500"/>
-              </a:lnSpc>
-              <a:buNone/>
-            </a:pPr>
-            <a:r>
-              <a:rPr lang="en-US" sz="1150" dirty="0">
-                <a:solidFill>
-                  <a:srgbClr val="9DB8D4"/>
-                </a:solidFill>
-                <a:latin typeface="Calibri" pitchFamily="34" charset="0"/>
-                <a:ea typeface="Calibri" pitchFamily="34" charset="-122"/>
-                <a:cs typeface="Calibri" pitchFamily="34" charset="-120"/>
-              </a:rPr>
-              <a:t>Algorithm breadth · Post-quantum (ML-KEM, ML-DSA, SLH-DSA) · Key-bound usage policy enforced in hardware</a:t>
-            </a:r>
-            <a:endParaRPr lang="en-US" sz="1150" dirty="0"/>
-          </a:p>
-        </p:txBody>
-      </p:sp>
-      <p:sp>
-        <p:nvSpPr>
-          <p:cNvPr id="12" name="Text 10"/>
-          <p:cNvSpPr txBox="1"/>
-          <p:nvPr/>
-        </p:nvSpPr>
-        <p:spPr>
-          <a:xfrm>
-            <a:off x="4334256" y="2779776"/>
-            <a:ext cx="3520440" cy="219456"/>
-          </a:xfrm>
-          <a:prstGeom prst="rect">
-            <a:avLst/>
-          </a:prstGeom>
-          <a:noFill/>
-          <a:ln/>
-        </p:spPr>
-        <p:txBody>
-          <a:bodyPr wrap="square" lIns="0" tIns="0" rIns="0" bIns="0" rtlCol="0" anchor="ctr"/>
-          <a:lstStyle/>
-          <a:p>
-            <a:pPr indent="0" marL="0">
-              <a:buNone/>
-            </a:pPr>
-            <a:r>
-              <a:rPr lang="en-US" sz="1000" b="1" spc="140" kern="0" dirty="0">
-                <a:solidFill>
-                  <a:srgbClr val="C8952B"/>
-                </a:solidFill>
-                <a:latin typeface="Calibri" pitchFamily="34" charset="0"/>
-                <a:ea typeface="Calibri" pitchFamily="34" charset="-122"/>
-                <a:cs typeface="Calibri" pitchFamily="34" charset="-120"/>
-              </a:rPr>
-              <a:t>OPTIONAL STEP</a:t>
-            </a:r>
-            <a:endParaRPr lang="en-US" sz="1000" dirty="0"/>
-          </a:p>
-        </p:txBody>
-      </p:sp>
-      <p:sp>
-        <p:nvSpPr>
-          <p:cNvPr id="13" name="Text 11"/>
-          <p:cNvSpPr txBox="1"/>
-          <p:nvPr/>
-        </p:nvSpPr>
-        <p:spPr>
-          <a:xfrm>
-            <a:off x="4334256" y="3035808"/>
-            <a:ext cx="3520440" cy="859536"/>
-          </a:xfrm>
-          <a:prstGeom prst="rect">
-            <a:avLst/>
-          </a:prstGeom>
-          <a:noFill/>
-          <a:ln/>
-        </p:spPr>
-        <p:txBody>
-          <a:bodyPr wrap="square" lIns="0" tIns="0" rIns="0" bIns="0" rtlCol="0" anchor="ctr"/>
-          <a:lstStyle/>
-          <a:p>
-            <a:pPr indent="0" marL="0">
-              <a:lnSpc>
-                <a:spcPts val="1500"/>
-              </a:lnSpc>
-              <a:buNone/>
-            </a:pPr>
-            <a:r>
-              <a:rPr lang="en-US" sz="1150" dirty="0">
-                <a:solidFill>
-                  <a:srgbClr val="9DB8D4"/>
-                </a:solidFill>
-                <a:latin typeface="Calibri" pitchFamily="34" charset="0"/>
-                <a:ea typeface="Calibri" pitchFamily="34" charset="-122"/>
-                <a:cs typeface="Calibri" pitchFamily="34" charset="-120"/>
-              </a:rPr>
-              <a:t>KMIP 3.0</a:t>
-            </a:r>
-            <a:endParaRPr lang="en-US" sz="1150" dirty="0"/>
-          </a:p>
-        </p:txBody>
-      </p:sp>
-      <p:sp>
-        <p:nvSpPr>
-          <p:cNvPr id="14" name="Text 12"/>
-          <p:cNvSpPr txBox="1"/>
-          <p:nvPr/>
-        </p:nvSpPr>
-        <p:spPr>
-          <a:xfrm>
-            <a:off x="4334256" y="4023360"/>
-            <a:ext cx="3520440" cy="219456"/>
-          </a:xfrm>
-          <a:prstGeom prst="rect">
-            <a:avLst/>
-          </a:prstGeom>
-          <a:noFill/>
-          <a:ln/>
-        </p:spPr>
-        <p:txBody>
-          <a:bodyPr wrap="square" lIns="0" tIns="0" rIns="0" bIns="0" rtlCol="0" anchor="ctr"/>
-          <a:lstStyle/>
-          <a:p>
-            <a:pPr indent="0" marL="0">
-              <a:buNone/>
-            </a:pPr>
-            <a:r>
-              <a:rPr lang="en-US" sz="1000" b="1" spc="140" kern="0" dirty="0">
-                <a:solidFill>
-                  <a:srgbClr val="C8952B"/>
-                </a:solidFill>
-                <a:latin typeface="Calibri" pitchFamily="34" charset="0"/>
-                <a:ea typeface="Calibri" pitchFamily="34" charset="-122"/>
-                <a:cs typeface="Calibri" pitchFamily="34" charset="-120"/>
-              </a:rPr>
-              <a:t>EXTERNAL</a:t>
-            </a:r>
-            <a:endParaRPr lang="en-US" sz="1000" dirty="0"/>
-          </a:p>
-        </p:txBody>
-      </p:sp>
-      <p:sp>
-        <p:nvSpPr>
-          <p:cNvPr id="15" name="Text 13"/>
-          <p:cNvSpPr txBox="1"/>
-          <p:nvPr/>
-        </p:nvSpPr>
-        <p:spPr>
-          <a:xfrm>
-            <a:off x="4334256" y="4279392"/>
-            <a:ext cx="3520440" cy="859536"/>
-          </a:xfrm>
-          <a:prstGeom prst="rect">
-            <a:avLst/>
-          </a:prstGeom>
-          <a:noFill/>
-          <a:ln/>
-        </p:spPr>
-        <p:txBody>
-          <a:bodyPr wrap="square" lIns="0" tIns="0" rIns="0" bIns="0" rtlCol="0" anchor="ctr"/>
-          <a:lstStyle/>
-          <a:p>
-            <a:pPr indent="0" marL="0">
-              <a:lnSpc>
-                <a:spcPts val="1500"/>
-              </a:lnSpc>
-              <a:buNone/>
-            </a:pPr>
-            <a:r>
-              <a:rPr lang="en-US" sz="1150" dirty="0">
-                <a:solidFill>
-                  <a:srgbClr val="9DB8D4"/>
-                </a:solidFill>
-                <a:latin typeface="Calibri" pitchFamily="34" charset="0"/>
-                <a:ea typeface="Calibri" pitchFamily="34" charset="-122"/>
-                <a:cs typeface="Calibri" pitchFamily="34" charset="-120"/>
-              </a:rPr>
-              <a:t>KMIP interoperability certification</a:t>
-            </a:r>
-            <a:endParaRPr lang="en-US" sz="1150" dirty="0"/>
-          </a:p>
-        </p:txBody>
-      </p:sp>
-      <p:sp>
-        <p:nvSpPr>
-          <p:cNvPr id="16" name="Text 14"/>
-          <p:cNvSpPr txBox="1"/>
-          <p:nvPr/>
-        </p:nvSpPr>
-        <p:spPr>
-          <a:xfrm>
-            <a:off x="8101584" y="1536192"/>
-            <a:ext cx="3520440" cy="219456"/>
-          </a:xfrm>
-          <a:prstGeom prst="rect">
-            <a:avLst/>
-          </a:prstGeom>
-          <a:noFill/>
-          <a:ln/>
-        </p:spPr>
-        <p:txBody>
-          <a:bodyPr wrap="square" lIns="0" tIns="0" rIns="0" bIns="0" rtlCol="0" anchor="ctr"/>
-          <a:lstStyle/>
-          <a:p>
-            <a:pPr indent="0" marL="0">
-              <a:buNone/>
-            </a:pPr>
-            <a:r>
-              <a:rPr lang="en-US" sz="1000" b="1" spc="140" kern="0" dirty="0">
-                <a:solidFill>
-                  <a:srgbClr val="C8952B"/>
-                </a:solidFill>
-                <a:latin typeface="Calibri" pitchFamily="34" charset="0"/>
-                <a:ea typeface="Calibri" pitchFamily="34" charset="-122"/>
-                <a:cs typeface="Calibri" pitchFamily="34" charset="-120"/>
-              </a:rPr>
-              <a:t>DEMAND</a:t>
-            </a:r>
-            <a:endParaRPr lang="en-US" sz="1000" dirty="0"/>
-          </a:p>
-        </p:txBody>
-      </p:sp>
-      <p:sp>
-        <p:nvSpPr>
-          <p:cNvPr id="17" name="Text 15"/>
-          <p:cNvSpPr txBox="1"/>
-          <p:nvPr/>
-        </p:nvSpPr>
-        <p:spPr>
-          <a:xfrm>
-            <a:off x="8101584" y="1792224"/>
-            <a:ext cx="3520440" cy="859536"/>
-          </a:xfrm>
-          <a:prstGeom prst="rect">
-            <a:avLst/>
-          </a:prstGeom>
-          <a:noFill/>
-          <a:ln/>
-        </p:spPr>
-        <p:txBody>
-          <a:bodyPr wrap="square" lIns="0" tIns="0" rIns="0" bIns="0" rtlCol="0" anchor="ctr"/>
-          <a:lstStyle/>
-          <a:p>
-            <a:pPr indent="0" marL="0">
-              <a:lnSpc>
-                <a:spcPts val="1500"/>
-              </a:lnSpc>
-              <a:buNone/>
-            </a:pPr>
-            <a:r>
-              <a:rPr lang="en-US" sz="1150" dirty="0">
-                <a:solidFill>
-                  <a:srgbClr val="9DB8D4"/>
-                </a:solidFill>
-                <a:latin typeface="Calibri" pitchFamily="34" charset="0"/>
-                <a:ea typeface="Calibri" pitchFamily="34" charset="-122"/>
-                <a:cs typeface="Calibri" pitchFamily="34" charset="-120"/>
-              </a:rPr>
-              <a:t>PKCS#11 provider for applications · KMIP JSON and XML encodings</a:t>
-            </a:r>
-            <a:endParaRPr lang="en-US" sz="1150" dirty="0"/>
-          </a:p>
-        </p:txBody>
-      </p:sp>
-      <p:sp>
-        <p:nvSpPr>
-          <p:cNvPr id="18" name="Text 16"/>
-          <p:cNvSpPr txBox="1"/>
-          <p:nvPr/>
-        </p:nvSpPr>
-        <p:spPr>
-          <a:xfrm>
-            <a:off x="8101584" y="2779776"/>
-            <a:ext cx="3520440" cy="219456"/>
-          </a:xfrm>
-          <a:prstGeom prst="rect">
-            <a:avLst/>
-          </a:prstGeom>
-          <a:noFill/>
-          <a:ln/>
-        </p:spPr>
-        <p:txBody>
-          <a:bodyPr wrap="square" lIns="0" tIns="0" rIns="0" bIns="0" rtlCol="0" anchor="ctr"/>
-          <a:lstStyle/>
-          <a:p>
-            <a:pPr indent="0" marL="0">
-              <a:buNone/>
-            </a:pPr>
-            <a:r>
-              <a:rPr lang="en-US" sz="1000" b="1" spc="140" kern="0" dirty="0">
-                <a:solidFill>
-                  <a:srgbClr val="C8952B"/>
-                </a:solidFill>
-                <a:latin typeface="Calibri" pitchFamily="34" charset="0"/>
-                <a:ea typeface="Calibri" pitchFamily="34" charset="-122"/>
-                <a:cs typeface="Calibri" pitchFamily="34" charset="-120"/>
-              </a:rPr>
-              <a:t>OUT OF SCOPE</a:t>
-            </a:r>
-            <a:endParaRPr lang="en-US" sz="1000" dirty="0"/>
-          </a:p>
-        </p:txBody>
-      </p:sp>
-      <p:sp>
-        <p:nvSpPr>
-          <p:cNvPr id="19" name="Text 17"/>
-          <p:cNvSpPr txBox="1"/>
-          <p:nvPr/>
-        </p:nvSpPr>
-        <p:spPr>
-          <a:xfrm>
-            <a:off x="8101584" y="3035808"/>
-            <a:ext cx="3520440" cy="859536"/>
-          </a:xfrm>
-          <a:prstGeom prst="rect">
-            <a:avLst/>
-          </a:prstGeom>
-          <a:noFill/>
-          <a:ln/>
-        </p:spPr>
-        <p:txBody>
-          <a:bodyPr wrap="square" lIns="0" tIns="0" rIns="0" bIns="0" rtlCol="0" anchor="ctr"/>
-          <a:lstStyle/>
-          <a:p>
-            <a:pPr indent="0" marL="0">
-              <a:lnSpc>
-                <a:spcPts val="1500"/>
-              </a:lnSpc>
-              <a:buNone/>
-            </a:pPr>
-            <a:r>
-              <a:rPr lang="en-US" sz="1150" dirty="0">
-                <a:solidFill>
-                  <a:srgbClr val="9DB8D4"/>
-                </a:solidFill>
-                <a:latin typeface="Calibri" pitchFamily="34" charset="0"/>
-                <a:ea typeface="Calibri" pitchFamily="34" charset="-122"/>
-                <a:cs typeface="Calibri" pitchFamily="34" charset="-120"/>
-              </a:rPr>
-              <a:t>Tokenization / format-preserving encryption</a:t>
-            </a:r>
-            <a:endParaRPr lang="en-US" sz="1150" dirty="0"/>
-          </a:p>
-        </p:txBody>
-      </p:sp>
-      <p:sp>
-        <p:nvSpPr>
-          <p:cNvPr id="20" name="Text 18"/>
-          <p:cNvSpPr txBox="1"/>
-          <p:nvPr/>
-        </p:nvSpPr>
-        <p:spPr>
-          <a:xfrm>
-            <a:off x="8101584" y="4023360"/>
-            <a:ext cx="3520440" cy="219456"/>
-          </a:xfrm>
-          <a:prstGeom prst="rect">
-            <a:avLst/>
-          </a:prstGeom>
-          <a:noFill/>
-          <a:ln/>
-        </p:spPr>
-        <p:txBody>
-          <a:bodyPr wrap="square" lIns="0" tIns="0" rIns="0" bIns="0" rtlCol="0" anchor="ctr"/>
-          <a:lstStyle/>
-          <a:p>
-            <a:pPr indent="0" marL="0">
-              <a:buNone/>
-            </a:pPr>
-            <a:r>
-              <a:rPr lang="en-US" sz="1000" b="1" spc="140" kern="0" dirty="0">
-                <a:solidFill>
-                  <a:srgbClr val="C8952B"/>
-                </a:solidFill>
-                <a:latin typeface="Calibri" pitchFamily="34" charset="0"/>
-                <a:ea typeface="Calibri" pitchFamily="34" charset="-122"/>
-                <a:cs typeface="Calibri" pitchFamily="34" charset="-120"/>
-              </a:rPr>
-              <a:t>PROCUREMENT</a:t>
-            </a:r>
-            <a:endParaRPr lang="en-US" sz="1000" dirty="0"/>
-          </a:p>
-        </p:txBody>
-      </p:sp>
-      <p:sp>
-        <p:nvSpPr>
-          <p:cNvPr id="21" name="Text 19"/>
-          <p:cNvSpPr txBox="1"/>
-          <p:nvPr/>
-        </p:nvSpPr>
-        <p:spPr>
-          <a:xfrm>
-            <a:off x="8101584" y="4279392"/>
-            <a:ext cx="3520440" cy="859536"/>
-          </a:xfrm>
-          <a:prstGeom prst="rect">
-            <a:avLst/>
-          </a:prstGeom>
-          <a:noFill/>
-          <a:ln/>
-        </p:spPr>
-        <p:txBody>
-          <a:bodyPr wrap="square" lIns="0" tIns="0" rIns="0" bIns="0" rtlCol="0" anchor="ctr"/>
-          <a:lstStyle/>
-          <a:p>
-            <a:pPr indent="0" marL="0">
-              <a:lnSpc>
-                <a:spcPts val="1500"/>
-              </a:lnSpc>
-              <a:buNone/>
-            </a:pPr>
-            <a:r>
-              <a:rPr lang="en-US" sz="1150" dirty="0">
-                <a:solidFill>
-                  <a:srgbClr val="9DB8D4"/>
-                </a:solidFill>
-                <a:latin typeface="Calibri" pitchFamily="34" charset="0"/>
-                <a:ea typeface="Calibri" pitchFamily="34" charset="-122"/>
-                <a:cs typeface="Calibri" pitchFamily="34" charset="-120"/>
-              </a:rPr>
-              <a:t>FIPS 140-2/3 validated HSM · Common Criteria / eIDAS</a:t>
-            </a:r>
-            <a:endParaRPr lang="en-US" sz="1150" dirty="0"/>
-          </a:p>
-        </p:txBody>
-      </p:sp>
-      <p:sp>
-        <p:nvSpPr>
-          <p:cNvPr id="22" name="Shape 20"/>
+          <p:cNvPr id="4" name="Shape 2"/>
           <p:cNvSpPr/>
           <p:nvPr/>
         </p:nvSpPr>
         <p:spPr>
           <a:xfrm>
-            <a:off x="566928" y="5175504"/>
-            <a:ext cx="11027664" cy="987552"/>
+            <a:off x="566928" y="1389888"/>
+            <a:ext cx="11027664" cy="475488"/>
           </a:xfrm>
           <a:prstGeom prst="roundRect">
             <a:avLst>
-              <a:gd name="adj" fmla="val 5556"/>
+              <a:gd name="adj" fmla="val 11538"/>
             </a:avLst>
           </a:prstGeom>
           <a:solidFill>
-            <a:srgbClr val="1B3350"/>
+            <a:srgbClr val="1A3A5C"/>
           </a:solidFill>
           <a:ln w="12700">
             <a:solidFill>
-              <a:srgbClr val="2A4A6B"/>
+              <a:srgbClr val="1A3A5C"/>
             </a:solidFill>
             <a:prstDash val="solid"/>
           </a:ln>
@@ -24246,14 +24469,14 @@
       </p:sp>
       <p:sp>
         <p:nvSpPr>
-          <p:cNvPr id="23" name="Text 21"/>
-          <p:cNvSpPr txBox="1"/>
-          <p:nvPr/>
-        </p:nvSpPr>
-        <p:spPr>
-          <a:xfrm>
-            <a:off x="841248" y="5175504"/>
-            <a:ext cx="10479024" cy="987552"/>
+          <p:cNvPr id="5" name="Text 3"/>
+          <p:cNvSpPr txBox="1"/>
+          <p:nvPr/>
+        </p:nvSpPr>
+        <p:spPr>
+          <a:xfrm>
+            <a:off x="822960" y="1389888"/>
+            <a:ext cx="9290304" cy="475488"/>
           </a:xfrm>
           <a:prstGeom prst="rect">
             <a:avLst/>
@@ -24266,23 +24489,369 @@
           <a:lstStyle/>
           <a:p>
             <a:pPr indent="0" marL="0">
+              <a:buNone/>
+            </a:pPr>
+            <a:r>
+              <a:rPr lang="en-US" sz="1200" dirty="0">
+                <a:solidFill>
+                  <a:srgbClr val="C9DAEA"/>
+                </a:solidFill>
+                <a:latin typeface="Calibri" pitchFamily="34" charset="0"/>
+                <a:ea typeface="Calibri" pitchFamily="34" charset="-122"/>
+                <a:cs typeface="Calibri" pitchFamily="34" charset="-120"/>
+              </a:rPr>
+              <a:t>Let a client speak KMIP without implementing a TTLV codec.</a:t>
+            </a:r>
+            <a:endParaRPr lang="en-US" sz="1200" dirty="0"/>
+          </a:p>
+        </p:txBody>
+      </p:sp>
+      <p:sp>
+        <p:nvSpPr>
+          <p:cNvPr id="6" name="Text 4"/>
+          <p:cNvSpPr txBox="1"/>
+          <p:nvPr/>
+        </p:nvSpPr>
+        <p:spPr>
+          <a:xfrm>
+            <a:off x="10177272" y="1389888"/>
+            <a:ext cx="1188720" cy="475488"/>
+          </a:xfrm>
+          <a:prstGeom prst="rect">
+            <a:avLst/>
+          </a:prstGeom>
+          <a:noFill/>
+          <a:ln/>
+        </p:spPr>
+        <p:txBody>
+          <a:bodyPr wrap="square" lIns="0" tIns="0" rIns="0" bIns="0" rtlCol="0" anchor="ctr"/>
+          <a:lstStyle/>
+          <a:p>
+            <a:pPr algn="r" indent="0" marL="0">
+              <a:buNone/>
+            </a:pPr>
+            <a:r>
+              <a:rPr lang="en-US" sz="1100" b="1" dirty="0">
+                <a:solidFill>
+                  <a:srgbClr val="C8952B"/>
+                </a:solidFill>
+                <a:latin typeface="Calibri" pitchFamily="34" charset="0"/>
+                <a:ea typeface="Calibri" pitchFamily="34" charset="-122"/>
+                <a:cs typeface="Calibri" pitchFamily="34" charset="-120"/>
+              </a:rPr>
+              <a:t>Stage E</a:t>
+            </a:r>
+            <a:endParaRPr lang="en-US" sz="1100" dirty="0"/>
+          </a:p>
+        </p:txBody>
+      </p:sp>
+      <p:sp>
+        <p:nvSpPr>
+          <p:cNvPr id="7" name="Shape 5"/>
+          <p:cNvSpPr/>
+          <p:nvPr/>
+        </p:nvSpPr>
+        <p:spPr>
+          <a:xfrm>
+            <a:off x="566928" y="2103120"/>
+            <a:ext cx="5486400" cy="3339084"/>
+          </a:xfrm>
+          <a:prstGeom prst="roundRect">
+            <a:avLst>
+              <a:gd name="adj" fmla="val 1643"/>
+            </a:avLst>
+          </a:prstGeom>
+          <a:solidFill>
+            <a:srgbClr val="FBF3E3"/>
+          </a:solidFill>
+          <a:ln w="12700">
+            <a:solidFill>
+              <a:srgbClr val="FBF3E3"/>
+            </a:solidFill>
+            <a:prstDash val="solid"/>
+          </a:ln>
+          <a:effectLst>
+            <a:outerShdw sx="100000" sy="100000" kx="0" ky="0" algn="bl" rotWithShape="0" blurRad="127000" dist="25400" dir="5400000">
+              <a:srgbClr val="8C9AA8">
+                <a:alpha val="22000"/>
+              </a:srgbClr>
+            </a:outerShdw>
+          </a:effectLst>
+        </p:spPr>
+      </p:sp>
+      <p:sp>
+        <p:nvSpPr>
+          <p:cNvPr id="8" name="Text 6"/>
+          <p:cNvSpPr txBox="1"/>
+          <p:nvPr/>
+        </p:nvSpPr>
+        <p:spPr>
+          <a:xfrm>
+            <a:off x="822960" y="2322576"/>
+            <a:ext cx="4974336" cy="201168"/>
+          </a:xfrm>
+          <a:prstGeom prst="rect">
+            <a:avLst/>
+          </a:prstGeom>
+          <a:noFill/>
+          <a:ln/>
+        </p:spPr>
+        <p:txBody>
+          <a:bodyPr wrap="square" lIns="0" tIns="0" rIns="0" bIns="0" rtlCol="0" anchor="ctr"/>
+          <a:lstStyle/>
+          <a:p>
+            <a:pPr indent="0" marL="0">
+              <a:buNone/>
+            </a:pPr>
+            <a:r>
+              <a:rPr lang="en-US" sz="1000" b="1" spc="160" kern="0" dirty="0">
+                <a:solidFill>
+                  <a:srgbClr val="9A6410"/>
+                </a:solidFill>
+                <a:latin typeface="Calibri" pitchFamily="34" charset="0"/>
+                <a:ea typeface="Calibri" pitchFamily="34" charset="-122"/>
+                <a:cs typeface="Calibri" pitchFamily="34" charset="-120"/>
+              </a:rPr>
+              <a:t>WHAT CHANGES IN THE EXISTING DESIGN</a:t>
+            </a:r>
+            <a:endParaRPr lang="en-US" sz="1000" dirty="0"/>
+          </a:p>
+        </p:txBody>
+      </p:sp>
+      <p:sp>
+        <p:nvSpPr>
+          <p:cNvPr id="9" name="Text 7"/>
+          <p:cNvSpPr txBox="1"/>
+          <p:nvPr/>
+        </p:nvSpPr>
+        <p:spPr>
+          <a:xfrm>
+            <a:off x="822960" y="2615184"/>
+            <a:ext cx="4974336" cy="2644140"/>
+          </a:xfrm>
+          <a:prstGeom prst="rect">
+            <a:avLst/>
+          </a:prstGeom>
+          <a:noFill/>
+          <a:ln/>
+        </p:spPr>
+        <p:txBody>
+          <a:bodyPr wrap="square" lIns="0" tIns="0" rIns="0" bIns="0" rtlCol="0" anchor="t"/>
+          <a:lstStyle/>
+          <a:p>
+            <a:pPr marL="342900" indent="-342900">
               <a:lnSpc>
-                <a:spcPts val="1900"/>
+                <a:spcPts val="1625"/>
               </a:lnSpc>
-              <a:buNone/>
-            </a:pPr>
-            <a:r>
-              <a:rPr lang="en-US" sz="1300" i="1" dirty="0">
-                <a:solidFill>
-                  <a:srgbClr val="FFFFFF"/>
-                </a:solidFill>
-                <a:latin typeface="Cambria" pitchFamily="34" charset="0"/>
-                <a:ea typeface="Cambria" pitchFamily="34" charset="-122"/>
-                <a:cs typeface="Cambria" pitchFamily="34" charset="-120"/>
-              </a:rPr>
-              <a:t>32 of 50 closed by the twelve steps. Six more are ordinary integration work once the REST layer exists to configure them. The last eight depend on a supplier, a procurement decision or an OASIS event — no amount of planning moves them.</a:t>
-            </a:r>
-            <a:endParaRPr lang="en-US" sz="1300" dirty="0"/>
+              <a:spcAft>
+                <a:spcPts val="700"/>
+              </a:spcAft>
+              <a:buSzPct val="100000"/>
+              <a:buChar char="•"/>
+            </a:pPr>
+            <a:r>
+              <a:rPr lang="en-US" sz="1250" dirty="0">
+                <a:solidFill>
+                  <a:srgbClr val="4D5A68"/>
+                </a:solidFill>
+                <a:latin typeface="Calibri" pitchFamily="34" charset="0"/>
+                <a:ea typeface="Calibri" pitchFamily="34" charset="-122"/>
+                <a:cs typeface="Calibri" pitchFamily="34" charset="-120"/>
+              </a:rPr>
+              <a:t>core/ttlv.py stops being the only codec, and the tag registry becomes shared infrastructure rather than a TTLV detail.</a:t>
+            </a:r>
+            <a:endParaRPr lang="en-US" sz="1250" dirty="0"/>
+          </a:p>
+          <a:p>
+            <a:pPr marL="342900" indent="-342900">
+              <a:lnSpc>
+                <a:spcPts val="1625"/>
+              </a:lnSpc>
+              <a:spcAft>
+                <a:spcPts val="700"/>
+              </a:spcAft>
+              <a:buSzPct val="100000"/>
+              <a:buChar char="•"/>
+            </a:pPr>
+            <a:r>
+              <a:rPr lang="en-US" sz="1250" dirty="0">
+                <a:solidFill>
+                  <a:srgbClr val="4D5A68"/>
+                </a:solidFill>
+                <a:latin typeface="Calibri" pitchFamily="34" charset="0"/>
+                <a:ea typeface="Calibri" pitchFamily="34" charset="-122"/>
+                <a:cs typeface="Calibri" pitchFamily="34" charset="-120"/>
+              </a:rPr>
+              <a:t>Nothing above the codec changes. That is the point of the step: the service layer cannot tell which encoding a request arrived in.</a:t>
+            </a:r>
+            <a:endParaRPr lang="en-US" sz="1250" dirty="0"/>
+          </a:p>
+        </p:txBody>
+      </p:sp>
+      <p:sp>
+        <p:nvSpPr>
+          <p:cNvPr id="10" name="Shape 8"/>
+          <p:cNvSpPr/>
+          <p:nvPr/>
+        </p:nvSpPr>
+        <p:spPr>
+          <a:xfrm>
+            <a:off x="6327648" y="2103120"/>
+            <a:ext cx="5266944" cy="3339084"/>
+          </a:xfrm>
+          <a:prstGeom prst="roundRect">
+            <a:avLst>
+              <a:gd name="adj" fmla="val 1643"/>
+            </a:avLst>
+          </a:prstGeom>
+          <a:solidFill>
+            <a:srgbClr val="E8EFF6"/>
+          </a:solidFill>
+          <a:ln w="12700">
+            <a:solidFill>
+              <a:srgbClr val="E8EFF6"/>
+            </a:solidFill>
+            <a:prstDash val="solid"/>
+          </a:ln>
+          <a:effectLst>
+            <a:outerShdw sx="100000" sy="100000" kx="0" ky="0" algn="bl" rotWithShape="0" blurRad="127000" dist="25400" dir="5400000">
+              <a:srgbClr val="8C9AA8">
+                <a:alpha val="22000"/>
+              </a:srgbClr>
+            </a:outerShdw>
+          </a:effectLst>
+        </p:spPr>
+      </p:sp>
+      <p:sp>
+        <p:nvSpPr>
+          <p:cNvPr id="11" name="Text 9"/>
+          <p:cNvSpPr txBox="1"/>
+          <p:nvPr/>
+        </p:nvSpPr>
+        <p:spPr>
+          <a:xfrm>
+            <a:off x="6583680" y="2322576"/>
+            <a:ext cx="4754880" cy="201168"/>
+          </a:xfrm>
+          <a:prstGeom prst="rect">
+            <a:avLst/>
+          </a:prstGeom>
+          <a:noFill/>
+          <a:ln/>
+        </p:spPr>
+        <p:txBody>
+          <a:bodyPr wrap="square" lIns="0" tIns="0" rIns="0" bIns="0" rtlCol="0" anchor="ctr"/>
+          <a:lstStyle/>
+          <a:p>
+            <a:pPr indent="0" marL="0">
+              <a:buNone/>
+            </a:pPr>
+            <a:r>
+              <a:rPr lang="en-US" sz="1000" b="1" spc="160" kern="0" dirty="0">
+                <a:solidFill>
+                  <a:srgbClr val="2E6DA4"/>
+                </a:solidFill>
+                <a:latin typeface="Calibri" pitchFamily="34" charset="0"/>
+                <a:ea typeface="Calibri" pitchFamily="34" charset="-122"/>
+                <a:cs typeface="Calibri" pitchFamily="34" charset="-120"/>
+              </a:rPr>
+              <a:t>THE SHAPE OF THE SOLUTION</a:t>
+            </a:r>
+            <a:endParaRPr lang="en-US" sz="1000" dirty="0"/>
+          </a:p>
+        </p:txBody>
+      </p:sp>
+      <p:sp>
+        <p:nvSpPr>
+          <p:cNvPr id="12" name="Text 10"/>
+          <p:cNvSpPr txBox="1"/>
+          <p:nvPr/>
+        </p:nvSpPr>
+        <p:spPr>
+          <a:xfrm>
+            <a:off x="6583680" y="2615184"/>
+            <a:ext cx="4754880" cy="2644140"/>
+          </a:xfrm>
+          <a:prstGeom prst="rect">
+            <a:avLst/>
+          </a:prstGeom>
+          <a:noFill/>
+          <a:ln/>
+        </p:spPr>
+        <p:txBody>
+          <a:bodyPr wrap="square" lIns="0" tIns="0" rIns="0" bIns="0" rtlCol="0" anchor="t"/>
+          <a:lstStyle/>
+          <a:p>
+            <a:pPr marL="342900" indent="-342900">
+              <a:lnSpc>
+                <a:spcPts val="1560"/>
+              </a:lnSpc>
+              <a:spcAft>
+                <a:spcPts val="700"/>
+              </a:spcAft>
+              <a:buSzPct val="100000"/>
+              <a:buChar char="•"/>
+            </a:pPr>
+            <a:r>
+              <a:rPr lang="en-US" sz="1200" dirty="0">
+                <a:solidFill>
+                  <a:srgbClr val="4D5A68"/>
+                </a:solidFill>
+                <a:latin typeface="Calibri" pitchFamily="34" charset="0"/>
+                <a:ea typeface="Calibri" pitchFamily="34" charset="-122"/>
+                <a:cs typeface="Calibri" pitchFamily="34" charset="-120"/>
+              </a:rPr>
+              <a:t>The object model does not change. What changes is the wire: a JSON codec and an XML one beside core/ttlv.py, both driven by the same tag and type tables, so a new tag is still added in one place.</a:t>
+            </a:r>
+            <a:endParaRPr lang="en-US" sz="1200" dirty="0"/>
+          </a:p>
+          <a:p>
+            <a:pPr marL="342900" indent="-342900">
+              <a:lnSpc>
+                <a:spcPts val="1560"/>
+              </a:lnSpc>
+              <a:spcAft>
+                <a:spcPts val="700"/>
+              </a:spcAft>
+              <a:buSzPct val="100000"/>
+              <a:buChar char="•"/>
+            </a:pPr>
+            <a:r>
+              <a:rPr lang="en-US" sz="1200" dirty="0">
+                <a:solidFill>
+                  <a:srgbClr val="4D5A68"/>
+                </a:solidFill>
+                <a:latin typeface="Calibri" pitchFamily="34" charset="0"/>
+                <a:ea typeface="Calibri" pitchFamily="34" charset="-122"/>
+                <a:cs typeface="Calibri" pitchFamily="34" charset="-120"/>
+              </a:rPr>
+              <a:t>An HTTPS binding on the API listener — POST /kmip, encoding chosen by Content-Type — rather than a second socket. The KMIP TCP port is untouched.</a:t>
+            </a:r>
+            <a:endParaRPr lang="en-US" sz="1200" dirty="0"/>
+          </a:p>
+          <a:p>
+            <a:pPr marL="342900" indent="-342900">
+              <a:lnSpc>
+                <a:spcPts val="1560"/>
+              </a:lnSpc>
+              <a:spcAft>
+                <a:spcPts val="700"/>
+              </a:spcAft>
+              <a:buSzPct val="100000"/>
+              <a:buChar char="•"/>
+            </a:pPr>
+            <a:r>
+              <a:rPr lang="en-US" sz="1200" dirty="0">
+                <a:solidFill>
+                  <a:srgbClr val="4D5A68"/>
+                </a:solidFill>
+                <a:latin typeface="Calibri" pitchFamily="34" charset="0"/>
+                <a:ea typeface="Calibri" pitchFamily="34" charset="-122"/>
+                <a:cs typeface="Calibri" pitchFamily="34" charset="-120"/>
+              </a:rPr>
+              <a:t>Encoding is a transport concern, so it sits below the service layer: the same guard, the same handlers, the same audit rows.</a:t>
+            </a:r>
+            <a:endParaRPr lang="en-US" sz="1200" dirty="0"/>
           </a:p>
         </p:txBody>
       </p:sp>
@@ -24351,7 +24920,7 @@
                 <a:ea typeface="Calibri" pitchFamily="34" charset="-122"/>
                 <a:cs typeface="Calibri" pitchFamily="34" charset="-120"/>
               </a:rPr>
-              <a:t>STEP 1 OF 12 · PROPOSED SOLUTION</a:t>
+              <a:t>STEP 1 OF 14 · PROPOSED SOLUTION</a:t>
             </a:r>
             <a:endParaRPr lang="en-US" sz="1150" dirty="0"/>
           </a:p>
@@ -24746,6 +25315,3507 @@
               <a:t>Estimated size: ~600 lines moved, ~15 new tests. No new dependencies.</a:t>
             </a:r>
             <a:endParaRPr lang="en-US" sz="1050" dirty="0"/>
+          </a:p>
+        </p:txBody>
+      </p:sp>
+    </p:spTree>
+  </p:cSld>
+  <p:clrMapOvr>
+    <a:masterClrMapping/>
+  </p:clrMapOvr>
+</p:sld>
+</file>
+
+<file path=ppt/slides/slide40.xml><?xml version="1.0" encoding="utf-8"?>
+<p:sld xmlns:a="http://schemas.openxmlformats.org/drawingml/2006/main" xmlns:r="http://schemas.openxmlformats.org/officeDocument/2006/relationships" xmlns:p="http://schemas.openxmlformats.org/presentationml/2006/main">
+  <p:cSld name="Slide 40">
+    <p:bg>
+      <p:bgPr>
+        <a:solidFill>
+          <a:srgbClr val="FFFFFF"/>
+        </a:solidFill>
+      </p:bgPr>
+    </p:bg>
+    <p:spTree>
+      <p:nvGrpSpPr>
+        <p:cNvPr id="1" name=""/>
+        <p:cNvGrpSpPr/>
+        <p:nvPr/>
+      </p:nvGrpSpPr>
+      <p:grpSpPr>
+        <a:xfrm>
+          <a:off x="0" y="0"/>
+          <a:ext cx="0" cy="0"/>
+          <a:chOff x="0" y="0"/>
+          <a:chExt cx="0" cy="0"/>
+        </a:xfrm>
+      </p:grpSpPr>
+      <p:sp>
+        <p:nvSpPr>
+          <p:cNvPr id="2" name="Text 0"/>
+          <p:cNvSpPr txBox="1"/>
+          <p:nvPr/>
+        </p:nvSpPr>
+        <p:spPr>
+          <a:xfrm>
+            <a:off x="566928" y="365760"/>
+            <a:ext cx="11027664" cy="237744"/>
+          </a:xfrm>
+          <a:prstGeom prst="rect">
+            <a:avLst/>
+          </a:prstGeom>
+          <a:noFill/>
+          <a:ln/>
+        </p:spPr>
+        <p:txBody>
+          <a:bodyPr wrap="square" lIns="0" tIns="0" rIns="0" bIns="0" rtlCol="0" anchor="ctr"/>
+          <a:lstStyle/>
+          <a:p>
+            <a:pPr indent="0" marL="0">
+              <a:buNone/>
+            </a:pPr>
+            <a:r>
+              <a:rPr lang="en-US" sz="1150" b="1" spc="220" kern="0" dirty="0">
+                <a:solidFill>
+                  <a:srgbClr val="C8952B"/>
+                </a:solidFill>
+                <a:latin typeface="Calibri" pitchFamily="34" charset="0"/>
+                <a:ea typeface="Calibri" pitchFamily="34" charset="-122"/>
+                <a:cs typeface="Calibri" pitchFamily="34" charset="-120"/>
+              </a:rPr>
+              <a:t>STEP 13 OF 14 · PROPOSED SOLUTION</a:t>
+            </a:r>
+            <a:endParaRPr lang="en-US" sz="1150" dirty="0"/>
+          </a:p>
+        </p:txBody>
+      </p:sp>
+      <p:sp>
+        <p:nvSpPr>
+          <p:cNvPr id="3" name="Text 1"/>
+          <p:cNvSpPr txBox="1"/>
+          <p:nvPr/>
+        </p:nvSpPr>
+        <p:spPr>
+          <a:xfrm>
+            <a:off x="566928" y="621792"/>
+            <a:ext cx="11027664" cy="640080"/>
+          </a:xfrm>
+          <a:prstGeom prst="rect">
+            <a:avLst/>
+          </a:prstGeom>
+          <a:noFill/>
+          <a:ln/>
+        </p:spPr>
+        <p:txBody>
+          <a:bodyPr wrap="square" lIns="0" tIns="0" rIns="0" bIns="0" rtlCol="0" anchor="ctr"/>
+          <a:lstStyle/>
+          <a:p>
+            <a:pPr indent="0" marL="0">
+              <a:buNone/>
+            </a:pPr>
+            <a:r>
+              <a:rPr lang="en-US" sz="3000" b="1" dirty="0">
+                <a:solidFill>
+                  <a:srgbClr val="1A3A5C"/>
+                </a:solidFill>
+                <a:latin typeface="Cambria" pitchFamily="34" charset="0"/>
+                <a:ea typeface="Cambria" pitchFamily="34" charset="-122"/>
+                <a:cs typeface="Cambria" pitchFamily="34" charset="-120"/>
+              </a:rPr>
+              <a:t>KMIP JSON and XML encodings</a:t>
+            </a:r>
+            <a:endParaRPr lang="en-US" sz="3000" dirty="0"/>
+          </a:p>
+        </p:txBody>
+      </p:sp>
+      <p:sp>
+        <p:nvSpPr>
+          <p:cNvPr id="4" name="Shape 2"/>
+          <p:cNvSpPr/>
+          <p:nvPr/>
+        </p:nvSpPr>
+        <p:spPr>
+          <a:xfrm>
+            <a:off x="566928" y="1389888"/>
+            <a:ext cx="11027664" cy="475488"/>
+          </a:xfrm>
+          <a:prstGeom prst="roundRect">
+            <a:avLst>
+              <a:gd name="adj" fmla="val 11538"/>
+            </a:avLst>
+          </a:prstGeom>
+          <a:solidFill>
+            <a:srgbClr val="1A3A5C"/>
+          </a:solidFill>
+          <a:ln w="12700">
+            <a:solidFill>
+              <a:srgbClr val="1A3A5C"/>
+            </a:solidFill>
+            <a:prstDash val="solid"/>
+          </a:ln>
+        </p:spPr>
+      </p:sp>
+      <p:sp>
+        <p:nvSpPr>
+          <p:cNvPr id="5" name="Text 3"/>
+          <p:cNvSpPr txBox="1"/>
+          <p:nvPr/>
+        </p:nvSpPr>
+        <p:spPr>
+          <a:xfrm>
+            <a:off x="822960" y="1389888"/>
+            <a:ext cx="9290304" cy="475488"/>
+          </a:xfrm>
+          <a:prstGeom prst="rect">
+            <a:avLst/>
+          </a:prstGeom>
+          <a:noFill/>
+          <a:ln/>
+        </p:spPr>
+        <p:txBody>
+          <a:bodyPr wrap="square" lIns="0" tIns="0" rIns="0" bIns="0" rtlCol="0" anchor="ctr"/>
+          <a:lstStyle/>
+          <a:p>
+            <a:pPr indent="0" marL="0">
+              <a:buNone/>
+            </a:pPr>
+            <a:r>
+              <a:rPr lang="en-US" sz="1200" dirty="0">
+                <a:solidFill>
+                  <a:srgbClr val="C9DAEA"/>
+                </a:solidFill>
+                <a:latin typeface="Calibri" pitchFamily="34" charset="0"/>
+                <a:ea typeface="Calibri" pitchFamily="34" charset="-122"/>
+                <a:cs typeface="Calibri" pitchFamily="34" charset="-120"/>
+              </a:rPr>
+              <a:t>Let a client speak KMIP without implementing a TTLV codec.</a:t>
+            </a:r>
+            <a:endParaRPr lang="en-US" sz="1200" dirty="0"/>
+          </a:p>
+        </p:txBody>
+      </p:sp>
+      <p:sp>
+        <p:nvSpPr>
+          <p:cNvPr id="6" name="Text 4"/>
+          <p:cNvSpPr txBox="1"/>
+          <p:nvPr/>
+        </p:nvSpPr>
+        <p:spPr>
+          <a:xfrm>
+            <a:off x="10177272" y="1389888"/>
+            <a:ext cx="1188720" cy="475488"/>
+          </a:xfrm>
+          <a:prstGeom prst="rect">
+            <a:avLst/>
+          </a:prstGeom>
+          <a:noFill/>
+          <a:ln/>
+        </p:spPr>
+        <p:txBody>
+          <a:bodyPr wrap="square" lIns="0" tIns="0" rIns="0" bIns="0" rtlCol="0" anchor="ctr"/>
+          <a:lstStyle/>
+          <a:p>
+            <a:pPr algn="r" indent="0" marL="0">
+              <a:buNone/>
+            </a:pPr>
+            <a:r>
+              <a:rPr lang="en-US" sz="1100" b="1" dirty="0">
+                <a:solidFill>
+                  <a:srgbClr val="C8952B"/>
+                </a:solidFill>
+                <a:latin typeface="Calibri" pitchFamily="34" charset="0"/>
+                <a:ea typeface="Calibri" pitchFamily="34" charset="-122"/>
+                <a:cs typeface="Calibri" pitchFamily="34" charset="-120"/>
+              </a:rPr>
+              <a:t>Stage E</a:t>
+            </a:r>
+            <a:endParaRPr lang="en-US" sz="1100" dirty="0"/>
+          </a:p>
+        </p:txBody>
+      </p:sp>
+      <p:sp>
+        <p:nvSpPr>
+          <p:cNvPr id="7" name="Shape 5"/>
+          <p:cNvSpPr/>
+          <p:nvPr/>
+        </p:nvSpPr>
+        <p:spPr>
+          <a:xfrm>
+            <a:off x="566928" y="2103120"/>
+            <a:ext cx="6766560" cy="2110994"/>
+          </a:xfrm>
+          <a:prstGeom prst="roundRect">
+            <a:avLst>
+              <a:gd name="adj" fmla="val 2599"/>
+            </a:avLst>
+          </a:prstGeom>
+          <a:solidFill>
+            <a:srgbClr val="E8EFF6"/>
+          </a:solidFill>
+          <a:ln w="12700">
+            <a:solidFill>
+              <a:srgbClr val="E8EFF6"/>
+            </a:solidFill>
+            <a:prstDash val="solid"/>
+          </a:ln>
+          <a:effectLst>
+            <a:outerShdw sx="100000" sy="100000" kx="0" ky="0" algn="bl" rotWithShape="0" blurRad="127000" dist="25400" dir="5400000">
+              <a:srgbClr val="8C9AA8">
+                <a:alpha val="22000"/>
+              </a:srgbClr>
+            </a:outerShdw>
+          </a:effectLst>
+        </p:spPr>
+      </p:sp>
+      <p:sp>
+        <p:nvSpPr>
+          <p:cNvPr id="8" name="Text 6"/>
+          <p:cNvSpPr txBox="1"/>
+          <p:nvPr/>
+        </p:nvSpPr>
+        <p:spPr>
+          <a:xfrm>
+            <a:off x="822960" y="2322576"/>
+            <a:ext cx="6254496" cy="201168"/>
+          </a:xfrm>
+          <a:prstGeom prst="rect">
+            <a:avLst/>
+          </a:prstGeom>
+          <a:noFill/>
+          <a:ln/>
+        </p:spPr>
+        <p:txBody>
+          <a:bodyPr wrap="square" lIns="0" tIns="0" rIns="0" bIns="0" rtlCol="0" anchor="ctr"/>
+          <a:lstStyle/>
+          <a:p>
+            <a:pPr indent="0" marL="0">
+              <a:buNone/>
+            </a:pPr>
+            <a:r>
+              <a:rPr lang="en-US" sz="1000" b="1" spc="160" kern="0" dirty="0">
+                <a:solidFill>
+                  <a:srgbClr val="2E6DA4"/>
+                </a:solidFill>
+                <a:latin typeface="Calibri" pitchFamily="34" charset="0"/>
+                <a:ea typeface="Calibri" pitchFamily="34" charset="-122"/>
+                <a:cs typeface="Calibri" pitchFamily="34" charset="-120"/>
+              </a:rPr>
+              <a:t>WHAT GETS BUILT</a:t>
+            </a:r>
+            <a:endParaRPr lang="en-US" sz="1000" dirty="0"/>
+          </a:p>
+        </p:txBody>
+      </p:sp>
+      <p:sp>
+        <p:nvSpPr>
+          <p:cNvPr id="9" name="Text 7"/>
+          <p:cNvSpPr txBox="1"/>
+          <p:nvPr/>
+        </p:nvSpPr>
+        <p:spPr>
+          <a:xfrm>
+            <a:off x="822960" y="2615184"/>
+            <a:ext cx="6254496" cy="1416050"/>
+          </a:xfrm>
+          <a:prstGeom prst="rect">
+            <a:avLst/>
+          </a:prstGeom>
+          <a:noFill/>
+          <a:ln/>
+        </p:spPr>
+        <p:txBody>
+          <a:bodyPr wrap="square" lIns="0" tIns="0" rIns="0" bIns="0" rtlCol="0" anchor="t"/>
+          <a:lstStyle/>
+          <a:p>
+            <a:pPr marL="342900" indent="-342900">
+              <a:lnSpc>
+                <a:spcPts val="1625"/>
+              </a:lnSpc>
+              <a:spcAft>
+                <a:spcPts val="700"/>
+              </a:spcAft>
+              <a:buSzPct val="100000"/>
+              <a:buChar char="•"/>
+            </a:pPr>
+            <a:r>
+              <a:rPr lang="en-US" sz="1250" dirty="0">
+                <a:solidFill>
+                  <a:srgbClr val="4D5A68"/>
+                </a:solidFill>
+                <a:latin typeface="Calibri" pitchFamily="34" charset="0"/>
+                <a:ea typeface="Calibri" pitchFamily="34" charset="-122"/>
+                <a:cs typeface="Calibri" pitchFamily="34" charset="-120"/>
+              </a:rPr>
+              <a:t>core/encodings/ with json.py and xml.py implementing the OASIS profiles, sharing the tag registry the TTLV codec already reads.</a:t>
+            </a:r>
+            <a:endParaRPr lang="en-US" sz="1250" dirty="0"/>
+          </a:p>
+          <a:p>
+            <a:pPr marL="342900" indent="-342900">
+              <a:lnSpc>
+                <a:spcPts val="1625"/>
+              </a:lnSpc>
+              <a:spcAft>
+                <a:spcPts val="700"/>
+              </a:spcAft>
+              <a:buSzPct val="100000"/>
+              <a:buChar char="•"/>
+            </a:pPr>
+            <a:r>
+              <a:rPr lang="en-US" sz="1250" dirty="0">
+                <a:solidFill>
+                  <a:srgbClr val="4D5A68"/>
+                </a:solidFill>
+                <a:latin typeface="Calibri" pitchFamily="34" charset="0"/>
+                <a:ea typeface="Calibri" pitchFamily="34" charset="-122"/>
+                <a:cs typeface="Calibri" pitchFamily="34" charset="-120"/>
+              </a:rPr>
+              <a:t>Content negotiation, and 415 for an encoding that is not enabled. Both are off by default: a new parser is new attack surface.</a:t>
+            </a:r>
+            <a:endParaRPr lang="en-US" sz="1250" dirty="0"/>
+          </a:p>
+        </p:txBody>
+      </p:sp>
+      <p:sp>
+        <p:nvSpPr>
+          <p:cNvPr id="10" name="Shape 8"/>
+          <p:cNvSpPr/>
+          <p:nvPr/>
+        </p:nvSpPr>
+        <p:spPr>
+          <a:xfrm>
+            <a:off x="7607808" y="2103120"/>
+            <a:ext cx="3986784" cy="2110994"/>
+          </a:xfrm>
+          <a:prstGeom prst="roundRect">
+            <a:avLst>
+              <a:gd name="adj" fmla="val 2599"/>
+            </a:avLst>
+          </a:prstGeom>
+          <a:solidFill>
+            <a:srgbClr val="E2F0E7"/>
+          </a:solidFill>
+          <a:ln w="12700">
+            <a:solidFill>
+              <a:srgbClr val="E2F0E7"/>
+            </a:solidFill>
+            <a:prstDash val="solid"/>
+          </a:ln>
+          <a:effectLst>
+            <a:outerShdw sx="100000" sy="100000" kx="0" ky="0" algn="bl" rotWithShape="0" blurRad="127000" dist="25400" dir="5400000">
+              <a:srgbClr val="8C9AA8">
+                <a:alpha val="22000"/>
+              </a:srgbClr>
+            </a:outerShdw>
+          </a:effectLst>
+        </p:spPr>
+      </p:sp>
+      <p:sp>
+        <p:nvSpPr>
+          <p:cNvPr id="11" name="Text 9"/>
+          <p:cNvSpPr txBox="1"/>
+          <p:nvPr/>
+        </p:nvSpPr>
+        <p:spPr>
+          <a:xfrm>
+            <a:off x="7863840" y="2322576"/>
+            <a:ext cx="3474720" cy="201168"/>
+          </a:xfrm>
+          <a:prstGeom prst="rect">
+            <a:avLst/>
+          </a:prstGeom>
+          <a:noFill/>
+          <a:ln/>
+        </p:spPr>
+        <p:txBody>
+          <a:bodyPr wrap="square" lIns="0" tIns="0" rIns="0" bIns="0" rtlCol="0" anchor="ctr"/>
+          <a:lstStyle/>
+          <a:p>
+            <a:pPr indent="0" marL="0">
+              <a:buNone/>
+            </a:pPr>
+            <a:r>
+              <a:rPr lang="en-US" sz="1000" b="1" spc="160" kern="0" dirty="0">
+                <a:solidFill>
+                  <a:srgbClr val="1F7A43"/>
+                </a:solidFill>
+                <a:latin typeface="Calibri" pitchFamily="34" charset="0"/>
+                <a:ea typeface="Calibri" pitchFamily="34" charset="-122"/>
+                <a:cs typeface="Calibri" pitchFamily="34" charset="-120"/>
+              </a:rPr>
+              <a:t>CLOSES 1 GAP-MATRIX FEATURE</a:t>
+            </a:r>
+            <a:endParaRPr lang="en-US" sz="1000" dirty="0"/>
+          </a:p>
+        </p:txBody>
+      </p:sp>
+      <p:sp>
+        <p:nvSpPr>
+          <p:cNvPr id="12" name="Text 10"/>
+          <p:cNvSpPr txBox="1"/>
+          <p:nvPr/>
+        </p:nvSpPr>
+        <p:spPr>
+          <a:xfrm>
+            <a:off x="7863840" y="2615184"/>
+            <a:ext cx="3474720" cy="1416050"/>
+          </a:xfrm>
+          <a:prstGeom prst="rect">
+            <a:avLst/>
+          </a:prstGeom>
+          <a:noFill/>
+          <a:ln/>
+        </p:spPr>
+        <p:txBody>
+          <a:bodyPr wrap="square" lIns="0" tIns="0" rIns="0" bIns="0" rtlCol="0" anchor="t"/>
+          <a:lstStyle/>
+          <a:p>
+            <a:pPr marL="342900" indent="-342900">
+              <a:lnSpc>
+                <a:spcPts val="1560"/>
+              </a:lnSpc>
+              <a:spcAft>
+                <a:spcPts val="700"/>
+              </a:spcAft>
+              <a:buSzPct val="100000"/>
+              <a:buChar char="•"/>
+            </a:pPr>
+            <a:r>
+              <a:rPr lang="en-US" sz="1200" dirty="0">
+                <a:solidFill>
+                  <a:srgbClr val="1A3A5C"/>
+                </a:solidFill>
+                <a:latin typeface="Calibri" pitchFamily="34" charset="0"/>
+                <a:ea typeface="Calibri" pitchFamily="34" charset="-122"/>
+                <a:cs typeface="Calibri" pitchFamily="34" charset="-120"/>
+              </a:rPr>
+              <a:t>KMIP JSON and XML encodings</a:t>
+            </a:r>
+            <a:endParaRPr lang="en-US" sz="1200" dirty="0"/>
+          </a:p>
+        </p:txBody>
+      </p:sp>
+      <p:sp>
+        <p:nvSpPr>
+          <p:cNvPr id="13" name="Text 11"/>
+          <p:cNvSpPr txBox="1"/>
+          <p:nvPr/>
+        </p:nvSpPr>
+        <p:spPr>
+          <a:xfrm>
+            <a:off x="566928" y="6272784"/>
+            <a:ext cx="11027664" cy="310896"/>
+          </a:xfrm>
+          <a:prstGeom prst="rect">
+            <a:avLst/>
+          </a:prstGeom>
+          <a:noFill/>
+          <a:ln/>
+        </p:spPr>
+        <p:txBody>
+          <a:bodyPr wrap="square" lIns="0" tIns="0" rIns="0" bIns="0" rtlCol="0" anchor="ctr"/>
+          <a:lstStyle/>
+          <a:p>
+            <a:pPr indent="0" marL="0">
+              <a:buNone/>
+            </a:pPr>
+            <a:r>
+              <a:rPr lang="en-US" sz="1050" i="1" dirty="0">
+                <a:solidFill>
+                  <a:srgbClr val="7B8794"/>
+                </a:solidFill>
+                <a:latin typeface="Calibri" pitchFamily="34" charset="0"/>
+                <a:ea typeface="Calibri" pitchFamily="34" charset="-122"/>
+                <a:cs typeface="Calibri" pitchFamily="34" charset="-120"/>
+              </a:rPr>
+              <a:t>Estimated size: ~700 lines, ~40 tests — mostly the existing corpus re-parametrised.</a:t>
+            </a:r>
+            <a:endParaRPr lang="en-US" sz="1050" dirty="0"/>
+          </a:p>
+        </p:txBody>
+      </p:sp>
+    </p:spTree>
+  </p:cSld>
+  <p:clrMapOvr>
+    <a:masterClrMapping/>
+  </p:clrMapOvr>
+</p:sld>
+</file>
+
+<file path=ppt/slides/slide41.xml><?xml version="1.0" encoding="utf-8"?>
+<p:sld xmlns:a="http://schemas.openxmlformats.org/drawingml/2006/main" xmlns:r="http://schemas.openxmlformats.org/officeDocument/2006/relationships" xmlns:p="http://schemas.openxmlformats.org/presentationml/2006/main">
+  <p:cSld name="Slide 41">
+    <p:bg>
+      <p:bgPr>
+        <a:solidFill>
+          <a:srgbClr val="FFFFFF"/>
+        </a:solidFill>
+      </p:bgPr>
+    </p:bg>
+    <p:spTree>
+      <p:nvGrpSpPr>
+        <p:cNvPr id="1" name=""/>
+        <p:cNvGrpSpPr/>
+        <p:nvPr/>
+      </p:nvGrpSpPr>
+      <p:grpSpPr>
+        <a:xfrm>
+          <a:off x="0" y="0"/>
+          <a:ext cx="0" cy="0"/>
+          <a:chOff x="0" y="0"/>
+          <a:chExt cx="0" cy="0"/>
+        </a:xfrm>
+      </p:grpSpPr>
+      <p:sp>
+        <p:nvSpPr>
+          <p:cNvPr id="2" name="Text 0"/>
+          <p:cNvSpPr txBox="1"/>
+          <p:nvPr/>
+        </p:nvSpPr>
+        <p:spPr>
+          <a:xfrm>
+            <a:off x="566928" y="365760"/>
+            <a:ext cx="11027664" cy="237744"/>
+          </a:xfrm>
+          <a:prstGeom prst="rect">
+            <a:avLst/>
+          </a:prstGeom>
+          <a:noFill/>
+          <a:ln/>
+        </p:spPr>
+        <p:txBody>
+          <a:bodyPr wrap="square" lIns="0" tIns="0" rIns="0" bIns="0" rtlCol="0" anchor="ctr"/>
+          <a:lstStyle/>
+          <a:p>
+            <a:pPr indent="0" marL="0">
+              <a:buNone/>
+            </a:pPr>
+            <a:r>
+              <a:rPr lang="en-US" sz="1150" b="1" spc="220" kern="0" dirty="0">
+                <a:solidFill>
+                  <a:srgbClr val="C8952B"/>
+                </a:solidFill>
+                <a:latin typeface="Calibri" pitchFamily="34" charset="0"/>
+                <a:ea typeface="Calibri" pitchFamily="34" charset="-122"/>
+                <a:cs typeface="Calibri" pitchFamily="34" charset="-120"/>
+              </a:rPr>
+              <a:t>STEP 13 OF 14 · TEST STRATEGY</a:t>
+            </a:r>
+            <a:endParaRPr lang="en-US" sz="1150" dirty="0"/>
+          </a:p>
+        </p:txBody>
+      </p:sp>
+      <p:sp>
+        <p:nvSpPr>
+          <p:cNvPr id="3" name="Text 1"/>
+          <p:cNvSpPr txBox="1"/>
+          <p:nvPr/>
+        </p:nvSpPr>
+        <p:spPr>
+          <a:xfrm>
+            <a:off x="566928" y="621792"/>
+            <a:ext cx="11027664" cy="640080"/>
+          </a:xfrm>
+          <a:prstGeom prst="rect">
+            <a:avLst/>
+          </a:prstGeom>
+          <a:noFill/>
+          <a:ln/>
+        </p:spPr>
+        <p:txBody>
+          <a:bodyPr wrap="square" lIns="0" tIns="0" rIns="0" bIns="0" rtlCol="0" anchor="ctr"/>
+          <a:lstStyle/>
+          <a:p>
+            <a:pPr indent="0" marL="0">
+              <a:buNone/>
+            </a:pPr>
+            <a:r>
+              <a:rPr lang="en-US" sz="3000" b="1" dirty="0">
+                <a:solidFill>
+                  <a:srgbClr val="1A3A5C"/>
+                </a:solidFill>
+                <a:latin typeface="Cambria" pitchFamily="34" charset="0"/>
+                <a:ea typeface="Cambria" pitchFamily="34" charset="-122"/>
+                <a:cs typeface="Cambria" pitchFamily="34" charset="-120"/>
+              </a:rPr>
+              <a:t>KMIP JSON and XML encodings</a:t>
+            </a:r>
+            <a:endParaRPr lang="en-US" sz="3000" dirty="0"/>
+          </a:p>
+        </p:txBody>
+      </p:sp>
+      <p:sp>
+        <p:nvSpPr>
+          <p:cNvPr id="4" name="Shape 2"/>
+          <p:cNvSpPr/>
+          <p:nvPr/>
+        </p:nvSpPr>
+        <p:spPr>
+          <a:xfrm>
+            <a:off x="566928" y="1389888"/>
+            <a:ext cx="11027664" cy="475488"/>
+          </a:xfrm>
+          <a:prstGeom prst="roundRect">
+            <a:avLst>
+              <a:gd name="adj" fmla="val 11538"/>
+            </a:avLst>
+          </a:prstGeom>
+          <a:solidFill>
+            <a:srgbClr val="1A3A5C"/>
+          </a:solidFill>
+          <a:ln w="12700">
+            <a:solidFill>
+              <a:srgbClr val="1A3A5C"/>
+            </a:solidFill>
+            <a:prstDash val="solid"/>
+          </a:ln>
+        </p:spPr>
+      </p:sp>
+      <p:sp>
+        <p:nvSpPr>
+          <p:cNvPr id="5" name="Text 3"/>
+          <p:cNvSpPr txBox="1"/>
+          <p:nvPr/>
+        </p:nvSpPr>
+        <p:spPr>
+          <a:xfrm>
+            <a:off x="822960" y="1389888"/>
+            <a:ext cx="9290304" cy="475488"/>
+          </a:xfrm>
+          <a:prstGeom prst="rect">
+            <a:avLst/>
+          </a:prstGeom>
+          <a:noFill/>
+          <a:ln/>
+        </p:spPr>
+        <p:txBody>
+          <a:bodyPr wrap="square" lIns="0" tIns="0" rIns="0" bIns="0" rtlCol="0" anchor="ctr"/>
+          <a:lstStyle/>
+          <a:p>
+            <a:pPr indent="0" marL="0">
+              <a:buNone/>
+            </a:pPr>
+            <a:r>
+              <a:rPr lang="en-US" sz="1200" dirty="0">
+                <a:solidFill>
+                  <a:srgbClr val="C9DAEA"/>
+                </a:solidFill>
+                <a:latin typeface="Calibri" pitchFamily="34" charset="0"/>
+                <a:ea typeface="Calibri" pitchFamily="34" charset="-122"/>
+                <a:cs typeface="Calibri" pitchFamily="34" charset="-120"/>
+              </a:rPr>
+              <a:t>Let a client speak KMIP without implementing a TTLV codec.</a:t>
+            </a:r>
+            <a:endParaRPr lang="en-US" sz="1200" dirty="0"/>
+          </a:p>
+        </p:txBody>
+      </p:sp>
+      <p:sp>
+        <p:nvSpPr>
+          <p:cNvPr id="6" name="Text 4"/>
+          <p:cNvSpPr txBox="1"/>
+          <p:nvPr/>
+        </p:nvSpPr>
+        <p:spPr>
+          <a:xfrm>
+            <a:off x="10177272" y="1389888"/>
+            <a:ext cx="1188720" cy="475488"/>
+          </a:xfrm>
+          <a:prstGeom prst="rect">
+            <a:avLst/>
+          </a:prstGeom>
+          <a:noFill/>
+          <a:ln/>
+        </p:spPr>
+        <p:txBody>
+          <a:bodyPr wrap="square" lIns="0" tIns="0" rIns="0" bIns="0" rtlCol="0" anchor="ctr"/>
+          <a:lstStyle/>
+          <a:p>
+            <a:pPr algn="r" indent="0" marL="0">
+              <a:buNone/>
+            </a:pPr>
+            <a:r>
+              <a:rPr lang="en-US" sz="1100" b="1" dirty="0">
+                <a:solidFill>
+                  <a:srgbClr val="C8952B"/>
+                </a:solidFill>
+                <a:latin typeface="Calibri" pitchFamily="34" charset="0"/>
+                <a:ea typeface="Calibri" pitchFamily="34" charset="-122"/>
+                <a:cs typeface="Calibri" pitchFamily="34" charset="-120"/>
+              </a:rPr>
+              <a:t>Stage E</a:t>
+            </a:r>
+            <a:endParaRPr lang="en-US" sz="1100" dirty="0"/>
+          </a:p>
+        </p:txBody>
+      </p:sp>
+      <p:sp>
+        <p:nvSpPr>
+          <p:cNvPr id="7" name="Shape 5"/>
+          <p:cNvSpPr/>
+          <p:nvPr/>
+        </p:nvSpPr>
+        <p:spPr>
+          <a:xfrm>
+            <a:off x="566928" y="2103120"/>
+            <a:ext cx="11027664" cy="2495169"/>
+          </a:xfrm>
+          <a:prstGeom prst="roundRect">
+            <a:avLst>
+              <a:gd name="adj" fmla="val 2199"/>
+            </a:avLst>
+          </a:prstGeom>
+          <a:solidFill>
+            <a:srgbClr val="E8EFF6"/>
+          </a:solidFill>
+          <a:ln w="12700">
+            <a:solidFill>
+              <a:srgbClr val="E8EFF6"/>
+            </a:solidFill>
+            <a:prstDash val="solid"/>
+          </a:ln>
+          <a:effectLst>
+            <a:outerShdw sx="100000" sy="100000" kx="0" ky="0" algn="bl" rotWithShape="0" blurRad="127000" dist="25400" dir="5400000">
+              <a:srgbClr val="8C9AA8">
+                <a:alpha val="22000"/>
+              </a:srgbClr>
+            </a:outerShdw>
+          </a:effectLst>
+        </p:spPr>
+      </p:sp>
+      <p:sp>
+        <p:nvSpPr>
+          <p:cNvPr id="8" name="Text 6"/>
+          <p:cNvSpPr txBox="1"/>
+          <p:nvPr/>
+        </p:nvSpPr>
+        <p:spPr>
+          <a:xfrm>
+            <a:off x="822960" y="2322576"/>
+            <a:ext cx="10515600" cy="201168"/>
+          </a:xfrm>
+          <a:prstGeom prst="rect">
+            <a:avLst/>
+          </a:prstGeom>
+          <a:noFill/>
+          <a:ln/>
+        </p:spPr>
+        <p:txBody>
+          <a:bodyPr wrap="square" lIns="0" tIns="0" rIns="0" bIns="0" rtlCol="0" anchor="ctr"/>
+          <a:lstStyle/>
+          <a:p>
+            <a:pPr indent="0" marL="0">
+              <a:buNone/>
+            </a:pPr>
+            <a:r>
+              <a:rPr lang="en-US" sz="1000" b="1" spc="160" kern="0" dirty="0">
+                <a:solidFill>
+                  <a:srgbClr val="2E6DA4"/>
+                </a:solidFill>
+                <a:latin typeface="Calibri" pitchFamily="34" charset="0"/>
+                <a:ea typeface="Calibri" pitchFamily="34" charset="-122"/>
+                <a:cs typeface="Calibri" pitchFamily="34" charset="-120"/>
+              </a:rPr>
+              <a:t>WHAT THE TESTS HAVE TO PROVE</a:t>
+            </a:r>
+            <a:endParaRPr lang="en-US" sz="1000" dirty="0"/>
+          </a:p>
+        </p:txBody>
+      </p:sp>
+      <p:sp>
+        <p:nvSpPr>
+          <p:cNvPr id="9" name="Text 7"/>
+          <p:cNvSpPr txBox="1"/>
+          <p:nvPr/>
+        </p:nvSpPr>
+        <p:spPr>
+          <a:xfrm>
+            <a:off x="822960" y="2615184"/>
+            <a:ext cx="10515600" cy="1800225"/>
+          </a:xfrm>
+          <a:prstGeom prst="rect">
+            <a:avLst/>
+          </a:prstGeom>
+          <a:noFill/>
+          <a:ln/>
+        </p:spPr>
+        <p:txBody>
+          <a:bodyPr wrap="square" lIns="0" tIns="0" rIns="0" bIns="0" rtlCol="0" anchor="t"/>
+          <a:lstStyle/>
+          <a:p>
+            <a:pPr marL="342900" indent="-342900">
+              <a:lnSpc>
+                <a:spcPts val="1625"/>
+              </a:lnSpc>
+              <a:spcAft>
+                <a:spcPts val="700"/>
+              </a:spcAft>
+              <a:buSzPct val="100000"/>
+              <a:buChar char="•"/>
+            </a:pPr>
+            <a:r>
+              <a:rPr lang="en-US" sz="1250" dirty="0">
+                <a:solidFill>
+                  <a:srgbClr val="4D5A68"/>
+                </a:solidFill>
+                <a:latin typeface="Calibri" pitchFamily="34" charset="0"/>
+                <a:ea typeface="Calibri" pitchFamily="34" charset="-122"/>
+                <a:cs typeface="Calibri" pitchFamily="34" charset="-120"/>
+              </a:rPr>
+              <a:t>Round-trip every operation's request and response through all three encodings and assert the decoded structures are identical — the existing conformance corpus re-run twice, not a new set of assertions.</a:t>
+            </a:r>
+            <a:endParaRPr lang="en-US" sz="1250" dirty="0"/>
+          </a:p>
+          <a:p>
+            <a:pPr marL="342900" indent="-342900">
+              <a:lnSpc>
+                <a:spcPts val="1625"/>
+              </a:lnSpc>
+              <a:spcAft>
+                <a:spcPts val="700"/>
+              </a:spcAft>
+              <a:buSzPct val="100000"/>
+              <a:buChar char="•"/>
+            </a:pPr>
+            <a:r>
+              <a:rPr lang="en-US" sz="1250" dirty="0">
+                <a:solidFill>
+                  <a:srgbClr val="4D5A68"/>
+                </a:solidFill>
+                <a:latin typeface="Calibri" pitchFamily="34" charset="0"/>
+                <a:ea typeface="Calibri" pitchFamily="34" charset="-122"/>
+                <a:cs typeface="Calibri" pitchFamily="34" charset="-120"/>
+              </a:rPr>
+              <a:t>The OASIS JSON and XML test vectors decode to what the TTLV vectors decode to.</a:t>
+            </a:r>
+            <a:endParaRPr lang="en-US" sz="1250" dirty="0"/>
+          </a:p>
+          <a:p>
+            <a:pPr marL="342900" indent="-342900">
+              <a:lnSpc>
+                <a:spcPts val="1625"/>
+              </a:lnSpc>
+              <a:spcAft>
+                <a:spcPts val="700"/>
+              </a:spcAft>
+              <a:buSzPct val="100000"/>
+              <a:buChar char="•"/>
+            </a:pPr>
+            <a:r>
+              <a:rPr lang="en-US" sz="1250" dirty="0">
+                <a:solidFill>
+                  <a:srgbClr val="4D5A68"/>
+                </a:solidFill>
+                <a:latin typeface="Calibri" pitchFamily="34" charset="0"/>
+                <a:ea typeface="Calibri" pitchFamily="34" charset="-122"/>
+                <a:cs typeface="Calibri" pitchFamily="34" charset="-120"/>
+              </a:rPr>
+              <a:t>A batch, a wrapped key and a dual-control refusal behave the same over JSON as over TTLV, so an encoding cannot change semantics.</a:t>
+            </a:r>
+            <a:endParaRPr lang="en-US" sz="1250" dirty="0"/>
+          </a:p>
+          <a:p>
+            <a:pPr marL="342900" indent="-342900">
+              <a:lnSpc>
+                <a:spcPts val="1625"/>
+              </a:lnSpc>
+              <a:spcAft>
+                <a:spcPts val="700"/>
+              </a:spcAft>
+              <a:buSzPct val="100000"/>
+              <a:buChar char="•"/>
+            </a:pPr>
+            <a:r>
+              <a:rPr lang="en-US" sz="1250" dirty="0">
+                <a:solidFill>
+                  <a:srgbClr val="4D5A68"/>
+                </a:solidFill>
+                <a:latin typeface="Calibri" pitchFamily="34" charset="0"/>
+                <a:ea typeface="Calibri" pitchFamily="34" charset="-122"/>
+                <a:cs typeface="Calibri" pitchFamily="34" charset="-120"/>
+              </a:rPr>
+              <a:t>An unknown tag, a truncated document and a type mismatch are refused with the same error the TTLV codec raises.</a:t>
+            </a:r>
+            <a:endParaRPr lang="en-US" sz="1250" dirty="0"/>
+          </a:p>
+        </p:txBody>
+      </p:sp>
+      <p:sp>
+        <p:nvSpPr>
+          <p:cNvPr id="10" name="Shape 8"/>
+          <p:cNvSpPr/>
+          <p:nvPr/>
+        </p:nvSpPr>
+        <p:spPr>
+          <a:xfrm>
+            <a:off x="566928" y="4872609"/>
+            <a:ext cx="11027664" cy="914400"/>
+          </a:xfrm>
+          <a:prstGeom prst="roundRect">
+            <a:avLst>
+              <a:gd name="adj" fmla="val 6000"/>
+            </a:avLst>
+          </a:prstGeom>
+          <a:solidFill>
+            <a:srgbClr val="E2F0E7"/>
+          </a:solidFill>
+          <a:ln w="12700">
+            <a:solidFill>
+              <a:srgbClr val="E2F0E7"/>
+            </a:solidFill>
+            <a:prstDash val="solid"/>
+          </a:ln>
+          <a:effectLst>
+            <a:outerShdw sx="100000" sy="100000" kx="0" ky="0" algn="bl" rotWithShape="0" blurRad="127000" dist="25400" dir="5400000">
+              <a:srgbClr val="8C9AA8">
+                <a:alpha val="22000"/>
+              </a:srgbClr>
+            </a:outerShdw>
+          </a:effectLst>
+        </p:spPr>
+      </p:sp>
+      <p:sp>
+        <p:nvSpPr>
+          <p:cNvPr id="11" name="Text 9"/>
+          <p:cNvSpPr txBox="1"/>
+          <p:nvPr/>
+        </p:nvSpPr>
+        <p:spPr>
+          <a:xfrm>
+            <a:off x="822960" y="5018913"/>
+            <a:ext cx="914400" cy="219456"/>
+          </a:xfrm>
+          <a:prstGeom prst="rect">
+            <a:avLst/>
+          </a:prstGeom>
+          <a:noFill/>
+          <a:ln/>
+        </p:spPr>
+        <p:txBody>
+          <a:bodyPr wrap="square" lIns="0" tIns="0" rIns="0" bIns="0" rtlCol="0" anchor="ctr"/>
+          <a:lstStyle/>
+          <a:p>
+            <a:pPr indent="0" marL="0">
+              <a:buNone/>
+            </a:pPr>
+            <a:r>
+              <a:rPr lang="en-US" sz="1000" b="1" spc="160" kern="0" dirty="0">
+                <a:solidFill>
+                  <a:srgbClr val="1F7A43"/>
+                </a:solidFill>
+                <a:latin typeface="Calibri" pitchFamily="34" charset="0"/>
+                <a:ea typeface="Calibri" pitchFamily="34" charset="-122"/>
+                <a:cs typeface="Calibri" pitchFamily="34" charset="-120"/>
+              </a:rPr>
+              <a:t>GATE</a:t>
+            </a:r>
+            <a:endParaRPr lang="en-US" sz="1000" dirty="0"/>
+          </a:p>
+        </p:txBody>
+      </p:sp>
+      <p:sp>
+        <p:nvSpPr>
+          <p:cNvPr id="12" name="Text 10"/>
+          <p:cNvSpPr txBox="1"/>
+          <p:nvPr/>
+        </p:nvSpPr>
+        <p:spPr>
+          <a:xfrm>
+            <a:off x="1773936" y="4982337"/>
+            <a:ext cx="9564624" cy="694944"/>
+          </a:xfrm>
+          <a:prstGeom prst="rect">
+            <a:avLst/>
+          </a:prstGeom>
+          <a:noFill/>
+          <a:ln/>
+        </p:spPr>
+        <p:txBody>
+          <a:bodyPr wrap="square" lIns="0" tIns="0" rIns="0" bIns="0" rtlCol="0" anchor="ctr"/>
+          <a:lstStyle/>
+          <a:p>
+            <a:pPr indent="0" marL="0">
+              <a:buNone/>
+            </a:pPr>
+            <a:r>
+              <a:rPr lang="en-US" sz="1250" dirty="0">
+                <a:solidFill>
+                  <a:srgbClr val="1A3A5C"/>
+                </a:solidFill>
+                <a:latin typeface="Calibri" pitchFamily="34" charset="0"/>
+                <a:ea typeface="Calibri" pitchFamily="34" charset="-122"/>
+                <a:cs typeface="Calibri" pitchFamily="34" charset="-120"/>
+              </a:rPr>
+              <a:t>The conformance suite passes unchanged when re-run against the JSON and XML encodings, and a request refused over TTLV is refused identically over both.</a:t>
+            </a:r>
+            <a:endParaRPr lang="en-US" sz="1250" dirty="0"/>
+          </a:p>
+        </p:txBody>
+      </p:sp>
+    </p:spTree>
+  </p:cSld>
+  <p:clrMapOvr>
+    <a:masterClrMapping/>
+  </p:clrMapOvr>
+</p:sld>
+</file>
+
+<file path=ppt/slides/slide42.xml><?xml version="1.0" encoding="utf-8"?>
+<p:sld xmlns:a="http://schemas.openxmlformats.org/drawingml/2006/main" xmlns:r="http://schemas.openxmlformats.org/officeDocument/2006/relationships" xmlns:p="http://schemas.openxmlformats.org/presentationml/2006/main">
+  <p:cSld name="Slide 42">
+    <p:bg>
+      <p:bgPr>
+        <a:solidFill>
+          <a:srgbClr val="FFFFFF"/>
+        </a:solidFill>
+      </p:bgPr>
+    </p:bg>
+    <p:spTree>
+      <p:nvGrpSpPr>
+        <p:cNvPr id="1" name=""/>
+        <p:cNvGrpSpPr/>
+        <p:nvPr/>
+      </p:nvGrpSpPr>
+      <p:grpSpPr>
+        <a:xfrm>
+          <a:off x="0" y="0"/>
+          <a:ext cx="0" cy="0"/>
+          <a:chOff x="0" y="0"/>
+          <a:chExt cx="0" cy="0"/>
+        </a:xfrm>
+      </p:grpSpPr>
+      <p:sp>
+        <p:nvSpPr>
+          <p:cNvPr id="2" name="Text 0"/>
+          <p:cNvSpPr txBox="1"/>
+          <p:nvPr/>
+        </p:nvSpPr>
+        <p:spPr>
+          <a:xfrm>
+            <a:off x="566928" y="365760"/>
+            <a:ext cx="11027664" cy="237744"/>
+          </a:xfrm>
+          <a:prstGeom prst="rect">
+            <a:avLst/>
+          </a:prstGeom>
+          <a:noFill/>
+          <a:ln/>
+        </p:spPr>
+        <p:txBody>
+          <a:bodyPr wrap="square" lIns="0" tIns="0" rIns="0" bIns="0" rtlCol="0" anchor="ctr"/>
+          <a:lstStyle/>
+          <a:p>
+            <a:pPr indent="0" marL="0">
+              <a:buNone/>
+            </a:pPr>
+            <a:r>
+              <a:rPr lang="en-US" sz="1150" b="1" spc="220" kern="0" dirty="0">
+                <a:solidFill>
+                  <a:srgbClr val="C8952B"/>
+                </a:solidFill>
+                <a:latin typeface="Calibri" pitchFamily="34" charset="0"/>
+                <a:ea typeface="Calibri" pitchFamily="34" charset="-122"/>
+                <a:cs typeface="Calibri" pitchFamily="34" charset="-120"/>
+              </a:rPr>
+              <a:t>STEP 14 OF 14 · DESIGN IMPACT</a:t>
+            </a:r>
+            <a:endParaRPr lang="en-US" sz="1150" dirty="0"/>
+          </a:p>
+        </p:txBody>
+      </p:sp>
+      <p:sp>
+        <p:nvSpPr>
+          <p:cNvPr id="3" name="Text 1"/>
+          <p:cNvSpPr txBox="1"/>
+          <p:nvPr/>
+        </p:nvSpPr>
+        <p:spPr>
+          <a:xfrm>
+            <a:off x="566928" y="621792"/>
+            <a:ext cx="11027664" cy="640080"/>
+          </a:xfrm>
+          <a:prstGeom prst="rect">
+            <a:avLst/>
+          </a:prstGeom>
+          <a:noFill/>
+          <a:ln/>
+        </p:spPr>
+        <p:txBody>
+          <a:bodyPr wrap="square" lIns="0" tIns="0" rIns="0" bIns="0" rtlCol="0" anchor="ctr"/>
+          <a:lstStyle/>
+          <a:p>
+            <a:pPr indent="0" marL="0">
+              <a:buNone/>
+            </a:pPr>
+            <a:r>
+              <a:rPr lang="en-US" sz="3000" b="1" dirty="0">
+                <a:solidFill>
+                  <a:srgbClr val="1A3A5C"/>
+                </a:solidFill>
+                <a:latin typeface="Cambria" pitchFamily="34" charset="0"/>
+                <a:ea typeface="Cambria" pitchFamily="34" charset="-122"/>
+                <a:cs typeface="Cambria" pitchFamily="34" charset="-120"/>
+              </a:rPr>
+              <a:t>Certificate discovery and expiry monitoring</a:t>
+            </a:r>
+            <a:endParaRPr lang="en-US" sz="3000" dirty="0"/>
+          </a:p>
+        </p:txBody>
+      </p:sp>
+      <p:sp>
+        <p:nvSpPr>
+          <p:cNvPr id="4" name="Shape 2"/>
+          <p:cNvSpPr/>
+          <p:nvPr/>
+        </p:nvSpPr>
+        <p:spPr>
+          <a:xfrm>
+            <a:off x="566928" y="1389888"/>
+            <a:ext cx="11027664" cy="475488"/>
+          </a:xfrm>
+          <a:prstGeom prst="roundRect">
+            <a:avLst>
+              <a:gd name="adj" fmla="val 11538"/>
+            </a:avLst>
+          </a:prstGeom>
+          <a:solidFill>
+            <a:srgbClr val="1A3A5C"/>
+          </a:solidFill>
+          <a:ln w="12700">
+            <a:solidFill>
+              <a:srgbClr val="1A3A5C"/>
+            </a:solidFill>
+            <a:prstDash val="solid"/>
+          </a:ln>
+        </p:spPr>
+      </p:sp>
+      <p:sp>
+        <p:nvSpPr>
+          <p:cNvPr id="5" name="Text 3"/>
+          <p:cNvSpPr txBox="1"/>
+          <p:nvPr/>
+        </p:nvSpPr>
+        <p:spPr>
+          <a:xfrm>
+            <a:off x="822960" y="1389888"/>
+            <a:ext cx="9290304" cy="475488"/>
+          </a:xfrm>
+          <a:prstGeom prst="rect">
+            <a:avLst/>
+          </a:prstGeom>
+          <a:noFill/>
+          <a:ln/>
+        </p:spPr>
+        <p:txBody>
+          <a:bodyPr wrap="square" lIns="0" tIns="0" rIns="0" bIns="0" rtlCol="0" anchor="ctr"/>
+          <a:lstStyle/>
+          <a:p>
+            <a:pPr indent="0" marL="0">
+              <a:buNone/>
+            </a:pPr>
+            <a:r>
+              <a:rPr lang="en-US" sz="1200" dirty="0">
+                <a:solidFill>
+                  <a:srgbClr val="C9DAEA"/>
+                </a:solidFill>
+                <a:latin typeface="Calibri" pitchFamily="34" charset="0"/>
+                <a:ea typeface="Calibri" pitchFamily="34" charset="-122"/>
+                <a:cs typeface="Calibri" pitchFamily="34" charset="-120"/>
+              </a:rPr>
+              <a:t>Know which certificates the estate is actually running, and warn before one expires.</a:t>
+            </a:r>
+            <a:endParaRPr lang="en-US" sz="1200" dirty="0"/>
+          </a:p>
+        </p:txBody>
+      </p:sp>
+      <p:sp>
+        <p:nvSpPr>
+          <p:cNvPr id="6" name="Text 4"/>
+          <p:cNvSpPr txBox="1"/>
+          <p:nvPr/>
+        </p:nvSpPr>
+        <p:spPr>
+          <a:xfrm>
+            <a:off x="10177272" y="1389888"/>
+            <a:ext cx="1188720" cy="475488"/>
+          </a:xfrm>
+          <a:prstGeom prst="rect">
+            <a:avLst/>
+          </a:prstGeom>
+          <a:noFill/>
+          <a:ln/>
+        </p:spPr>
+        <p:txBody>
+          <a:bodyPr wrap="square" lIns="0" tIns="0" rIns="0" bIns="0" rtlCol="0" anchor="ctr"/>
+          <a:lstStyle/>
+          <a:p>
+            <a:pPr algn="r" indent="0" marL="0">
+              <a:buNone/>
+            </a:pPr>
+            <a:r>
+              <a:rPr lang="en-US" sz="1100" b="1" dirty="0">
+                <a:solidFill>
+                  <a:srgbClr val="C8952B"/>
+                </a:solidFill>
+                <a:latin typeface="Calibri" pitchFamily="34" charset="0"/>
+                <a:ea typeface="Calibri" pitchFamily="34" charset="-122"/>
+                <a:cs typeface="Calibri" pitchFamily="34" charset="-120"/>
+              </a:rPr>
+              <a:t>Stage E</a:t>
+            </a:r>
+            <a:endParaRPr lang="en-US" sz="1100" dirty="0"/>
+          </a:p>
+        </p:txBody>
+      </p:sp>
+      <p:sp>
+        <p:nvSpPr>
+          <p:cNvPr id="7" name="Shape 5"/>
+          <p:cNvSpPr/>
+          <p:nvPr/>
+        </p:nvSpPr>
+        <p:spPr>
+          <a:xfrm>
+            <a:off x="566928" y="2103120"/>
+            <a:ext cx="5486400" cy="3140964"/>
+          </a:xfrm>
+          <a:prstGeom prst="roundRect">
+            <a:avLst>
+              <a:gd name="adj" fmla="val 1747"/>
+            </a:avLst>
+          </a:prstGeom>
+          <a:solidFill>
+            <a:srgbClr val="FBF3E3"/>
+          </a:solidFill>
+          <a:ln w="12700">
+            <a:solidFill>
+              <a:srgbClr val="FBF3E3"/>
+            </a:solidFill>
+            <a:prstDash val="solid"/>
+          </a:ln>
+          <a:effectLst>
+            <a:outerShdw sx="100000" sy="100000" kx="0" ky="0" algn="bl" rotWithShape="0" blurRad="127000" dist="25400" dir="5400000">
+              <a:srgbClr val="8C9AA8">
+                <a:alpha val="22000"/>
+              </a:srgbClr>
+            </a:outerShdw>
+          </a:effectLst>
+        </p:spPr>
+      </p:sp>
+      <p:sp>
+        <p:nvSpPr>
+          <p:cNvPr id="8" name="Text 6"/>
+          <p:cNvSpPr txBox="1"/>
+          <p:nvPr/>
+        </p:nvSpPr>
+        <p:spPr>
+          <a:xfrm>
+            <a:off x="822960" y="2322576"/>
+            <a:ext cx="4974336" cy="201168"/>
+          </a:xfrm>
+          <a:prstGeom prst="rect">
+            <a:avLst/>
+          </a:prstGeom>
+          <a:noFill/>
+          <a:ln/>
+        </p:spPr>
+        <p:txBody>
+          <a:bodyPr wrap="square" lIns="0" tIns="0" rIns="0" bIns="0" rtlCol="0" anchor="ctr"/>
+          <a:lstStyle/>
+          <a:p>
+            <a:pPr indent="0" marL="0">
+              <a:buNone/>
+            </a:pPr>
+            <a:r>
+              <a:rPr lang="en-US" sz="1000" b="1" spc="160" kern="0" dirty="0">
+                <a:solidFill>
+                  <a:srgbClr val="9A6410"/>
+                </a:solidFill>
+                <a:latin typeface="Calibri" pitchFamily="34" charset="0"/>
+                <a:ea typeface="Calibri" pitchFamily="34" charset="-122"/>
+                <a:cs typeface="Calibri" pitchFamily="34" charset="-120"/>
+              </a:rPr>
+              <a:t>WHAT CHANGES IN THE EXISTING DESIGN</a:t>
+            </a:r>
+            <a:endParaRPr lang="en-US" sz="1000" dirty="0"/>
+          </a:p>
+        </p:txBody>
+      </p:sp>
+      <p:sp>
+        <p:nvSpPr>
+          <p:cNvPr id="9" name="Text 7"/>
+          <p:cNvSpPr txBox="1"/>
+          <p:nvPr/>
+        </p:nvSpPr>
+        <p:spPr>
+          <a:xfrm>
+            <a:off x="822960" y="2615184"/>
+            <a:ext cx="4974336" cy="2446020"/>
+          </a:xfrm>
+          <a:prstGeom prst="rect">
+            <a:avLst/>
+          </a:prstGeom>
+          <a:noFill/>
+          <a:ln/>
+        </p:spPr>
+        <p:txBody>
+          <a:bodyPr wrap="square" lIns="0" tIns="0" rIns="0" bIns="0" rtlCol="0" anchor="t"/>
+          <a:lstStyle/>
+          <a:p>
+            <a:pPr marL="342900" indent="-342900">
+              <a:lnSpc>
+                <a:spcPts val="1625"/>
+              </a:lnSpc>
+              <a:spcAft>
+                <a:spcPts val="700"/>
+              </a:spcAft>
+              <a:buSzPct val="100000"/>
+              <a:buChar char="•"/>
+            </a:pPr>
+            <a:r>
+              <a:rPr lang="en-US" sz="1250" dirty="0">
+                <a:solidFill>
+                  <a:srgbClr val="4D5A68"/>
+                </a:solidFill>
+                <a:latin typeface="Calibri" pitchFamily="34" charset="0"/>
+                <a:ea typeface="Calibri" pitchFamily="34" charset="-122"/>
+                <a:cs typeface="Calibri" pitchFamily="34" charset="-120"/>
+              </a:rPr>
+              <a:t>The server starts reaching outward. Everything else here waits to be called; this initiates connections, which is a new posture for the service and for its firewall rules.</a:t>
+            </a:r>
+            <a:endParaRPr lang="en-US" sz="1250" dirty="0"/>
+          </a:p>
+          <a:p>
+            <a:pPr marL="342900" indent="-342900">
+              <a:lnSpc>
+                <a:spcPts val="1625"/>
+              </a:lnSpc>
+              <a:spcAft>
+                <a:spcPts val="700"/>
+              </a:spcAft>
+              <a:buSzPct val="100000"/>
+              <a:buChar char="•"/>
+            </a:pPr>
+            <a:r>
+              <a:rPr lang="en-US" sz="1250" dirty="0">
+                <a:solidFill>
+                  <a:srgbClr val="4D5A68"/>
+                </a:solidFill>
+                <a:latin typeface="Calibri" pitchFamily="34" charset="0"/>
+                <a:ea typeface="Calibri" pitchFamily="34" charset="-122"/>
+                <a:cs typeface="Calibri" pitchFamily="34" charset="-120"/>
+              </a:rPr>
+              <a:t>The inventory stops being a view of what this KMS holds and becomes a view of the estate, including certificates it does not manage.</a:t>
+            </a:r>
+            <a:endParaRPr lang="en-US" sz="1250" dirty="0"/>
+          </a:p>
+        </p:txBody>
+      </p:sp>
+      <p:sp>
+        <p:nvSpPr>
+          <p:cNvPr id="10" name="Shape 8"/>
+          <p:cNvSpPr/>
+          <p:nvPr/>
+        </p:nvSpPr>
+        <p:spPr>
+          <a:xfrm>
+            <a:off x="6327648" y="2103120"/>
+            <a:ext cx="5266944" cy="3140964"/>
+          </a:xfrm>
+          <a:prstGeom prst="roundRect">
+            <a:avLst>
+              <a:gd name="adj" fmla="val 1747"/>
+            </a:avLst>
+          </a:prstGeom>
+          <a:solidFill>
+            <a:srgbClr val="E8EFF6"/>
+          </a:solidFill>
+          <a:ln w="12700">
+            <a:solidFill>
+              <a:srgbClr val="E8EFF6"/>
+            </a:solidFill>
+            <a:prstDash val="solid"/>
+          </a:ln>
+          <a:effectLst>
+            <a:outerShdw sx="100000" sy="100000" kx="0" ky="0" algn="bl" rotWithShape="0" blurRad="127000" dist="25400" dir="5400000">
+              <a:srgbClr val="8C9AA8">
+                <a:alpha val="22000"/>
+              </a:srgbClr>
+            </a:outerShdw>
+          </a:effectLst>
+        </p:spPr>
+      </p:sp>
+      <p:sp>
+        <p:nvSpPr>
+          <p:cNvPr id="11" name="Text 9"/>
+          <p:cNvSpPr txBox="1"/>
+          <p:nvPr/>
+        </p:nvSpPr>
+        <p:spPr>
+          <a:xfrm>
+            <a:off x="6583680" y="2322576"/>
+            <a:ext cx="4754880" cy="201168"/>
+          </a:xfrm>
+          <a:prstGeom prst="rect">
+            <a:avLst/>
+          </a:prstGeom>
+          <a:noFill/>
+          <a:ln/>
+        </p:spPr>
+        <p:txBody>
+          <a:bodyPr wrap="square" lIns="0" tIns="0" rIns="0" bIns="0" rtlCol="0" anchor="ctr"/>
+          <a:lstStyle/>
+          <a:p>
+            <a:pPr indent="0" marL="0">
+              <a:buNone/>
+            </a:pPr>
+            <a:r>
+              <a:rPr lang="en-US" sz="1000" b="1" spc="160" kern="0" dirty="0">
+                <a:solidFill>
+                  <a:srgbClr val="2E6DA4"/>
+                </a:solidFill>
+                <a:latin typeface="Calibri" pitchFamily="34" charset="0"/>
+                <a:ea typeface="Calibri" pitchFamily="34" charset="-122"/>
+                <a:cs typeface="Calibri" pitchFamily="34" charset="-120"/>
+              </a:rPr>
+              <a:t>THE SHAPE OF THE SOLUTION</a:t>
+            </a:r>
+            <a:endParaRPr lang="en-US" sz="1000" dirty="0"/>
+          </a:p>
+        </p:txBody>
+      </p:sp>
+      <p:sp>
+        <p:nvSpPr>
+          <p:cNvPr id="12" name="Text 10"/>
+          <p:cNvSpPr txBox="1"/>
+          <p:nvPr/>
+        </p:nvSpPr>
+        <p:spPr>
+          <a:xfrm>
+            <a:off x="6583680" y="2615184"/>
+            <a:ext cx="4754880" cy="2446020"/>
+          </a:xfrm>
+          <a:prstGeom prst="rect">
+            <a:avLst/>
+          </a:prstGeom>
+          <a:noFill/>
+          <a:ln/>
+        </p:spPr>
+        <p:txBody>
+          <a:bodyPr wrap="square" lIns="0" tIns="0" rIns="0" bIns="0" rtlCol="0" anchor="t"/>
+          <a:lstStyle/>
+          <a:p>
+            <a:pPr marL="342900" indent="-342900">
+              <a:lnSpc>
+                <a:spcPts val="1560"/>
+              </a:lnSpc>
+              <a:spcAft>
+                <a:spcPts val="700"/>
+              </a:spcAft>
+              <a:buSzPct val="100000"/>
+              <a:buChar char="•"/>
+            </a:pPr>
+            <a:r>
+              <a:rPr lang="en-US" sz="1200" dirty="0">
+                <a:solidFill>
+                  <a:srgbClr val="4D5A68"/>
+                </a:solidFill>
+                <a:latin typeface="Calibri" pitchFamily="34" charset="0"/>
+                <a:ea typeface="Calibri" pitchFamily="34" charset="-122"/>
+                <a:cs typeface="Calibri" pitchFamily="34" charset="-120"/>
+              </a:rPr>
+              <a:t>A scanner that connects to configured TLS endpoints, records the chain presented, and stores subject, issuer, fingerprint and validity window against the inventory.</a:t>
+            </a:r>
+            <a:endParaRPr lang="en-US" sz="1200" dirty="0"/>
+          </a:p>
+          <a:p>
+            <a:pPr marL="342900" indent="-342900">
+              <a:lnSpc>
+                <a:spcPts val="1560"/>
+              </a:lnSpc>
+              <a:spcAft>
+                <a:spcPts val="700"/>
+              </a:spcAft>
+              <a:buSzPct val="100000"/>
+              <a:buChar char="•"/>
+            </a:pPr>
+            <a:r>
+              <a:rPr lang="en-US" sz="1200" dirty="0">
+                <a:solidFill>
+                  <a:srgbClr val="4D5A68"/>
+                </a:solidFill>
+                <a:latin typeface="Calibri" pitchFamily="34" charset="0"/>
+                <a:ea typeface="Calibri" pitchFamily="34" charset="-122"/>
+                <a:cs typeface="Calibri" pitchFamily="34" charset="-120"/>
+              </a:rPr>
+              <a:t>Certificates registered here are matched by fingerprint, so the report separates what this KMS manages from what it does not — the second number is the one that matters.</a:t>
+            </a:r>
+            <a:endParaRPr lang="en-US" sz="1200" dirty="0"/>
+          </a:p>
+          <a:p>
+            <a:pPr marL="342900" indent="-342900">
+              <a:lnSpc>
+                <a:spcPts val="1560"/>
+              </a:lnSpc>
+              <a:spcAft>
+                <a:spcPts val="700"/>
+              </a:spcAft>
+              <a:buSzPct val="100000"/>
+              <a:buChar char="•"/>
+            </a:pPr>
+            <a:r>
+              <a:rPr lang="en-US" sz="1200" dirty="0">
+                <a:solidFill>
+                  <a:srgbClr val="4D5A68"/>
+                </a:solidFill>
+                <a:latin typeface="Calibri" pitchFamily="34" charset="0"/>
+                <a:ea typeface="Calibri" pitchFamily="34" charset="-122"/>
+                <a:cs typeface="Calibri" pitchFamily="34" charset="-120"/>
+              </a:rPr>
+              <a:t>Expiry thresholds feed the alerting rules built in step 9 rather than opening a second notification path.</a:t>
+            </a:r>
+            <a:endParaRPr lang="en-US" sz="1200" dirty="0"/>
+          </a:p>
+        </p:txBody>
+      </p:sp>
+    </p:spTree>
+  </p:cSld>
+  <p:clrMapOvr>
+    <a:masterClrMapping/>
+  </p:clrMapOvr>
+</p:sld>
+</file>
+
+<file path=ppt/slides/slide43.xml><?xml version="1.0" encoding="utf-8"?>
+<p:sld xmlns:a="http://schemas.openxmlformats.org/drawingml/2006/main" xmlns:r="http://schemas.openxmlformats.org/officeDocument/2006/relationships" xmlns:p="http://schemas.openxmlformats.org/presentationml/2006/main">
+  <p:cSld name="Slide 43">
+    <p:bg>
+      <p:bgPr>
+        <a:solidFill>
+          <a:srgbClr val="FFFFFF"/>
+        </a:solidFill>
+      </p:bgPr>
+    </p:bg>
+    <p:spTree>
+      <p:nvGrpSpPr>
+        <p:cNvPr id="1" name=""/>
+        <p:cNvGrpSpPr/>
+        <p:nvPr/>
+      </p:nvGrpSpPr>
+      <p:grpSpPr>
+        <a:xfrm>
+          <a:off x="0" y="0"/>
+          <a:ext cx="0" cy="0"/>
+          <a:chOff x="0" y="0"/>
+          <a:chExt cx="0" cy="0"/>
+        </a:xfrm>
+      </p:grpSpPr>
+      <p:sp>
+        <p:nvSpPr>
+          <p:cNvPr id="2" name="Text 0"/>
+          <p:cNvSpPr txBox="1"/>
+          <p:nvPr/>
+        </p:nvSpPr>
+        <p:spPr>
+          <a:xfrm>
+            <a:off x="566928" y="365760"/>
+            <a:ext cx="11027664" cy="237744"/>
+          </a:xfrm>
+          <a:prstGeom prst="rect">
+            <a:avLst/>
+          </a:prstGeom>
+          <a:noFill/>
+          <a:ln/>
+        </p:spPr>
+        <p:txBody>
+          <a:bodyPr wrap="square" lIns="0" tIns="0" rIns="0" bIns="0" rtlCol="0" anchor="ctr"/>
+          <a:lstStyle/>
+          <a:p>
+            <a:pPr indent="0" marL="0">
+              <a:buNone/>
+            </a:pPr>
+            <a:r>
+              <a:rPr lang="en-US" sz="1150" b="1" spc="220" kern="0" dirty="0">
+                <a:solidFill>
+                  <a:srgbClr val="C8952B"/>
+                </a:solidFill>
+                <a:latin typeface="Calibri" pitchFamily="34" charset="0"/>
+                <a:ea typeface="Calibri" pitchFamily="34" charset="-122"/>
+                <a:cs typeface="Calibri" pitchFamily="34" charset="-120"/>
+              </a:rPr>
+              <a:t>STEP 14 OF 14 · PROPOSED SOLUTION</a:t>
+            </a:r>
+            <a:endParaRPr lang="en-US" sz="1150" dirty="0"/>
+          </a:p>
+        </p:txBody>
+      </p:sp>
+      <p:sp>
+        <p:nvSpPr>
+          <p:cNvPr id="3" name="Text 1"/>
+          <p:cNvSpPr txBox="1"/>
+          <p:nvPr/>
+        </p:nvSpPr>
+        <p:spPr>
+          <a:xfrm>
+            <a:off x="566928" y="621792"/>
+            <a:ext cx="11027664" cy="640080"/>
+          </a:xfrm>
+          <a:prstGeom prst="rect">
+            <a:avLst/>
+          </a:prstGeom>
+          <a:noFill/>
+          <a:ln/>
+        </p:spPr>
+        <p:txBody>
+          <a:bodyPr wrap="square" lIns="0" tIns="0" rIns="0" bIns="0" rtlCol="0" anchor="ctr"/>
+          <a:lstStyle/>
+          <a:p>
+            <a:pPr indent="0" marL="0">
+              <a:buNone/>
+            </a:pPr>
+            <a:r>
+              <a:rPr lang="en-US" sz="3000" b="1" dirty="0">
+                <a:solidFill>
+                  <a:srgbClr val="1A3A5C"/>
+                </a:solidFill>
+                <a:latin typeface="Cambria" pitchFamily="34" charset="0"/>
+                <a:ea typeface="Cambria" pitchFamily="34" charset="-122"/>
+                <a:cs typeface="Cambria" pitchFamily="34" charset="-120"/>
+              </a:rPr>
+              <a:t>Certificate discovery and expiry monitoring</a:t>
+            </a:r>
+            <a:endParaRPr lang="en-US" sz="3000" dirty="0"/>
+          </a:p>
+        </p:txBody>
+      </p:sp>
+      <p:sp>
+        <p:nvSpPr>
+          <p:cNvPr id="4" name="Shape 2"/>
+          <p:cNvSpPr/>
+          <p:nvPr/>
+        </p:nvSpPr>
+        <p:spPr>
+          <a:xfrm>
+            <a:off x="566928" y="1389888"/>
+            <a:ext cx="11027664" cy="475488"/>
+          </a:xfrm>
+          <a:prstGeom prst="roundRect">
+            <a:avLst>
+              <a:gd name="adj" fmla="val 11538"/>
+            </a:avLst>
+          </a:prstGeom>
+          <a:solidFill>
+            <a:srgbClr val="1A3A5C"/>
+          </a:solidFill>
+          <a:ln w="12700">
+            <a:solidFill>
+              <a:srgbClr val="1A3A5C"/>
+            </a:solidFill>
+            <a:prstDash val="solid"/>
+          </a:ln>
+        </p:spPr>
+      </p:sp>
+      <p:sp>
+        <p:nvSpPr>
+          <p:cNvPr id="5" name="Text 3"/>
+          <p:cNvSpPr txBox="1"/>
+          <p:nvPr/>
+        </p:nvSpPr>
+        <p:spPr>
+          <a:xfrm>
+            <a:off x="822960" y="1389888"/>
+            <a:ext cx="9290304" cy="475488"/>
+          </a:xfrm>
+          <a:prstGeom prst="rect">
+            <a:avLst/>
+          </a:prstGeom>
+          <a:noFill/>
+          <a:ln/>
+        </p:spPr>
+        <p:txBody>
+          <a:bodyPr wrap="square" lIns="0" tIns="0" rIns="0" bIns="0" rtlCol="0" anchor="ctr"/>
+          <a:lstStyle/>
+          <a:p>
+            <a:pPr indent="0" marL="0">
+              <a:buNone/>
+            </a:pPr>
+            <a:r>
+              <a:rPr lang="en-US" sz="1200" dirty="0">
+                <a:solidFill>
+                  <a:srgbClr val="C9DAEA"/>
+                </a:solidFill>
+                <a:latin typeface="Calibri" pitchFamily="34" charset="0"/>
+                <a:ea typeface="Calibri" pitchFamily="34" charset="-122"/>
+                <a:cs typeface="Calibri" pitchFamily="34" charset="-120"/>
+              </a:rPr>
+              <a:t>Know which certificates the estate is actually running, and warn before one expires.</a:t>
+            </a:r>
+            <a:endParaRPr lang="en-US" sz="1200" dirty="0"/>
+          </a:p>
+        </p:txBody>
+      </p:sp>
+      <p:sp>
+        <p:nvSpPr>
+          <p:cNvPr id="6" name="Text 4"/>
+          <p:cNvSpPr txBox="1"/>
+          <p:nvPr/>
+        </p:nvSpPr>
+        <p:spPr>
+          <a:xfrm>
+            <a:off x="10177272" y="1389888"/>
+            <a:ext cx="1188720" cy="475488"/>
+          </a:xfrm>
+          <a:prstGeom prst="rect">
+            <a:avLst/>
+          </a:prstGeom>
+          <a:noFill/>
+          <a:ln/>
+        </p:spPr>
+        <p:txBody>
+          <a:bodyPr wrap="square" lIns="0" tIns="0" rIns="0" bIns="0" rtlCol="0" anchor="ctr"/>
+          <a:lstStyle/>
+          <a:p>
+            <a:pPr algn="r" indent="0" marL="0">
+              <a:buNone/>
+            </a:pPr>
+            <a:r>
+              <a:rPr lang="en-US" sz="1100" b="1" dirty="0">
+                <a:solidFill>
+                  <a:srgbClr val="C8952B"/>
+                </a:solidFill>
+                <a:latin typeface="Calibri" pitchFamily="34" charset="0"/>
+                <a:ea typeface="Calibri" pitchFamily="34" charset="-122"/>
+                <a:cs typeface="Calibri" pitchFamily="34" charset="-120"/>
+              </a:rPr>
+              <a:t>Stage E</a:t>
+            </a:r>
+            <a:endParaRPr lang="en-US" sz="1100" dirty="0"/>
+          </a:p>
+        </p:txBody>
+      </p:sp>
+      <p:sp>
+        <p:nvSpPr>
+          <p:cNvPr id="7" name="Shape 5"/>
+          <p:cNvSpPr/>
+          <p:nvPr/>
+        </p:nvSpPr>
+        <p:spPr>
+          <a:xfrm>
+            <a:off x="566928" y="2103120"/>
+            <a:ext cx="6766560" cy="2110994"/>
+          </a:xfrm>
+          <a:prstGeom prst="roundRect">
+            <a:avLst>
+              <a:gd name="adj" fmla="val 2599"/>
+            </a:avLst>
+          </a:prstGeom>
+          <a:solidFill>
+            <a:srgbClr val="E8EFF6"/>
+          </a:solidFill>
+          <a:ln w="12700">
+            <a:solidFill>
+              <a:srgbClr val="E8EFF6"/>
+            </a:solidFill>
+            <a:prstDash val="solid"/>
+          </a:ln>
+          <a:effectLst>
+            <a:outerShdw sx="100000" sy="100000" kx="0" ky="0" algn="bl" rotWithShape="0" blurRad="127000" dist="25400" dir="5400000">
+              <a:srgbClr val="8C9AA8">
+                <a:alpha val="22000"/>
+              </a:srgbClr>
+            </a:outerShdw>
+          </a:effectLst>
+        </p:spPr>
+      </p:sp>
+      <p:sp>
+        <p:nvSpPr>
+          <p:cNvPr id="8" name="Text 6"/>
+          <p:cNvSpPr txBox="1"/>
+          <p:nvPr/>
+        </p:nvSpPr>
+        <p:spPr>
+          <a:xfrm>
+            <a:off x="822960" y="2322576"/>
+            <a:ext cx="6254496" cy="201168"/>
+          </a:xfrm>
+          <a:prstGeom prst="rect">
+            <a:avLst/>
+          </a:prstGeom>
+          <a:noFill/>
+          <a:ln/>
+        </p:spPr>
+        <p:txBody>
+          <a:bodyPr wrap="square" lIns="0" tIns="0" rIns="0" bIns="0" rtlCol="0" anchor="ctr"/>
+          <a:lstStyle/>
+          <a:p>
+            <a:pPr indent="0" marL="0">
+              <a:buNone/>
+            </a:pPr>
+            <a:r>
+              <a:rPr lang="en-US" sz="1000" b="1" spc="160" kern="0" dirty="0">
+                <a:solidFill>
+                  <a:srgbClr val="2E6DA4"/>
+                </a:solidFill>
+                <a:latin typeface="Calibri" pitchFamily="34" charset="0"/>
+                <a:ea typeface="Calibri" pitchFamily="34" charset="-122"/>
+                <a:cs typeface="Calibri" pitchFamily="34" charset="-120"/>
+              </a:rPr>
+              <a:t>WHAT GETS BUILT</a:t>
+            </a:r>
+            <a:endParaRPr lang="en-US" sz="1000" dirty="0"/>
+          </a:p>
+        </p:txBody>
+      </p:sp>
+      <p:sp>
+        <p:nvSpPr>
+          <p:cNvPr id="9" name="Text 7"/>
+          <p:cNvSpPr txBox="1"/>
+          <p:nvPr/>
+        </p:nvSpPr>
+        <p:spPr>
+          <a:xfrm>
+            <a:off x="822960" y="2615184"/>
+            <a:ext cx="6254496" cy="1416050"/>
+          </a:xfrm>
+          <a:prstGeom prst="rect">
+            <a:avLst/>
+          </a:prstGeom>
+          <a:noFill/>
+          <a:ln/>
+        </p:spPr>
+        <p:txBody>
+          <a:bodyPr wrap="square" lIns="0" tIns="0" rIns="0" bIns="0" rtlCol="0" anchor="t"/>
+          <a:lstStyle/>
+          <a:p>
+            <a:pPr marL="342900" indent="-342900">
+              <a:lnSpc>
+                <a:spcPts val="1625"/>
+              </a:lnSpc>
+              <a:spcAft>
+                <a:spcPts val="700"/>
+              </a:spcAft>
+              <a:buSzPct val="100000"/>
+              <a:buChar char="•"/>
+            </a:pPr>
+            <a:r>
+              <a:rPr lang="en-US" sz="1250" dirty="0">
+                <a:solidFill>
+                  <a:srgbClr val="4D5A68"/>
+                </a:solidFill>
+                <a:latin typeface="Calibri" pitchFamily="34" charset="0"/>
+                <a:ea typeface="Calibri" pitchFamily="34" charset="-122"/>
+                <a:cs typeface="Calibri" pitchFamily="34" charset="-120"/>
+              </a:rPr>
+              <a:t>kmip_pkcs11/discovery/ with the scanner, a scheduler entry beside the cryptoperiod scheduler in worker 0, and the inventory tables.</a:t>
+            </a:r>
+            <a:endParaRPr lang="en-US" sz="1250" dirty="0"/>
+          </a:p>
+          <a:p>
+            <a:pPr marL="342900" indent="-342900">
+              <a:lnSpc>
+                <a:spcPts val="1625"/>
+              </a:lnSpc>
+              <a:spcAft>
+                <a:spcPts val="700"/>
+              </a:spcAft>
+              <a:buSzPct val="100000"/>
+              <a:buChar char="•"/>
+            </a:pPr>
+            <a:r>
+              <a:rPr lang="en-US" sz="1250" dirty="0">
+                <a:solidFill>
+                  <a:srgbClr val="4D5A68"/>
+                </a:solidFill>
+                <a:latin typeface="Calibri" pitchFamily="34" charset="0"/>
+                <a:ea typeface="Calibri" pitchFamily="34" charset="-122"/>
+                <a:cs typeface="Calibri" pitchFamily="34" charset="-120"/>
+              </a:rPr>
+              <a:t>Scanning is read-only and rate-limited. This is a tool that touches production endpoints, and it should be incapable of harming them.</a:t>
+            </a:r>
+            <a:endParaRPr lang="en-US" sz="1250" dirty="0"/>
+          </a:p>
+        </p:txBody>
+      </p:sp>
+      <p:sp>
+        <p:nvSpPr>
+          <p:cNvPr id="10" name="Shape 8"/>
+          <p:cNvSpPr/>
+          <p:nvPr/>
+        </p:nvSpPr>
+        <p:spPr>
+          <a:xfrm>
+            <a:off x="7607808" y="2103120"/>
+            <a:ext cx="3986784" cy="2110994"/>
+          </a:xfrm>
+          <a:prstGeom prst="roundRect">
+            <a:avLst>
+              <a:gd name="adj" fmla="val 2599"/>
+            </a:avLst>
+          </a:prstGeom>
+          <a:solidFill>
+            <a:srgbClr val="E2F0E7"/>
+          </a:solidFill>
+          <a:ln w="12700">
+            <a:solidFill>
+              <a:srgbClr val="E2F0E7"/>
+            </a:solidFill>
+            <a:prstDash val="solid"/>
+          </a:ln>
+          <a:effectLst>
+            <a:outerShdw sx="100000" sy="100000" kx="0" ky="0" algn="bl" rotWithShape="0" blurRad="127000" dist="25400" dir="5400000">
+              <a:srgbClr val="8C9AA8">
+                <a:alpha val="22000"/>
+              </a:srgbClr>
+            </a:outerShdw>
+          </a:effectLst>
+        </p:spPr>
+      </p:sp>
+      <p:sp>
+        <p:nvSpPr>
+          <p:cNvPr id="11" name="Text 9"/>
+          <p:cNvSpPr txBox="1"/>
+          <p:nvPr/>
+        </p:nvSpPr>
+        <p:spPr>
+          <a:xfrm>
+            <a:off x="7863840" y="2322576"/>
+            <a:ext cx="3474720" cy="201168"/>
+          </a:xfrm>
+          <a:prstGeom prst="rect">
+            <a:avLst/>
+          </a:prstGeom>
+          <a:noFill/>
+          <a:ln/>
+        </p:spPr>
+        <p:txBody>
+          <a:bodyPr wrap="square" lIns="0" tIns="0" rIns="0" bIns="0" rtlCol="0" anchor="ctr"/>
+          <a:lstStyle/>
+          <a:p>
+            <a:pPr indent="0" marL="0">
+              <a:buNone/>
+            </a:pPr>
+            <a:r>
+              <a:rPr lang="en-US" sz="1000" b="1" spc="160" kern="0" dirty="0">
+                <a:solidFill>
+                  <a:srgbClr val="1F7A43"/>
+                </a:solidFill>
+                <a:latin typeface="Calibri" pitchFamily="34" charset="0"/>
+                <a:ea typeface="Calibri" pitchFamily="34" charset="-122"/>
+                <a:cs typeface="Calibri" pitchFamily="34" charset="-120"/>
+              </a:rPr>
+              <a:t>CLOSES 1 GAP-MATRIX FEATURE</a:t>
+            </a:r>
+            <a:endParaRPr lang="en-US" sz="1000" dirty="0"/>
+          </a:p>
+        </p:txBody>
+      </p:sp>
+      <p:sp>
+        <p:nvSpPr>
+          <p:cNvPr id="12" name="Text 10"/>
+          <p:cNvSpPr txBox="1"/>
+          <p:nvPr/>
+        </p:nvSpPr>
+        <p:spPr>
+          <a:xfrm>
+            <a:off x="7863840" y="2615184"/>
+            <a:ext cx="3474720" cy="1416050"/>
+          </a:xfrm>
+          <a:prstGeom prst="rect">
+            <a:avLst/>
+          </a:prstGeom>
+          <a:noFill/>
+          <a:ln/>
+        </p:spPr>
+        <p:txBody>
+          <a:bodyPr wrap="square" lIns="0" tIns="0" rIns="0" bIns="0" rtlCol="0" anchor="t"/>
+          <a:lstStyle/>
+          <a:p>
+            <a:pPr marL="342900" indent="-342900">
+              <a:lnSpc>
+                <a:spcPts val="1560"/>
+              </a:lnSpc>
+              <a:spcAft>
+                <a:spcPts val="700"/>
+              </a:spcAft>
+              <a:buSzPct val="100000"/>
+              <a:buChar char="•"/>
+            </a:pPr>
+            <a:r>
+              <a:rPr lang="en-US" sz="1200" dirty="0">
+                <a:solidFill>
+                  <a:srgbClr val="1A3A5C"/>
+                </a:solidFill>
+                <a:latin typeface="Calibri" pitchFamily="34" charset="0"/>
+                <a:ea typeface="Calibri" pitchFamily="34" charset="-122"/>
+                <a:cs typeface="Calibri" pitchFamily="34" charset="-120"/>
+              </a:rPr>
+              <a:t>Certificate discovery and expiry monitoring</a:t>
+            </a:r>
+            <a:endParaRPr lang="en-US" sz="1200" dirty="0"/>
+          </a:p>
+        </p:txBody>
+      </p:sp>
+      <p:sp>
+        <p:nvSpPr>
+          <p:cNvPr id="13" name="Text 11"/>
+          <p:cNvSpPr txBox="1"/>
+          <p:nvPr/>
+        </p:nvSpPr>
+        <p:spPr>
+          <a:xfrm>
+            <a:off x="566928" y="6272784"/>
+            <a:ext cx="11027664" cy="310896"/>
+          </a:xfrm>
+          <a:prstGeom prst="rect">
+            <a:avLst/>
+          </a:prstGeom>
+          <a:noFill/>
+          <a:ln/>
+        </p:spPr>
+        <p:txBody>
+          <a:bodyPr wrap="square" lIns="0" tIns="0" rIns="0" bIns="0" rtlCol="0" anchor="ctr"/>
+          <a:lstStyle/>
+          <a:p>
+            <a:pPr indent="0" marL="0">
+              <a:buNone/>
+            </a:pPr>
+            <a:r>
+              <a:rPr lang="en-US" sz="1050" i="1" dirty="0">
+                <a:solidFill>
+                  <a:srgbClr val="7B8794"/>
+                </a:solidFill>
+                <a:latin typeface="Calibri" pitchFamily="34" charset="0"/>
+                <a:ea typeface="Calibri" pitchFamily="34" charset="-122"/>
+                <a:cs typeface="Calibri" pitchFamily="34" charset="-120"/>
+              </a:rPr>
+              <a:t>Estimated size: ~600 lines, ~30 tests.</a:t>
+            </a:r>
+            <a:endParaRPr lang="en-US" sz="1050" dirty="0"/>
+          </a:p>
+        </p:txBody>
+      </p:sp>
+    </p:spTree>
+  </p:cSld>
+  <p:clrMapOvr>
+    <a:masterClrMapping/>
+  </p:clrMapOvr>
+</p:sld>
+</file>
+
+<file path=ppt/slides/slide44.xml><?xml version="1.0" encoding="utf-8"?>
+<p:sld xmlns:a="http://schemas.openxmlformats.org/drawingml/2006/main" xmlns:r="http://schemas.openxmlformats.org/officeDocument/2006/relationships" xmlns:p="http://schemas.openxmlformats.org/presentationml/2006/main">
+  <p:cSld name="Slide 44">
+    <p:bg>
+      <p:bgPr>
+        <a:solidFill>
+          <a:srgbClr val="FFFFFF"/>
+        </a:solidFill>
+      </p:bgPr>
+    </p:bg>
+    <p:spTree>
+      <p:nvGrpSpPr>
+        <p:cNvPr id="1" name=""/>
+        <p:cNvGrpSpPr/>
+        <p:nvPr/>
+      </p:nvGrpSpPr>
+      <p:grpSpPr>
+        <a:xfrm>
+          <a:off x="0" y="0"/>
+          <a:ext cx="0" cy="0"/>
+          <a:chOff x="0" y="0"/>
+          <a:chExt cx="0" cy="0"/>
+        </a:xfrm>
+      </p:grpSpPr>
+      <p:sp>
+        <p:nvSpPr>
+          <p:cNvPr id="2" name="Text 0"/>
+          <p:cNvSpPr txBox="1"/>
+          <p:nvPr/>
+        </p:nvSpPr>
+        <p:spPr>
+          <a:xfrm>
+            <a:off x="566928" y="365760"/>
+            <a:ext cx="11027664" cy="237744"/>
+          </a:xfrm>
+          <a:prstGeom prst="rect">
+            <a:avLst/>
+          </a:prstGeom>
+          <a:noFill/>
+          <a:ln/>
+        </p:spPr>
+        <p:txBody>
+          <a:bodyPr wrap="square" lIns="0" tIns="0" rIns="0" bIns="0" rtlCol="0" anchor="ctr"/>
+          <a:lstStyle/>
+          <a:p>
+            <a:pPr indent="0" marL="0">
+              <a:buNone/>
+            </a:pPr>
+            <a:r>
+              <a:rPr lang="en-US" sz="1150" b="1" spc="220" kern="0" dirty="0">
+                <a:solidFill>
+                  <a:srgbClr val="C8952B"/>
+                </a:solidFill>
+                <a:latin typeface="Calibri" pitchFamily="34" charset="0"/>
+                <a:ea typeface="Calibri" pitchFamily="34" charset="-122"/>
+                <a:cs typeface="Calibri" pitchFamily="34" charset="-120"/>
+              </a:rPr>
+              <a:t>STEP 14 OF 14 · TEST STRATEGY</a:t>
+            </a:r>
+            <a:endParaRPr lang="en-US" sz="1150" dirty="0"/>
+          </a:p>
+        </p:txBody>
+      </p:sp>
+      <p:sp>
+        <p:nvSpPr>
+          <p:cNvPr id="3" name="Text 1"/>
+          <p:cNvSpPr txBox="1"/>
+          <p:nvPr/>
+        </p:nvSpPr>
+        <p:spPr>
+          <a:xfrm>
+            <a:off x="566928" y="621792"/>
+            <a:ext cx="11027664" cy="640080"/>
+          </a:xfrm>
+          <a:prstGeom prst="rect">
+            <a:avLst/>
+          </a:prstGeom>
+          <a:noFill/>
+          <a:ln/>
+        </p:spPr>
+        <p:txBody>
+          <a:bodyPr wrap="square" lIns="0" tIns="0" rIns="0" bIns="0" rtlCol="0" anchor="ctr"/>
+          <a:lstStyle/>
+          <a:p>
+            <a:pPr indent="0" marL="0">
+              <a:buNone/>
+            </a:pPr>
+            <a:r>
+              <a:rPr lang="en-US" sz="3000" b="1" dirty="0">
+                <a:solidFill>
+                  <a:srgbClr val="1A3A5C"/>
+                </a:solidFill>
+                <a:latin typeface="Cambria" pitchFamily="34" charset="0"/>
+                <a:ea typeface="Cambria" pitchFamily="34" charset="-122"/>
+                <a:cs typeface="Cambria" pitchFamily="34" charset="-120"/>
+              </a:rPr>
+              <a:t>Certificate discovery and expiry monitoring</a:t>
+            </a:r>
+            <a:endParaRPr lang="en-US" sz="3000" dirty="0"/>
+          </a:p>
+        </p:txBody>
+      </p:sp>
+      <p:sp>
+        <p:nvSpPr>
+          <p:cNvPr id="4" name="Shape 2"/>
+          <p:cNvSpPr/>
+          <p:nvPr/>
+        </p:nvSpPr>
+        <p:spPr>
+          <a:xfrm>
+            <a:off x="566928" y="1389888"/>
+            <a:ext cx="11027664" cy="475488"/>
+          </a:xfrm>
+          <a:prstGeom prst="roundRect">
+            <a:avLst>
+              <a:gd name="adj" fmla="val 11538"/>
+            </a:avLst>
+          </a:prstGeom>
+          <a:solidFill>
+            <a:srgbClr val="1A3A5C"/>
+          </a:solidFill>
+          <a:ln w="12700">
+            <a:solidFill>
+              <a:srgbClr val="1A3A5C"/>
+            </a:solidFill>
+            <a:prstDash val="solid"/>
+          </a:ln>
+        </p:spPr>
+      </p:sp>
+      <p:sp>
+        <p:nvSpPr>
+          <p:cNvPr id="5" name="Text 3"/>
+          <p:cNvSpPr txBox="1"/>
+          <p:nvPr/>
+        </p:nvSpPr>
+        <p:spPr>
+          <a:xfrm>
+            <a:off x="822960" y="1389888"/>
+            <a:ext cx="9290304" cy="475488"/>
+          </a:xfrm>
+          <a:prstGeom prst="rect">
+            <a:avLst/>
+          </a:prstGeom>
+          <a:noFill/>
+          <a:ln/>
+        </p:spPr>
+        <p:txBody>
+          <a:bodyPr wrap="square" lIns="0" tIns="0" rIns="0" bIns="0" rtlCol="0" anchor="ctr"/>
+          <a:lstStyle/>
+          <a:p>
+            <a:pPr indent="0" marL="0">
+              <a:buNone/>
+            </a:pPr>
+            <a:r>
+              <a:rPr lang="en-US" sz="1200" dirty="0">
+                <a:solidFill>
+                  <a:srgbClr val="C9DAEA"/>
+                </a:solidFill>
+                <a:latin typeface="Calibri" pitchFamily="34" charset="0"/>
+                <a:ea typeface="Calibri" pitchFamily="34" charset="-122"/>
+                <a:cs typeface="Calibri" pitchFamily="34" charset="-120"/>
+              </a:rPr>
+              <a:t>Know which certificates the estate is actually running, and warn before one expires.</a:t>
+            </a:r>
+            <a:endParaRPr lang="en-US" sz="1200" dirty="0"/>
+          </a:p>
+        </p:txBody>
+      </p:sp>
+      <p:sp>
+        <p:nvSpPr>
+          <p:cNvPr id="6" name="Text 4"/>
+          <p:cNvSpPr txBox="1"/>
+          <p:nvPr/>
+        </p:nvSpPr>
+        <p:spPr>
+          <a:xfrm>
+            <a:off x="10177272" y="1389888"/>
+            <a:ext cx="1188720" cy="475488"/>
+          </a:xfrm>
+          <a:prstGeom prst="rect">
+            <a:avLst/>
+          </a:prstGeom>
+          <a:noFill/>
+          <a:ln/>
+        </p:spPr>
+        <p:txBody>
+          <a:bodyPr wrap="square" lIns="0" tIns="0" rIns="0" bIns="0" rtlCol="0" anchor="ctr"/>
+          <a:lstStyle/>
+          <a:p>
+            <a:pPr algn="r" indent="0" marL="0">
+              <a:buNone/>
+            </a:pPr>
+            <a:r>
+              <a:rPr lang="en-US" sz="1100" b="1" dirty="0">
+                <a:solidFill>
+                  <a:srgbClr val="C8952B"/>
+                </a:solidFill>
+                <a:latin typeface="Calibri" pitchFamily="34" charset="0"/>
+                <a:ea typeface="Calibri" pitchFamily="34" charset="-122"/>
+                <a:cs typeface="Calibri" pitchFamily="34" charset="-120"/>
+              </a:rPr>
+              <a:t>Stage E</a:t>
+            </a:r>
+            <a:endParaRPr lang="en-US" sz="1100" dirty="0"/>
+          </a:p>
+        </p:txBody>
+      </p:sp>
+      <p:sp>
+        <p:nvSpPr>
+          <p:cNvPr id="7" name="Shape 5"/>
+          <p:cNvSpPr/>
+          <p:nvPr/>
+        </p:nvSpPr>
+        <p:spPr>
+          <a:xfrm>
+            <a:off x="566928" y="2103120"/>
+            <a:ext cx="11027664" cy="2288794"/>
+          </a:xfrm>
+          <a:prstGeom prst="roundRect">
+            <a:avLst>
+              <a:gd name="adj" fmla="val 2397"/>
+            </a:avLst>
+          </a:prstGeom>
+          <a:solidFill>
+            <a:srgbClr val="E8EFF6"/>
+          </a:solidFill>
+          <a:ln w="12700">
+            <a:solidFill>
+              <a:srgbClr val="E8EFF6"/>
+            </a:solidFill>
+            <a:prstDash val="solid"/>
+          </a:ln>
+          <a:effectLst>
+            <a:outerShdw sx="100000" sy="100000" kx="0" ky="0" algn="bl" rotWithShape="0" blurRad="127000" dist="25400" dir="5400000">
+              <a:srgbClr val="8C9AA8">
+                <a:alpha val="22000"/>
+              </a:srgbClr>
+            </a:outerShdw>
+          </a:effectLst>
+        </p:spPr>
+      </p:sp>
+      <p:sp>
+        <p:nvSpPr>
+          <p:cNvPr id="8" name="Text 6"/>
+          <p:cNvSpPr txBox="1"/>
+          <p:nvPr/>
+        </p:nvSpPr>
+        <p:spPr>
+          <a:xfrm>
+            <a:off x="822960" y="2322576"/>
+            <a:ext cx="10515600" cy="201168"/>
+          </a:xfrm>
+          <a:prstGeom prst="rect">
+            <a:avLst/>
+          </a:prstGeom>
+          <a:noFill/>
+          <a:ln/>
+        </p:spPr>
+        <p:txBody>
+          <a:bodyPr wrap="square" lIns="0" tIns="0" rIns="0" bIns="0" rtlCol="0" anchor="ctr"/>
+          <a:lstStyle/>
+          <a:p>
+            <a:pPr indent="0" marL="0">
+              <a:buNone/>
+            </a:pPr>
+            <a:r>
+              <a:rPr lang="en-US" sz="1000" b="1" spc="160" kern="0" dirty="0">
+                <a:solidFill>
+                  <a:srgbClr val="2E6DA4"/>
+                </a:solidFill>
+                <a:latin typeface="Calibri" pitchFamily="34" charset="0"/>
+                <a:ea typeface="Calibri" pitchFamily="34" charset="-122"/>
+                <a:cs typeface="Calibri" pitchFamily="34" charset="-120"/>
+              </a:rPr>
+              <a:t>WHAT THE TESTS HAVE TO PROVE</a:t>
+            </a:r>
+            <a:endParaRPr lang="en-US" sz="1000" dirty="0"/>
+          </a:p>
+        </p:txBody>
+      </p:sp>
+      <p:sp>
+        <p:nvSpPr>
+          <p:cNvPr id="9" name="Text 7"/>
+          <p:cNvSpPr txBox="1"/>
+          <p:nvPr/>
+        </p:nvSpPr>
+        <p:spPr>
+          <a:xfrm>
+            <a:off x="822960" y="2615184"/>
+            <a:ext cx="10515600" cy="1593850"/>
+          </a:xfrm>
+          <a:prstGeom prst="rect">
+            <a:avLst/>
+          </a:prstGeom>
+          <a:noFill/>
+          <a:ln/>
+        </p:spPr>
+        <p:txBody>
+          <a:bodyPr wrap="square" lIns="0" tIns="0" rIns="0" bIns="0" rtlCol="0" anchor="t"/>
+          <a:lstStyle/>
+          <a:p>
+            <a:pPr marL="342900" indent="-342900">
+              <a:lnSpc>
+                <a:spcPts val="1625"/>
+              </a:lnSpc>
+              <a:spcAft>
+                <a:spcPts val="700"/>
+              </a:spcAft>
+              <a:buSzPct val="100000"/>
+              <a:buChar char="•"/>
+            </a:pPr>
+            <a:r>
+              <a:rPr lang="en-US" sz="1250" dirty="0">
+                <a:solidFill>
+                  <a:srgbClr val="4D5A68"/>
+                </a:solidFill>
+                <a:latin typeface="Calibri" pitchFamily="34" charset="0"/>
+                <a:ea typeface="Calibri" pitchFamily="34" charset="-122"/>
+                <a:cs typeface="Calibri" pitchFamily="34" charset="-120"/>
+              </a:rPr>
+              <a:t>A scan of local TLS servers with known certificates records exactly those chains, intermediate included.</a:t>
+            </a:r>
+            <a:endParaRPr lang="en-US" sz="1250" dirty="0"/>
+          </a:p>
+          <a:p>
+            <a:pPr marL="342900" indent="-342900">
+              <a:lnSpc>
+                <a:spcPts val="1625"/>
+              </a:lnSpc>
+              <a:spcAft>
+                <a:spcPts val="700"/>
+              </a:spcAft>
+              <a:buSzPct val="100000"/>
+              <a:buChar char="•"/>
+            </a:pPr>
+            <a:r>
+              <a:rPr lang="en-US" sz="1250" dirty="0">
+                <a:solidFill>
+                  <a:srgbClr val="4D5A68"/>
+                </a:solidFill>
+                <a:latin typeface="Calibri" pitchFamily="34" charset="0"/>
+                <a:ea typeface="Calibri" pitchFamily="34" charset="-122"/>
+                <a:cs typeface="Calibri" pitchFamily="34" charset="-120"/>
+              </a:rPr>
+              <a:t>A certificate registered here and the same certificate found by scanning reconcile to one inventory row, matched on fingerprint.</a:t>
+            </a:r>
+            <a:endParaRPr lang="en-US" sz="1250" dirty="0"/>
+          </a:p>
+          <a:p>
+            <a:pPr marL="342900" indent="-342900">
+              <a:lnSpc>
+                <a:spcPts val="1625"/>
+              </a:lnSpc>
+              <a:spcAft>
+                <a:spcPts val="700"/>
+              </a:spcAft>
+              <a:buSzPct val="100000"/>
+              <a:buChar char="•"/>
+            </a:pPr>
+            <a:r>
+              <a:rPr lang="en-US" sz="1250" dirty="0">
+                <a:solidFill>
+                  <a:srgbClr val="4D5A68"/>
+                </a:solidFill>
+                <a:latin typeface="Calibri" pitchFamily="34" charset="0"/>
+                <a:ea typeface="Calibri" pitchFamily="34" charset="-122"/>
+                <a:cs typeface="Calibri" pitchFamily="34" charset="-120"/>
+              </a:rPr>
+              <a:t>An endpoint that times out, presents an expired certificate, or drops the handshake is recorded as such rather than skipped silently.</a:t>
+            </a:r>
+            <a:endParaRPr lang="en-US" sz="1250" dirty="0"/>
+          </a:p>
+          <a:p>
+            <a:pPr marL="342900" indent="-342900">
+              <a:lnSpc>
+                <a:spcPts val="1625"/>
+              </a:lnSpc>
+              <a:spcAft>
+                <a:spcPts val="700"/>
+              </a:spcAft>
+              <a:buSzPct val="100000"/>
+              <a:buChar char="•"/>
+            </a:pPr>
+            <a:r>
+              <a:rPr lang="en-US" sz="1250" dirty="0">
+                <a:solidFill>
+                  <a:srgbClr val="4D5A68"/>
+                </a:solidFill>
+                <a:latin typeface="Calibri" pitchFamily="34" charset="0"/>
+                <a:ea typeface="Calibri" pitchFamily="34" charset="-122"/>
+                <a:cs typeface="Calibri" pitchFamily="34" charset="-120"/>
+              </a:rPr>
+              <a:t>An expiry threshold fires once per certificate per window, not on every scan.</a:t>
+            </a:r>
+            <a:endParaRPr lang="en-US" sz="1250" dirty="0"/>
+          </a:p>
+        </p:txBody>
+      </p:sp>
+      <p:sp>
+        <p:nvSpPr>
+          <p:cNvPr id="10" name="Shape 8"/>
+          <p:cNvSpPr/>
+          <p:nvPr/>
+        </p:nvSpPr>
+        <p:spPr>
+          <a:xfrm>
+            <a:off x="566928" y="4666234"/>
+            <a:ext cx="11027664" cy="914400"/>
+          </a:xfrm>
+          <a:prstGeom prst="roundRect">
+            <a:avLst>
+              <a:gd name="adj" fmla="val 6000"/>
+            </a:avLst>
+          </a:prstGeom>
+          <a:solidFill>
+            <a:srgbClr val="E2F0E7"/>
+          </a:solidFill>
+          <a:ln w="12700">
+            <a:solidFill>
+              <a:srgbClr val="E2F0E7"/>
+            </a:solidFill>
+            <a:prstDash val="solid"/>
+          </a:ln>
+          <a:effectLst>
+            <a:outerShdw sx="100000" sy="100000" kx="0" ky="0" algn="bl" rotWithShape="0" blurRad="127000" dist="25400" dir="5400000">
+              <a:srgbClr val="8C9AA8">
+                <a:alpha val="22000"/>
+              </a:srgbClr>
+            </a:outerShdw>
+          </a:effectLst>
+        </p:spPr>
+      </p:sp>
+      <p:sp>
+        <p:nvSpPr>
+          <p:cNvPr id="11" name="Text 9"/>
+          <p:cNvSpPr txBox="1"/>
+          <p:nvPr/>
+        </p:nvSpPr>
+        <p:spPr>
+          <a:xfrm>
+            <a:off x="822960" y="4812538"/>
+            <a:ext cx="914400" cy="219456"/>
+          </a:xfrm>
+          <a:prstGeom prst="rect">
+            <a:avLst/>
+          </a:prstGeom>
+          <a:noFill/>
+          <a:ln/>
+        </p:spPr>
+        <p:txBody>
+          <a:bodyPr wrap="square" lIns="0" tIns="0" rIns="0" bIns="0" rtlCol="0" anchor="ctr"/>
+          <a:lstStyle/>
+          <a:p>
+            <a:pPr indent="0" marL="0">
+              <a:buNone/>
+            </a:pPr>
+            <a:r>
+              <a:rPr lang="en-US" sz="1000" b="1" spc="160" kern="0" dirty="0">
+                <a:solidFill>
+                  <a:srgbClr val="1F7A43"/>
+                </a:solidFill>
+                <a:latin typeface="Calibri" pitchFamily="34" charset="0"/>
+                <a:ea typeface="Calibri" pitchFamily="34" charset="-122"/>
+                <a:cs typeface="Calibri" pitchFamily="34" charset="-120"/>
+              </a:rPr>
+              <a:t>GATE</a:t>
+            </a:r>
+            <a:endParaRPr lang="en-US" sz="1000" dirty="0"/>
+          </a:p>
+        </p:txBody>
+      </p:sp>
+      <p:sp>
+        <p:nvSpPr>
+          <p:cNvPr id="12" name="Text 10"/>
+          <p:cNvSpPr txBox="1"/>
+          <p:nvPr/>
+        </p:nvSpPr>
+        <p:spPr>
+          <a:xfrm>
+            <a:off x="1773936" y="4775962"/>
+            <a:ext cx="9564624" cy="694944"/>
+          </a:xfrm>
+          <a:prstGeom prst="rect">
+            <a:avLst/>
+          </a:prstGeom>
+          <a:noFill/>
+          <a:ln/>
+        </p:spPr>
+        <p:txBody>
+          <a:bodyPr wrap="square" lIns="0" tIns="0" rIns="0" bIns="0" rtlCol="0" anchor="ctr"/>
+          <a:lstStyle/>
+          <a:p>
+            <a:pPr indent="0" marL="0">
+              <a:buNone/>
+            </a:pPr>
+            <a:r>
+              <a:rPr lang="en-US" sz="1250" dirty="0">
+                <a:solidFill>
+                  <a:srgbClr val="1A3A5C"/>
+                </a:solidFill>
+                <a:latin typeface="Calibri" pitchFamily="34" charset="0"/>
+                <a:ea typeface="Calibri" pitchFamily="34" charset="-122"/>
+                <a:cs typeface="Calibri" pitchFamily="34" charset="-120"/>
+              </a:rPr>
+              <a:t>A scan of a fixture estate reports every certificate, splits managed from unmanaged correctly, and raises an expiry alert exactly once for a certificate inside the warning window.</a:t>
+            </a:r>
+            <a:endParaRPr lang="en-US" sz="1250" dirty="0"/>
+          </a:p>
+        </p:txBody>
+      </p:sp>
+    </p:spTree>
+  </p:cSld>
+  <p:clrMapOvr>
+    <a:masterClrMapping/>
+  </p:clrMapOvr>
+</p:sld>
+</file>
+
+<file path=ppt/slides/slide45.xml><?xml version="1.0" encoding="utf-8"?>
+<p:sld xmlns:a="http://schemas.openxmlformats.org/drawingml/2006/main" xmlns:r="http://schemas.openxmlformats.org/officeDocument/2006/relationships" xmlns:p="http://schemas.openxmlformats.org/presentationml/2006/main">
+  <p:cSld name="Slide 45">
+    <p:bg>
+      <p:bgPr>
+        <a:solidFill>
+          <a:srgbClr val="102437"/>
+        </a:solidFill>
+      </p:bgPr>
+    </p:bg>
+    <p:spTree>
+      <p:nvGrpSpPr>
+        <p:cNvPr id="1" name=""/>
+        <p:cNvGrpSpPr/>
+        <p:nvPr/>
+      </p:nvGrpSpPr>
+      <p:grpSpPr>
+        <a:xfrm>
+          <a:off x="0" y="0"/>
+          <a:ext cx="0" cy="0"/>
+          <a:chOff x="0" y="0"/>
+          <a:chExt cx="0" cy="0"/>
+        </a:xfrm>
+      </p:grpSpPr>
+      <p:sp>
+        <p:nvSpPr>
+          <p:cNvPr id="2" name="Text 0"/>
+          <p:cNvSpPr txBox="1"/>
+          <p:nvPr/>
+        </p:nvSpPr>
+        <p:spPr>
+          <a:xfrm>
+            <a:off x="566928" y="365760"/>
+            <a:ext cx="11027664" cy="237744"/>
+          </a:xfrm>
+          <a:prstGeom prst="rect">
+            <a:avLst/>
+          </a:prstGeom>
+          <a:noFill/>
+          <a:ln/>
+        </p:spPr>
+        <p:txBody>
+          <a:bodyPr wrap="square" lIns="0" tIns="0" rIns="0" bIns="0" rtlCol="0" anchor="ctr"/>
+          <a:lstStyle/>
+          <a:p>
+            <a:pPr indent="0" marL="0">
+              <a:buNone/>
+            </a:pPr>
+            <a:r>
+              <a:rPr lang="en-US" sz="1150" b="1" spc="220" kern="0" dirty="0">
+                <a:solidFill>
+                  <a:srgbClr val="C8952B"/>
+                </a:solidFill>
+                <a:latin typeface="Calibri" pitchFamily="34" charset="0"/>
+                <a:ea typeface="Calibri" pitchFamily="34" charset="-122"/>
+                <a:cs typeface="Calibri" pitchFamily="34" charset="-120"/>
+              </a:rPr>
+              <a:t>AFTER STEP 12</a:t>
+            </a:r>
+            <a:endParaRPr lang="en-US" sz="1150" dirty="0"/>
+          </a:p>
+        </p:txBody>
+      </p:sp>
+      <p:sp>
+        <p:nvSpPr>
+          <p:cNvPr id="3" name="Text 1"/>
+          <p:cNvSpPr txBox="1"/>
+          <p:nvPr/>
+        </p:nvSpPr>
+        <p:spPr>
+          <a:xfrm>
+            <a:off x="566928" y="621792"/>
+            <a:ext cx="11027664" cy="640080"/>
+          </a:xfrm>
+          <a:prstGeom prst="rect">
+            <a:avLst/>
+          </a:prstGeom>
+          <a:noFill/>
+          <a:ln/>
+        </p:spPr>
+        <p:txBody>
+          <a:bodyPr wrap="square" lIns="0" tIns="0" rIns="0" bIns="0" rtlCol="0" anchor="ctr"/>
+          <a:lstStyle/>
+          <a:p>
+            <a:pPr indent="0" marL="0">
+              <a:buNone/>
+            </a:pPr>
+            <a:r>
+              <a:rPr lang="en-US" sz="3000" b="1" dirty="0">
+                <a:solidFill>
+                  <a:srgbClr val="FFFFFF"/>
+                </a:solidFill>
+                <a:latin typeface="Cambria" pitchFamily="34" charset="0"/>
+                <a:ea typeface="Cambria" pitchFamily="34" charset="-122"/>
+                <a:cs typeface="Cambria" pitchFamily="34" charset="-120"/>
+              </a:rPr>
+              <a:t>What the plan does not close</a:t>
+            </a:r>
+            <a:endParaRPr lang="en-US" sz="3000" dirty="0"/>
+          </a:p>
+        </p:txBody>
+      </p:sp>
+      <p:sp>
+        <p:nvSpPr>
+          <p:cNvPr id="4" name="Text 2"/>
+          <p:cNvSpPr txBox="1"/>
+          <p:nvPr/>
+        </p:nvSpPr>
+        <p:spPr>
+          <a:xfrm>
+            <a:off x="566928" y="1536192"/>
+            <a:ext cx="3520440" cy="219456"/>
+          </a:xfrm>
+          <a:prstGeom prst="rect">
+            <a:avLst/>
+          </a:prstGeom>
+          <a:noFill/>
+          <a:ln/>
+        </p:spPr>
+        <p:txBody>
+          <a:bodyPr wrap="square" lIns="0" tIns="0" rIns="0" bIns="0" rtlCol="0" anchor="ctr"/>
+          <a:lstStyle/>
+          <a:p>
+            <a:pPr indent="0" marL="0">
+              <a:buNone/>
+            </a:pPr>
+            <a:r>
+              <a:rPr lang="en-US" sz="1000" b="1" spc="140" kern="0" dirty="0">
+                <a:solidFill>
+                  <a:srgbClr val="C8952B"/>
+                </a:solidFill>
+                <a:latin typeface="Calibri" pitchFamily="34" charset="0"/>
+                <a:ea typeface="Calibri" pitchFamily="34" charset="-122"/>
+                <a:cs typeface="Calibri" pitchFamily="34" charset="-120"/>
+              </a:rPr>
+              <a:t>INTEGRATION</a:t>
+            </a:r>
+            <a:endParaRPr lang="en-US" sz="1000" dirty="0"/>
+          </a:p>
+        </p:txBody>
+      </p:sp>
+      <p:sp>
+        <p:nvSpPr>
+          <p:cNvPr id="5" name="Text 3"/>
+          <p:cNvSpPr txBox="1"/>
+          <p:nvPr/>
+        </p:nvSpPr>
+        <p:spPr>
+          <a:xfrm>
+            <a:off x="566928" y="1792224"/>
+            <a:ext cx="3520440" cy="859536"/>
+          </a:xfrm>
+          <a:prstGeom prst="rect">
+            <a:avLst/>
+          </a:prstGeom>
+          <a:noFill/>
+          <a:ln/>
+        </p:spPr>
+        <p:txBody>
+          <a:bodyPr wrap="square" lIns="0" tIns="0" rIns="0" bIns="0" rtlCol="0" anchor="ctr"/>
+          <a:lstStyle/>
+          <a:p>
+            <a:pPr indent="0" marL="0">
+              <a:lnSpc>
+                <a:spcPts val="1500"/>
+              </a:lnSpc>
+              <a:buNone/>
+            </a:pPr>
+            <a:r>
+              <a:rPr lang="en-US" sz="1150" dirty="0">
+                <a:solidFill>
+                  <a:srgbClr val="9DB8D4"/>
+                </a:solidFill>
+                <a:latin typeface="Calibri" pitchFamily="34" charset="0"/>
+                <a:ea typeface="Calibri" pitchFamily="34" charset="-122"/>
+                <a:cs typeface="Calibri" pitchFamily="34" charset="-120"/>
+              </a:rPr>
+              <a:t>Cloud BYOK (AWS, Azure, GCP) · Cloud EKM / XKS / hold-your-own-key</a:t>
+            </a:r>
+            <a:endParaRPr lang="en-US" sz="1150" dirty="0"/>
+          </a:p>
+        </p:txBody>
+      </p:sp>
+      <p:sp>
+        <p:nvSpPr>
+          <p:cNvPr id="6" name="Text 4"/>
+          <p:cNvSpPr txBox="1"/>
+          <p:nvPr/>
+        </p:nvSpPr>
+        <p:spPr>
+          <a:xfrm>
+            <a:off x="566928" y="2779776"/>
+            <a:ext cx="3520440" cy="219456"/>
+          </a:xfrm>
+          <a:prstGeom prst="rect">
+            <a:avLst/>
+          </a:prstGeom>
+          <a:noFill/>
+          <a:ln/>
+        </p:spPr>
+        <p:txBody>
+          <a:bodyPr wrap="square" lIns="0" tIns="0" rIns="0" bIns="0" rtlCol="0" anchor="ctr"/>
+          <a:lstStyle/>
+          <a:p>
+            <a:pPr indent="0" marL="0">
+              <a:buNone/>
+            </a:pPr>
+            <a:r>
+              <a:rPr lang="en-US" sz="1000" b="1" spc="140" kern="0" dirty="0">
+                <a:solidFill>
+                  <a:srgbClr val="C8952B"/>
+                </a:solidFill>
+                <a:latin typeface="Calibri" pitchFamily="34" charset="0"/>
+                <a:ea typeface="Calibri" pitchFamily="34" charset="-122"/>
+                <a:cs typeface="Calibri" pitchFamily="34" charset="-120"/>
+              </a:rPr>
+              <a:t>VALIDATION</a:t>
+            </a:r>
+            <a:endParaRPr lang="en-US" sz="1000" dirty="0"/>
+          </a:p>
+        </p:txBody>
+      </p:sp>
+      <p:sp>
+        <p:nvSpPr>
+          <p:cNvPr id="7" name="Text 5"/>
+          <p:cNvSpPr txBox="1"/>
+          <p:nvPr/>
+        </p:nvSpPr>
+        <p:spPr>
+          <a:xfrm>
+            <a:off x="566928" y="3035808"/>
+            <a:ext cx="3520440" cy="859536"/>
+          </a:xfrm>
+          <a:prstGeom prst="rect">
+            <a:avLst/>
+          </a:prstGeom>
+          <a:noFill/>
+          <a:ln/>
+        </p:spPr>
+        <p:txBody>
+          <a:bodyPr wrap="square" lIns="0" tIns="0" rIns="0" bIns="0" rtlCol="0" anchor="ctr"/>
+          <a:lstStyle/>
+          <a:p>
+            <a:pPr indent="0" marL="0">
+              <a:lnSpc>
+                <a:spcPts val="1500"/>
+              </a:lnSpc>
+              <a:buNone/>
+            </a:pPr>
+            <a:r>
+              <a:rPr lang="en-US" sz="1150" dirty="0">
+                <a:solidFill>
+                  <a:srgbClr val="9DB8D4"/>
+                </a:solidFill>
+                <a:latin typeface="Calibri" pitchFamily="34" charset="0"/>
+                <a:ea typeface="Calibri" pitchFamily="34" charset="-122"/>
+                <a:cs typeface="Calibri" pitchFamily="34" charset="-120"/>
+              </a:rPr>
+              <a:t>Database TDE integration · Storage, backup and VM integrations</a:t>
+            </a:r>
+            <a:endParaRPr lang="en-US" sz="1150" dirty="0"/>
+          </a:p>
+        </p:txBody>
+      </p:sp>
+      <p:sp>
+        <p:nvSpPr>
+          <p:cNvPr id="8" name="Text 6"/>
+          <p:cNvSpPr txBox="1"/>
+          <p:nvPr/>
+        </p:nvSpPr>
+        <p:spPr>
+          <a:xfrm>
+            <a:off x="566928" y="4023360"/>
+            <a:ext cx="3520440" cy="219456"/>
+          </a:xfrm>
+          <a:prstGeom prst="rect">
+            <a:avLst/>
+          </a:prstGeom>
+          <a:noFill/>
+          <a:ln/>
+        </p:spPr>
+        <p:txBody>
+          <a:bodyPr wrap="square" lIns="0" tIns="0" rIns="0" bIns="0" rtlCol="0" anchor="ctr"/>
+          <a:lstStyle/>
+          <a:p>
+            <a:pPr indent="0" marL="0">
+              <a:buNone/>
+            </a:pPr>
+            <a:r>
+              <a:rPr lang="en-US" sz="1000" b="1" spc="140" kern="0" dirty="0">
+                <a:solidFill>
+                  <a:srgbClr val="C8952B"/>
+                </a:solidFill>
+                <a:latin typeface="Calibri" pitchFamily="34" charset="0"/>
+                <a:ea typeface="Calibri" pitchFamily="34" charset="-122"/>
+                <a:cs typeface="Calibri" pitchFamily="34" charset="-120"/>
+              </a:rPr>
+              <a:t>PRODUCT SCOPE</a:t>
+            </a:r>
+            <a:endParaRPr lang="en-US" sz="1000" dirty="0"/>
+          </a:p>
+        </p:txBody>
+      </p:sp>
+      <p:sp>
+        <p:nvSpPr>
+          <p:cNvPr id="9" name="Text 7"/>
+          <p:cNvSpPr txBox="1"/>
+          <p:nvPr/>
+        </p:nvSpPr>
+        <p:spPr>
+          <a:xfrm>
+            <a:off x="566928" y="4279392"/>
+            <a:ext cx="3520440" cy="859536"/>
+          </a:xfrm>
+          <a:prstGeom prst="rect">
+            <a:avLst/>
+          </a:prstGeom>
+          <a:noFill/>
+          <a:ln/>
+        </p:spPr>
+        <p:txBody>
+          <a:bodyPr wrap="square" lIns="0" tIns="0" rIns="0" bIns="0" rtlCol="0" anchor="ctr"/>
+          <a:lstStyle/>
+          <a:p>
+            <a:pPr indent="0" marL="0">
+              <a:lnSpc>
+                <a:spcPts val="1500"/>
+              </a:lnSpc>
+              <a:buNone/>
+            </a:pPr>
+            <a:r>
+              <a:rPr lang="en-US" sz="1150" dirty="0">
+                <a:solidFill>
+                  <a:srgbClr val="9DB8D4"/>
+                </a:solidFill>
+                <a:latin typeface="Calibri" pitchFamily="34" charset="0"/>
+                <a:ea typeface="Calibri" pitchFamily="34" charset="-122"/>
+                <a:cs typeface="Calibri" pitchFamily="34" charset="-120"/>
+              </a:rPr>
+              <a:t>Secrets management · Certificate lifecycle</a:t>
+            </a:r>
+            <a:endParaRPr lang="en-US" sz="1150" dirty="0"/>
+          </a:p>
+        </p:txBody>
+      </p:sp>
+      <p:sp>
+        <p:nvSpPr>
+          <p:cNvPr id="10" name="Text 8"/>
+          <p:cNvSpPr txBox="1"/>
+          <p:nvPr/>
+        </p:nvSpPr>
+        <p:spPr>
+          <a:xfrm>
+            <a:off x="4334256" y="1536192"/>
+            <a:ext cx="3520440" cy="219456"/>
+          </a:xfrm>
+          <a:prstGeom prst="rect">
+            <a:avLst/>
+          </a:prstGeom>
+          <a:noFill/>
+          <a:ln/>
+        </p:spPr>
+        <p:txBody>
+          <a:bodyPr wrap="square" lIns="0" tIns="0" rIns="0" bIns="0" rtlCol="0" anchor="ctr"/>
+          <a:lstStyle/>
+          <a:p>
+            <a:pPr indent="0" marL="0">
+              <a:buNone/>
+            </a:pPr>
+            <a:r>
+              <a:rPr lang="en-US" sz="1000" b="1" spc="140" kern="0" dirty="0">
+                <a:solidFill>
+                  <a:srgbClr val="C8952B"/>
+                </a:solidFill>
+                <a:latin typeface="Calibri" pitchFamily="34" charset="0"/>
+                <a:ea typeface="Calibri" pitchFamily="34" charset="-122"/>
+                <a:cs typeface="Calibri" pitchFamily="34" charset="-120"/>
+              </a:rPr>
+              <a:t>SUPPLIER</a:t>
+            </a:r>
+            <a:endParaRPr lang="en-US" sz="1000" dirty="0"/>
+          </a:p>
+        </p:txBody>
+      </p:sp>
+      <p:sp>
+        <p:nvSpPr>
+          <p:cNvPr id="11" name="Text 9"/>
+          <p:cNvSpPr txBox="1"/>
+          <p:nvPr/>
+        </p:nvSpPr>
+        <p:spPr>
+          <a:xfrm>
+            <a:off x="4334256" y="1792224"/>
+            <a:ext cx="3520440" cy="859536"/>
+          </a:xfrm>
+          <a:prstGeom prst="rect">
+            <a:avLst/>
+          </a:prstGeom>
+          <a:noFill/>
+          <a:ln/>
+        </p:spPr>
+        <p:txBody>
+          <a:bodyPr wrap="square" lIns="0" tIns="0" rIns="0" bIns="0" rtlCol="0" anchor="ctr"/>
+          <a:lstStyle/>
+          <a:p>
+            <a:pPr indent="0" marL="0">
+              <a:lnSpc>
+                <a:spcPts val="1500"/>
+              </a:lnSpc>
+              <a:buNone/>
+            </a:pPr>
+            <a:r>
+              <a:rPr lang="en-US" sz="1150" dirty="0">
+                <a:solidFill>
+                  <a:srgbClr val="9DB8D4"/>
+                </a:solidFill>
+                <a:latin typeface="Calibri" pitchFamily="34" charset="0"/>
+                <a:ea typeface="Calibri" pitchFamily="34" charset="-122"/>
+                <a:cs typeface="Calibri" pitchFamily="34" charset="-120"/>
+              </a:rPr>
+              <a:t>Algorithm breadth · Post-quantum (ML-KEM, ML-DSA, SLH-DSA) · Key-bound usage policy enforced in hardware</a:t>
+            </a:r>
+            <a:endParaRPr lang="en-US" sz="1150" dirty="0"/>
+          </a:p>
+        </p:txBody>
+      </p:sp>
+      <p:sp>
+        <p:nvSpPr>
+          <p:cNvPr id="12" name="Text 10"/>
+          <p:cNvSpPr txBox="1"/>
+          <p:nvPr/>
+        </p:nvSpPr>
+        <p:spPr>
+          <a:xfrm>
+            <a:off x="4334256" y="2779776"/>
+            <a:ext cx="3520440" cy="219456"/>
+          </a:xfrm>
+          <a:prstGeom prst="rect">
+            <a:avLst/>
+          </a:prstGeom>
+          <a:noFill/>
+          <a:ln/>
+        </p:spPr>
+        <p:txBody>
+          <a:bodyPr wrap="square" lIns="0" tIns="0" rIns="0" bIns="0" rtlCol="0" anchor="ctr"/>
+          <a:lstStyle/>
+          <a:p>
+            <a:pPr indent="0" marL="0">
+              <a:buNone/>
+            </a:pPr>
+            <a:r>
+              <a:rPr lang="en-US" sz="1000" b="1" spc="140" kern="0" dirty="0">
+                <a:solidFill>
+                  <a:srgbClr val="C8952B"/>
+                </a:solidFill>
+                <a:latin typeface="Calibri" pitchFamily="34" charset="0"/>
+                <a:ea typeface="Calibri" pitchFamily="34" charset="-122"/>
+                <a:cs typeface="Calibri" pitchFamily="34" charset="-120"/>
+              </a:rPr>
+              <a:t>OPTIONAL STEP</a:t>
+            </a:r>
+            <a:endParaRPr lang="en-US" sz="1000" dirty="0"/>
+          </a:p>
+        </p:txBody>
+      </p:sp>
+      <p:sp>
+        <p:nvSpPr>
+          <p:cNvPr id="13" name="Text 11"/>
+          <p:cNvSpPr txBox="1"/>
+          <p:nvPr/>
+        </p:nvSpPr>
+        <p:spPr>
+          <a:xfrm>
+            <a:off x="4334256" y="3035808"/>
+            <a:ext cx="3520440" cy="859536"/>
+          </a:xfrm>
+          <a:prstGeom prst="rect">
+            <a:avLst/>
+          </a:prstGeom>
+          <a:noFill/>
+          <a:ln/>
+        </p:spPr>
+        <p:txBody>
+          <a:bodyPr wrap="square" lIns="0" tIns="0" rIns="0" bIns="0" rtlCol="0" anchor="ctr"/>
+          <a:lstStyle/>
+          <a:p>
+            <a:pPr indent="0" marL="0">
+              <a:lnSpc>
+                <a:spcPts val="1500"/>
+              </a:lnSpc>
+              <a:buNone/>
+            </a:pPr>
+            <a:r>
+              <a:rPr lang="en-US" sz="1150" dirty="0">
+                <a:solidFill>
+                  <a:srgbClr val="9DB8D4"/>
+                </a:solidFill>
+                <a:latin typeface="Calibri" pitchFamily="34" charset="0"/>
+                <a:ea typeface="Calibri" pitchFamily="34" charset="-122"/>
+                <a:cs typeface="Calibri" pitchFamily="34" charset="-120"/>
+              </a:rPr>
+              <a:t>KMIP 3.0</a:t>
+            </a:r>
+            <a:endParaRPr lang="en-US" sz="1150" dirty="0"/>
+          </a:p>
+        </p:txBody>
+      </p:sp>
+      <p:sp>
+        <p:nvSpPr>
+          <p:cNvPr id="14" name="Text 12"/>
+          <p:cNvSpPr txBox="1"/>
+          <p:nvPr/>
+        </p:nvSpPr>
+        <p:spPr>
+          <a:xfrm>
+            <a:off x="4334256" y="4023360"/>
+            <a:ext cx="3520440" cy="219456"/>
+          </a:xfrm>
+          <a:prstGeom prst="rect">
+            <a:avLst/>
+          </a:prstGeom>
+          <a:noFill/>
+          <a:ln/>
+        </p:spPr>
+        <p:txBody>
+          <a:bodyPr wrap="square" lIns="0" tIns="0" rIns="0" bIns="0" rtlCol="0" anchor="ctr"/>
+          <a:lstStyle/>
+          <a:p>
+            <a:pPr indent="0" marL="0">
+              <a:buNone/>
+            </a:pPr>
+            <a:r>
+              <a:rPr lang="en-US" sz="1000" b="1" spc="140" kern="0" dirty="0">
+                <a:solidFill>
+                  <a:srgbClr val="C8952B"/>
+                </a:solidFill>
+                <a:latin typeface="Calibri" pitchFamily="34" charset="0"/>
+                <a:ea typeface="Calibri" pitchFamily="34" charset="-122"/>
+                <a:cs typeface="Calibri" pitchFamily="34" charset="-120"/>
+              </a:rPr>
+              <a:t>EXTERNAL</a:t>
+            </a:r>
+            <a:endParaRPr lang="en-US" sz="1000" dirty="0"/>
+          </a:p>
+        </p:txBody>
+      </p:sp>
+      <p:sp>
+        <p:nvSpPr>
+          <p:cNvPr id="15" name="Text 13"/>
+          <p:cNvSpPr txBox="1"/>
+          <p:nvPr/>
+        </p:nvSpPr>
+        <p:spPr>
+          <a:xfrm>
+            <a:off x="4334256" y="4279392"/>
+            <a:ext cx="3520440" cy="859536"/>
+          </a:xfrm>
+          <a:prstGeom prst="rect">
+            <a:avLst/>
+          </a:prstGeom>
+          <a:noFill/>
+          <a:ln/>
+        </p:spPr>
+        <p:txBody>
+          <a:bodyPr wrap="square" lIns="0" tIns="0" rIns="0" bIns="0" rtlCol="0" anchor="ctr"/>
+          <a:lstStyle/>
+          <a:p>
+            <a:pPr indent="0" marL="0">
+              <a:lnSpc>
+                <a:spcPts val="1500"/>
+              </a:lnSpc>
+              <a:buNone/>
+            </a:pPr>
+            <a:r>
+              <a:rPr lang="en-US" sz="1150" dirty="0">
+                <a:solidFill>
+                  <a:srgbClr val="9DB8D4"/>
+                </a:solidFill>
+                <a:latin typeface="Calibri" pitchFamily="34" charset="0"/>
+                <a:ea typeface="Calibri" pitchFamily="34" charset="-122"/>
+                <a:cs typeface="Calibri" pitchFamily="34" charset="-120"/>
+              </a:rPr>
+              <a:t>KMIP interoperability certification</a:t>
+            </a:r>
+            <a:endParaRPr lang="en-US" sz="1150" dirty="0"/>
+          </a:p>
+        </p:txBody>
+      </p:sp>
+      <p:sp>
+        <p:nvSpPr>
+          <p:cNvPr id="16" name="Text 14"/>
+          <p:cNvSpPr txBox="1"/>
+          <p:nvPr/>
+        </p:nvSpPr>
+        <p:spPr>
+          <a:xfrm>
+            <a:off x="8101584" y="1536192"/>
+            <a:ext cx="3520440" cy="219456"/>
+          </a:xfrm>
+          <a:prstGeom prst="rect">
+            <a:avLst/>
+          </a:prstGeom>
+          <a:noFill/>
+          <a:ln/>
+        </p:spPr>
+        <p:txBody>
+          <a:bodyPr wrap="square" lIns="0" tIns="0" rIns="0" bIns="0" rtlCol="0" anchor="ctr"/>
+          <a:lstStyle/>
+          <a:p>
+            <a:pPr indent="0" marL="0">
+              <a:buNone/>
+            </a:pPr>
+            <a:r>
+              <a:rPr lang="en-US" sz="1000" b="1" spc="140" kern="0" dirty="0">
+                <a:solidFill>
+                  <a:srgbClr val="C8952B"/>
+                </a:solidFill>
+                <a:latin typeface="Calibri" pitchFamily="34" charset="0"/>
+                <a:ea typeface="Calibri" pitchFamily="34" charset="-122"/>
+                <a:cs typeface="Calibri" pitchFamily="34" charset="-120"/>
+              </a:rPr>
+              <a:t>DEMAND</a:t>
+            </a:r>
+            <a:endParaRPr lang="en-US" sz="1000" dirty="0"/>
+          </a:p>
+        </p:txBody>
+      </p:sp>
+      <p:sp>
+        <p:nvSpPr>
+          <p:cNvPr id="17" name="Text 15"/>
+          <p:cNvSpPr txBox="1"/>
+          <p:nvPr/>
+        </p:nvSpPr>
+        <p:spPr>
+          <a:xfrm>
+            <a:off x="8101584" y="1792224"/>
+            <a:ext cx="3520440" cy="859536"/>
+          </a:xfrm>
+          <a:prstGeom prst="rect">
+            <a:avLst/>
+          </a:prstGeom>
+          <a:noFill/>
+          <a:ln/>
+        </p:spPr>
+        <p:txBody>
+          <a:bodyPr wrap="square" lIns="0" tIns="0" rIns="0" bIns="0" rtlCol="0" anchor="ctr"/>
+          <a:lstStyle/>
+          <a:p>
+            <a:pPr indent="0" marL="0">
+              <a:lnSpc>
+                <a:spcPts val="1500"/>
+              </a:lnSpc>
+              <a:buNone/>
+            </a:pPr>
+            <a:r>
+              <a:rPr lang="en-US" sz="1150" dirty="0">
+                <a:solidFill>
+                  <a:srgbClr val="9DB8D4"/>
+                </a:solidFill>
+                <a:latin typeface="Calibri" pitchFamily="34" charset="0"/>
+                <a:ea typeface="Calibri" pitchFamily="34" charset="-122"/>
+                <a:cs typeface="Calibri" pitchFamily="34" charset="-120"/>
+              </a:rPr>
+              <a:t>PKCS#11 provider for applications</a:t>
+            </a:r>
+            <a:endParaRPr lang="en-US" sz="1150" dirty="0"/>
+          </a:p>
+        </p:txBody>
+      </p:sp>
+      <p:sp>
+        <p:nvSpPr>
+          <p:cNvPr id="18" name="Text 16"/>
+          <p:cNvSpPr txBox="1"/>
+          <p:nvPr/>
+        </p:nvSpPr>
+        <p:spPr>
+          <a:xfrm>
+            <a:off x="8101584" y="2779776"/>
+            <a:ext cx="3520440" cy="219456"/>
+          </a:xfrm>
+          <a:prstGeom prst="rect">
+            <a:avLst/>
+          </a:prstGeom>
+          <a:noFill/>
+          <a:ln/>
+        </p:spPr>
+        <p:txBody>
+          <a:bodyPr wrap="square" lIns="0" tIns="0" rIns="0" bIns="0" rtlCol="0" anchor="ctr"/>
+          <a:lstStyle/>
+          <a:p>
+            <a:pPr indent="0" marL="0">
+              <a:buNone/>
+            </a:pPr>
+            <a:r>
+              <a:rPr lang="en-US" sz="1000" b="1" spc="140" kern="0" dirty="0">
+                <a:solidFill>
+                  <a:srgbClr val="C8952B"/>
+                </a:solidFill>
+                <a:latin typeface="Calibri" pitchFamily="34" charset="0"/>
+                <a:ea typeface="Calibri" pitchFamily="34" charset="-122"/>
+                <a:cs typeface="Calibri" pitchFamily="34" charset="-120"/>
+              </a:rPr>
+              <a:t>OUT OF SCOPE</a:t>
+            </a:r>
+            <a:endParaRPr lang="en-US" sz="1000" dirty="0"/>
+          </a:p>
+        </p:txBody>
+      </p:sp>
+      <p:sp>
+        <p:nvSpPr>
+          <p:cNvPr id="19" name="Text 17"/>
+          <p:cNvSpPr txBox="1"/>
+          <p:nvPr/>
+        </p:nvSpPr>
+        <p:spPr>
+          <a:xfrm>
+            <a:off x="8101584" y="3035808"/>
+            <a:ext cx="3520440" cy="859536"/>
+          </a:xfrm>
+          <a:prstGeom prst="rect">
+            <a:avLst/>
+          </a:prstGeom>
+          <a:noFill/>
+          <a:ln/>
+        </p:spPr>
+        <p:txBody>
+          <a:bodyPr wrap="square" lIns="0" tIns="0" rIns="0" bIns="0" rtlCol="0" anchor="ctr"/>
+          <a:lstStyle/>
+          <a:p>
+            <a:pPr indent="0" marL="0">
+              <a:lnSpc>
+                <a:spcPts val="1500"/>
+              </a:lnSpc>
+              <a:buNone/>
+            </a:pPr>
+            <a:r>
+              <a:rPr lang="en-US" sz="1150" dirty="0">
+                <a:solidFill>
+                  <a:srgbClr val="9DB8D4"/>
+                </a:solidFill>
+                <a:latin typeface="Calibri" pitchFamily="34" charset="0"/>
+                <a:ea typeface="Calibri" pitchFamily="34" charset="-122"/>
+                <a:cs typeface="Calibri" pitchFamily="34" charset="-120"/>
+              </a:rPr>
+              <a:t>Tokenization / format-preserving encryption</a:t>
+            </a:r>
+            <a:endParaRPr lang="en-US" sz="1150" dirty="0"/>
+          </a:p>
+        </p:txBody>
+      </p:sp>
+      <p:sp>
+        <p:nvSpPr>
+          <p:cNvPr id="20" name="Text 18"/>
+          <p:cNvSpPr txBox="1"/>
+          <p:nvPr/>
+        </p:nvSpPr>
+        <p:spPr>
+          <a:xfrm>
+            <a:off x="8101584" y="4023360"/>
+            <a:ext cx="3520440" cy="219456"/>
+          </a:xfrm>
+          <a:prstGeom prst="rect">
+            <a:avLst/>
+          </a:prstGeom>
+          <a:noFill/>
+          <a:ln/>
+        </p:spPr>
+        <p:txBody>
+          <a:bodyPr wrap="square" lIns="0" tIns="0" rIns="0" bIns="0" rtlCol="0" anchor="ctr"/>
+          <a:lstStyle/>
+          <a:p>
+            <a:pPr indent="0" marL="0">
+              <a:buNone/>
+            </a:pPr>
+            <a:r>
+              <a:rPr lang="en-US" sz="1000" b="1" spc="140" kern="0" dirty="0">
+                <a:solidFill>
+                  <a:srgbClr val="C8952B"/>
+                </a:solidFill>
+                <a:latin typeface="Calibri" pitchFamily="34" charset="0"/>
+                <a:ea typeface="Calibri" pitchFamily="34" charset="-122"/>
+                <a:cs typeface="Calibri" pitchFamily="34" charset="-120"/>
+              </a:rPr>
+              <a:t>PROCUREMENT</a:t>
+            </a:r>
+            <a:endParaRPr lang="en-US" sz="1000" dirty="0"/>
+          </a:p>
+        </p:txBody>
+      </p:sp>
+      <p:sp>
+        <p:nvSpPr>
+          <p:cNvPr id="21" name="Text 19"/>
+          <p:cNvSpPr txBox="1"/>
+          <p:nvPr/>
+        </p:nvSpPr>
+        <p:spPr>
+          <a:xfrm>
+            <a:off x="8101584" y="4279392"/>
+            <a:ext cx="3520440" cy="859536"/>
+          </a:xfrm>
+          <a:prstGeom prst="rect">
+            <a:avLst/>
+          </a:prstGeom>
+          <a:noFill/>
+          <a:ln/>
+        </p:spPr>
+        <p:txBody>
+          <a:bodyPr wrap="square" lIns="0" tIns="0" rIns="0" bIns="0" rtlCol="0" anchor="ctr"/>
+          <a:lstStyle/>
+          <a:p>
+            <a:pPr indent="0" marL="0">
+              <a:lnSpc>
+                <a:spcPts val="1500"/>
+              </a:lnSpc>
+              <a:buNone/>
+            </a:pPr>
+            <a:r>
+              <a:rPr lang="en-US" sz="1150" dirty="0">
+                <a:solidFill>
+                  <a:srgbClr val="9DB8D4"/>
+                </a:solidFill>
+                <a:latin typeface="Calibri" pitchFamily="34" charset="0"/>
+                <a:ea typeface="Calibri" pitchFamily="34" charset="-122"/>
+                <a:cs typeface="Calibri" pitchFamily="34" charset="-120"/>
+              </a:rPr>
+              <a:t>FIPS 140-2/3 validated HSM · Common Criteria / eIDAS</a:t>
+            </a:r>
+            <a:endParaRPr lang="en-US" sz="1150" dirty="0"/>
+          </a:p>
+        </p:txBody>
+      </p:sp>
+      <p:sp>
+        <p:nvSpPr>
+          <p:cNvPr id="22" name="Shape 20"/>
+          <p:cNvSpPr/>
+          <p:nvPr/>
+        </p:nvSpPr>
+        <p:spPr>
+          <a:xfrm>
+            <a:off x="566928" y="5175504"/>
+            <a:ext cx="11027664" cy="987552"/>
+          </a:xfrm>
+          <a:prstGeom prst="roundRect">
+            <a:avLst>
+              <a:gd name="adj" fmla="val 5556"/>
+            </a:avLst>
+          </a:prstGeom>
+          <a:solidFill>
+            <a:srgbClr val="1B3350"/>
+          </a:solidFill>
+          <a:ln w="12700">
+            <a:solidFill>
+              <a:srgbClr val="2A4A6B"/>
+            </a:solidFill>
+            <a:prstDash val="solid"/>
+          </a:ln>
+        </p:spPr>
+      </p:sp>
+      <p:sp>
+        <p:nvSpPr>
+          <p:cNvPr id="23" name="Text 21"/>
+          <p:cNvSpPr txBox="1"/>
+          <p:nvPr/>
+        </p:nvSpPr>
+        <p:spPr>
+          <a:xfrm>
+            <a:off x="841248" y="5175504"/>
+            <a:ext cx="10479024" cy="987552"/>
+          </a:xfrm>
+          <a:prstGeom prst="rect">
+            <a:avLst/>
+          </a:prstGeom>
+          <a:noFill/>
+          <a:ln/>
+        </p:spPr>
+        <p:txBody>
+          <a:bodyPr wrap="square" lIns="0" tIns="0" rIns="0" bIns="0" rtlCol="0" anchor="ctr"/>
+          <a:lstStyle/>
+          <a:p>
+            <a:pPr indent="0" marL="0">
+              <a:lnSpc>
+                <a:spcPts val="1900"/>
+              </a:lnSpc>
+              <a:buNone/>
+            </a:pPr>
+            <a:r>
+              <a:rPr lang="en-US" sz="1300" i="1" dirty="0">
+                <a:solidFill>
+                  <a:srgbClr val="FFFFFF"/>
+                </a:solidFill>
+                <a:latin typeface="Cambria" pitchFamily="34" charset="0"/>
+                <a:ea typeface="Cambria" pitchFamily="34" charset="-122"/>
+                <a:cs typeface="Cambria" pitchFamily="34" charset="-120"/>
+              </a:rPr>
+              <a:t>34 of 50 closed by the 14 steps. 8 more are work someone could schedule — integration, vendor validation, or a product decision. The last 8 depend on a supplier, a procurement decision, an OASIS event or hardware this project cannot verify; no amount of planning moves them.</a:t>
+            </a:r>
+            <a:endParaRPr lang="en-US" sz="1300" dirty="0"/>
           </a:p>
         </p:txBody>
       </p:sp>
@@ -24814,7 +28884,7 @@
                 <a:ea typeface="Calibri" pitchFamily="34" charset="-122"/>
                 <a:cs typeface="Calibri" pitchFamily="34" charset="-120"/>
               </a:rPr>
-              <a:t>STEP 1 OF 12 · TEST STRATEGY</a:t>
+              <a:t>STEP 1 OF 14 · TEST STRATEGY</a:t>
             </a:r>
             <a:endParaRPr lang="en-US" sz="1150" dirty="0"/>
           </a:p>
@@ -25308,7 +29378,7 @@
                 <a:ea typeface="Calibri" pitchFamily="34" charset="-122"/>
                 <a:cs typeface="Calibri" pitchFamily="34" charset="-120"/>
               </a:rPr>
-              <a:t>STEP 2 OF 12 · DESIGN IMPACT</a:t>
+              <a:t>STEP 2 OF 14 · DESIGN IMPACT</a:t>
             </a:r>
             <a:endParaRPr lang="en-US" sz="1150" dirty="0"/>
           </a:p>
@@ -25833,7 +29903,7 @@
                 <a:ea typeface="Calibri" pitchFamily="34" charset="-122"/>
                 <a:cs typeface="Calibri" pitchFamily="34" charset="-120"/>
               </a:rPr>
-              <a:t>STEP 2 OF 12 · PROPOSED SOLUTION</a:t>
+              <a:t>STEP 2 OF 14 · PROPOSED SOLUTION</a:t>
             </a:r>
             <a:endParaRPr lang="en-US" sz="1150" dirty="0"/>
           </a:p>
@@ -26373,7 +30443,7 @@
                 <a:ea typeface="Calibri" pitchFamily="34" charset="-122"/>
                 <a:cs typeface="Calibri" pitchFamily="34" charset="-120"/>
               </a:rPr>
-              <a:t>STEP 2 OF 12 · TEST STRATEGY</a:t>
+              <a:t>STEP 2 OF 14 · TEST STRATEGY</a:t>
             </a:r>
             <a:endParaRPr lang="en-US" sz="1150" dirty="0"/>
           </a:p>
@@ -26867,7 +30937,7 @@
                 <a:ea typeface="Calibri" pitchFamily="34" charset="-122"/>
                 <a:cs typeface="Calibri" pitchFamily="34" charset="-120"/>
               </a:rPr>
-              <a:t>STEP 3 OF 12 · DESIGN IMPACT</a:t>
+              <a:t>STEP 3 OF 14 · DESIGN IMPACT</a:t>
             </a:r>
             <a:endParaRPr lang="en-US" sz="1150" dirty="0"/>
           </a:p>

--- a/KMIP_PKCS11_REST_KMS_Plan_Deck.pptx
+++ b/KMIP_PKCS11_REST_KMS_Plan_Deck.pptx
@@ -5253,7 +5253,7 @@
                 <a:ea typeface="Calibri" pitchFamily="34" charset="-122"/>
                 <a:cs typeface="Calibri" pitchFamily="34" charset="-120"/>
               </a:rPr>
-              <a:t>Baseline e44a2ef · 816 tests green · 11 September 2026</a:t>
+              <a:t>Baseline e44a2ef · 816 tests green · 12 September 2026</a:t>
             </a:r>
             <a:endParaRPr lang="en-US" sz="1050" dirty="0"/>
           </a:p>
